--- a/PPT/Magic Fridge.pptx
+++ b/PPT/Magic Fridge.pptx
@@ -111,6 +111,11 @@
       </a:defRPr>
     </a:lvl9pPr>
   </p:defaultTextStyle>
+  <p:extLst>
+    <p:ext uri="{EFAFB233-063F-42B5-8137-9DF3F51BA10A}">
+      <p15:sldGuideLst xmlns:p15="http://schemas.microsoft.com/office/powerpoint/2012/main"/>
+    </p:ext>
+  </p:extLst>
 </p:presentation>
 </file>
 
@@ -305,7 +310,7 @@
           <a:p>
             <a:fld id="{14FEEE99-8E01-453E-BB84-C9CA0F55D998}" type="datetimeFigureOut">
               <a:rPr lang="hu-HU" smtClean="0"/>
-              <a:t>2026. 03. 03.</a:t>
+              <a:t>2026. 03. 04.</a:t>
             </a:fld>
             <a:endParaRPr lang="hu-HU"/>
           </a:p>
@@ -741,7 +746,7 @@
           <a:p>
             <a:fld id="{14FEEE99-8E01-453E-BB84-C9CA0F55D998}" type="datetimeFigureOut">
               <a:rPr lang="hu-HU" smtClean="0"/>
-              <a:t>2026. 03. 03.</a:t>
+              <a:t>2026. 03. 04.</a:t>
             </a:fld>
             <a:endParaRPr lang="hu-HU"/>
           </a:p>
@@ -991,7 +996,7 @@
           <a:p>
             <a:fld id="{14FEEE99-8E01-453E-BB84-C9CA0F55D998}" type="datetimeFigureOut">
               <a:rPr lang="hu-HU" smtClean="0"/>
-              <a:t>2026. 03. 03.</a:t>
+              <a:t>2026. 03. 04.</a:t>
             </a:fld>
             <a:endParaRPr lang="hu-HU"/>
           </a:p>
@@ -1299,7 +1304,7 @@
           <a:p>
             <a:fld id="{14FEEE99-8E01-453E-BB84-C9CA0F55D998}" type="datetimeFigureOut">
               <a:rPr lang="hu-HU" smtClean="0"/>
-              <a:t>2026. 03. 03.</a:t>
+              <a:t>2026. 03. 04.</a:t>
             </a:fld>
             <a:endParaRPr lang="hu-HU"/>
           </a:p>
@@ -1617,7 +1622,7 @@
           <a:p>
             <a:fld id="{14FEEE99-8E01-453E-BB84-C9CA0F55D998}" type="datetimeFigureOut">
               <a:rPr lang="hu-HU" smtClean="0"/>
-              <a:t>2026. 03. 03.</a:t>
+              <a:t>2026. 03. 04.</a:t>
             </a:fld>
             <a:endParaRPr lang="hu-HU"/>
           </a:p>
@@ -1919,7 +1924,7 @@
           <a:p>
             <a:fld id="{14FEEE99-8E01-453E-BB84-C9CA0F55D998}" type="datetimeFigureOut">
               <a:rPr lang="hu-HU" smtClean="0"/>
-              <a:t>2026. 03. 03.</a:t>
+              <a:t>2026. 03. 04.</a:t>
             </a:fld>
             <a:endParaRPr lang="hu-HU"/>
           </a:p>
@@ -2286,7 +2291,7 @@
           <a:p>
             <a:fld id="{14FEEE99-8E01-453E-BB84-C9CA0F55D998}" type="datetimeFigureOut">
               <a:rPr lang="hu-HU" smtClean="0"/>
-              <a:t>2026. 03. 03.</a:t>
+              <a:t>2026. 03. 04.</a:t>
             </a:fld>
             <a:endParaRPr lang="hu-HU"/>
           </a:p>
@@ -2460,7 +2465,7 @@
           <a:p>
             <a:fld id="{14FEEE99-8E01-453E-BB84-C9CA0F55D998}" type="datetimeFigureOut">
               <a:rPr lang="hu-HU" smtClean="0"/>
-              <a:t>2026. 03. 03.</a:t>
+              <a:t>2026. 03. 04.</a:t>
             </a:fld>
             <a:endParaRPr lang="hu-HU"/>
           </a:p>
@@ -2640,7 +2645,7 @@
           <a:p>
             <a:fld id="{14FEEE99-8E01-453E-BB84-C9CA0F55D998}" type="datetimeFigureOut">
               <a:rPr lang="hu-HU" smtClean="0"/>
-              <a:t>2026. 03. 03.</a:t>
+              <a:t>2026. 03. 04.</a:t>
             </a:fld>
             <a:endParaRPr lang="hu-HU"/>
           </a:p>
@@ -2810,7 +2815,7 @@
           <a:p>
             <a:fld id="{14FEEE99-8E01-453E-BB84-C9CA0F55D998}" type="datetimeFigureOut">
               <a:rPr lang="hu-HU" smtClean="0"/>
-              <a:t>2026. 03. 03.</a:t>
+              <a:t>2026. 03. 04.</a:t>
             </a:fld>
             <a:endParaRPr lang="hu-HU"/>
           </a:p>
@@ -3060,7 +3065,7 @@
           <a:p>
             <a:fld id="{14FEEE99-8E01-453E-BB84-C9CA0F55D998}" type="datetimeFigureOut">
               <a:rPr lang="hu-HU" smtClean="0"/>
-              <a:t>2026. 03. 03.</a:t>
+              <a:t>2026. 03. 04.</a:t>
             </a:fld>
             <a:endParaRPr lang="hu-HU"/>
           </a:p>
@@ -3296,7 +3301,7 @@
           <a:p>
             <a:fld id="{14FEEE99-8E01-453E-BB84-C9CA0F55D998}" type="datetimeFigureOut">
               <a:rPr lang="hu-HU" smtClean="0"/>
-              <a:t>2026. 03. 03.</a:t>
+              <a:t>2026. 03. 04.</a:t>
             </a:fld>
             <a:endParaRPr lang="hu-HU"/>
           </a:p>
@@ -3678,7 +3683,7 @@
           <a:p>
             <a:fld id="{14FEEE99-8E01-453E-BB84-C9CA0F55D998}" type="datetimeFigureOut">
               <a:rPr lang="hu-HU" smtClean="0"/>
-              <a:t>2026. 03. 03.</a:t>
+              <a:t>2026. 03. 04.</a:t>
             </a:fld>
             <a:endParaRPr lang="hu-HU"/>
           </a:p>
@@ -3796,7 +3801,7 @@
           <a:p>
             <a:fld id="{14FEEE99-8E01-453E-BB84-C9CA0F55D998}" type="datetimeFigureOut">
               <a:rPr lang="hu-HU" smtClean="0"/>
-              <a:t>2026. 03. 03.</a:t>
+              <a:t>2026. 03. 04.</a:t>
             </a:fld>
             <a:endParaRPr lang="hu-HU"/>
           </a:p>
@@ -3891,7 +3896,7 @@
           <a:p>
             <a:fld id="{14FEEE99-8E01-453E-BB84-C9CA0F55D998}" type="datetimeFigureOut">
               <a:rPr lang="hu-HU" smtClean="0"/>
-              <a:t>2026. 03. 03.</a:t>
+              <a:t>2026. 03. 04.</a:t>
             </a:fld>
             <a:endParaRPr lang="hu-HU"/>
           </a:p>
@@ -4146,7 +4151,7 @@
           <a:p>
             <a:fld id="{14FEEE99-8E01-453E-BB84-C9CA0F55D998}" type="datetimeFigureOut">
               <a:rPr lang="hu-HU" smtClean="0"/>
-              <a:t>2026. 03. 03.</a:t>
+              <a:t>2026. 03. 04.</a:t>
             </a:fld>
             <a:endParaRPr lang="hu-HU"/>
           </a:p>
@@ -4429,7 +4434,7 @@
           <a:p>
             <a:fld id="{14FEEE99-8E01-453E-BB84-C9CA0F55D998}" type="datetimeFigureOut">
               <a:rPr lang="hu-HU" smtClean="0"/>
-              <a:t>2026. 03. 03.</a:t>
+              <a:t>2026. 03. 04.</a:t>
             </a:fld>
             <a:endParaRPr lang="hu-HU"/>
           </a:p>
@@ -4835,7 +4840,7 @@
           <a:p>
             <a:fld id="{14FEEE99-8E01-453E-BB84-C9CA0F55D998}" type="datetimeFigureOut">
               <a:rPr lang="hu-HU" smtClean="0"/>
-              <a:t>2026. 03. 03.</a:t>
+              <a:t>2026. 03. 04.</a:t>
             </a:fld>
             <a:endParaRPr lang="hu-HU"/>
           </a:p>
@@ -5550,6 +5555,9 @@
   <p:clrMapOvr>
     <a:masterClrMapping/>
   </p:clrMapOvr>
+  <p:transition spd="slow">
+    <p:push dir="u"/>
+  </p:transition>
 </p:sld>
 </file>
 
@@ -5570,6 +5578,36 @@
           <a:chExt cx="0" cy="0"/>
         </a:xfrm>
       </p:grpSpPr>
+      <p:pic>
+        <p:nvPicPr>
+          <p:cNvPr id="5" name="Kép 4">
+            <a:extLst>
+              <a:ext uri="{FF2B5EF4-FFF2-40B4-BE49-F238E27FC236}">
+                <a16:creationId xmlns:a16="http://schemas.microsoft.com/office/drawing/2014/main" id="{D84BE393-950C-4DFB-8153-B5F0BBEF4982}"/>
+              </a:ext>
+            </a:extLst>
+          </p:cNvPr>
+          <p:cNvPicPr>
+            <a:picLocks noChangeAspect="1"/>
+          </p:cNvPicPr>
+          <p:nvPr/>
+        </p:nvPicPr>
+        <p:blipFill>
+          <a:blip r:embed="rId2"/>
+          <a:stretch>
+            <a:fillRect/>
+          </a:stretch>
+        </p:blipFill>
+        <p:spPr>
+          <a:xfrm>
+            <a:off x="4951412" y="2201767"/>
+            <a:ext cx="5522912" cy="2793566"/>
+          </a:xfrm>
+          <a:prstGeom prst="rect">
+            <a:avLst/>
+          </a:prstGeom>
+        </p:spPr>
+      </p:pic>
       <p:sp>
         <p:nvSpPr>
           <p:cNvPr id="2" name="Cím 1">
@@ -5621,7 +5659,7 @@
           <a:p>
             <a:r>
               <a:rPr lang="hu-HU" b="1" dirty="0"/>
-              <a:t>Milyen problémára ad megoldást a rendszer?</a:t>
+              <a:t>Miben illetve hogyan is segítünk pontosan az emberek, családok számára.</a:t>
             </a:r>
             <a:endParaRPr lang="hu-HU" dirty="0"/>
           </a:p>
@@ -5633,18 +5671,7 @@
                   <a:srgbClr val="000000"/>
                 </a:solidFill>
               </a:rPr>
-              <a:t>Élelmiszer-pazarlás csökkentése</a:t>
-            </a:r>
-          </a:p>
-          <a:p>
-            <a:pPr lvl="1"/>
-            <a:r>
-              <a:rPr lang="hu-HU" dirty="0">
-                <a:solidFill>
-                  <a:srgbClr val="000000"/>
-                </a:solidFill>
-              </a:rPr>
-              <a:t>Jogosultságok kezelése</a:t>
+              <a:t>Élelmiszer-pazarlás csökkentése -&gt; Hamarosan lejáró termékekre való figyelemfelhívás</a:t>
             </a:r>
           </a:p>
           <a:p>
@@ -5668,6 +5695,14 @@
               </a:rPr>
               <a:t>Recept -&gt; raktár összevetés</a:t>
             </a:r>
+          </a:p>
+          <a:p>
+            <a:pPr lvl="1"/>
+            <a:endParaRPr lang="hu-HU" dirty="0">
+              <a:solidFill>
+                <a:srgbClr val="000000"/>
+              </a:solidFill>
+            </a:endParaRPr>
           </a:p>
           <a:p>
             <a:endParaRPr lang="hu-HU" dirty="0"/>
@@ -5689,7 +5724,7 @@
           <p:nvPr/>
         </p:nvPicPr>
         <p:blipFill>
-          <a:blip r:embed="rId2">
+          <a:blip r:embed="rId3">
             <a:extLst>
               <a:ext uri="{28A0092B-C50C-407E-A947-70E740481C1C}">
                 <a14:useLocalDpi xmlns:a14="http://schemas.microsoft.com/office/drawing/2010/main" val="0"/>
@@ -5720,6 +5755,130 @@
   <p:clrMapOvr>
     <a:masterClrMapping/>
   </p:clrMapOvr>
+  <p:transition spd="slow">
+    <p:push dir="u"/>
+  </p:transition>
+  <p:timing>
+    <p:tnLst>
+      <p:par>
+        <p:cTn id="1" dur="indefinite" restart="never" nodeType="tmRoot">
+          <p:childTnLst>
+            <p:seq concurrent="1" nextAc="seek">
+              <p:cTn id="2" dur="indefinite" nodeType="mainSeq">
+                <p:childTnLst>
+                  <p:par>
+                    <p:cTn id="3" fill="hold">
+                      <p:stCondLst>
+                        <p:cond delay="indefinite"/>
+                      </p:stCondLst>
+                      <p:childTnLst>
+                        <p:par>
+                          <p:cTn id="4" fill="hold">
+                            <p:stCondLst>
+                              <p:cond delay="0"/>
+                            </p:stCondLst>
+                            <p:childTnLst>
+                              <p:par>
+                                <p:cTn id="5" presetID="2" presetClass="entr" presetSubtype="4" fill="hold" nodeType="clickEffect">
+                                  <p:stCondLst>
+                                    <p:cond delay="0"/>
+                                  </p:stCondLst>
+                                  <p:childTnLst>
+                                    <p:set>
+                                      <p:cBhvr>
+                                        <p:cTn id="6" dur="1" fill="hold">
+                                          <p:stCondLst>
+                                            <p:cond delay="0"/>
+                                          </p:stCondLst>
+                                        </p:cTn>
+                                        <p:tgtEl>
+                                          <p:spTgt spid="5"/>
+                                        </p:tgtEl>
+                                        <p:attrNameLst>
+                                          <p:attrName>style.visibility</p:attrName>
+                                        </p:attrNameLst>
+                                      </p:cBhvr>
+                                      <p:to>
+                                        <p:strVal val="visible"/>
+                                      </p:to>
+                                    </p:set>
+                                    <p:anim calcmode="lin" valueType="num">
+                                      <p:cBhvr additive="base">
+                                        <p:cTn id="7" dur="500" fill="hold"/>
+                                        <p:tgtEl>
+                                          <p:spTgt spid="5"/>
+                                        </p:tgtEl>
+                                        <p:attrNameLst>
+                                          <p:attrName>ppt_x</p:attrName>
+                                        </p:attrNameLst>
+                                      </p:cBhvr>
+                                      <p:tavLst>
+                                        <p:tav tm="0">
+                                          <p:val>
+                                            <p:strVal val="#ppt_x"/>
+                                          </p:val>
+                                        </p:tav>
+                                        <p:tav tm="100000">
+                                          <p:val>
+                                            <p:strVal val="#ppt_x"/>
+                                          </p:val>
+                                        </p:tav>
+                                      </p:tavLst>
+                                    </p:anim>
+                                    <p:anim calcmode="lin" valueType="num">
+                                      <p:cBhvr additive="base">
+                                        <p:cTn id="8" dur="500" fill="hold"/>
+                                        <p:tgtEl>
+                                          <p:spTgt spid="5"/>
+                                        </p:tgtEl>
+                                        <p:attrNameLst>
+                                          <p:attrName>ppt_y</p:attrName>
+                                        </p:attrNameLst>
+                                      </p:cBhvr>
+                                      <p:tavLst>
+                                        <p:tav tm="0">
+                                          <p:val>
+                                            <p:strVal val="1+#ppt_h/2"/>
+                                          </p:val>
+                                        </p:tav>
+                                        <p:tav tm="100000">
+                                          <p:val>
+                                            <p:strVal val="#ppt_y"/>
+                                          </p:val>
+                                        </p:tav>
+                                      </p:tavLst>
+                                    </p:anim>
+                                  </p:childTnLst>
+                                </p:cTn>
+                              </p:par>
+                            </p:childTnLst>
+                          </p:cTn>
+                        </p:par>
+                      </p:childTnLst>
+                    </p:cTn>
+                  </p:par>
+                </p:childTnLst>
+              </p:cTn>
+              <p:prevCondLst>
+                <p:cond evt="onPrev" delay="0">
+                  <p:tgtEl>
+                    <p:sldTgt/>
+                  </p:tgtEl>
+                </p:cond>
+              </p:prevCondLst>
+              <p:nextCondLst>
+                <p:cond evt="onNext" delay="0">
+                  <p:tgtEl>
+                    <p:sldTgt/>
+                  </p:tgtEl>
+                </p:cond>
+              </p:nextCondLst>
+            </p:seq>
+          </p:childTnLst>
+        </p:cTn>
+      </p:par>
+    </p:tnLst>
+  </p:timing>
 </p:sld>
 </file>
 
@@ -5890,6 +6049,96 @@
           </a:prstGeom>
         </p:spPr>
       </p:pic>
+      <p:pic>
+        <p:nvPicPr>
+          <p:cNvPr id="6" name="Kép 5">
+            <a:extLst>
+              <a:ext uri="{FF2B5EF4-FFF2-40B4-BE49-F238E27FC236}">
+                <a16:creationId xmlns:a16="http://schemas.microsoft.com/office/drawing/2014/main" id="{DBE09674-D80B-4C28-8C28-D999A6BA63D8}"/>
+              </a:ext>
+            </a:extLst>
+          </p:cNvPr>
+          <p:cNvPicPr>
+            <a:picLocks noChangeAspect="1"/>
+          </p:cNvPicPr>
+          <p:nvPr/>
+        </p:nvPicPr>
+        <p:blipFill>
+          <a:blip r:embed="rId3"/>
+          <a:stretch>
+            <a:fillRect/>
+          </a:stretch>
+        </p:blipFill>
+        <p:spPr>
+          <a:xfrm>
+            <a:off x="5445200" y="275884"/>
+            <a:ext cx="3717924" cy="2745544"/>
+          </a:xfrm>
+          <a:prstGeom prst="rect">
+            <a:avLst/>
+          </a:prstGeom>
+        </p:spPr>
+      </p:pic>
+      <p:pic>
+        <p:nvPicPr>
+          <p:cNvPr id="8" name="Kép 7">
+            <a:extLst>
+              <a:ext uri="{FF2B5EF4-FFF2-40B4-BE49-F238E27FC236}">
+                <a16:creationId xmlns:a16="http://schemas.microsoft.com/office/drawing/2014/main" id="{36BD642E-2512-44DA-ACDB-DE70918F4719}"/>
+              </a:ext>
+            </a:extLst>
+          </p:cNvPr>
+          <p:cNvPicPr>
+            <a:picLocks noChangeAspect="1"/>
+          </p:cNvPicPr>
+          <p:nvPr/>
+        </p:nvPicPr>
+        <p:blipFill>
+          <a:blip r:embed="rId4"/>
+          <a:stretch>
+            <a:fillRect/>
+          </a:stretch>
+        </p:blipFill>
+        <p:spPr>
+          <a:xfrm>
+            <a:off x="8597901" y="1805153"/>
+            <a:ext cx="3594099" cy="2805080"/>
+          </a:xfrm>
+          <a:prstGeom prst="rect">
+            <a:avLst/>
+          </a:prstGeom>
+        </p:spPr>
+      </p:pic>
+      <p:pic>
+        <p:nvPicPr>
+          <p:cNvPr id="10" name="Kép 9">
+            <a:extLst>
+              <a:ext uri="{FF2B5EF4-FFF2-40B4-BE49-F238E27FC236}">
+                <a16:creationId xmlns:a16="http://schemas.microsoft.com/office/drawing/2014/main" id="{3F043C30-21D5-47E4-B1FA-E30EEF83A68A}"/>
+              </a:ext>
+            </a:extLst>
+          </p:cNvPr>
+          <p:cNvPicPr>
+            <a:picLocks noChangeAspect="1"/>
+          </p:cNvPicPr>
+          <p:nvPr/>
+        </p:nvPicPr>
+        <p:blipFill>
+          <a:blip r:embed="rId5"/>
+          <a:stretch>
+            <a:fillRect/>
+          </a:stretch>
+        </p:blipFill>
+        <p:spPr>
+          <a:xfrm>
+            <a:off x="4695691" y="3021428"/>
+            <a:ext cx="3904629" cy="2828718"/>
+          </a:xfrm>
+          <a:prstGeom prst="rect">
+            <a:avLst/>
+          </a:prstGeom>
+        </p:spPr>
+      </p:pic>
     </p:spTree>
     <p:extLst>
       <p:ext uri="{BB962C8B-B14F-4D97-AF65-F5344CB8AC3E}">
@@ -5900,6 +6149,312 @@
   <p:clrMapOvr>
     <a:masterClrMapping/>
   </p:clrMapOvr>
+  <p:transition spd="slow">
+    <p:push dir="u"/>
+  </p:transition>
+  <p:timing>
+    <p:tnLst>
+      <p:par>
+        <p:cTn id="1" dur="indefinite" restart="never" nodeType="tmRoot">
+          <p:childTnLst>
+            <p:seq concurrent="1" nextAc="seek">
+              <p:cTn id="2" dur="indefinite" nodeType="mainSeq">
+                <p:childTnLst>
+                  <p:par>
+                    <p:cTn id="3" fill="hold">
+                      <p:stCondLst>
+                        <p:cond delay="indefinite"/>
+                      </p:stCondLst>
+                      <p:childTnLst>
+                        <p:par>
+                          <p:cTn id="4" fill="hold">
+                            <p:stCondLst>
+                              <p:cond delay="0"/>
+                            </p:stCondLst>
+                            <p:childTnLst>
+                              <p:par>
+                                <p:cTn id="5" presetID="2" presetClass="entr" presetSubtype="4" fill="hold" nodeType="clickEffect">
+                                  <p:stCondLst>
+                                    <p:cond delay="0"/>
+                                  </p:stCondLst>
+                                  <p:childTnLst>
+                                    <p:set>
+                                      <p:cBhvr>
+                                        <p:cTn id="6" dur="1" fill="hold">
+                                          <p:stCondLst>
+                                            <p:cond delay="0"/>
+                                          </p:stCondLst>
+                                        </p:cTn>
+                                        <p:tgtEl>
+                                          <p:spTgt spid="6"/>
+                                        </p:tgtEl>
+                                        <p:attrNameLst>
+                                          <p:attrName>style.visibility</p:attrName>
+                                        </p:attrNameLst>
+                                      </p:cBhvr>
+                                      <p:to>
+                                        <p:strVal val="visible"/>
+                                      </p:to>
+                                    </p:set>
+                                    <p:anim calcmode="lin" valueType="num">
+                                      <p:cBhvr additive="base">
+                                        <p:cTn id="7" dur="500" fill="hold"/>
+                                        <p:tgtEl>
+                                          <p:spTgt spid="6"/>
+                                        </p:tgtEl>
+                                        <p:attrNameLst>
+                                          <p:attrName>ppt_x</p:attrName>
+                                        </p:attrNameLst>
+                                      </p:cBhvr>
+                                      <p:tavLst>
+                                        <p:tav tm="0">
+                                          <p:val>
+                                            <p:strVal val="#ppt_x"/>
+                                          </p:val>
+                                        </p:tav>
+                                        <p:tav tm="100000">
+                                          <p:val>
+                                            <p:strVal val="#ppt_x"/>
+                                          </p:val>
+                                        </p:tav>
+                                      </p:tavLst>
+                                    </p:anim>
+                                    <p:anim calcmode="lin" valueType="num">
+                                      <p:cBhvr additive="base">
+                                        <p:cTn id="8" dur="500" fill="hold"/>
+                                        <p:tgtEl>
+                                          <p:spTgt spid="6"/>
+                                        </p:tgtEl>
+                                        <p:attrNameLst>
+                                          <p:attrName>ppt_y</p:attrName>
+                                        </p:attrNameLst>
+                                      </p:cBhvr>
+                                      <p:tavLst>
+                                        <p:tav tm="0">
+                                          <p:val>
+                                            <p:strVal val="1+#ppt_h/2"/>
+                                          </p:val>
+                                        </p:tav>
+                                        <p:tav tm="100000">
+                                          <p:val>
+                                            <p:strVal val="#ppt_y"/>
+                                          </p:val>
+                                        </p:tav>
+                                      </p:tavLst>
+                                    </p:anim>
+                                  </p:childTnLst>
+                                </p:cTn>
+                              </p:par>
+                            </p:childTnLst>
+                          </p:cTn>
+                        </p:par>
+                      </p:childTnLst>
+                    </p:cTn>
+                  </p:par>
+                  <p:par>
+                    <p:cTn id="9" fill="hold">
+                      <p:stCondLst>
+                        <p:cond delay="indefinite"/>
+                      </p:stCondLst>
+                      <p:childTnLst>
+                        <p:par>
+                          <p:cTn id="10" fill="hold">
+                            <p:stCondLst>
+                              <p:cond delay="0"/>
+                            </p:stCondLst>
+                            <p:childTnLst>
+                              <p:par>
+                                <p:cTn id="11" presetID="2" presetClass="entr" presetSubtype="4" fill="hold" nodeType="clickEffect">
+                                  <p:stCondLst>
+                                    <p:cond delay="0"/>
+                                  </p:stCondLst>
+                                  <p:childTnLst>
+                                    <p:set>
+                                      <p:cBhvr>
+                                        <p:cTn id="12" dur="1" fill="hold">
+                                          <p:stCondLst>
+                                            <p:cond delay="0"/>
+                                          </p:stCondLst>
+                                        </p:cTn>
+                                        <p:tgtEl>
+                                          <p:spTgt spid="8"/>
+                                        </p:tgtEl>
+                                        <p:attrNameLst>
+                                          <p:attrName>style.visibility</p:attrName>
+                                        </p:attrNameLst>
+                                      </p:cBhvr>
+                                      <p:to>
+                                        <p:strVal val="visible"/>
+                                      </p:to>
+                                    </p:set>
+                                    <p:anim calcmode="lin" valueType="num">
+                                      <p:cBhvr additive="base">
+                                        <p:cTn id="13" dur="500" fill="hold"/>
+                                        <p:tgtEl>
+                                          <p:spTgt spid="8"/>
+                                        </p:tgtEl>
+                                        <p:attrNameLst>
+                                          <p:attrName>ppt_x</p:attrName>
+                                        </p:attrNameLst>
+                                      </p:cBhvr>
+                                      <p:tavLst>
+                                        <p:tav tm="0">
+                                          <p:val>
+                                            <p:strVal val="#ppt_x"/>
+                                          </p:val>
+                                        </p:tav>
+                                        <p:tav tm="100000">
+                                          <p:val>
+                                            <p:strVal val="#ppt_x"/>
+                                          </p:val>
+                                        </p:tav>
+                                      </p:tavLst>
+                                    </p:anim>
+                                    <p:anim calcmode="lin" valueType="num">
+                                      <p:cBhvr additive="base">
+                                        <p:cTn id="14" dur="500" fill="hold"/>
+                                        <p:tgtEl>
+                                          <p:spTgt spid="8"/>
+                                        </p:tgtEl>
+                                        <p:attrNameLst>
+                                          <p:attrName>ppt_y</p:attrName>
+                                        </p:attrNameLst>
+                                      </p:cBhvr>
+                                      <p:tavLst>
+                                        <p:tav tm="0">
+                                          <p:val>
+                                            <p:strVal val="1+#ppt_h/2"/>
+                                          </p:val>
+                                        </p:tav>
+                                        <p:tav tm="100000">
+                                          <p:val>
+                                            <p:strVal val="#ppt_y"/>
+                                          </p:val>
+                                        </p:tav>
+                                      </p:tavLst>
+                                    </p:anim>
+                                  </p:childTnLst>
+                                </p:cTn>
+                              </p:par>
+                            </p:childTnLst>
+                          </p:cTn>
+                        </p:par>
+                      </p:childTnLst>
+                    </p:cTn>
+                  </p:par>
+                  <p:par>
+                    <p:cTn id="15" fill="hold">
+                      <p:stCondLst>
+                        <p:cond delay="indefinite"/>
+                      </p:stCondLst>
+                      <p:childTnLst>
+                        <p:par>
+                          <p:cTn id="16" fill="hold">
+                            <p:stCondLst>
+                              <p:cond delay="0"/>
+                            </p:stCondLst>
+                            <p:childTnLst>
+                              <p:par>
+                                <p:cTn id="17" presetID="2" presetClass="entr" presetSubtype="4" fill="hold" nodeType="clickEffect">
+                                  <p:stCondLst>
+                                    <p:cond delay="0"/>
+                                  </p:stCondLst>
+                                  <p:childTnLst>
+                                    <p:set>
+                                      <p:cBhvr>
+                                        <p:cTn id="18" dur="1" fill="hold">
+                                          <p:stCondLst>
+                                            <p:cond delay="0"/>
+                                          </p:stCondLst>
+                                        </p:cTn>
+                                        <p:tgtEl>
+                                          <p:spTgt spid="10"/>
+                                        </p:tgtEl>
+                                        <p:attrNameLst>
+                                          <p:attrName>style.visibility</p:attrName>
+                                        </p:attrNameLst>
+                                      </p:cBhvr>
+                                      <p:to>
+                                        <p:strVal val="visible"/>
+                                      </p:to>
+                                    </p:set>
+                                    <p:anim calcmode="lin" valueType="num">
+                                      <p:cBhvr additive="base">
+                                        <p:cTn id="19" dur="500" fill="hold"/>
+                                        <p:tgtEl>
+                                          <p:spTgt spid="10"/>
+                                        </p:tgtEl>
+                                        <p:attrNameLst>
+                                          <p:attrName>ppt_x</p:attrName>
+                                        </p:attrNameLst>
+                                      </p:cBhvr>
+                                      <p:tavLst>
+                                        <p:tav tm="0">
+                                          <p:val>
+                                            <p:strVal val="#ppt_x"/>
+                                          </p:val>
+                                        </p:tav>
+                                        <p:tav tm="100000">
+                                          <p:val>
+                                            <p:strVal val="#ppt_x"/>
+                                          </p:val>
+                                        </p:tav>
+                                      </p:tavLst>
+                                    </p:anim>
+                                    <p:anim calcmode="lin" valueType="num">
+                                      <p:cBhvr additive="base">
+                                        <p:cTn id="20" dur="500" fill="hold"/>
+                                        <p:tgtEl>
+                                          <p:spTgt spid="10"/>
+                                        </p:tgtEl>
+                                        <p:attrNameLst>
+                                          <p:attrName>ppt_y</p:attrName>
+                                        </p:attrNameLst>
+                                      </p:cBhvr>
+                                      <p:tavLst>
+                                        <p:tav tm="0">
+                                          <p:val>
+                                            <p:strVal val="1+#ppt_h/2"/>
+                                          </p:val>
+                                        </p:tav>
+                                        <p:tav tm="100000">
+                                          <p:val>
+                                            <p:strVal val="#ppt_y"/>
+                                          </p:val>
+                                        </p:tav>
+                                      </p:tavLst>
+                                    </p:anim>
+                                  </p:childTnLst>
+                                </p:cTn>
+                              </p:par>
+                            </p:childTnLst>
+                          </p:cTn>
+                        </p:par>
+                      </p:childTnLst>
+                    </p:cTn>
+                  </p:par>
+                </p:childTnLst>
+              </p:cTn>
+              <p:prevCondLst>
+                <p:cond evt="onPrev" delay="0">
+                  <p:tgtEl>
+                    <p:sldTgt/>
+                  </p:tgtEl>
+                </p:cond>
+              </p:prevCondLst>
+              <p:nextCondLst>
+                <p:cond evt="onNext" delay="0">
+                  <p:tgtEl>
+                    <p:sldTgt/>
+                  </p:tgtEl>
+                </p:cond>
+              </p:nextCondLst>
+            </p:seq>
+          </p:childTnLst>
+        </p:cTn>
+      </p:par>
+    </p:tnLst>
+  </p:timing>
 </p:sld>
 </file>
 
@@ -5971,7 +6526,7 @@
           <a:p>
             <a:r>
               <a:rPr lang="hu-HU" b="1" dirty="0"/>
-              <a:t>Architektúra összeállítása:</a:t>
+              <a:t>Architektúra összeállítása a programunkban:</a:t>
             </a:r>
             <a:endParaRPr lang="hu-HU" dirty="0"/>
           </a:p>
@@ -6050,7 +6605,21 @@
                   <a:srgbClr val="000000"/>
                 </a:solidFill>
               </a:rPr>
-              <a:t>Külső API integráció</a:t>
+              <a:t>Külső API integráció(receptekhez való hozzáférés)</a:t>
+            </a:r>
+          </a:p>
+          <a:p>
+            <a:pPr lvl="1">
+              <a:buFont typeface="Arial" panose="020B0604020202020204" pitchFamily="34" charset="0"/>
+              <a:buChar char="•"/>
+            </a:pPr>
+            <a:r>
+              <a:rPr lang="hu-HU" dirty="0">
+                <a:solidFill>
+                  <a:srgbClr val="000000"/>
+                </a:solidFill>
+              </a:rPr>
+              <a:t>Adatszerkezet</a:t>
             </a:r>
           </a:p>
           <a:p>
@@ -6094,6 +6663,66 @@
           </a:prstGeom>
         </p:spPr>
       </p:pic>
+      <p:pic>
+        <p:nvPicPr>
+          <p:cNvPr id="5" name="Kép 4">
+            <a:extLst>
+              <a:ext uri="{FF2B5EF4-FFF2-40B4-BE49-F238E27FC236}">
+                <a16:creationId xmlns:a16="http://schemas.microsoft.com/office/drawing/2014/main" id="{83983435-DA29-4720-812D-4906ACE39108}"/>
+              </a:ext>
+            </a:extLst>
+          </p:cNvPr>
+          <p:cNvPicPr>
+            <a:picLocks noChangeAspect="1"/>
+          </p:cNvPicPr>
+          <p:nvPr/>
+        </p:nvPicPr>
+        <p:blipFill>
+          <a:blip r:embed="rId3"/>
+          <a:stretch>
+            <a:fillRect/>
+          </a:stretch>
+        </p:blipFill>
+        <p:spPr>
+          <a:xfrm>
+            <a:off x="9542974" y="335745"/>
+            <a:ext cx="1171914" cy="1820150"/>
+          </a:xfrm>
+          <a:prstGeom prst="rect">
+            <a:avLst/>
+          </a:prstGeom>
+        </p:spPr>
+      </p:pic>
+      <p:pic>
+        <p:nvPicPr>
+          <p:cNvPr id="8" name="Kép 7">
+            <a:extLst>
+              <a:ext uri="{FF2B5EF4-FFF2-40B4-BE49-F238E27FC236}">
+                <a16:creationId xmlns:a16="http://schemas.microsoft.com/office/drawing/2014/main" id="{E945A3CB-8276-4B91-B4D9-22D7D5E1CC38}"/>
+              </a:ext>
+            </a:extLst>
+          </p:cNvPr>
+          <p:cNvPicPr>
+            <a:picLocks noChangeAspect="1"/>
+          </p:cNvPicPr>
+          <p:nvPr/>
+        </p:nvPicPr>
+        <p:blipFill>
+          <a:blip r:embed="rId4"/>
+          <a:stretch>
+            <a:fillRect/>
+          </a:stretch>
+        </p:blipFill>
+        <p:spPr>
+          <a:xfrm>
+            <a:off x="7008481" y="335745"/>
+            <a:ext cx="2284522" cy="1820150"/>
+          </a:xfrm>
+          <a:prstGeom prst="rect">
+            <a:avLst/>
+          </a:prstGeom>
+        </p:spPr>
+      </p:pic>
     </p:spTree>
     <p:extLst>
       <p:ext uri="{BB962C8B-B14F-4D97-AF65-F5344CB8AC3E}">
@@ -6104,6 +6733,221 @@
   <p:clrMapOvr>
     <a:masterClrMapping/>
   </p:clrMapOvr>
+  <p:transition spd="slow">
+    <p:push dir="u"/>
+  </p:transition>
+  <p:timing>
+    <p:tnLst>
+      <p:par>
+        <p:cTn id="1" dur="indefinite" restart="never" nodeType="tmRoot">
+          <p:childTnLst>
+            <p:seq concurrent="1" nextAc="seek">
+              <p:cTn id="2" dur="indefinite" nodeType="mainSeq">
+                <p:childTnLst>
+                  <p:par>
+                    <p:cTn id="3" fill="hold">
+                      <p:stCondLst>
+                        <p:cond delay="indefinite"/>
+                      </p:stCondLst>
+                      <p:childTnLst>
+                        <p:par>
+                          <p:cTn id="4" fill="hold">
+                            <p:stCondLst>
+                              <p:cond delay="0"/>
+                            </p:stCondLst>
+                            <p:childTnLst>
+                              <p:par>
+                                <p:cTn id="5" presetID="2" presetClass="entr" presetSubtype="4" fill="hold" nodeType="clickEffect">
+                                  <p:stCondLst>
+                                    <p:cond delay="0"/>
+                                  </p:stCondLst>
+                                  <p:childTnLst>
+                                    <p:set>
+                                      <p:cBhvr>
+                                        <p:cTn id="6" dur="1" fill="hold">
+                                          <p:stCondLst>
+                                            <p:cond delay="0"/>
+                                          </p:stCondLst>
+                                        </p:cTn>
+                                        <p:tgtEl>
+                                          <p:spTgt spid="5"/>
+                                        </p:tgtEl>
+                                        <p:attrNameLst>
+                                          <p:attrName>style.visibility</p:attrName>
+                                        </p:attrNameLst>
+                                      </p:cBhvr>
+                                      <p:to>
+                                        <p:strVal val="visible"/>
+                                      </p:to>
+                                    </p:set>
+                                    <p:anim calcmode="lin" valueType="num">
+                                      <p:cBhvr additive="base">
+                                        <p:cTn id="7" dur="500" fill="hold"/>
+                                        <p:tgtEl>
+                                          <p:spTgt spid="5"/>
+                                        </p:tgtEl>
+                                        <p:attrNameLst>
+                                          <p:attrName>ppt_x</p:attrName>
+                                        </p:attrNameLst>
+                                      </p:cBhvr>
+                                      <p:tavLst>
+                                        <p:tav tm="0">
+                                          <p:val>
+                                            <p:strVal val="#ppt_x"/>
+                                          </p:val>
+                                        </p:tav>
+                                        <p:tav tm="100000">
+                                          <p:val>
+                                            <p:strVal val="#ppt_x"/>
+                                          </p:val>
+                                        </p:tav>
+                                      </p:tavLst>
+                                    </p:anim>
+                                    <p:anim calcmode="lin" valueType="num">
+                                      <p:cBhvr additive="base">
+                                        <p:cTn id="8" dur="500" fill="hold"/>
+                                        <p:tgtEl>
+                                          <p:spTgt spid="5"/>
+                                        </p:tgtEl>
+                                        <p:attrNameLst>
+                                          <p:attrName>ppt_y</p:attrName>
+                                        </p:attrNameLst>
+                                      </p:cBhvr>
+                                      <p:tavLst>
+                                        <p:tav tm="0">
+                                          <p:val>
+                                            <p:strVal val="1+#ppt_h/2"/>
+                                          </p:val>
+                                        </p:tav>
+                                        <p:tav tm="100000">
+                                          <p:val>
+                                            <p:strVal val="#ppt_y"/>
+                                          </p:val>
+                                        </p:tav>
+                                      </p:tavLst>
+                                    </p:anim>
+                                  </p:childTnLst>
+                                </p:cTn>
+                              </p:par>
+                            </p:childTnLst>
+                          </p:cTn>
+                        </p:par>
+                      </p:childTnLst>
+                    </p:cTn>
+                  </p:par>
+                  <p:par>
+                    <p:cTn id="9" fill="hold">
+                      <p:stCondLst>
+                        <p:cond delay="indefinite"/>
+                      </p:stCondLst>
+                      <p:childTnLst>
+                        <p:par>
+                          <p:cTn id="10" fill="hold">
+                            <p:stCondLst>
+                              <p:cond delay="0"/>
+                            </p:stCondLst>
+                            <p:childTnLst>
+                              <p:par>
+                                <p:cTn id="11" presetID="2" presetClass="entr" presetSubtype="4" fill="hold" nodeType="clickEffect">
+                                  <p:stCondLst>
+                                    <p:cond delay="0"/>
+                                  </p:stCondLst>
+                                  <p:childTnLst>
+                                    <p:set>
+                                      <p:cBhvr>
+                                        <p:cTn id="12" dur="1" fill="hold">
+                                          <p:stCondLst>
+                                            <p:cond delay="0"/>
+                                          </p:stCondLst>
+                                        </p:cTn>
+                                        <p:tgtEl>
+                                          <p:spTgt spid="8"/>
+                                        </p:tgtEl>
+                                        <p:attrNameLst>
+                                          <p:attrName>style.visibility</p:attrName>
+                                        </p:attrNameLst>
+                                      </p:cBhvr>
+                                      <p:to>
+                                        <p:strVal val="visible"/>
+                                      </p:to>
+                                    </p:set>
+                                    <p:anim calcmode="lin" valueType="num">
+                                      <p:cBhvr additive="base">
+                                        <p:cTn id="13" dur="500" fill="hold"/>
+                                        <p:tgtEl>
+                                          <p:spTgt spid="8"/>
+                                        </p:tgtEl>
+                                        <p:attrNameLst>
+                                          <p:attrName>ppt_x</p:attrName>
+                                        </p:attrNameLst>
+                                      </p:cBhvr>
+                                      <p:tavLst>
+                                        <p:tav tm="0">
+                                          <p:val>
+                                            <p:strVal val="#ppt_x"/>
+                                          </p:val>
+                                        </p:tav>
+                                        <p:tav tm="100000">
+                                          <p:val>
+                                            <p:strVal val="#ppt_x"/>
+                                          </p:val>
+                                        </p:tav>
+                                      </p:tavLst>
+                                    </p:anim>
+                                    <p:anim calcmode="lin" valueType="num">
+                                      <p:cBhvr additive="base">
+                                        <p:cTn id="14" dur="500" fill="hold"/>
+                                        <p:tgtEl>
+                                          <p:spTgt spid="8"/>
+                                        </p:tgtEl>
+                                        <p:attrNameLst>
+                                          <p:attrName>ppt_y</p:attrName>
+                                        </p:attrNameLst>
+                                      </p:cBhvr>
+                                      <p:tavLst>
+                                        <p:tav tm="0">
+                                          <p:val>
+                                            <p:strVal val="1+#ppt_h/2"/>
+                                          </p:val>
+                                        </p:tav>
+                                        <p:tav tm="100000">
+                                          <p:val>
+                                            <p:strVal val="#ppt_y"/>
+                                          </p:val>
+                                        </p:tav>
+                                      </p:tavLst>
+                                    </p:anim>
+                                  </p:childTnLst>
+                                </p:cTn>
+                              </p:par>
+                            </p:childTnLst>
+                          </p:cTn>
+                        </p:par>
+                      </p:childTnLst>
+                    </p:cTn>
+                  </p:par>
+                </p:childTnLst>
+              </p:cTn>
+              <p:prevCondLst>
+                <p:cond evt="onPrev" delay="0">
+                  <p:tgtEl>
+                    <p:sldTgt/>
+                  </p:tgtEl>
+                </p:cond>
+              </p:prevCondLst>
+              <p:nextCondLst>
+                <p:cond evt="onNext" delay="0">
+                  <p:tgtEl>
+                    <p:sldTgt/>
+                  </p:tgtEl>
+                </p:cond>
+              </p:nextCondLst>
+            </p:seq>
+          </p:childTnLst>
+        </p:cTn>
+      </p:par>
+    </p:tnLst>
+  </p:timing>
 </p:sld>
 </file>
 
@@ -6290,6 +7134,96 @@
           </a:prstGeom>
         </p:spPr>
       </p:pic>
+      <p:pic>
+        <p:nvPicPr>
+          <p:cNvPr id="6" name="Kép 5">
+            <a:extLst>
+              <a:ext uri="{FF2B5EF4-FFF2-40B4-BE49-F238E27FC236}">
+                <a16:creationId xmlns:a16="http://schemas.microsoft.com/office/drawing/2014/main" id="{22E1B217-BBD8-4CC1-BF8B-CA58FFB05755}"/>
+              </a:ext>
+            </a:extLst>
+          </p:cNvPr>
+          <p:cNvPicPr>
+            <a:picLocks noChangeAspect="1"/>
+          </p:cNvPicPr>
+          <p:nvPr/>
+        </p:nvPicPr>
+        <p:blipFill>
+          <a:blip r:embed="rId3"/>
+          <a:stretch>
+            <a:fillRect/>
+          </a:stretch>
+        </p:blipFill>
+        <p:spPr>
+          <a:xfrm>
+            <a:off x="5631619" y="499535"/>
+            <a:ext cx="1791807" cy="3517900"/>
+          </a:xfrm>
+          <a:prstGeom prst="rect">
+            <a:avLst/>
+          </a:prstGeom>
+        </p:spPr>
+      </p:pic>
+      <p:pic>
+        <p:nvPicPr>
+          <p:cNvPr id="8" name="Kép 7">
+            <a:extLst>
+              <a:ext uri="{FF2B5EF4-FFF2-40B4-BE49-F238E27FC236}">
+                <a16:creationId xmlns:a16="http://schemas.microsoft.com/office/drawing/2014/main" id="{A06BBBEF-98E1-4BF6-8762-8941F378C730}"/>
+              </a:ext>
+            </a:extLst>
+          </p:cNvPr>
+          <p:cNvPicPr>
+            <a:picLocks noChangeAspect="1"/>
+          </p:cNvPicPr>
+          <p:nvPr/>
+        </p:nvPicPr>
+        <p:blipFill>
+          <a:blip r:embed="rId4"/>
+          <a:stretch>
+            <a:fillRect/>
+          </a:stretch>
+        </p:blipFill>
+        <p:spPr>
+          <a:xfrm>
+            <a:off x="7423426" y="499535"/>
+            <a:ext cx="3731478" cy="3000142"/>
+          </a:xfrm>
+          <a:prstGeom prst="rect">
+            <a:avLst/>
+          </a:prstGeom>
+        </p:spPr>
+      </p:pic>
+      <p:pic>
+        <p:nvPicPr>
+          <p:cNvPr id="10" name="Kép 9">
+            <a:extLst>
+              <a:ext uri="{FF2B5EF4-FFF2-40B4-BE49-F238E27FC236}">
+                <a16:creationId xmlns:a16="http://schemas.microsoft.com/office/drawing/2014/main" id="{95F5C76B-D9C5-4760-8415-D5585D01D54F}"/>
+              </a:ext>
+            </a:extLst>
+          </p:cNvPr>
+          <p:cNvPicPr>
+            <a:picLocks noChangeAspect="1"/>
+          </p:cNvPicPr>
+          <p:nvPr/>
+        </p:nvPicPr>
+        <p:blipFill>
+          <a:blip r:embed="rId5"/>
+          <a:stretch>
+            <a:fillRect/>
+          </a:stretch>
+        </p:blipFill>
+        <p:spPr>
+          <a:xfrm>
+            <a:off x="7423426" y="3499677"/>
+            <a:ext cx="3745502" cy="2713853"/>
+          </a:xfrm>
+          <a:prstGeom prst="rect">
+            <a:avLst/>
+          </a:prstGeom>
+        </p:spPr>
+      </p:pic>
     </p:spTree>
     <p:extLst>
       <p:ext uri="{BB962C8B-B14F-4D97-AF65-F5344CB8AC3E}">
@@ -6300,6 +7234,312 @@
   <p:clrMapOvr>
     <a:masterClrMapping/>
   </p:clrMapOvr>
+  <p:transition spd="slow">
+    <p:push dir="u"/>
+  </p:transition>
+  <p:timing>
+    <p:tnLst>
+      <p:par>
+        <p:cTn id="1" dur="indefinite" restart="never" nodeType="tmRoot">
+          <p:childTnLst>
+            <p:seq concurrent="1" nextAc="seek">
+              <p:cTn id="2" dur="indefinite" nodeType="mainSeq">
+                <p:childTnLst>
+                  <p:par>
+                    <p:cTn id="3" fill="hold">
+                      <p:stCondLst>
+                        <p:cond delay="indefinite"/>
+                      </p:stCondLst>
+                      <p:childTnLst>
+                        <p:par>
+                          <p:cTn id="4" fill="hold">
+                            <p:stCondLst>
+                              <p:cond delay="0"/>
+                            </p:stCondLst>
+                            <p:childTnLst>
+                              <p:par>
+                                <p:cTn id="5" presetID="2" presetClass="entr" presetSubtype="4" fill="hold" nodeType="clickEffect">
+                                  <p:stCondLst>
+                                    <p:cond delay="0"/>
+                                  </p:stCondLst>
+                                  <p:childTnLst>
+                                    <p:set>
+                                      <p:cBhvr>
+                                        <p:cTn id="6" dur="1" fill="hold">
+                                          <p:stCondLst>
+                                            <p:cond delay="0"/>
+                                          </p:stCondLst>
+                                        </p:cTn>
+                                        <p:tgtEl>
+                                          <p:spTgt spid="6"/>
+                                        </p:tgtEl>
+                                        <p:attrNameLst>
+                                          <p:attrName>style.visibility</p:attrName>
+                                        </p:attrNameLst>
+                                      </p:cBhvr>
+                                      <p:to>
+                                        <p:strVal val="visible"/>
+                                      </p:to>
+                                    </p:set>
+                                    <p:anim calcmode="lin" valueType="num">
+                                      <p:cBhvr additive="base">
+                                        <p:cTn id="7" dur="500" fill="hold"/>
+                                        <p:tgtEl>
+                                          <p:spTgt spid="6"/>
+                                        </p:tgtEl>
+                                        <p:attrNameLst>
+                                          <p:attrName>ppt_x</p:attrName>
+                                        </p:attrNameLst>
+                                      </p:cBhvr>
+                                      <p:tavLst>
+                                        <p:tav tm="0">
+                                          <p:val>
+                                            <p:strVal val="#ppt_x"/>
+                                          </p:val>
+                                        </p:tav>
+                                        <p:tav tm="100000">
+                                          <p:val>
+                                            <p:strVal val="#ppt_x"/>
+                                          </p:val>
+                                        </p:tav>
+                                      </p:tavLst>
+                                    </p:anim>
+                                    <p:anim calcmode="lin" valueType="num">
+                                      <p:cBhvr additive="base">
+                                        <p:cTn id="8" dur="500" fill="hold"/>
+                                        <p:tgtEl>
+                                          <p:spTgt spid="6"/>
+                                        </p:tgtEl>
+                                        <p:attrNameLst>
+                                          <p:attrName>ppt_y</p:attrName>
+                                        </p:attrNameLst>
+                                      </p:cBhvr>
+                                      <p:tavLst>
+                                        <p:tav tm="0">
+                                          <p:val>
+                                            <p:strVal val="1+#ppt_h/2"/>
+                                          </p:val>
+                                        </p:tav>
+                                        <p:tav tm="100000">
+                                          <p:val>
+                                            <p:strVal val="#ppt_y"/>
+                                          </p:val>
+                                        </p:tav>
+                                      </p:tavLst>
+                                    </p:anim>
+                                  </p:childTnLst>
+                                </p:cTn>
+                              </p:par>
+                            </p:childTnLst>
+                          </p:cTn>
+                        </p:par>
+                      </p:childTnLst>
+                    </p:cTn>
+                  </p:par>
+                  <p:par>
+                    <p:cTn id="9" fill="hold">
+                      <p:stCondLst>
+                        <p:cond delay="indefinite"/>
+                      </p:stCondLst>
+                      <p:childTnLst>
+                        <p:par>
+                          <p:cTn id="10" fill="hold">
+                            <p:stCondLst>
+                              <p:cond delay="0"/>
+                            </p:stCondLst>
+                            <p:childTnLst>
+                              <p:par>
+                                <p:cTn id="11" presetID="2" presetClass="entr" presetSubtype="4" fill="hold" nodeType="clickEffect">
+                                  <p:stCondLst>
+                                    <p:cond delay="0"/>
+                                  </p:stCondLst>
+                                  <p:childTnLst>
+                                    <p:set>
+                                      <p:cBhvr>
+                                        <p:cTn id="12" dur="1" fill="hold">
+                                          <p:stCondLst>
+                                            <p:cond delay="0"/>
+                                          </p:stCondLst>
+                                        </p:cTn>
+                                        <p:tgtEl>
+                                          <p:spTgt spid="8"/>
+                                        </p:tgtEl>
+                                        <p:attrNameLst>
+                                          <p:attrName>style.visibility</p:attrName>
+                                        </p:attrNameLst>
+                                      </p:cBhvr>
+                                      <p:to>
+                                        <p:strVal val="visible"/>
+                                      </p:to>
+                                    </p:set>
+                                    <p:anim calcmode="lin" valueType="num">
+                                      <p:cBhvr additive="base">
+                                        <p:cTn id="13" dur="500" fill="hold"/>
+                                        <p:tgtEl>
+                                          <p:spTgt spid="8"/>
+                                        </p:tgtEl>
+                                        <p:attrNameLst>
+                                          <p:attrName>ppt_x</p:attrName>
+                                        </p:attrNameLst>
+                                      </p:cBhvr>
+                                      <p:tavLst>
+                                        <p:tav tm="0">
+                                          <p:val>
+                                            <p:strVal val="#ppt_x"/>
+                                          </p:val>
+                                        </p:tav>
+                                        <p:tav tm="100000">
+                                          <p:val>
+                                            <p:strVal val="#ppt_x"/>
+                                          </p:val>
+                                        </p:tav>
+                                      </p:tavLst>
+                                    </p:anim>
+                                    <p:anim calcmode="lin" valueType="num">
+                                      <p:cBhvr additive="base">
+                                        <p:cTn id="14" dur="500" fill="hold"/>
+                                        <p:tgtEl>
+                                          <p:spTgt spid="8"/>
+                                        </p:tgtEl>
+                                        <p:attrNameLst>
+                                          <p:attrName>ppt_y</p:attrName>
+                                        </p:attrNameLst>
+                                      </p:cBhvr>
+                                      <p:tavLst>
+                                        <p:tav tm="0">
+                                          <p:val>
+                                            <p:strVal val="1+#ppt_h/2"/>
+                                          </p:val>
+                                        </p:tav>
+                                        <p:tav tm="100000">
+                                          <p:val>
+                                            <p:strVal val="#ppt_y"/>
+                                          </p:val>
+                                        </p:tav>
+                                      </p:tavLst>
+                                    </p:anim>
+                                  </p:childTnLst>
+                                </p:cTn>
+                              </p:par>
+                            </p:childTnLst>
+                          </p:cTn>
+                        </p:par>
+                      </p:childTnLst>
+                    </p:cTn>
+                  </p:par>
+                  <p:par>
+                    <p:cTn id="15" fill="hold">
+                      <p:stCondLst>
+                        <p:cond delay="indefinite"/>
+                      </p:stCondLst>
+                      <p:childTnLst>
+                        <p:par>
+                          <p:cTn id="16" fill="hold">
+                            <p:stCondLst>
+                              <p:cond delay="0"/>
+                            </p:stCondLst>
+                            <p:childTnLst>
+                              <p:par>
+                                <p:cTn id="17" presetID="2" presetClass="entr" presetSubtype="4" fill="hold" nodeType="clickEffect">
+                                  <p:stCondLst>
+                                    <p:cond delay="0"/>
+                                  </p:stCondLst>
+                                  <p:childTnLst>
+                                    <p:set>
+                                      <p:cBhvr>
+                                        <p:cTn id="18" dur="1" fill="hold">
+                                          <p:stCondLst>
+                                            <p:cond delay="0"/>
+                                          </p:stCondLst>
+                                        </p:cTn>
+                                        <p:tgtEl>
+                                          <p:spTgt spid="10"/>
+                                        </p:tgtEl>
+                                        <p:attrNameLst>
+                                          <p:attrName>style.visibility</p:attrName>
+                                        </p:attrNameLst>
+                                      </p:cBhvr>
+                                      <p:to>
+                                        <p:strVal val="visible"/>
+                                      </p:to>
+                                    </p:set>
+                                    <p:anim calcmode="lin" valueType="num">
+                                      <p:cBhvr additive="base">
+                                        <p:cTn id="19" dur="500" fill="hold"/>
+                                        <p:tgtEl>
+                                          <p:spTgt spid="10"/>
+                                        </p:tgtEl>
+                                        <p:attrNameLst>
+                                          <p:attrName>ppt_x</p:attrName>
+                                        </p:attrNameLst>
+                                      </p:cBhvr>
+                                      <p:tavLst>
+                                        <p:tav tm="0">
+                                          <p:val>
+                                            <p:strVal val="#ppt_x"/>
+                                          </p:val>
+                                        </p:tav>
+                                        <p:tav tm="100000">
+                                          <p:val>
+                                            <p:strVal val="#ppt_x"/>
+                                          </p:val>
+                                        </p:tav>
+                                      </p:tavLst>
+                                    </p:anim>
+                                    <p:anim calcmode="lin" valueType="num">
+                                      <p:cBhvr additive="base">
+                                        <p:cTn id="20" dur="500" fill="hold"/>
+                                        <p:tgtEl>
+                                          <p:spTgt spid="10"/>
+                                        </p:tgtEl>
+                                        <p:attrNameLst>
+                                          <p:attrName>ppt_y</p:attrName>
+                                        </p:attrNameLst>
+                                      </p:cBhvr>
+                                      <p:tavLst>
+                                        <p:tav tm="0">
+                                          <p:val>
+                                            <p:strVal val="1+#ppt_h/2"/>
+                                          </p:val>
+                                        </p:tav>
+                                        <p:tav tm="100000">
+                                          <p:val>
+                                            <p:strVal val="#ppt_y"/>
+                                          </p:val>
+                                        </p:tav>
+                                      </p:tavLst>
+                                    </p:anim>
+                                  </p:childTnLst>
+                                </p:cTn>
+                              </p:par>
+                            </p:childTnLst>
+                          </p:cTn>
+                        </p:par>
+                      </p:childTnLst>
+                    </p:cTn>
+                  </p:par>
+                </p:childTnLst>
+              </p:cTn>
+              <p:prevCondLst>
+                <p:cond evt="onPrev" delay="0">
+                  <p:tgtEl>
+                    <p:sldTgt/>
+                  </p:tgtEl>
+                </p:cond>
+              </p:prevCondLst>
+              <p:nextCondLst>
+                <p:cond evt="onNext" delay="0">
+                  <p:tgtEl>
+                    <p:sldTgt/>
+                  </p:tgtEl>
+                </p:cond>
+              </p:nextCondLst>
+            </p:seq>
+          </p:childTnLst>
+        </p:cTn>
+      </p:par>
+    </p:tnLst>
+  </p:timing>
 </p:sld>
 </file>
 
@@ -6457,6 +7697,66 @@
           </a:prstGeom>
         </p:spPr>
       </p:pic>
+      <p:pic>
+        <p:nvPicPr>
+          <p:cNvPr id="6" name="Kép 5">
+            <a:extLst>
+              <a:ext uri="{FF2B5EF4-FFF2-40B4-BE49-F238E27FC236}">
+                <a16:creationId xmlns:a16="http://schemas.microsoft.com/office/drawing/2014/main" id="{76F26A6F-168D-42B5-B76A-A5C1EFC67834}"/>
+              </a:ext>
+            </a:extLst>
+          </p:cNvPr>
+          <p:cNvPicPr>
+            <a:picLocks noChangeAspect="1"/>
+          </p:cNvPicPr>
+          <p:nvPr/>
+        </p:nvPicPr>
+        <p:blipFill>
+          <a:blip r:embed="rId3"/>
+          <a:stretch>
+            <a:fillRect/>
+          </a:stretch>
+        </p:blipFill>
+        <p:spPr>
+          <a:xfrm>
+            <a:off x="4264898" y="1020808"/>
+            <a:ext cx="6847602" cy="1038288"/>
+          </a:xfrm>
+          <a:prstGeom prst="rect">
+            <a:avLst/>
+          </a:prstGeom>
+        </p:spPr>
+      </p:pic>
+      <p:pic>
+        <p:nvPicPr>
+          <p:cNvPr id="8" name="Kép 7">
+            <a:extLst>
+              <a:ext uri="{FF2B5EF4-FFF2-40B4-BE49-F238E27FC236}">
+                <a16:creationId xmlns:a16="http://schemas.microsoft.com/office/drawing/2014/main" id="{99DFC7C0-1914-4953-8F92-B8B45D8BA715}"/>
+              </a:ext>
+            </a:extLst>
+          </p:cNvPr>
+          <p:cNvPicPr>
+            <a:picLocks noChangeAspect="1"/>
+          </p:cNvPicPr>
+          <p:nvPr/>
+        </p:nvPicPr>
+        <p:blipFill>
+          <a:blip r:embed="rId4"/>
+          <a:stretch>
+            <a:fillRect/>
+          </a:stretch>
+        </p:blipFill>
+        <p:spPr>
+          <a:xfrm>
+            <a:off x="4264898" y="2059096"/>
+            <a:ext cx="6847602" cy="583014"/>
+          </a:xfrm>
+          <a:prstGeom prst="rect">
+            <a:avLst/>
+          </a:prstGeom>
+        </p:spPr>
+      </p:pic>
     </p:spTree>
     <p:extLst>
       <p:ext uri="{BB962C8B-B14F-4D97-AF65-F5344CB8AC3E}">
@@ -6467,6 +7767,221 @@
   <p:clrMapOvr>
     <a:masterClrMapping/>
   </p:clrMapOvr>
+  <p:transition spd="slow">
+    <p:push dir="u"/>
+  </p:transition>
+  <p:timing>
+    <p:tnLst>
+      <p:par>
+        <p:cTn id="1" dur="indefinite" restart="never" nodeType="tmRoot">
+          <p:childTnLst>
+            <p:seq concurrent="1" nextAc="seek">
+              <p:cTn id="2" dur="indefinite" nodeType="mainSeq">
+                <p:childTnLst>
+                  <p:par>
+                    <p:cTn id="3" fill="hold">
+                      <p:stCondLst>
+                        <p:cond delay="indefinite"/>
+                      </p:stCondLst>
+                      <p:childTnLst>
+                        <p:par>
+                          <p:cTn id="4" fill="hold">
+                            <p:stCondLst>
+                              <p:cond delay="0"/>
+                            </p:stCondLst>
+                            <p:childTnLst>
+                              <p:par>
+                                <p:cTn id="5" presetID="2" presetClass="entr" presetSubtype="4" fill="hold" nodeType="clickEffect">
+                                  <p:stCondLst>
+                                    <p:cond delay="0"/>
+                                  </p:stCondLst>
+                                  <p:childTnLst>
+                                    <p:set>
+                                      <p:cBhvr>
+                                        <p:cTn id="6" dur="1" fill="hold">
+                                          <p:stCondLst>
+                                            <p:cond delay="0"/>
+                                          </p:stCondLst>
+                                        </p:cTn>
+                                        <p:tgtEl>
+                                          <p:spTgt spid="6"/>
+                                        </p:tgtEl>
+                                        <p:attrNameLst>
+                                          <p:attrName>style.visibility</p:attrName>
+                                        </p:attrNameLst>
+                                      </p:cBhvr>
+                                      <p:to>
+                                        <p:strVal val="visible"/>
+                                      </p:to>
+                                    </p:set>
+                                    <p:anim calcmode="lin" valueType="num">
+                                      <p:cBhvr additive="base">
+                                        <p:cTn id="7" dur="500" fill="hold"/>
+                                        <p:tgtEl>
+                                          <p:spTgt spid="6"/>
+                                        </p:tgtEl>
+                                        <p:attrNameLst>
+                                          <p:attrName>ppt_x</p:attrName>
+                                        </p:attrNameLst>
+                                      </p:cBhvr>
+                                      <p:tavLst>
+                                        <p:tav tm="0">
+                                          <p:val>
+                                            <p:strVal val="#ppt_x"/>
+                                          </p:val>
+                                        </p:tav>
+                                        <p:tav tm="100000">
+                                          <p:val>
+                                            <p:strVal val="#ppt_x"/>
+                                          </p:val>
+                                        </p:tav>
+                                      </p:tavLst>
+                                    </p:anim>
+                                    <p:anim calcmode="lin" valueType="num">
+                                      <p:cBhvr additive="base">
+                                        <p:cTn id="8" dur="500" fill="hold"/>
+                                        <p:tgtEl>
+                                          <p:spTgt spid="6"/>
+                                        </p:tgtEl>
+                                        <p:attrNameLst>
+                                          <p:attrName>ppt_y</p:attrName>
+                                        </p:attrNameLst>
+                                      </p:cBhvr>
+                                      <p:tavLst>
+                                        <p:tav tm="0">
+                                          <p:val>
+                                            <p:strVal val="1+#ppt_h/2"/>
+                                          </p:val>
+                                        </p:tav>
+                                        <p:tav tm="100000">
+                                          <p:val>
+                                            <p:strVal val="#ppt_y"/>
+                                          </p:val>
+                                        </p:tav>
+                                      </p:tavLst>
+                                    </p:anim>
+                                  </p:childTnLst>
+                                </p:cTn>
+                              </p:par>
+                            </p:childTnLst>
+                          </p:cTn>
+                        </p:par>
+                      </p:childTnLst>
+                    </p:cTn>
+                  </p:par>
+                  <p:par>
+                    <p:cTn id="9" fill="hold">
+                      <p:stCondLst>
+                        <p:cond delay="indefinite"/>
+                      </p:stCondLst>
+                      <p:childTnLst>
+                        <p:par>
+                          <p:cTn id="10" fill="hold">
+                            <p:stCondLst>
+                              <p:cond delay="0"/>
+                            </p:stCondLst>
+                            <p:childTnLst>
+                              <p:par>
+                                <p:cTn id="11" presetID="2" presetClass="entr" presetSubtype="4" fill="hold" nodeType="clickEffect">
+                                  <p:stCondLst>
+                                    <p:cond delay="0"/>
+                                  </p:stCondLst>
+                                  <p:childTnLst>
+                                    <p:set>
+                                      <p:cBhvr>
+                                        <p:cTn id="12" dur="1" fill="hold">
+                                          <p:stCondLst>
+                                            <p:cond delay="0"/>
+                                          </p:stCondLst>
+                                        </p:cTn>
+                                        <p:tgtEl>
+                                          <p:spTgt spid="8"/>
+                                        </p:tgtEl>
+                                        <p:attrNameLst>
+                                          <p:attrName>style.visibility</p:attrName>
+                                        </p:attrNameLst>
+                                      </p:cBhvr>
+                                      <p:to>
+                                        <p:strVal val="visible"/>
+                                      </p:to>
+                                    </p:set>
+                                    <p:anim calcmode="lin" valueType="num">
+                                      <p:cBhvr additive="base">
+                                        <p:cTn id="13" dur="500" fill="hold"/>
+                                        <p:tgtEl>
+                                          <p:spTgt spid="8"/>
+                                        </p:tgtEl>
+                                        <p:attrNameLst>
+                                          <p:attrName>ppt_x</p:attrName>
+                                        </p:attrNameLst>
+                                      </p:cBhvr>
+                                      <p:tavLst>
+                                        <p:tav tm="0">
+                                          <p:val>
+                                            <p:strVal val="#ppt_x"/>
+                                          </p:val>
+                                        </p:tav>
+                                        <p:tav tm="100000">
+                                          <p:val>
+                                            <p:strVal val="#ppt_x"/>
+                                          </p:val>
+                                        </p:tav>
+                                      </p:tavLst>
+                                    </p:anim>
+                                    <p:anim calcmode="lin" valueType="num">
+                                      <p:cBhvr additive="base">
+                                        <p:cTn id="14" dur="500" fill="hold"/>
+                                        <p:tgtEl>
+                                          <p:spTgt spid="8"/>
+                                        </p:tgtEl>
+                                        <p:attrNameLst>
+                                          <p:attrName>ppt_y</p:attrName>
+                                        </p:attrNameLst>
+                                      </p:cBhvr>
+                                      <p:tavLst>
+                                        <p:tav tm="0">
+                                          <p:val>
+                                            <p:strVal val="1+#ppt_h/2"/>
+                                          </p:val>
+                                        </p:tav>
+                                        <p:tav tm="100000">
+                                          <p:val>
+                                            <p:strVal val="#ppt_y"/>
+                                          </p:val>
+                                        </p:tav>
+                                      </p:tavLst>
+                                    </p:anim>
+                                  </p:childTnLst>
+                                </p:cTn>
+                              </p:par>
+                            </p:childTnLst>
+                          </p:cTn>
+                        </p:par>
+                      </p:childTnLst>
+                    </p:cTn>
+                  </p:par>
+                </p:childTnLst>
+              </p:cTn>
+              <p:prevCondLst>
+                <p:cond evt="onPrev" delay="0">
+                  <p:tgtEl>
+                    <p:sldTgt/>
+                  </p:tgtEl>
+                </p:cond>
+              </p:prevCondLst>
+              <p:nextCondLst>
+                <p:cond evt="onNext" delay="0">
+                  <p:tgtEl>
+                    <p:sldTgt/>
+                  </p:tgtEl>
+                </p:cond>
+              </p:nextCondLst>
+            </p:seq>
+          </p:childTnLst>
+        </p:cTn>
+      </p:par>
+    </p:tnLst>
+  </p:timing>
 </p:sld>
 </file>
 
@@ -6508,10 +8023,7 @@
           <a:bodyPr/>
           <a:lstStyle/>
           <a:p>
-            <a:r>
-              <a:rPr lang="hu-HU" dirty="0"/>
-              <a:t>Recept → készlet összehasonlítás</a:t>
-            </a:r>
+            <a:endParaRPr lang="hu-HU" dirty="0"/>
           </a:p>
         </p:txBody>
       </p:sp>
@@ -6586,6 +8098,9 @@
   <p:clrMapOvr>
     <a:masterClrMapping/>
   </p:clrMapOvr>
+  <p:transition spd="slow">
+    <p:push dir="u"/>
+  </p:transition>
 </p:sld>
 </file>
 
@@ -6627,7 +8142,10 @@
           <a:bodyPr/>
           <a:lstStyle/>
           <a:p>
-            <a:endParaRPr lang="hu-HU"/>
+            <a:r>
+              <a:rPr lang="hu-HU" b="1" dirty="0"/>
+              <a:t>Köszönjük a figyelmüket !</a:t>
+            </a:r>
           </a:p>
         </p:txBody>
       </p:sp>
@@ -6652,7 +8170,7 @@
           <a:bodyPr/>
           <a:lstStyle/>
           <a:p>
-            <a:endParaRPr lang="hu-HU"/>
+            <a:endParaRPr lang="hu-HU" dirty="0"/>
           </a:p>
         </p:txBody>
       </p:sp>
@@ -6666,6 +8184,9 @@
   <p:clrMapOvr>
     <a:masterClrMapping/>
   </p:clrMapOvr>
+  <p:transition spd="slow">
+    <p:push dir="u"/>
+  </p:transition>
 </p:sld>
 </file>
 

--- a/PPT/Magic Fridge.pptx
+++ b/PPT/Magic Fridge.pptx
@@ -11,8 +11,19 @@
     <p:sldId id="259" r:id="rId5"/>
     <p:sldId id="260" r:id="rId6"/>
     <p:sldId id="261" r:id="rId7"/>
-    <p:sldId id="262" r:id="rId8"/>
-    <p:sldId id="263" r:id="rId9"/>
+    <p:sldId id="264" r:id="rId8"/>
+    <p:sldId id="265" r:id="rId9"/>
+    <p:sldId id="266" r:id="rId10"/>
+    <p:sldId id="267" r:id="rId11"/>
+    <p:sldId id="268" r:id="rId12"/>
+    <p:sldId id="270" r:id="rId13"/>
+    <p:sldId id="272" r:id="rId14"/>
+    <p:sldId id="274" r:id="rId15"/>
+    <p:sldId id="275" r:id="rId16"/>
+    <p:sldId id="276" r:id="rId17"/>
+    <p:sldId id="277" r:id="rId18"/>
+    <p:sldId id="278" r:id="rId19"/>
+    <p:sldId id="279" r:id="rId20"/>
   </p:sldIdLst>
   <p:sldSz cx="12192000" cy="6858000"/>
   <p:notesSz cx="6858000" cy="9144000"/>
@@ -5399,25 +5410,25 @@
           <a:lstStyle/>
           <a:p>
             <a:r>
-              <a:rPr lang="hu-HU" b="1" dirty="0" err="1">
-                <a:solidFill>
-                  <a:schemeClr val="bg2"/>
+              <a:rPr lang="hu-HU" sz="4000" b="1" dirty="0" err="1">
+                <a:solidFill>
+                  <a:srgbClr val="006699"/>
                 </a:solidFill>
               </a:rPr>
               <a:t>Magic</a:t>
             </a:r>
             <a:r>
-              <a:rPr lang="hu-HU" b="1" dirty="0">
-                <a:solidFill>
-                  <a:schemeClr val="bg2"/>
+              <a:rPr lang="hu-HU" sz="4000" b="1" dirty="0">
+                <a:solidFill>
+                  <a:srgbClr val="006699"/>
                 </a:solidFill>
               </a:rPr>
               <a:t> </a:t>
             </a:r>
             <a:r>
-              <a:rPr lang="hu-HU" b="1" dirty="0" err="1">
-                <a:solidFill>
-                  <a:schemeClr val="bg2"/>
+              <a:rPr lang="hu-HU" sz="4000" b="1" dirty="0" err="1">
+                <a:solidFill>
+                  <a:srgbClr val="006699"/>
                 </a:solidFill>
               </a:rPr>
               <a:t>Fridge</a:t>
@@ -5426,9 +5437,9 @@
               <a:rPr lang="hu-HU" dirty="0"/>
             </a:br>
             <a:r>
-              <a:rPr lang="hu-HU" dirty="0">
-                <a:solidFill>
-                  <a:srgbClr val="7030A0"/>
+              <a:rPr lang="hu-HU" sz="4000" b="1" dirty="0">
+                <a:solidFill>
+                  <a:srgbClr val="006699"/>
                 </a:solidFill>
               </a:rPr>
               <a:t>Intelligens hűtő- és kamrakezelő rendszer</a:t>
@@ -5458,49 +5469,17 @@
           <a:lstStyle/>
           <a:p>
             <a:r>
-              <a:rPr lang="hu-HU" b="1" dirty="0">
-                <a:solidFill>
-                  <a:srgbClr val="000000"/>
-                </a:solidFill>
-              </a:rPr>
-              <a:t>Készítette:</a:t>
-            </a:r>
-            <a:br>
-              <a:rPr lang="hu-HU" dirty="0">
-                <a:solidFill>
-                  <a:srgbClr val="000000"/>
-                </a:solidFill>
-              </a:rPr>
-            </a:br>
-            <a:r>
-              <a:rPr lang="hu-HU" i="1" dirty="0" err="1">
-                <a:solidFill>
-                  <a:srgbClr val="000000"/>
-                </a:solidFill>
-              </a:rPr>
-              <a:t>Sutús</a:t>
-            </a:r>
-            <a:r>
-              <a:rPr lang="hu-HU" i="1" dirty="0">
-                <a:solidFill>
-                  <a:srgbClr val="000000"/>
-                </a:solidFill>
-              </a:rPr>
-              <a:t> Róbert</a:t>
-            </a:r>
-            <a:br>
-              <a:rPr lang="hu-HU" i="1" dirty="0">
-                <a:solidFill>
-                  <a:srgbClr val="000000"/>
-                </a:solidFill>
-              </a:rPr>
-            </a:br>
-            <a:r>
-              <a:rPr lang="hu-HU" i="1" dirty="0">
-                <a:solidFill>
-                  <a:srgbClr val="000000"/>
-                </a:solidFill>
-              </a:rPr>
+              <a:rPr sz="2000"/>
+              <a:t>• Készítette:</a:t>
+            </a:r>
+            <a:br/>
+            <a:r>
+              <a:rPr sz="2000"/>
+              <a:t>Sutús Róbert</a:t>
+            </a:r>
+            <a:br/>
+            <a:r>
+              <a:rPr sz="2000"/>
               <a:t>Udvari Dominik</a:t>
             </a:r>
           </a:p>
@@ -5561,6 +5540,2947 @@
 </p:sld>
 </file>
 
+<file path=ppt/slides/slide10.xml><?xml version="1.0" encoding="utf-8"?>
+<p:sld xmlns:a="http://schemas.openxmlformats.org/drawingml/2006/main" xmlns:r="http://schemas.openxmlformats.org/officeDocument/2006/relationships" xmlns:p="http://schemas.openxmlformats.org/presentationml/2006/main">
+  <p:cSld>
+    <p:spTree>
+      <p:nvGrpSpPr>
+        <p:cNvPr id="1" name=""/>
+        <p:cNvGrpSpPr/>
+        <p:nvPr/>
+      </p:nvGrpSpPr>
+      <p:grpSpPr>
+        <a:xfrm>
+          <a:off x="0" y="0"/>
+          <a:ext cx="0" cy="0"/>
+          <a:chOff x="0" y="0"/>
+          <a:chExt cx="0" cy="0"/>
+        </a:xfrm>
+      </p:grpSpPr>
+      <p:sp>
+        <p:nvSpPr>
+          <p:cNvPr id="2" name="Title 1"/>
+          <p:cNvSpPr>
+            <a:spLocks noGrp="1"/>
+          </p:cNvSpPr>
+          <p:nvPr>
+            <p:ph type="title"/>
+          </p:nvPr>
+        </p:nvSpPr>
+        <p:spPr/>
+        <p:txBody>
+          <a:bodyPr/>
+          <a:lstStyle/>
+          <a:p>
+            <a:r>
+              <a:rPr sz="4000" b="1" dirty="0" err="1"/>
+              <a:t>Recept</a:t>
+            </a:r>
+            <a:r>
+              <a:rPr sz="4000" b="1" dirty="0"/>
+              <a:t> </a:t>
+            </a:r>
+            <a:r>
+              <a:rPr sz="4000" b="1" dirty="0" err="1"/>
+              <a:t>ellenőrzés</a:t>
+            </a:r>
+            <a:r>
+              <a:rPr sz="4000" b="1" dirty="0"/>
+              <a:t> </a:t>
+            </a:r>
+            <a:r>
+              <a:rPr sz="4000" b="1" dirty="0" err="1"/>
+              <a:t>logika</a:t>
+            </a:r>
+            <a:endParaRPr sz="4000" b="1" dirty="0"/>
+          </a:p>
+        </p:txBody>
+      </p:sp>
+      <p:sp>
+        <p:nvSpPr>
+          <p:cNvPr id="3" name="Content Placeholder 2"/>
+          <p:cNvSpPr>
+            <a:spLocks noGrp="1"/>
+          </p:cNvSpPr>
+          <p:nvPr>
+            <p:ph idx="1"/>
+          </p:nvPr>
+        </p:nvSpPr>
+        <p:spPr/>
+        <p:txBody>
+          <a:bodyPr/>
+          <a:lstStyle/>
+          <a:p>
+            <a:r>
+              <a:rPr sz="2000" dirty="0"/>
+              <a:t> </a:t>
+            </a:r>
+            <a:r>
+              <a:rPr sz="2000" dirty="0" err="1"/>
+              <a:t>Felhasználó</a:t>
+            </a:r>
+            <a:r>
+              <a:rPr sz="2000" dirty="0"/>
+              <a:t> </a:t>
+            </a:r>
+            <a:r>
+              <a:rPr sz="2000" dirty="0" err="1"/>
+              <a:t>kiválaszt</a:t>
+            </a:r>
+            <a:r>
+              <a:rPr sz="2000" dirty="0"/>
+              <a:t> </a:t>
+            </a:r>
+            <a:r>
+              <a:rPr sz="2000" dirty="0" err="1"/>
+              <a:t>egy</a:t>
+            </a:r>
+            <a:r>
+              <a:rPr sz="2000" dirty="0"/>
+              <a:t> </a:t>
+            </a:r>
+            <a:r>
+              <a:rPr sz="2000" dirty="0" err="1"/>
+              <a:t>receptet</a:t>
+            </a:r>
+            <a:endParaRPr sz="2000" dirty="0"/>
+          </a:p>
+          <a:p>
+            <a:r>
+              <a:rPr sz="2000" dirty="0"/>
+              <a:t> </a:t>
+            </a:r>
+            <a:r>
+              <a:rPr sz="2000" dirty="0" err="1"/>
+              <a:t>Rendszer</a:t>
+            </a:r>
+            <a:r>
+              <a:rPr sz="2000" dirty="0"/>
+              <a:t> </a:t>
+            </a:r>
+            <a:r>
+              <a:rPr sz="2000" dirty="0" err="1"/>
+              <a:t>lekéri</a:t>
+            </a:r>
+            <a:r>
+              <a:rPr sz="2000" dirty="0"/>
+              <a:t> a </a:t>
+            </a:r>
+            <a:r>
+              <a:rPr sz="2000" dirty="0" err="1"/>
+              <a:t>recept</a:t>
+            </a:r>
+            <a:r>
+              <a:rPr sz="2000" dirty="0"/>
+              <a:t> </a:t>
+            </a:r>
+            <a:r>
+              <a:rPr sz="2000" dirty="0" err="1"/>
+              <a:t>hozzávalóit</a:t>
+            </a:r>
+            <a:r>
+              <a:rPr sz="2000" dirty="0"/>
+              <a:t> API-</a:t>
+            </a:r>
+            <a:r>
+              <a:rPr sz="2000" dirty="0" err="1"/>
+              <a:t>ból</a:t>
+            </a:r>
+            <a:endParaRPr sz="2000" dirty="0"/>
+          </a:p>
+          <a:p>
+            <a:r>
+              <a:rPr sz="2000" dirty="0"/>
+              <a:t> </a:t>
+            </a:r>
+            <a:r>
+              <a:rPr sz="2000" dirty="0" err="1"/>
+              <a:t>Összeveti</a:t>
+            </a:r>
+            <a:r>
+              <a:rPr sz="2000" dirty="0"/>
+              <a:t> a </a:t>
+            </a:r>
+            <a:r>
+              <a:rPr sz="2000" dirty="0" err="1"/>
+              <a:t>raktárban</a:t>
+            </a:r>
+            <a:r>
+              <a:rPr sz="2000" dirty="0"/>
+              <a:t> </a:t>
+            </a:r>
+            <a:r>
+              <a:rPr sz="2000" dirty="0" err="1"/>
+              <a:t>lévő</a:t>
+            </a:r>
+            <a:r>
+              <a:rPr sz="2000" dirty="0"/>
+              <a:t> </a:t>
+            </a:r>
+            <a:r>
+              <a:rPr sz="2000" dirty="0" err="1"/>
+              <a:t>termékekkel</a:t>
+            </a:r>
+            <a:endParaRPr sz="2000" dirty="0"/>
+          </a:p>
+          <a:p>
+            <a:r>
+              <a:rPr sz="2000" dirty="0"/>
+              <a:t> </a:t>
+            </a:r>
+            <a:r>
+              <a:rPr sz="2000" dirty="0" err="1"/>
+              <a:t>Hiányzó</a:t>
+            </a:r>
+            <a:r>
+              <a:rPr sz="2000" dirty="0"/>
+              <a:t> </a:t>
+            </a:r>
+            <a:r>
+              <a:rPr sz="2000" dirty="0" err="1"/>
+              <a:t>elemek</a:t>
+            </a:r>
+            <a:r>
+              <a:rPr sz="2000" dirty="0"/>
+              <a:t> </a:t>
+            </a:r>
+            <a:r>
+              <a:rPr sz="2000" dirty="0" err="1"/>
+              <a:t>hozzáadása</a:t>
+            </a:r>
+            <a:r>
+              <a:rPr sz="2000" dirty="0"/>
+              <a:t> </a:t>
+            </a:r>
+            <a:r>
+              <a:rPr sz="2000" dirty="0" err="1"/>
+              <a:t>bevásárlólistához</a:t>
+            </a:r>
+            <a:endParaRPr sz="2000" dirty="0"/>
+          </a:p>
+        </p:txBody>
+      </p:sp>
+    </p:spTree>
+  </p:cSld>
+  <p:clrMapOvr>
+    <a:masterClrMapping/>
+  </p:clrMapOvr>
+  <p:transition spd="slow">
+    <p:push dir="u"/>
+  </p:transition>
+</p:sld>
+</file>
+
+<file path=ppt/slides/slide11.xml><?xml version="1.0" encoding="utf-8"?>
+<p:sld xmlns:a="http://schemas.openxmlformats.org/drawingml/2006/main" xmlns:r="http://schemas.openxmlformats.org/officeDocument/2006/relationships" xmlns:p="http://schemas.openxmlformats.org/presentationml/2006/main">
+  <p:cSld>
+    <p:spTree>
+      <p:nvGrpSpPr>
+        <p:cNvPr id="1" name=""/>
+        <p:cNvGrpSpPr/>
+        <p:nvPr/>
+      </p:nvGrpSpPr>
+      <p:grpSpPr>
+        <a:xfrm>
+          <a:off x="0" y="0"/>
+          <a:ext cx="0" cy="0"/>
+          <a:chOff x="0" y="0"/>
+          <a:chExt cx="0" cy="0"/>
+        </a:xfrm>
+      </p:grpSpPr>
+      <p:sp>
+        <p:nvSpPr>
+          <p:cNvPr id="2" name="Title 1"/>
+          <p:cNvSpPr>
+            <a:spLocks noGrp="1"/>
+          </p:cNvSpPr>
+          <p:nvPr>
+            <p:ph type="title"/>
+          </p:nvPr>
+        </p:nvSpPr>
+        <p:spPr/>
+        <p:txBody>
+          <a:bodyPr/>
+          <a:lstStyle/>
+          <a:p>
+            <a:r>
+              <a:rPr sz="4000" b="1" dirty="0" err="1"/>
+              <a:t>Külső</a:t>
+            </a:r>
+            <a:r>
+              <a:rPr sz="4000" b="1" dirty="0"/>
+              <a:t> API </a:t>
+            </a:r>
+            <a:r>
+              <a:rPr sz="4000" b="1" dirty="0" err="1"/>
+              <a:t>használat</a:t>
+            </a:r>
+            <a:endParaRPr sz="4000" b="1" dirty="0"/>
+          </a:p>
+        </p:txBody>
+      </p:sp>
+      <p:sp>
+        <p:nvSpPr>
+          <p:cNvPr id="3" name="Content Placeholder 2"/>
+          <p:cNvSpPr>
+            <a:spLocks noGrp="1"/>
+          </p:cNvSpPr>
+          <p:nvPr>
+            <p:ph idx="1"/>
+          </p:nvPr>
+        </p:nvSpPr>
+        <p:spPr/>
+        <p:txBody>
+          <a:bodyPr/>
+          <a:lstStyle/>
+          <a:p>
+            <a:r>
+              <a:rPr sz="2000" dirty="0"/>
+              <a:t> </a:t>
+            </a:r>
+            <a:r>
+              <a:rPr sz="2000" dirty="0" err="1"/>
+              <a:t>Receptek</a:t>
+            </a:r>
+            <a:r>
+              <a:rPr sz="2000" dirty="0"/>
+              <a:t> </a:t>
+            </a:r>
+            <a:r>
+              <a:rPr sz="2000" dirty="0" err="1"/>
+              <a:t>lekérése</a:t>
+            </a:r>
+            <a:r>
+              <a:rPr sz="2000" dirty="0"/>
+              <a:t> online </a:t>
+            </a:r>
+            <a:r>
+              <a:rPr sz="2000" dirty="0" err="1"/>
+              <a:t>adatbázisból</a:t>
+            </a:r>
+            <a:endParaRPr sz="2000" dirty="0"/>
+          </a:p>
+          <a:p>
+            <a:r>
+              <a:rPr sz="2000" dirty="0"/>
+              <a:t> </a:t>
+            </a:r>
+            <a:r>
+              <a:rPr sz="2000" dirty="0" err="1"/>
+              <a:t>Keresés</a:t>
+            </a:r>
+            <a:r>
+              <a:rPr sz="2000" dirty="0"/>
+              <a:t> </a:t>
+            </a:r>
+            <a:r>
+              <a:rPr sz="2000" dirty="0" err="1"/>
+              <a:t>alapanyag</a:t>
+            </a:r>
+            <a:r>
+              <a:rPr sz="2000" dirty="0"/>
+              <a:t> </a:t>
+            </a:r>
+            <a:r>
+              <a:rPr sz="2000" dirty="0" err="1"/>
+              <a:t>alapján</a:t>
+            </a:r>
+            <a:endParaRPr sz="2000" dirty="0"/>
+          </a:p>
+          <a:p>
+            <a:r>
+              <a:rPr sz="2000" dirty="0"/>
+              <a:t> </a:t>
+            </a:r>
+            <a:r>
+              <a:rPr sz="2000" dirty="0" err="1"/>
+              <a:t>Receptek</a:t>
+            </a:r>
+            <a:r>
+              <a:rPr sz="2000" dirty="0"/>
+              <a:t> </a:t>
+            </a:r>
+            <a:r>
+              <a:rPr sz="2000" dirty="0" err="1"/>
+              <a:t>szűrése</a:t>
+            </a:r>
+            <a:r>
+              <a:rPr sz="2000" dirty="0"/>
+              <a:t> </a:t>
+            </a:r>
+            <a:r>
+              <a:rPr sz="2000" dirty="0" err="1"/>
+              <a:t>diéta</a:t>
+            </a:r>
+            <a:r>
+              <a:rPr sz="2000" dirty="0"/>
+              <a:t> </a:t>
+            </a:r>
+            <a:r>
+              <a:rPr sz="2000" dirty="0" err="1"/>
+              <a:t>vagy</a:t>
+            </a:r>
+            <a:r>
+              <a:rPr sz="2000" dirty="0"/>
+              <a:t> </a:t>
+            </a:r>
+            <a:r>
+              <a:rPr sz="2000" dirty="0" err="1"/>
+              <a:t>kategória</a:t>
+            </a:r>
+            <a:r>
+              <a:rPr sz="2000" dirty="0"/>
+              <a:t> </a:t>
+            </a:r>
+            <a:r>
+              <a:rPr sz="2000" dirty="0" err="1"/>
+              <a:t>szerint</a:t>
+            </a:r>
+            <a:endParaRPr sz="2000" dirty="0"/>
+          </a:p>
+          <a:p>
+            <a:r>
+              <a:rPr sz="2000" dirty="0"/>
+              <a:t> API </a:t>
+            </a:r>
+            <a:r>
+              <a:rPr sz="2000" dirty="0" err="1"/>
+              <a:t>válasz</a:t>
+            </a:r>
+            <a:r>
+              <a:rPr sz="2000" dirty="0"/>
+              <a:t> </a:t>
+            </a:r>
+            <a:r>
+              <a:rPr sz="2000" dirty="0" err="1"/>
+              <a:t>feldolgozása</a:t>
+            </a:r>
+            <a:r>
+              <a:rPr sz="2000" dirty="0"/>
+              <a:t> backend </a:t>
+            </a:r>
+            <a:r>
+              <a:rPr sz="2000" dirty="0" err="1"/>
+              <a:t>oldalon</a:t>
+            </a:r>
+            <a:endParaRPr sz="2000" dirty="0"/>
+          </a:p>
+        </p:txBody>
+      </p:sp>
+    </p:spTree>
+  </p:cSld>
+  <p:clrMapOvr>
+    <a:masterClrMapping/>
+  </p:clrMapOvr>
+  <p:transition spd="slow">
+    <p:push dir="u"/>
+  </p:transition>
+</p:sld>
+</file>
+
+<file path=ppt/slides/slide12.xml><?xml version="1.0" encoding="utf-8"?>
+<p:sld xmlns:a="http://schemas.openxmlformats.org/drawingml/2006/main" xmlns:r="http://schemas.openxmlformats.org/officeDocument/2006/relationships" xmlns:p="http://schemas.openxmlformats.org/presentationml/2006/main">
+  <p:cSld>
+    <p:spTree>
+      <p:nvGrpSpPr>
+        <p:cNvPr id="1" name=""/>
+        <p:cNvGrpSpPr/>
+        <p:nvPr/>
+      </p:nvGrpSpPr>
+      <p:grpSpPr>
+        <a:xfrm>
+          <a:off x="0" y="0"/>
+          <a:ext cx="0" cy="0"/>
+          <a:chOff x="0" y="0"/>
+          <a:chExt cx="0" cy="0"/>
+        </a:xfrm>
+      </p:grpSpPr>
+      <p:sp>
+        <p:nvSpPr>
+          <p:cNvPr id="2" name="Title 1"/>
+          <p:cNvSpPr>
+            <a:spLocks noGrp="1"/>
+          </p:cNvSpPr>
+          <p:nvPr>
+            <p:ph type="title"/>
+          </p:nvPr>
+        </p:nvSpPr>
+        <p:spPr/>
+        <p:txBody>
+          <a:bodyPr/>
+          <a:lstStyle/>
+          <a:p>
+            <a:r>
+              <a:rPr sz="4000" b="1" dirty="0" err="1"/>
+              <a:t>Értesítési</a:t>
+            </a:r>
+            <a:r>
+              <a:rPr sz="4000" b="1" dirty="0"/>
+              <a:t> </a:t>
+            </a:r>
+            <a:r>
+              <a:rPr sz="4000" b="1" dirty="0" err="1"/>
+              <a:t>rendszer</a:t>
+            </a:r>
+            <a:endParaRPr sz="4000" b="1" dirty="0"/>
+          </a:p>
+        </p:txBody>
+      </p:sp>
+      <p:sp>
+        <p:nvSpPr>
+          <p:cNvPr id="3" name="Content Placeholder 2"/>
+          <p:cNvSpPr>
+            <a:spLocks noGrp="1"/>
+          </p:cNvSpPr>
+          <p:nvPr>
+            <p:ph idx="1"/>
+          </p:nvPr>
+        </p:nvSpPr>
+        <p:spPr/>
+        <p:txBody>
+          <a:bodyPr/>
+          <a:lstStyle/>
+          <a:p>
+            <a:r>
+              <a:rPr sz="2000" dirty="0"/>
+              <a:t> </a:t>
+            </a:r>
+            <a:r>
+              <a:rPr sz="2000" dirty="0" err="1"/>
+              <a:t>Lejáró</a:t>
+            </a:r>
+            <a:r>
+              <a:rPr sz="2000" dirty="0"/>
+              <a:t> </a:t>
+            </a:r>
+            <a:r>
+              <a:rPr sz="2000" dirty="0" err="1"/>
+              <a:t>termékek</a:t>
+            </a:r>
+            <a:r>
+              <a:rPr sz="2000" dirty="0"/>
+              <a:t> </a:t>
+            </a:r>
+            <a:r>
+              <a:rPr sz="2000" dirty="0" err="1"/>
+              <a:t>figyelése</a:t>
+            </a:r>
+            <a:endParaRPr sz="2000" dirty="0"/>
+          </a:p>
+          <a:p>
+            <a:r>
+              <a:rPr sz="2000" dirty="0"/>
+              <a:t> Push </a:t>
+            </a:r>
+            <a:r>
+              <a:rPr sz="2000" dirty="0" err="1"/>
+              <a:t>értesítések</a:t>
+            </a:r>
+            <a:r>
+              <a:rPr sz="2000" dirty="0"/>
+              <a:t> </a:t>
+            </a:r>
+          </a:p>
+        </p:txBody>
+      </p:sp>
+    </p:spTree>
+  </p:cSld>
+  <p:clrMapOvr>
+    <a:masterClrMapping/>
+  </p:clrMapOvr>
+  <p:transition spd="slow">
+    <p:push dir="u"/>
+  </p:transition>
+</p:sld>
+</file>
+
+<file path=ppt/slides/slide13.xml><?xml version="1.0" encoding="utf-8"?>
+<p:sld xmlns:a="http://schemas.openxmlformats.org/drawingml/2006/main" xmlns:r="http://schemas.openxmlformats.org/officeDocument/2006/relationships" xmlns:p="http://schemas.openxmlformats.org/presentationml/2006/main">
+  <p:cSld>
+    <p:spTree>
+      <p:nvGrpSpPr>
+        <p:cNvPr id="1" name=""/>
+        <p:cNvGrpSpPr/>
+        <p:nvPr/>
+      </p:nvGrpSpPr>
+      <p:grpSpPr>
+        <a:xfrm>
+          <a:off x="0" y="0"/>
+          <a:ext cx="0" cy="0"/>
+          <a:chOff x="0" y="0"/>
+          <a:chExt cx="0" cy="0"/>
+        </a:xfrm>
+      </p:grpSpPr>
+      <p:sp>
+        <p:nvSpPr>
+          <p:cNvPr id="2" name="Title 1"/>
+          <p:cNvSpPr>
+            <a:spLocks noGrp="1"/>
+          </p:cNvSpPr>
+          <p:nvPr>
+            <p:ph type="title"/>
+          </p:nvPr>
+        </p:nvSpPr>
+        <p:spPr/>
+        <p:txBody>
+          <a:bodyPr/>
+          <a:lstStyle/>
+          <a:p>
+            <a:r>
+              <a:rPr sz="4000" b="1" dirty="0" err="1"/>
+              <a:t>Biztonság</a:t>
+            </a:r>
+            <a:endParaRPr sz="4000" b="1" dirty="0"/>
+          </a:p>
+        </p:txBody>
+      </p:sp>
+      <p:sp>
+        <p:nvSpPr>
+          <p:cNvPr id="3" name="Content Placeholder 2"/>
+          <p:cNvSpPr>
+            <a:spLocks noGrp="1"/>
+          </p:cNvSpPr>
+          <p:nvPr>
+            <p:ph idx="1"/>
+          </p:nvPr>
+        </p:nvSpPr>
+        <p:spPr/>
+        <p:txBody>
+          <a:bodyPr/>
+          <a:lstStyle/>
+          <a:p>
+            <a:r>
+              <a:rPr sz="2000" dirty="0"/>
+              <a:t> </a:t>
+            </a:r>
+            <a:r>
+              <a:rPr sz="2000" dirty="0" err="1"/>
+              <a:t>Felhasználó</a:t>
+            </a:r>
+            <a:r>
+              <a:rPr sz="2000" dirty="0"/>
+              <a:t> </a:t>
+            </a:r>
+            <a:r>
+              <a:rPr sz="2000" dirty="0" err="1"/>
+              <a:t>hitelesítés</a:t>
+            </a:r>
+            <a:r>
+              <a:rPr sz="2000" dirty="0"/>
+              <a:t> (Auth)</a:t>
+            </a:r>
+          </a:p>
+          <a:p>
+            <a:r>
+              <a:rPr sz="2000" dirty="0"/>
+              <a:t> Token </a:t>
+            </a:r>
+            <a:r>
+              <a:rPr sz="2000" dirty="0" err="1"/>
+              <a:t>alapú</a:t>
+            </a:r>
+            <a:r>
+              <a:rPr sz="2000" dirty="0"/>
+              <a:t> </a:t>
+            </a:r>
+            <a:r>
+              <a:rPr sz="2000" dirty="0" err="1"/>
+              <a:t>hozzáférés</a:t>
+            </a:r>
+            <a:endParaRPr sz="2000" dirty="0"/>
+          </a:p>
+          <a:p>
+            <a:r>
+              <a:rPr sz="2000" dirty="0"/>
+              <a:t> </a:t>
+            </a:r>
+            <a:r>
+              <a:rPr sz="2000" dirty="0" err="1"/>
+              <a:t>Adatvédelem</a:t>
+            </a:r>
+            <a:r>
+              <a:rPr sz="2000" dirty="0"/>
+              <a:t> </a:t>
+            </a:r>
+            <a:r>
+              <a:rPr sz="2000" dirty="0" err="1"/>
+              <a:t>és</a:t>
+            </a:r>
+            <a:r>
+              <a:rPr sz="2000" dirty="0"/>
+              <a:t> </a:t>
+            </a:r>
+            <a:r>
+              <a:rPr sz="2000" dirty="0" err="1"/>
+              <a:t>jogosultság</a:t>
+            </a:r>
+            <a:r>
+              <a:rPr sz="2000" dirty="0"/>
+              <a:t> </a:t>
+            </a:r>
+            <a:r>
+              <a:rPr sz="2000" dirty="0" err="1"/>
+              <a:t>kezelés</a:t>
+            </a:r>
+            <a:endParaRPr sz="2000" dirty="0"/>
+          </a:p>
+          <a:p>
+            <a:r>
+              <a:rPr sz="2000" dirty="0"/>
+              <a:t> </a:t>
+            </a:r>
+            <a:r>
+              <a:rPr sz="2000" dirty="0" err="1"/>
+              <a:t>Biztonságos</a:t>
+            </a:r>
+            <a:r>
+              <a:rPr sz="2000" dirty="0"/>
+              <a:t> API </a:t>
+            </a:r>
+            <a:r>
+              <a:rPr sz="2000" dirty="0" err="1"/>
+              <a:t>kommunikáció</a:t>
+            </a:r>
+            <a:endParaRPr sz="2000" dirty="0"/>
+          </a:p>
+        </p:txBody>
+      </p:sp>
+    </p:spTree>
+  </p:cSld>
+  <p:clrMapOvr>
+    <a:masterClrMapping/>
+  </p:clrMapOvr>
+  <p:transition spd="slow">
+    <p:push dir="u"/>
+  </p:transition>
+</p:sld>
+</file>
+
+<file path=ppt/slides/slide14.xml><?xml version="1.0" encoding="utf-8"?>
+<p:sld xmlns:a="http://schemas.openxmlformats.org/drawingml/2006/main" xmlns:r="http://schemas.openxmlformats.org/officeDocument/2006/relationships" xmlns:p="http://schemas.openxmlformats.org/presentationml/2006/main">
+  <p:cSld>
+    <p:spTree>
+      <p:nvGrpSpPr>
+        <p:cNvPr id="1" name=""/>
+        <p:cNvGrpSpPr/>
+        <p:nvPr/>
+      </p:nvGrpSpPr>
+      <p:grpSpPr>
+        <a:xfrm>
+          <a:off x="0" y="0"/>
+          <a:ext cx="0" cy="0"/>
+          <a:chOff x="0" y="0"/>
+          <a:chExt cx="0" cy="0"/>
+        </a:xfrm>
+      </p:grpSpPr>
+      <p:sp>
+        <p:nvSpPr>
+          <p:cNvPr id="2" name="Title 1"/>
+          <p:cNvSpPr>
+            <a:spLocks noGrp="1"/>
+          </p:cNvSpPr>
+          <p:nvPr>
+            <p:ph type="title"/>
+          </p:nvPr>
+        </p:nvSpPr>
+        <p:spPr/>
+        <p:txBody>
+          <a:bodyPr/>
+          <a:lstStyle/>
+          <a:p>
+            <a:r>
+              <a:rPr sz="4000" b="1" dirty="0" err="1"/>
+              <a:t>Jövőbeli</a:t>
+            </a:r>
+            <a:r>
+              <a:rPr sz="4000" b="1" dirty="0"/>
+              <a:t> </a:t>
+            </a:r>
+            <a:r>
+              <a:rPr sz="4000" b="1" dirty="0" err="1"/>
+              <a:t>fejlesztések</a:t>
+            </a:r>
+            <a:endParaRPr sz="4000" b="1" dirty="0"/>
+          </a:p>
+        </p:txBody>
+      </p:sp>
+      <p:sp>
+        <p:nvSpPr>
+          <p:cNvPr id="3" name="Content Placeholder 2"/>
+          <p:cNvSpPr>
+            <a:spLocks noGrp="1"/>
+          </p:cNvSpPr>
+          <p:nvPr>
+            <p:ph idx="1"/>
+          </p:nvPr>
+        </p:nvSpPr>
+        <p:spPr/>
+        <p:txBody>
+          <a:bodyPr/>
+          <a:lstStyle/>
+          <a:p>
+            <a:r>
+              <a:rPr sz="2000" dirty="0"/>
+              <a:t> </a:t>
+            </a:r>
+            <a:r>
+              <a:rPr sz="2000" dirty="0" err="1"/>
+              <a:t>Vonalkód</a:t>
+            </a:r>
+            <a:r>
+              <a:rPr sz="2000" dirty="0"/>
+              <a:t> </a:t>
+            </a:r>
+            <a:r>
+              <a:rPr sz="2000" dirty="0" err="1"/>
+              <a:t>beolvasás</a:t>
+            </a:r>
+            <a:r>
+              <a:rPr sz="2000" dirty="0"/>
+              <a:t> </a:t>
+            </a:r>
+            <a:r>
+              <a:rPr sz="2000" dirty="0" err="1"/>
+              <a:t>termékekhez</a:t>
+            </a:r>
+            <a:endParaRPr sz="2000" dirty="0"/>
+          </a:p>
+          <a:p>
+            <a:r>
+              <a:rPr sz="2000" dirty="0"/>
+              <a:t> AI </a:t>
+            </a:r>
+            <a:r>
+              <a:rPr sz="2000" dirty="0" err="1"/>
+              <a:t>alapú</a:t>
+            </a:r>
+            <a:r>
+              <a:rPr sz="2000" dirty="0"/>
+              <a:t> </a:t>
+            </a:r>
+            <a:r>
+              <a:rPr sz="2000" dirty="0" err="1"/>
+              <a:t>recept</a:t>
+            </a:r>
+            <a:r>
+              <a:rPr sz="2000" dirty="0"/>
+              <a:t> </a:t>
+            </a:r>
+            <a:r>
+              <a:rPr sz="2000" dirty="0" err="1"/>
+              <a:t>ajánló</a:t>
+            </a:r>
+            <a:endParaRPr sz="2000" dirty="0"/>
+          </a:p>
+          <a:p>
+            <a:r>
+              <a:rPr sz="2000" dirty="0"/>
+              <a:t> </a:t>
+            </a:r>
+            <a:r>
+              <a:rPr sz="2000" dirty="0" err="1"/>
+              <a:t>Automatikus</a:t>
+            </a:r>
+            <a:r>
+              <a:rPr sz="2000" dirty="0"/>
+              <a:t> </a:t>
+            </a:r>
+            <a:r>
+              <a:rPr sz="2000" dirty="0" err="1"/>
+              <a:t>felismerés</a:t>
+            </a:r>
+            <a:r>
+              <a:rPr sz="2000" dirty="0"/>
+              <a:t> </a:t>
+            </a:r>
+            <a:r>
+              <a:rPr sz="2000" dirty="0" err="1"/>
+              <a:t>okos</a:t>
+            </a:r>
+            <a:r>
+              <a:rPr sz="2000" dirty="0"/>
+              <a:t> </a:t>
+            </a:r>
+            <a:r>
+              <a:rPr sz="2000" dirty="0" err="1"/>
+              <a:t>hűtővel</a:t>
+            </a:r>
+            <a:endParaRPr sz="2000" dirty="0"/>
+          </a:p>
+          <a:p>
+            <a:r>
+              <a:rPr sz="2000" dirty="0"/>
+              <a:t> Mobil </a:t>
+            </a:r>
+            <a:r>
+              <a:rPr sz="2000" dirty="0" err="1"/>
+              <a:t>alkalmazás</a:t>
+            </a:r>
+            <a:r>
+              <a:rPr sz="2000" dirty="0"/>
+              <a:t> </a:t>
+            </a:r>
+            <a:r>
+              <a:rPr sz="2000" dirty="0" err="1"/>
+              <a:t>fejlesztése</a:t>
+            </a:r>
+            <a:endParaRPr sz="2000" dirty="0"/>
+          </a:p>
+        </p:txBody>
+      </p:sp>
+    </p:spTree>
+  </p:cSld>
+  <p:clrMapOvr>
+    <a:masterClrMapping/>
+  </p:clrMapOvr>
+  <p:transition spd="slow">
+    <p:push dir="u"/>
+  </p:transition>
+</p:sld>
+</file>
+
+<file path=ppt/slides/slide15.xml><?xml version="1.0" encoding="utf-8"?>
+<p:sld xmlns:a="http://schemas.openxmlformats.org/drawingml/2006/main" xmlns:r="http://schemas.openxmlformats.org/officeDocument/2006/relationships" xmlns:p="http://schemas.openxmlformats.org/presentationml/2006/main">
+  <p:cSld>
+    <p:spTree>
+      <p:nvGrpSpPr>
+        <p:cNvPr id="1" name=""/>
+        <p:cNvGrpSpPr/>
+        <p:nvPr/>
+      </p:nvGrpSpPr>
+      <p:grpSpPr>
+        <a:xfrm>
+          <a:off x="0" y="0"/>
+          <a:ext cx="0" cy="0"/>
+          <a:chOff x="0" y="0"/>
+          <a:chExt cx="0" cy="0"/>
+        </a:xfrm>
+      </p:grpSpPr>
+      <p:sp>
+        <p:nvSpPr>
+          <p:cNvPr id="2" name="Title 1"/>
+          <p:cNvSpPr>
+            <a:spLocks noGrp="1"/>
+          </p:cNvSpPr>
+          <p:nvPr>
+            <p:ph type="title"/>
+          </p:nvPr>
+        </p:nvSpPr>
+        <p:spPr/>
+        <p:txBody>
+          <a:bodyPr/>
+          <a:lstStyle/>
+          <a:p>
+            <a:r>
+              <a:rPr sz="4000" b="1" dirty="0" err="1"/>
+              <a:t>Rövid</a:t>
+            </a:r>
+            <a:r>
+              <a:rPr sz="4000" b="1" dirty="0"/>
+              <a:t> demo </a:t>
+            </a:r>
+            <a:r>
+              <a:rPr sz="4000" b="1" dirty="0" err="1"/>
+              <a:t>forgatókönyv</a:t>
+            </a:r>
+            <a:endParaRPr sz="4000" b="1" dirty="0"/>
+          </a:p>
+        </p:txBody>
+      </p:sp>
+      <p:sp>
+        <p:nvSpPr>
+          <p:cNvPr id="3" name="Content Placeholder 2"/>
+          <p:cNvSpPr>
+            <a:spLocks noGrp="1"/>
+          </p:cNvSpPr>
+          <p:nvPr>
+            <p:ph idx="1"/>
+          </p:nvPr>
+        </p:nvSpPr>
+        <p:spPr/>
+        <p:txBody>
+          <a:bodyPr/>
+          <a:lstStyle/>
+          <a:p>
+            <a:r>
+              <a:rPr sz="2000" dirty="0"/>
+              <a:t> </a:t>
+            </a:r>
+            <a:r>
+              <a:rPr sz="2000" dirty="0" err="1"/>
+              <a:t>Felhasználó</a:t>
+            </a:r>
+            <a:r>
+              <a:rPr sz="2000" dirty="0"/>
+              <a:t> </a:t>
+            </a:r>
+            <a:r>
+              <a:rPr sz="2000" dirty="0" err="1"/>
+              <a:t>belép</a:t>
+            </a:r>
+            <a:endParaRPr sz="2000" dirty="0"/>
+          </a:p>
+          <a:p>
+            <a:r>
+              <a:rPr sz="2000" dirty="0"/>
+              <a:t> </a:t>
+            </a:r>
+            <a:r>
+              <a:rPr sz="2000" dirty="0" err="1"/>
+              <a:t>Hozzáad</a:t>
+            </a:r>
+            <a:r>
+              <a:rPr sz="2000" dirty="0"/>
+              <a:t> </a:t>
+            </a:r>
+            <a:r>
+              <a:rPr sz="2000" dirty="0" err="1"/>
+              <a:t>néhány</a:t>
+            </a:r>
+            <a:r>
+              <a:rPr sz="2000" dirty="0"/>
+              <a:t> </a:t>
+            </a:r>
+            <a:r>
+              <a:rPr sz="2000" dirty="0" err="1"/>
+              <a:t>terméket</a:t>
+            </a:r>
+            <a:r>
+              <a:rPr sz="2000" dirty="0"/>
+              <a:t> a </a:t>
+            </a:r>
+            <a:r>
+              <a:rPr sz="2000" dirty="0" err="1"/>
+              <a:t>raktárhoz</a:t>
+            </a:r>
+            <a:endParaRPr sz="2000" dirty="0"/>
+          </a:p>
+          <a:p>
+            <a:r>
+              <a:rPr sz="2000" dirty="0"/>
+              <a:t> </a:t>
+            </a:r>
+            <a:r>
+              <a:rPr sz="2000" dirty="0" err="1"/>
+              <a:t>Kiválaszt</a:t>
+            </a:r>
+            <a:r>
+              <a:rPr sz="2000" dirty="0"/>
+              <a:t> </a:t>
+            </a:r>
+            <a:r>
+              <a:rPr sz="2000" dirty="0" err="1"/>
+              <a:t>egy</a:t>
+            </a:r>
+            <a:r>
+              <a:rPr sz="2000" dirty="0"/>
+              <a:t> </a:t>
+            </a:r>
+            <a:r>
+              <a:rPr sz="2000" dirty="0" err="1"/>
+              <a:t>receptet</a:t>
+            </a:r>
+            <a:endParaRPr sz="2000" dirty="0"/>
+          </a:p>
+          <a:p>
+            <a:r>
+              <a:rPr sz="2000" dirty="0"/>
+              <a:t> </a:t>
+            </a:r>
+            <a:r>
+              <a:rPr sz="2000" dirty="0" err="1"/>
+              <a:t>Rendszer</a:t>
+            </a:r>
+            <a:r>
+              <a:rPr sz="2000" dirty="0"/>
+              <a:t> </a:t>
+            </a:r>
+            <a:r>
+              <a:rPr sz="2000" dirty="0" err="1"/>
+              <a:t>megmutatja</a:t>
+            </a:r>
+            <a:r>
+              <a:rPr sz="2000" dirty="0"/>
+              <a:t> mi </a:t>
+            </a:r>
+            <a:r>
+              <a:rPr sz="2000" dirty="0" err="1"/>
+              <a:t>hiányzik</a:t>
+            </a:r>
+            <a:endParaRPr sz="2000" dirty="0"/>
+          </a:p>
+        </p:txBody>
+      </p:sp>
+    </p:spTree>
+  </p:cSld>
+  <p:clrMapOvr>
+    <a:masterClrMapping/>
+  </p:clrMapOvr>
+  <p:transition spd="slow">
+    <p:push dir="u"/>
+  </p:transition>
+</p:sld>
+</file>
+
+<file path=ppt/slides/slide16.xml><?xml version="1.0" encoding="utf-8"?>
+<p:sld xmlns:a="http://schemas.openxmlformats.org/drawingml/2006/main" xmlns:r="http://schemas.openxmlformats.org/officeDocument/2006/relationships" xmlns:p="http://schemas.openxmlformats.org/presentationml/2006/main">
+  <p:cSld>
+    <p:spTree>
+      <p:nvGrpSpPr>
+        <p:cNvPr id="1" name=""/>
+        <p:cNvGrpSpPr/>
+        <p:nvPr/>
+      </p:nvGrpSpPr>
+      <p:grpSpPr>
+        <a:xfrm>
+          <a:off x="0" y="0"/>
+          <a:ext cx="0" cy="0"/>
+          <a:chOff x="0" y="0"/>
+          <a:chExt cx="0" cy="0"/>
+        </a:xfrm>
+      </p:grpSpPr>
+      <p:sp>
+        <p:nvSpPr>
+          <p:cNvPr id="2" name="Title 1"/>
+          <p:cNvSpPr>
+            <a:spLocks noGrp="1"/>
+          </p:cNvSpPr>
+          <p:nvPr>
+            <p:ph type="title"/>
+          </p:nvPr>
+        </p:nvSpPr>
+        <p:spPr/>
+        <p:txBody>
+          <a:bodyPr/>
+          <a:lstStyle/>
+          <a:p>
+            <a:r>
+              <a:rPr b="1" dirty="0" err="1"/>
+              <a:t>Rendszer</a:t>
+            </a:r>
+            <a:r>
+              <a:rPr b="1" dirty="0"/>
+              <a:t> </a:t>
+            </a:r>
+            <a:r>
+              <a:rPr b="1" dirty="0" err="1"/>
+              <a:t>architektúra</a:t>
+            </a:r>
+            <a:endParaRPr b="1" dirty="0"/>
+          </a:p>
+        </p:txBody>
+      </p:sp>
+      <p:sp>
+        <p:nvSpPr>
+          <p:cNvPr id="3" name="Rectangle 2"/>
+          <p:cNvSpPr/>
+          <p:nvPr/>
+        </p:nvSpPr>
+        <p:spPr>
+          <a:xfrm>
+            <a:off x="457200" y="1828800"/>
+            <a:ext cx="2011680" cy="1005840"/>
+          </a:xfrm>
+          <a:prstGeom prst="rect">
+            <a:avLst/>
+          </a:prstGeom>
+        </p:spPr>
+        <p:style>
+          <a:lnRef idx="1">
+            <a:schemeClr val="accent1"/>
+          </a:lnRef>
+          <a:fillRef idx="3">
+            <a:schemeClr val="accent1"/>
+          </a:fillRef>
+          <a:effectRef idx="2">
+            <a:schemeClr val="accent1"/>
+          </a:effectRef>
+          <a:fontRef idx="minor">
+            <a:schemeClr val="lt1"/>
+          </a:fontRef>
+        </p:style>
+        <p:txBody>
+          <a:bodyPr rtlCol="0" anchor="ctr"/>
+          <a:lstStyle/>
+          <a:p>
+            <a:r>
+              <a:rPr sz="1600" dirty="0">
+                <a:solidFill>
+                  <a:schemeClr val="tx2"/>
+                </a:solidFill>
+              </a:rPr>
+              <a:t>Frontend</a:t>
+            </a:r>
+          </a:p>
+        </p:txBody>
+      </p:sp>
+      <p:sp>
+        <p:nvSpPr>
+          <p:cNvPr id="4" name="Rectangle 3"/>
+          <p:cNvSpPr/>
+          <p:nvPr/>
+        </p:nvSpPr>
+        <p:spPr>
+          <a:xfrm>
+            <a:off x="3657600" y="1828800"/>
+            <a:ext cx="2011680" cy="1005840"/>
+          </a:xfrm>
+          <a:prstGeom prst="rect">
+            <a:avLst/>
+          </a:prstGeom>
+        </p:spPr>
+        <p:style>
+          <a:lnRef idx="1">
+            <a:schemeClr val="accent1"/>
+          </a:lnRef>
+          <a:fillRef idx="3">
+            <a:schemeClr val="accent1"/>
+          </a:fillRef>
+          <a:effectRef idx="2">
+            <a:schemeClr val="accent1"/>
+          </a:effectRef>
+          <a:fontRef idx="minor">
+            <a:schemeClr val="lt1"/>
+          </a:fontRef>
+        </p:style>
+        <p:txBody>
+          <a:bodyPr rtlCol="0" anchor="ctr"/>
+          <a:lstStyle/>
+          <a:p>
+            <a:r>
+              <a:rPr sz="1600" dirty="0">
+                <a:solidFill>
+                  <a:schemeClr val="tx2"/>
+                </a:solidFill>
+              </a:rPr>
+              <a:t>Backend</a:t>
+            </a:r>
+            <a:endParaRPr lang="hu-HU" sz="1600" dirty="0">
+              <a:solidFill>
+                <a:schemeClr val="tx2"/>
+              </a:solidFill>
+            </a:endParaRPr>
+          </a:p>
+          <a:p>
+            <a:endParaRPr sz="1600" dirty="0">
+              <a:solidFill>
+                <a:schemeClr val="tx2"/>
+              </a:solidFill>
+            </a:endParaRPr>
+          </a:p>
+        </p:txBody>
+      </p:sp>
+      <p:sp>
+        <p:nvSpPr>
+          <p:cNvPr id="5" name="Rectangle 4"/>
+          <p:cNvSpPr/>
+          <p:nvPr/>
+        </p:nvSpPr>
+        <p:spPr>
+          <a:xfrm>
+            <a:off x="6858000" y="914400"/>
+            <a:ext cx="2011680" cy="1005840"/>
+          </a:xfrm>
+          <a:prstGeom prst="rect">
+            <a:avLst/>
+          </a:prstGeom>
+        </p:spPr>
+        <p:style>
+          <a:lnRef idx="1">
+            <a:schemeClr val="accent1"/>
+          </a:lnRef>
+          <a:fillRef idx="3">
+            <a:schemeClr val="accent1"/>
+          </a:fillRef>
+          <a:effectRef idx="2">
+            <a:schemeClr val="accent1"/>
+          </a:effectRef>
+          <a:fontRef idx="minor">
+            <a:schemeClr val="lt1"/>
+          </a:fontRef>
+        </p:style>
+        <p:txBody>
+          <a:bodyPr rtlCol="0" anchor="ctr"/>
+          <a:lstStyle/>
+          <a:p>
+            <a:r>
+              <a:rPr sz="1600" dirty="0">
+                <a:solidFill>
+                  <a:schemeClr val="tx2"/>
+                </a:solidFill>
+              </a:rPr>
+              <a:t>Database</a:t>
+            </a:r>
+          </a:p>
+          <a:p>
+            <a:endParaRPr sz="1600" dirty="0">
+              <a:solidFill>
+                <a:schemeClr val="tx2"/>
+              </a:solidFill>
+            </a:endParaRPr>
+          </a:p>
+        </p:txBody>
+      </p:sp>
+      <p:sp>
+        <p:nvSpPr>
+          <p:cNvPr id="6" name="Rectangle 5"/>
+          <p:cNvSpPr/>
+          <p:nvPr/>
+        </p:nvSpPr>
+        <p:spPr>
+          <a:xfrm>
+            <a:off x="6858000" y="2926080"/>
+            <a:ext cx="2011680" cy="1005840"/>
+          </a:xfrm>
+          <a:prstGeom prst="rect">
+            <a:avLst/>
+          </a:prstGeom>
+        </p:spPr>
+        <p:style>
+          <a:lnRef idx="1">
+            <a:schemeClr val="accent1"/>
+          </a:lnRef>
+          <a:fillRef idx="3">
+            <a:schemeClr val="accent1"/>
+          </a:fillRef>
+          <a:effectRef idx="2">
+            <a:schemeClr val="accent1"/>
+          </a:effectRef>
+          <a:fontRef idx="minor">
+            <a:schemeClr val="lt1"/>
+          </a:fontRef>
+        </p:style>
+        <p:txBody>
+          <a:bodyPr rtlCol="0" anchor="ctr"/>
+          <a:lstStyle/>
+          <a:p>
+            <a:r>
+              <a:rPr sz="1600" dirty="0">
+                <a:solidFill>
+                  <a:schemeClr val="tx2"/>
+                </a:solidFill>
+              </a:rPr>
+              <a:t>Recipe API</a:t>
+            </a:r>
+          </a:p>
+          <a:p>
+            <a:endParaRPr sz="1600" dirty="0">
+              <a:solidFill>
+                <a:schemeClr val="tx2"/>
+              </a:solidFill>
+            </a:endParaRPr>
+          </a:p>
+        </p:txBody>
+      </p:sp>
+      <p:cxnSp>
+        <p:nvCxnSpPr>
+          <p:cNvPr id="7" name="Connector 6"/>
+          <p:cNvCxnSpPr/>
+          <p:nvPr/>
+        </p:nvCxnSpPr>
+        <p:spPr>
+          <a:xfrm>
+            <a:off x="2468880" y="2286000"/>
+            <a:ext cx="1188720" cy="0"/>
+          </a:xfrm>
+          <a:prstGeom prst="line">
+            <a:avLst/>
+          </a:prstGeom>
+        </p:spPr>
+        <p:style>
+          <a:lnRef idx="2">
+            <a:schemeClr val="accent1"/>
+          </a:lnRef>
+          <a:fillRef idx="0">
+            <a:schemeClr val="accent1"/>
+          </a:fillRef>
+          <a:effectRef idx="1">
+            <a:schemeClr val="accent1"/>
+          </a:effectRef>
+          <a:fontRef idx="minor">
+            <a:schemeClr val="tx1"/>
+          </a:fontRef>
+        </p:style>
+      </p:cxnSp>
+      <p:cxnSp>
+        <p:nvCxnSpPr>
+          <p:cNvPr id="8" name="Connector 7"/>
+          <p:cNvCxnSpPr/>
+          <p:nvPr/>
+        </p:nvCxnSpPr>
+        <p:spPr>
+          <a:xfrm flipV="1">
+            <a:off x="5669280" y="1463040"/>
+            <a:ext cx="1188720" cy="822960"/>
+          </a:xfrm>
+          <a:prstGeom prst="line">
+            <a:avLst/>
+          </a:prstGeom>
+        </p:spPr>
+        <p:style>
+          <a:lnRef idx="2">
+            <a:schemeClr val="accent1"/>
+          </a:lnRef>
+          <a:fillRef idx="0">
+            <a:schemeClr val="accent1"/>
+          </a:fillRef>
+          <a:effectRef idx="1">
+            <a:schemeClr val="accent1"/>
+          </a:effectRef>
+          <a:fontRef idx="minor">
+            <a:schemeClr val="tx1"/>
+          </a:fontRef>
+        </p:style>
+      </p:cxnSp>
+      <p:cxnSp>
+        <p:nvCxnSpPr>
+          <p:cNvPr id="9" name="Connector 8"/>
+          <p:cNvCxnSpPr/>
+          <p:nvPr/>
+        </p:nvCxnSpPr>
+        <p:spPr>
+          <a:xfrm>
+            <a:off x="5669280" y="2286000"/>
+            <a:ext cx="1188720" cy="1097280"/>
+          </a:xfrm>
+          <a:prstGeom prst="line">
+            <a:avLst/>
+          </a:prstGeom>
+        </p:spPr>
+        <p:style>
+          <a:lnRef idx="2">
+            <a:schemeClr val="accent1"/>
+          </a:lnRef>
+          <a:fillRef idx="0">
+            <a:schemeClr val="accent1"/>
+          </a:fillRef>
+          <a:effectRef idx="1">
+            <a:schemeClr val="accent1"/>
+          </a:effectRef>
+          <a:fontRef idx="minor">
+            <a:schemeClr val="tx1"/>
+          </a:fontRef>
+        </p:style>
+      </p:cxnSp>
+    </p:spTree>
+  </p:cSld>
+  <p:clrMapOvr>
+    <a:masterClrMapping/>
+  </p:clrMapOvr>
+  <p:transition spd="slow">
+    <p:push dir="u"/>
+  </p:transition>
+  <p:timing>
+    <p:tnLst>
+      <p:par>
+        <p:cTn id="1" dur="indefinite" restart="never" nodeType="tmRoot">
+          <p:childTnLst>
+            <p:seq concurrent="1" nextAc="seek">
+              <p:cTn id="2" dur="indefinite" nodeType="mainSeq">
+                <p:childTnLst>
+                  <p:par>
+                    <p:cTn id="3" fill="hold">
+                      <p:stCondLst>
+                        <p:cond delay="indefinite"/>
+                      </p:stCondLst>
+                      <p:childTnLst>
+                        <p:par>
+                          <p:cTn id="4" fill="hold">
+                            <p:stCondLst>
+                              <p:cond delay="0"/>
+                            </p:stCondLst>
+                            <p:childTnLst>
+                              <p:par>
+                                <p:cTn id="5" presetID="2" presetClass="entr" presetSubtype="4" fill="hold" grpId="0" nodeType="clickEffect">
+                                  <p:stCondLst>
+                                    <p:cond delay="0"/>
+                                  </p:stCondLst>
+                                  <p:childTnLst>
+                                    <p:set>
+                                      <p:cBhvr>
+                                        <p:cTn id="6" dur="1" fill="hold">
+                                          <p:stCondLst>
+                                            <p:cond delay="0"/>
+                                          </p:stCondLst>
+                                        </p:cTn>
+                                        <p:tgtEl>
+                                          <p:spTgt spid="3"/>
+                                        </p:tgtEl>
+                                        <p:attrNameLst>
+                                          <p:attrName>style.visibility</p:attrName>
+                                        </p:attrNameLst>
+                                      </p:cBhvr>
+                                      <p:to>
+                                        <p:strVal val="visible"/>
+                                      </p:to>
+                                    </p:set>
+                                    <p:anim calcmode="lin" valueType="num">
+                                      <p:cBhvr additive="base">
+                                        <p:cTn id="7" dur="500" fill="hold"/>
+                                        <p:tgtEl>
+                                          <p:spTgt spid="3"/>
+                                        </p:tgtEl>
+                                        <p:attrNameLst>
+                                          <p:attrName>ppt_x</p:attrName>
+                                        </p:attrNameLst>
+                                      </p:cBhvr>
+                                      <p:tavLst>
+                                        <p:tav tm="0">
+                                          <p:val>
+                                            <p:strVal val="#ppt_x"/>
+                                          </p:val>
+                                        </p:tav>
+                                        <p:tav tm="100000">
+                                          <p:val>
+                                            <p:strVal val="#ppt_x"/>
+                                          </p:val>
+                                        </p:tav>
+                                      </p:tavLst>
+                                    </p:anim>
+                                    <p:anim calcmode="lin" valueType="num">
+                                      <p:cBhvr additive="base">
+                                        <p:cTn id="8" dur="500" fill="hold"/>
+                                        <p:tgtEl>
+                                          <p:spTgt spid="3"/>
+                                        </p:tgtEl>
+                                        <p:attrNameLst>
+                                          <p:attrName>ppt_y</p:attrName>
+                                        </p:attrNameLst>
+                                      </p:cBhvr>
+                                      <p:tavLst>
+                                        <p:tav tm="0">
+                                          <p:val>
+                                            <p:strVal val="1+#ppt_h/2"/>
+                                          </p:val>
+                                        </p:tav>
+                                        <p:tav tm="100000">
+                                          <p:val>
+                                            <p:strVal val="#ppt_y"/>
+                                          </p:val>
+                                        </p:tav>
+                                      </p:tavLst>
+                                    </p:anim>
+                                  </p:childTnLst>
+                                </p:cTn>
+                              </p:par>
+                            </p:childTnLst>
+                          </p:cTn>
+                        </p:par>
+                      </p:childTnLst>
+                    </p:cTn>
+                  </p:par>
+                  <p:par>
+                    <p:cTn id="9" fill="hold">
+                      <p:stCondLst>
+                        <p:cond delay="indefinite"/>
+                      </p:stCondLst>
+                      <p:childTnLst>
+                        <p:par>
+                          <p:cTn id="10" fill="hold">
+                            <p:stCondLst>
+                              <p:cond delay="0"/>
+                            </p:stCondLst>
+                            <p:childTnLst>
+                              <p:par>
+                                <p:cTn id="11" presetID="2" presetClass="entr" presetSubtype="4" fill="hold" grpId="0" nodeType="clickEffect">
+                                  <p:stCondLst>
+                                    <p:cond delay="0"/>
+                                  </p:stCondLst>
+                                  <p:childTnLst>
+                                    <p:set>
+                                      <p:cBhvr>
+                                        <p:cTn id="12" dur="1" fill="hold">
+                                          <p:stCondLst>
+                                            <p:cond delay="0"/>
+                                          </p:stCondLst>
+                                        </p:cTn>
+                                        <p:tgtEl>
+                                          <p:spTgt spid="4"/>
+                                        </p:tgtEl>
+                                        <p:attrNameLst>
+                                          <p:attrName>style.visibility</p:attrName>
+                                        </p:attrNameLst>
+                                      </p:cBhvr>
+                                      <p:to>
+                                        <p:strVal val="visible"/>
+                                      </p:to>
+                                    </p:set>
+                                    <p:anim calcmode="lin" valueType="num">
+                                      <p:cBhvr additive="base">
+                                        <p:cTn id="13" dur="500" fill="hold"/>
+                                        <p:tgtEl>
+                                          <p:spTgt spid="4"/>
+                                        </p:tgtEl>
+                                        <p:attrNameLst>
+                                          <p:attrName>ppt_x</p:attrName>
+                                        </p:attrNameLst>
+                                      </p:cBhvr>
+                                      <p:tavLst>
+                                        <p:tav tm="0">
+                                          <p:val>
+                                            <p:strVal val="#ppt_x"/>
+                                          </p:val>
+                                        </p:tav>
+                                        <p:tav tm="100000">
+                                          <p:val>
+                                            <p:strVal val="#ppt_x"/>
+                                          </p:val>
+                                        </p:tav>
+                                      </p:tavLst>
+                                    </p:anim>
+                                    <p:anim calcmode="lin" valueType="num">
+                                      <p:cBhvr additive="base">
+                                        <p:cTn id="14" dur="500" fill="hold"/>
+                                        <p:tgtEl>
+                                          <p:spTgt spid="4"/>
+                                        </p:tgtEl>
+                                        <p:attrNameLst>
+                                          <p:attrName>ppt_y</p:attrName>
+                                        </p:attrNameLst>
+                                      </p:cBhvr>
+                                      <p:tavLst>
+                                        <p:tav tm="0">
+                                          <p:val>
+                                            <p:strVal val="1+#ppt_h/2"/>
+                                          </p:val>
+                                        </p:tav>
+                                        <p:tav tm="100000">
+                                          <p:val>
+                                            <p:strVal val="#ppt_y"/>
+                                          </p:val>
+                                        </p:tav>
+                                      </p:tavLst>
+                                    </p:anim>
+                                  </p:childTnLst>
+                                </p:cTn>
+                              </p:par>
+                            </p:childTnLst>
+                          </p:cTn>
+                        </p:par>
+                      </p:childTnLst>
+                    </p:cTn>
+                  </p:par>
+                  <p:par>
+                    <p:cTn id="15" fill="hold">
+                      <p:stCondLst>
+                        <p:cond delay="indefinite"/>
+                      </p:stCondLst>
+                      <p:childTnLst>
+                        <p:par>
+                          <p:cTn id="16" fill="hold">
+                            <p:stCondLst>
+                              <p:cond delay="0"/>
+                            </p:stCondLst>
+                            <p:childTnLst>
+                              <p:par>
+                                <p:cTn id="17" presetID="2" presetClass="entr" presetSubtype="4" fill="hold" grpId="0" nodeType="clickEffect">
+                                  <p:stCondLst>
+                                    <p:cond delay="0"/>
+                                  </p:stCondLst>
+                                  <p:childTnLst>
+                                    <p:set>
+                                      <p:cBhvr>
+                                        <p:cTn id="18" dur="1" fill="hold">
+                                          <p:stCondLst>
+                                            <p:cond delay="0"/>
+                                          </p:stCondLst>
+                                        </p:cTn>
+                                        <p:tgtEl>
+                                          <p:spTgt spid="5"/>
+                                        </p:tgtEl>
+                                        <p:attrNameLst>
+                                          <p:attrName>style.visibility</p:attrName>
+                                        </p:attrNameLst>
+                                      </p:cBhvr>
+                                      <p:to>
+                                        <p:strVal val="visible"/>
+                                      </p:to>
+                                    </p:set>
+                                    <p:anim calcmode="lin" valueType="num">
+                                      <p:cBhvr additive="base">
+                                        <p:cTn id="19" dur="500" fill="hold"/>
+                                        <p:tgtEl>
+                                          <p:spTgt spid="5"/>
+                                        </p:tgtEl>
+                                        <p:attrNameLst>
+                                          <p:attrName>ppt_x</p:attrName>
+                                        </p:attrNameLst>
+                                      </p:cBhvr>
+                                      <p:tavLst>
+                                        <p:tav tm="0">
+                                          <p:val>
+                                            <p:strVal val="#ppt_x"/>
+                                          </p:val>
+                                        </p:tav>
+                                        <p:tav tm="100000">
+                                          <p:val>
+                                            <p:strVal val="#ppt_x"/>
+                                          </p:val>
+                                        </p:tav>
+                                      </p:tavLst>
+                                    </p:anim>
+                                    <p:anim calcmode="lin" valueType="num">
+                                      <p:cBhvr additive="base">
+                                        <p:cTn id="20" dur="500" fill="hold"/>
+                                        <p:tgtEl>
+                                          <p:spTgt spid="5"/>
+                                        </p:tgtEl>
+                                        <p:attrNameLst>
+                                          <p:attrName>ppt_y</p:attrName>
+                                        </p:attrNameLst>
+                                      </p:cBhvr>
+                                      <p:tavLst>
+                                        <p:tav tm="0">
+                                          <p:val>
+                                            <p:strVal val="1+#ppt_h/2"/>
+                                          </p:val>
+                                        </p:tav>
+                                        <p:tav tm="100000">
+                                          <p:val>
+                                            <p:strVal val="#ppt_y"/>
+                                          </p:val>
+                                        </p:tav>
+                                      </p:tavLst>
+                                    </p:anim>
+                                  </p:childTnLst>
+                                </p:cTn>
+                              </p:par>
+                            </p:childTnLst>
+                          </p:cTn>
+                        </p:par>
+                      </p:childTnLst>
+                    </p:cTn>
+                  </p:par>
+                  <p:par>
+                    <p:cTn id="21" fill="hold">
+                      <p:stCondLst>
+                        <p:cond delay="indefinite"/>
+                      </p:stCondLst>
+                      <p:childTnLst>
+                        <p:par>
+                          <p:cTn id="22" fill="hold">
+                            <p:stCondLst>
+                              <p:cond delay="0"/>
+                            </p:stCondLst>
+                            <p:childTnLst>
+                              <p:par>
+                                <p:cTn id="23" presetID="2" presetClass="entr" presetSubtype="4" fill="hold" grpId="0" nodeType="clickEffect">
+                                  <p:stCondLst>
+                                    <p:cond delay="0"/>
+                                  </p:stCondLst>
+                                  <p:childTnLst>
+                                    <p:set>
+                                      <p:cBhvr>
+                                        <p:cTn id="24" dur="1" fill="hold">
+                                          <p:stCondLst>
+                                            <p:cond delay="0"/>
+                                          </p:stCondLst>
+                                        </p:cTn>
+                                        <p:tgtEl>
+                                          <p:spTgt spid="6"/>
+                                        </p:tgtEl>
+                                        <p:attrNameLst>
+                                          <p:attrName>style.visibility</p:attrName>
+                                        </p:attrNameLst>
+                                      </p:cBhvr>
+                                      <p:to>
+                                        <p:strVal val="visible"/>
+                                      </p:to>
+                                    </p:set>
+                                    <p:anim calcmode="lin" valueType="num">
+                                      <p:cBhvr additive="base">
+                                        <p:cTn id="25" dur="500" fill="hold"/>
+                                        <p:tgtEl>
+                                          <p:spTgt spid="6"/>
+                                        </p:tgtEl>
+                                        <p:attrNameLst>
+                                          <p:attrName>ppt_x</p:attrName>
+                                        </p:attrNameLst>
+                                      </p:cBhvr>
+                                      <p:tavLst>
+                                        <p:tav tm="0">
+                                          <p:val>
+                                            <p:strVal val="#ppt_x"/>
+                                          </p:val>
+                                        </p:tav>
+                                        <p:tav tm="100000">
+                                          <p:val>
+                                            <p:strVal val="#ppt_x"/>
+                                          </p:val>
+                                        </p:tav>
+                                      </p:tavLst>
+                                    </p:anim>
+                                    <p:anim calcmode="lin" valueType="num">
+                                      <p:cBhvr additive="base">
+                                        <p:cTn id="26" dur="500" fill="hold"/>
+                                        <p:tgtEl>
+                                          <p:spTgt spid="6"/>
+                                        </p:tgtEl>
+                                        <p:attrNameLst>
+                                          <p:attrName>ppt_y</p:attrName>
+                                        </p:attrNameLst>
+                                      </p:cBhvr>
+                                      <p:tavLst>
+                                        <p:tav tm="0">
+                                          <p:val>
+                                            <p:strVal val="1+#ppt_h/2"/>
+                                          </p:val>
+                                        </p:tav>
+                                        <p:tav tm="100000">
+                                          <p:val>
+                                            <p:strVal val="#ppt_y"/>
+                                          </p:val>
+                                        </p:tav>
+                                      </p:tavLst>
+                                    </p:anim>
+                                  </p:childTnLst>
+                                </p:cTn>
+                              </p:par>
+                            </p:childTnLst>
+                          </p:cTn>
+                        </p:par>
+                      </p:childTnLst>
+                    </p:cTn>
+                  </p:par>
+                </p:childTnLst>
+              </p:cTn>
+              <p:prevCondLst>
+                <p:cond evt="onPrev" delay="0">
+                  <p:tgtEl>
+                    <p:sldTgt/>
+                  </p:tgtEl>
+                </p:cond>
+              </p:prevCondLst>
+              <p:nextCondLst>
+                <p:cond evt="onNext" delay="0">
+                  <p:tgtEl>
+                    <p:sldTgt/>
+                  </p:tgtEl>
+                </p:cond>
+              </p:nextCondLst>
+            </p:seq>
+          </p:childTnLst>
+        </p:cTn>
+      </p:par>
+    </p:tnLst>
+    <p:bldLst>
+      <p:bldP spid="3" grpId="0" animBg="1"/>
+      <p:bldP spid="4" grpId="0" animBg="1"/>
+      <p:bldP spid="5" grpId="0" animBg="1"/>
+      <p:bldP spid="6" grpId="0" animBg="1"/>
+    </p:bldLst>
+  </p:timing>
+</p:sld>
+</file>
+
+<file path=ppt/slides/slide17.xml><?xml version="1.0" encoding="utf-8"?>
+<p:sld xmlns:a="http://schemas.openxmlformats.org/drawingml/2006/main" xmlns:r="http://schemas.openxmlformats.org/officeDocument/2006/relationships" xmlns:p="http://schemas.openxmlformats.org/presentationml/2006/main">
+  <p:cSld>
+    <p:spTree>
+      <p:nvGrpSpPr>
+        <p:cNvPr id="1" name=""/>
+        <p:cNvGrpSpPr/>
+        <p:nvPr/>
+      </p:nvGrpSpPr>
+      <p:grpSpPr>
+        <a:xfrm>
+          <a:off x="0" y="0"/>
+          <a:ext cx="0" cy="0"/>
+          <a:chOff x="0" y="0"/>
+          <a:chExt cx="0" cy="0"/>
+        </a:xfrm>
+      </p:grpSpPr>
+      <p:sp>
+        <p:nvSpPr>
+          <p:cNvPr id="2" name="Title 1"/>
+          <p:cNvSpPr>
+            <a:spLocks noGrp="1"/>
+          </p:cNvSpPr>
+          <p:nvPr>
+            <p:ph type="title"/>
+          </p:nvPr>
+        </p:nvSpPr>
+        <p:spPr/>
+        <p:txBody>
+          <a:bodyPr/>
+          <a:lstStyle/>
+          <a:p>
+            <a:r>
+              <a:rPr b="1" dirty="0" err="1"/>
+              <a:t>Bevásárlólista</a:t>
+            </a:r>
+            <a:r>
+              <a:rPr b="1" dirty="0"/>
+              <a:t> </a:t>
+            </a:r>
+            <a:r>
+              <a:rPr b="1" dirty="0" err="1"/>
+              <a:t>működési</a:t>
+            </a:r>
+            <a:r>
+              <a:rPr b="1" dirty="0"/>
+              <a:t> </a:t>
+            </a:r>
+            <a:r>
+              <a:rPr b="1" dirty="0" err="1"/>
+              <a:t>folyamat</a:t>
+            </a:r>
+            <a:endParaRPr b="1" dirty="0"/>
+          </a:p>
+        </p:txBody>
+      </p:sp>
+      <p:sp>
+        <p:nvSpPr>
+          <p:cNvPr id="3" name="Rectangle 2"/>
+          <p:cNvSpPr/>
+          <p:nvPr/>
+        </p:nvSpPr>
+        <p:spPr>
+          <a:xfrm>
+            <a:off x="457200" y="2011680"/>
+            <a:ext cx="2011680" cy="1097280"/>
+          </a:xfrm>
+          <a:prstGeom prst="rect">
+            <a:avLst/>
+          </a:prstGeom>
+        </p:spPr>
+        <p:style>
+          <a:lnRef idx="1">
+            <a:schemeClr val="accent1"/>
+          </a:lnRef>
+          <a:fillRef idx="3">
+            <a:schemeClr val="accent1"/>
+          </a:fillRef>
+          <a:effectRef idx="2">
+            <a:schemeClr val="accent1"/>
+          </a:effectRef>
+          <a:fontRef idx="minor">
+            <a:schemeClr val="lt1"/>
+          </a:fontRef>
+        </p:style>
+        <p:txBody>
+          <a:bodyPr rtlCol="0" anchor="ctr"/>
+          <a:lstStyle/>
+          <a:p>
+            <a:r>
+              <a:rPr sz="1600" dirty="0" err="1">
+                <a:solidFill>
+                  <a:schemeClr val="tx2"/>
+                </a:solidFill>
+              </a:rPr>
+              <a:t>Felhasználó</a:t>
+            </a:r>
+            <a:r>
+              <a:rPr sz="1600" dirty="0">
+                <a:solidFill>
+                  <a:schemeClr val="tx2"/>
+                </a:solidFill>
+              </a:rPr>
+              <a:t> </a:t>
+            </a:r>
+            <a:r>
+              <a:rPr sz="1600" dirty="0" err="1">
+                <a:solidFill>
+                  <a:schemeClr val="tx2"/>
+                </a:solidFill>
+              </a:rPr>
+              <a:t>hozzáad</a:t>
+            </a:r>
+            <a:endParaRPr sz="1600" dirty="0">
+              <a:solidFill>
+                <a:schemeClr val="tx2"/>
+              </a:solidFill>
+            </a:endParaRPr>
+          </a:p>
+          <a:p>
+            <a:r>
+              <a:rPr sz="1600" dirty="0" err="1">
+                <a:solidFill>
+                  <a:schemeClr val="tx2"/>
+                </a:solidFill>
+              </a:rPr>
+              <a:t>terméket</a:t>
+            </a:r>
+            <a:endParaRPr sz="1600" dirty="0">
+              <a:solidFill>
+                <a:schemeClr val="tx2"/>
+              </a:solidFill>
+            </a:endParaRPr>
+          </a:p>
+        </p:txBody>
+      </p:sp>
+      <p:sp>
+        <p:nvSpPr>
+          <p:cNvPr id="4" name="Rectangle 3"/>
+          <p:cNvSpPr/>
+          <p:nvPr/>
+        </p:nvSpPr>
+        <p:spPr>
+          <a:xfrm>
+            <a:off x="2743200" y="2011680"/>
+            <a:ext cx="2011680" cy="1097280"/>
+          </a:xfrm>
+          <a:prstGeom prst="rect">
+            <a:avLst/>
+          </a:prstGeom>
+        </p:spPr>
+        <p:style>
+          <a:lnRef idx="1">
+            <a:schemeClr val="accent1"/>
+          </a:lnRef>
+          <a:fillRef idx="3">
+            <a:schemeClr val="accent1"/>
+          </a:fillRef>
+          <a:effectRef idx="2">
+            <a:schemeClr val="accent1"/>
+          </a:effectRef>
+          <a:fontRef idx="minor">
+            <a:schemeClr val="lt1"/>
+          </a:fontRef>
+        </p:style>
+        <p:txBody>
+          <a:bodyPr rtlCol="0" anchor="ctr"/>
+          <a:lstStyle/>
+          <a:p>
+            <a:r>
+              <a:rPr sz="1600" dirty="0" err="1">
+                <a:solidFill>
+                  <a:schemeClr val="tx2"/>
+                </a:solidFill>
+              </a:rPr>
+              <a:t>Rendszer</a:t>
+            </a:r>
+            <a:r>
+              <a:rPr sz="1600" dirty="0">
+                <a:solidFill>
+                  <a:schemeClr val="tx2"/>
+                </a:solidFill>
+              </a:rPr>
+              <a:t> </a:t>
+            </a:r>
+            <a:r>
+              <a:rPr sz="1600" dirty="0" err="1">
+                <a:solidFill>
+                  <a:schemeClr val="tx2"/>
+                </a:solidFill>
+              </a:rPr>
+              <a:t>ellenőrzi</a:t>
+            </a:r>
+            <a:endParaRPr sz="1600" dirty="0">
+              <a:solidFill>
+                <a:schemeClr val="tx2"/>
+              </a:solidFill>
+            </a:endParaRPr>
+          </a:p>
+          <a:p>
+            <a:r>
+              <a:rPr sz="1600" dirty="0" err="1">
+                <a:solidFill>
+                  <a:schemeClr val="tx2"/>
+                </a:solidFill>
+              </a:rPr>
+              <a:t>készletet</a:t>
+            </a:r>
+            <a:endParaRPr sz="1600" dirty="0">
+              <a:solidFill>
+                <a:schemeClr val="tx2"/>
+              </a:solidFill>
+            </a:endParaRPr>
+          </a:p>
+        </p:txBody>
+      </p:sp>
+      <p:cxnSp>
+        <p:nvCxnSpPr>
+          <p:cNvPr id="5" name="Connector 4"/>
+          <p:cNvCxnSpPr/>
+          <p:nvPr/>
+        </p:nvCxnSpPr>
+        <p:spPr>
+          <a:xfrm>
+            <a:off x="2468880" y="2560320"/>
+            <a:ext cx="274320" cy="0"/>
+          </a:xfrm>
+          <a:prstGeom prst="line">
+            <a:avLst/>
+          </a:prstGeom>
+        </p:spPr>
+        <p:style>
+          <a:lnRef idx="2">
+            <a:schemeClr val="accent1"/>
+          </a:lnRef>
+          <a:fillRef idx="0">
+            <a:schemeClr val="accent1"/>
+          </a:fillRef>
+          <a:effectRef idx="1">
+            <a:schemeClr val="accent1"/>
+          </a:effectRef>
+          <a:fontRef idx="minor">
+            <a:schemeClr val="tx1"/>
+          </a:fontRef>
+        </p:style>
+      </p:cxnSp>
+      <p:sp>
+        <p:nvSpPr>
+          <p:cNvPr id="6" name="Rectangle 5"/>
+          <p:cNvSpPr/>
+          <p:nvPr/>
+        </p:nvSpPr>
+        <p:spPr>
+          <a:xfrm>
+            <a:off x="5029200" y="2011680"/>
+            <a:ext cx="2011680" cy="1097280"/>
+          </a:xfrm>
+          <a:prstGeom prst="rect">
+            <a:avLst/>
+          </a:prstGeom>
+        </p:spPr>
+        <p:style>
+          <a:lnRef idx="1">
+            <a:schemeClr val="accent1"/>
+          </a:lnRef>
+          <a:fillRef idx="3">
+            <a:schemeClr val="accent1"/>
+          </a:fillRef>
+          <a:effectRef idx="2">
+            <a:schemeClr val="accent1"/>
+          </a:effectRef>
+          <a:fontRef idx="minor">
+            <a:schemeClr val="lt1"/>
+          </a:fontRef>
+        </p:style>
+        <p:txBody>
+          <a:bodyPr rtlCol="0" anchor="ctr"/>
+          <a:lstStyle/>
+          <a:p>
+            <a:r>
+              <a:rPr sz="1600" dirty="0" err="1">
+                <a:solidFill>
+                  <a:schemeClr val="tx2"/>
+                </a:solidFill>
+              </a:rPr>
+              <a:t>Hiányzó</a:t>
+            </a:r>
+            <a:r>
+              <a:rPr sz="1600" dirty="0">
+                <a:solidFill>
+                  <a:schemeClr val="tx2"/>
+                </a:solidFill>
+              </a:rPr>
+              <a:t> </a:t>
+            </a:r>
+            <a:r>
+              <a:rPr sz="1600" dirty="0" err="1">
+                <a:solidFill>
+                  <a:schemeClr val="tx2"/>
+                </a:solidFill>
+              </a:rPr>
+              <a:t>elem</a:t>
+            </a:r>
+            <a:r>
+              <a:rPr sz="1600" dirty="0">
+                <a:solidFill>
+                  <a:schemeClr val="tx2"/>
+                </a:solidFill>
+              </a:rPr>
+              <a:t>?</a:t>
+            </a:r>
+          </a:p>
+        </p:txBody>
+      </p:sp>
+      <p:cxnSp>
+        <p:nvCxnSpPr>
+          <p:cNvPr id="7" name="Connector 6"/>
+          <p:cNvCxnSpPr/>
+          <p:nvPr/>
+        </p:nvCxnSpPr>
+        <p:spPr>
+          <a:xfrm>
+            <a:off x="4754880" y="2560320"/>
+            <a:ext cx="274320" cy="0"/>
+          </a:xfrm>
+          <a:prstGeom prst="line">
+            <a:avLst/>
+          </a:prstGeom>
+        </p:spPr>
+        <p:style>
+          <a:lnRef idx="2">
+            <a:schemeClr val="accent1"/>
+          </a:lnRef>
+          <a:fillRef idx="0">
+            <a:schemeClr val="accent1"/>
+          </a:fillRef>
+          <a:effectRef idx="1">
+            <a:schemeClr val="accent1"/>
+          </a:effectRef>
+          <a:fontRef idx="minor">
+            <a:schemeClr val="tx1"/>
+          </a:fontRef>
+        </p:style>
+      </p:cxnSp>
+      <p:sp>
+        <p:nvSpPr>
+          <p:cNvPr id="8" name="Rectangle 7"/>
+          <p:cNvSpPr/>
+          <p:nvPr/>
+        </p:nvSpPr>
+        <p:spPr>
+          <a:xfrm>
+            <a:off x="7315200" y="2011680"/>
+            <a:ext cx="2011680" cy="1097280"/>
+          </a:xfrm>
+          <a:prstGeom prst="rect">
+            <a:avLst/>
+          </a:prstGeom>
+        </p:spPr>
+        <p:style>
+          <a:lnRef idx="1">
+            <a:schemeClr val="accent1"/>
+          </a:lnRef>
+          <a:fillRef idx="3">
+            <a:schemeClr val="accent1"/>
+          </a:fillRef>
+          <a:effectRef idx="2">
+            <a:schemeClr val="accent1"/>
+          </a:effectRef>
+          <a:fontRef idx="minor">
+            <a:schemeClr val="lt1"/>
+          </a:fontRef>
+        </p:style>
+        <p:txBody>
+          <a:bodyPr rtlCol="0" anchor="ctr"/>
+          <a:lstStyle/>
+          <a:p>
+            <a:r>
+              <a:rPr sz="1600" dirty="0" err="1">
+                <a:solidFill>
+                  <a:schemeClr val="tx2"/>
+                </a:solidFill>
+              </a:rPr>
+              <a:t>Hozzáadás</a:t>
+            </a:r>
+            <a:endParaRPr sz="1600" dirty="0">
+              <a:solidFill>
+                <a:schemeClr val="tx2"/>
+              </a:solidFill>
+            </a:endParaRPr>
+          </a:p>
+          <a:p>
+            <a:r>
+              <a:rPr sz="1600" dirty="0" err="1">
+                <a:solidFill>
+                  <a:schemeClr val="tx2"/>
+                </a:solidFill>
+              </a:rPr>
+              <a:t>bevásárlólistához</a:t>
+            </a:r>
+            <a:endParaRPr sz="1600" dirty="0">
+              <a:solidFill>
+                <a:schemeClr val="tx2"/>
+              </a:solidFill>
+            </a:endParaRPr>
+          </a:p>
+        </p:txBody>
+      </p:sp>
+      <p:cxnSp>
+        <p:nvCxnSpPr>
+          <p:cNvPr id="9" name="Connector 8"/>
+          <p:cNvCxnSpPr/>
+          <p:nvPr/>
+        </p:nvCxnSpPr>
+        <p:spPr>
+          <a:xfrm>
+            <a:off x="7040880" y="2560320"/>
+            <a:ext cx="274320" cy="0"/>
+          </a:xfrm>
+          <a:prstGeom prst="line">
+            <a:avLst/>
+          </a:prstGeom>
+        </p:spPr>
+        <p:style>
+          <a:lnRef idx="2">
+            <a:schemeClr val="accent1"/>
+          </a:lnRef>
+          <a:fillRef idx="0">
+            <a:schemeClr val="accent1"/>
+          </a:fillRef>
+          <a:effectRef idx="1">
+            <a:schemeClr val="accent1"/>
+          </a:effectRef>
+          <a:fontRef idx="minor">
+            <a:schemeClr val="tx1"/>
+          </a:fontRef>
+        </p:style>
+      </p:cxnSp>
+    </p:spTree>
+  </p:cSld>
+  <p:clrMapOvr>
+    <a:masterClrMapping/>
+  </p:clrMapOvr>
+  <p:transition spd="slow">
+    <p:push dir="u"/>
+  </p:transition>
+  <p:timing>
+    <p:tnLst>
+      <p:par>
+        <p:cTn id="1" dur="indefinite" restart="never" nodeType="tmRoot">
+          <p:childTnLst>
+            <p:seq concurrent="1" nextAc="seek">
+              <p:cTn id="2" dur="indefinite" nodeType="mainSeq">
+                <p:childTnLst>
+                  <p:par>
+                    <p:cTn id="3" fill="hold">
+                      <p:stCondLst>
+                        <p:cond delay="indefinite"/>
+                      </p:stCondLst>
+                      <p:childTnLst>
+                        <p:par>
+                          <p:cTn id="4" fill="hold">
+                            <p:stCondLst>
+                              <p:cond delay="0"/>
+                            </p:stCondLst>
+                            <p:childTnLst>
+                              <p:par>
+                                <p:cTn id="5" presetID="2" presetClass="entr" presetSubtype="4" fill="hold" grpId="0" nodeType="clickEffect">
+                                  <p:stCondLst>
+                                    <p:cond delay="0"/>
+                                  </p:stCondLst>
+                                  <p:childTnLst>
+                                    <p:set>
+                                      <p:cBhvr>
+                                        <p:cTn id="6" dur="1" fill="hold">
+                                          <p:stCondLst>
+                                            <p:cond delay="0"/>
+                                          </p:stCondLst>
+                                        </p:cTn>
+                                        <p:tgtEl>
+                                          <p:spTgt spid="3"/>
+                                        </p:tgtEl>
+                                        <p:attrNameLst>
+                                          <p:attrName>style.visibility</p:attrName>
+                                        </p:attrNameLst>
+                                      </p:cBhvr>
+                                      <p:to>
+                                        <p:strVal val="visible"/>
+                                      </p:to>
+                                    </p:set>
+                                    <p:anim calcmode="lin" valueType="num">
+                                      <p:cBhvr additive="base">
+                                        <p:cTn id="7" dur="500" fill="hold"/>
+                                        <p:tgtEl>
+                                          <p:spTgt spid="3"/>
+                                        </p:tgtEl>
+                                        <p:attrNameLst>
+                                          <p:attrName>ppt_x</p:attrName>
+                                        </p:attrNameLst>
+                                      </p:cBhvr>
+                                      <p:tavLst>
+                                        <p:tav tm="0">
+                                          <p:val>
+                                            <p:strVal val="#ppt_x"/>
+                                          </p:val>
+                                        </p:tav>
+                                        <p:tav tm="100000">
+                                          <p:val>
+                                            <p:strVal val="#ppt_x"/>
+                                          </p:val>
+                                        </p:tav>
+                                      </p:tavLst>
+                                    </p:anim>
+                                    <p:anim calcmode="lin" valueType="num">
+                                      <p:cBhvr additive="base">
+                                        <p:cTn id="8" dur="500" fill="hold"/>
+                                        <p:tgtEl>
+                                          <p:spTgt spid="3"/>
+                                        </p:tgtEl>
+                                        <p:attrNameLst>
+                                          <p:attrName>ppt_y</p:attrName>
+                                        </p:attrNameLst>
+                                      </p:cBhvr>
+                                      <p:tavLst>
+                                        <p:tav tm="0">
+                                          <p:val>
+                                            <p:strVal val="1+#ppt_h/2"/>
+                                          </p:val>
+                                        </p:tav>
+                                        <p:tav tm="100000">
+                                          <p:val>
+                                            <p:strVal val="#ppt_y"/>
+                                          </p:val>
+                                        </p:tav>
+                                      </p:tavLst>
+                                    </p:anim>
+                                  </p:childTnLst>
+                                </p:cTn>
+                              </p:par>
+                            </p:childTnLst>
+                          </p:cTn>
+                        </p:par>
+                      </p:childTnLst>
+                    </p:cTn>
+                  </p:par>
+                  <p:par>
+                    <p:cTn id="9" fill="hold">
+                      <p:stCondLst>
+                        <p:cond delay="indefinite"/>
+                      </p:stCondLst>
+                      <p:childTnLst>
+                        <p:par>
+                          <p:cTn id="10" fill="hold">
+                            <p:stCondLst>
+                              <p:cond delay="0"/>
+                            </p:stCondLst>
+                            <p:childTnLst>
+                              <p:par>
+                                <p:cTn id="11" presetID="2" presetClass="entr" presetSubtype="4" fill="hold" grpId="0" nodeType="clickEffect">
+                                  <p:stCondLst>
+                                    <p:cond delay="0"/>
+                                  </p:stCondLst>
+                                  <p:childTnLst>
+                                    <p:set>
+                                      <p:cBhvr>
+                                        <p:cTn id="12" dur="1" fill="hold">
+                                          <p:stCondLst>
+                                            <p:cond delay="0"/>
+                                          </p:stCondLst>
+                                        </p:cTn>
+                                        <p:tgtEl>
+                                          <p:spTgt spid="4"/>
+                                        </p:tgtEl>
+                                        <p:attrNameLst>
+                                          <p:attrName>style.visibility</p:attrName>
+                                        </p:attrNameLst>
+                                      </p:cBhvr>
+                                      <p:to>
+                                        <p:strVal val="visible"/>
+                                      </p:to>
+                                    </p:set>
+                                    <p:anim calcmode="lin" valueType="num">
+                                      <p:cBhvr additive="base">
+                                        <p:cTn id="13" dur="500" fill="hold"/>
+                                        <p:tgtEl>
+                                          <p:spTgt spid="4"/>
+                                        </p:tgtEl>
+                                        <p:attrNameLst>
+                                          <p:attrName>ppt_x</p:attrName>
+                                        </p:attrNameLst>
+                                      </p:cBhvr>
+                                      <p:tavLst>
+                                        <p:tav tm="0">
+                                          <p:val>
+                                            <p:strVal val="#ppt_x"/>
+                                          </p:val>
+                                        </p:tav>
+                                        <p:tav tm="100000">
+                                          <p:val>
+                                            <p:strVal val="#ppt_x"/>
+                                          </p:val>
+                                        </p:tav>
+                                      </p:tavLst>
+                                    </p:anim>
+                                    <p:anim calcmode="lin" valueType="num">
+                                      <p:cBhvr additive="base">
+                                        <p:cTn id="14" dur="500" fill="hold"/>
+                                        <p:tgtEl>
+                                          <p:spTgt spid="4"/>
+                                        </p:tgtEl>
+                                        <p:attrNameLst>
+                                          <p:attrName>ppt_y</p:attrName>
+                                        </p:attrNameLst>
+                                      </p:cBhvr>
+                                      <p:tavLst>
+                                        <p:tav tm="0">
+                                          <p:val>
+                                            <p:strVal val="1+#ppt_h/2"/>
+                                          </p:val>
+                                        </p:tav>
+                                        <p:tav tm="100000">
+                                          <p:val>
+                                            <p:strVal val="#ppt_y"/>
+                                          </p:val>
+                                        </p:tav>
+                                      </p:tavLst>
+                                    </p:anim>
+                                  </p:childTnLst>
+                                </p:cTn>
+                              </p:par>
+                            </p:childTnLst>
+                          </p:cTn>
+                        </p:par>
+                      </p:childTnLst>
+                    </p:cTn>
+                  </p:par>
+                  <p:par>
+                    <p:cTn id="15" fill="hold">
+                      <p:stCondLst>
+                        <p:cond delay="indefinite"/>
+                      </p:stCondLst>
+                      <p:childTnLst>
+                        <p:par>
+                          <p:cTn id="16" fill="hold">
+                            <p:stCondLst>
+                              <p:cond delay="0"/>
+                            </p:stCondLst>
+                            <p:childTnLst>
+                              <p:par>
+                                <p:cTn id="17" presetID="2" presetClass="entr" presetSubtype="4" fill="hold" grpId="0" nodeType="clickEffect">
+                                  <p:stCondLst>
+                                    <p:cond delay="0"/>
+                                  </p:stCondLst>
+                                  <p:childTnLst>
+                                    <p:set>
+                                      <p:cBhvr>
+                                        <p:cTn id="18" dur="1" fill="hold">
+                                          <p:stCondLst>
+                                            <p:cond delay="0"/>
+                                          </p:stCondLst>
+                                        </p:cTn>
+                                        <p:tgtEl>
+                                          <p:spTgt spid="6"/>
+                                        </p:tgtEl>
+                                        <p:attrNameLst>
+                                          <p:attrName>style.visibility</p:attrName>
+                                        </p:attrNameLst>
+                                      </p:cBhvr>
+                                      <p:to>
+                                        <p:strVal val="visible"/>
+                                      </p:to>
+                                    </p:set>
+                                    <p:anim calcmode="lin" valueType="num">
+                                      <p:cBhvr additive="base">
+                                        <p:cTn id="19" dur="500" fill="hold"/>
+                                        <p:tgtEl>
+                                          <p:spTgt spid="6"/>
+                                        </p:tgtEl>
+                                        <p:attrNameLst>
+                                          <p:attrName>ppt_x</p:attrName>
+                                        </p:attrNameLst>
+                                      </p:cBhvr>
+                                      <p:tavLst>
+                                        <p:tav tm="0">
+                                          <p:val>
+                                            <p:strVal val="#ppt_x"/>
+                                          </p:val>
+                                        </p:tav>
+                                        <p:tav tm="100000">
+                                          <p:val>
+                                            <p:strVal val="#ppt_x"/>
+                                          </p:val>
+                                        </p:tav>
+                                      </p:tavLst>
+                                    </p:anim>
+                                    <p:anim calcmode="lin" valueType="num">
+                                      <p:cBhvr additive="base">
+                                        <p:cTn id="20" dur="500" fill="hold"/>
+                                        <p:tgtEl>
+                                          <p:spTgt spid="6"/>
+                                        </p:tgtEl>
+                                        <p:attrNameLst>
+                                          <p:attrName>ppt_y</p:attrName>
+                                        </p:attrNameLst>
+                                      </p:cBhvr>
+                                      <p:tavLst>
+                                        <p:tav tm="0">
+                                          <p:val>
+                                            <p:strVal val="1+#ppt_h/2"/>
+                                          </p:val>
+                                        </p:tav>
+                                        <p:tav tm="100000">
+                                          <p:val>
+                                            <p:strVal val="#ppt_y"/>
+                                          </p:val>
+                                        </p:tav>
+                                      </p:tavLst>
+                                    </p:anim>
+                                  </p:childTnLst>
+                                </p:cTn>
+                              </p:par>
+                            </p:childTnLst>
+                          </p:cTn>
+                        </p:par>
+                      </p:childTnLst>
+                    </p:cTn>
+                  </p:par>
+                  <p:par>
+                    <p:cTn id="21" fill="hold">
+                      <p:stCondLst>
+                        <p:cond delay="indefinite"/>
+                      </p:stCondLst>
+                      <p:childTnLst>
+                        <p:par>
+                          <p:cTn id="22" fill="hold">
+                            <p:stCondLst>
+                              <p:cond delay="0"/>
+                            </p:stCondLst>
+                            <p:childTnLst>
+                              <p:par>
+                                <p:cTn id="23" presetID="2" presetClass="entr" presetSubtype="4" fill="hold" grpId="0" nodeType="clickEffect">
+                                  <p:stCondLst>
+                                    <p:cond delay="0"/>
+                                  </p:stCondLst>
+                                  <p:childTnLst>
+                                    <p:set>
+                                      <p:cBhvr>
+                                        <p:cTn id="24" dur="1" fill="hold">
+                                          <p:stCondLst>
+                                            <p:cond delay="0"/>
+                                          </p:stCondLst>
+                                        </p:cTn>
+                                        <p:tgtEl>
+                                          <p:spTgt spid="8"/>
+                                        </p:tgtEl>
+                                        <p:attrNameLst>
+                                          <p:attrName>style.visibility</p:attrName>
+                                        </p:attrNameLst>
+                                      </p:cBhvr>
+                                      <p:to>
+                                        <p:strVal val="visible"/>
+                                      </p:to>
+                                    </p:set>
+                                    <p:anim calcmode="lin" valueType="num">
+                                      <p:cBhvr additive="base">
+                                        <p:cTn id="25" dur="500" fill="hold"/>
+                                        <p:tgtEl>
+                                          <p:spTgt spid="8"/>
+                                        </p:tgtEl>
+                                        <p:attrNameLst>
+                                          <p:attrName>ppt_x</p:attrName>
+                                        </p:attrNameLst>
+                                      </p:cBhvr>
+                                      <p:tavLst>
+                                        <p:tav tm="0">
+                                          <p:val>
+                                            <p:strVal val="#ppt_x"/>
+                                          </p:val>
+                                        </p:tav>
+                                        <p:tav tm="100000">
+                                          <p:val>
+                                            <p:strVal val="#ppt_x"/>
+                                          </p:val>
+                                        </p:tav>
+                                      </p:tavLst>
+                                    </p:anim>
+                                    <p:anim calcmode="lin" valueType="num">
+                                      <p:cBhvr additive="base">
+                                        <p:cTn id="26" dur="500" fill="hold"/>
+                                        <p:tgtEl>
+                                          <p:spTgt spid="8"/>
+                                        </p:tgtEl>
+                                        <p:attrNameLst>
+                                          <p:attrName>ppt_y</p:attrName>
+                                        </p:attrNameLst>
+                                      </p:cBhvr>
+                                      <p:tavLst>
+                                        <p:tav tm="0">
+                                          <p:val>
+                                            <p:strVal val="1+#ppt_h/2"/>
+                                          </p:val>
+                                        </p:tav>
+                                        <p:tav tm="100000">
+                                          <p:val>
+                                            <p:strVal val="#ppt_y"/>
+                                          </p:val>
+                                        </p:tav>
+                                      </p:tavLst>
+                                    </p:anim>
+                                  </p:childTnLst>
+                                </p:cTn>
+                              </p:par>
+                            </p:childTnLst>
+                          </p:cTn>
+                        </p:par>
+                      </p:childTnLst>
+                    </p:cTn>
+                  </p:par>
+                </p:childTnLst>
+              </p:cTn>
+              <p:prevCondLst>
+                <p:cond evt="onPrev" delay="0">
+                  <p:tgtEl>
+                    <p:sldTgt/>
+                  </p:tgtEl>
+                </p:cond>
+              </p:prevCondLst>
+              <p:nextCondLst>
+                <p:cond evt="onNext" delay="0">
+                  <p:tgtEl>
+                    <p:sldTgt/>
+                  </p:tgtEl>
+                </p:cond>
+              </p:nextCondLst>
+            </p:seq>
+          </p:childTnLst>
+        </p:cTn>
+      </p:par>
+    </p:tnLst>
+    <p:bldLst>
+      <p:bldP spid="3" grpId="0" animBg="1"/>
+      <p:bldP spid="4" grpId="0" animBg="1"/>
+      <p:bldP spid="6" grpId="0" animBg="1"/>
+      <p:bldP spid="8" grpId="0" animBg="1"/>
+    </p:bldLst>
+  </p:timing>
+</p:sld>
+</file>
+
+<file path=ppt/slides/slide18.xml><?xml version="1.0" encoding="utf-8"?>
+<p:sld xmlns:a="http://schemas.openxmlformats.org/drawingml/2006/main" xmlns:r="http://schemas.openxmlformats.org/officeDocument/2006/relationships" xmlns:p="http://schemas.openxmlformats.org/presentationml/2006/main">
+  <p:cSld>
+    <p:spTree>
+      <p:nvGrpSpPr>
+        <p:cNvPr id="1" name=""/>
+        <p:cNvGrpSpPr/>
+        <p:nvPr/>
+      </p:nvGrpSpPr>
+      <p:grpSpPr>
+        <a:xfrm>
+          <a:off x="0" y="0"/>
+          <a:ext cx="0" cy="0"/>
+          <a:chOff x="0" y="0"/>
+          <a:chExt cx="0" cy="0"/>
+        </a:xfrm>
+      </p:grpSpPr>
+      <p:sp>
+        <p:nvSpPr>
+          <p:cNvPr id="2" name="Title 1"/>
+          <p:cNvSpPr>
+            <a:spLocks noGrp="1"/>
+          </p:cNvSpPr>
+          <p:nvPr>
+            <p:ph type="title"/>
+          </p:nvPr>
+        </p:nvSpPr>
+        <p:spPr/>
+        <p:txBody>
+          <a:bodyPr/>
+          <a:lstStyle/>
+          <a:p>
+            <a:r>
+              <a:rPr dirty="0" err="1"/>
+              <a:t>Adatbázis</a:t>
+            </a:r>
+            <a:r>
+              <a:rPr dirty="0"/>
+              <a:t> </a:t>
+            </a:r>
+            <a:r>
+              <a:rPr dirty="0" err="1"/>
+              <a:t>struktúra</a:t>
+            </a:r>
+            <a:endParaRPr dirty="0"/>
+          </a:p>
+        </p:txBody>
+      </p:sp>
+      <p:pic>
+        <p:nvPicPr>
+          <p:cNvPr id="3" name="Picture 2" descr="adaszerkezet.png"/>
+          <p:cNvPicPr>
+            <a:picLocks noChangeAspect="1"/>
+          </p:cNvPicPr>
+          <p:nvPr/>
+        </p:nvPicPr>
+        <p:blipFill>
+          <a:blip r:embed="rId2"/>
+          <a:stretch>
+            <a:fillRect/>
+          </a:stretch>
+        </p:blipFill>
+        <p:spPr>
+          <a:xfrm>
+            <a:off x="3416967" y="100674"/>
+            <a:ext cx="4467727" cy="4752062"/>
+          </a:xfrm>
+          <a:prstGeom prst="rect">
+            <a:avLst/>
+          </a:prstGeom>
+        </p:spPr>
+      </p:pic>
+    </p:spTree>
+  </p:cSld>
+  <p:clrMapOvr>
+    <a:masterClrMapping/>
+  </p:clrMapOvr>
+  <p:timing>
+    <p:tnLst>
+      <p:par>
+        <p:cTn id="1" dur="indefinite" restart="never" nodeType="tmRoot">
+          <p:childTnLst>
+            <p:seq concurrent="1" nextAc="seek">
+              <p:cTn id="2" dur="indefinite" nodeType="mainSeq">
+                <p:childTnLst>
+                  <p:par>
+                    <p:cTn id="3" fill="hold">
+                      <p:stCondLst>
+                        <p:cond delay="indefinite"/>
+                      </p:stCondLst>
+                      <p:childTnLst>
+                        <p:par>
+                          <p:cTn id="4" fill="hold">
+                            <p:stCondLst>
+                              <p:cond delay="0"/>
+                            </p:stCondLst>
+                            <p:childTnLst>
+                              <p:par>
+                                <p:cTn id="5" presetID="2" presetClass="entr" presetSubtype="4" fill="hold" nodeType="clickEffect">
+                                  <p:stCondLst>
+                                    <p:cond delay="0"/>
+                                  </p:stCondLst>
+                                  <p:childTnLst>
+                                    <p:set>
+                                      <p:cBhvr>
+                                        <p:cTn id="6" dur="1" fill="hold">
+                                          <p:stCondLst>
+                                            <p:cond delay="0"/>
+                                          </p:stCondLst>
+                                        </p:cTn>
+                                        <p:tgtEl>
+                                          <p:spTgt spid="3"/>
+                                        </p:tgtEl>
+                                        <p:attrNameLst>
+                                          <p:attrName>style.visibility</p:attrName>
+                                        </p:attrNameLst>
+                                      </p:cBhvr>
+                                      <p:to>
+                                        <p:strVal val="visible"/>
+                                      </p:to>
+                                    </p:set>
+                                    <p:anim calcmode="lin" valueType="num">
+                                      <p:cBhvr additive="base">
+                                        <p:cTn id="7" dur="500" fill="hold"/>
+                                        <p:tgtEl>
+                                          <p:spTgt spid="3"/>
+                                        </p:tgtEl>
+                                        <p:attrNameLst>
+                                          <p:attrName>ppt_x</p:attrName>
+                                        </p:attrNameLst>
+                                      </p:cBhvr>
+                                      <p:tavLst>
+                                        <p:tav tm="0">
+                                          <p:val>
+                                            <p:strVal val="#ppt_x"/>
+                                          </p:val>
+                                        </p:tav>
+                                        <p:tav tm="100000">
+                                          <p:val>
+                                            <p:strVal val="#ppt_x"/>
+                                          </p:val>
+                                        </p:tav>
+                                      </p:tavLst>
+                                    </p:anim>
+                                    <p:anim calcmode="lin" valueType="num">
+                                      <p:cBhvr additive="base">
+                                        <p:cTn id="8" dur="500" fill="hold"/>
+                                        <p:tgtEl>
+                                          <p:spTgt spid="3"/>
+                                        </p:tgtEl>
+                                        <p:attrNameLst>
+                                          <p:attrName>ppt_y</p:attrName>
+                                        </p:attrNameLst>
+                                      </p:cBhvr>
+                                      <p:tavLst>
+                                        <p:tav tm="0">
+                                          <p:val>
+                                            <p:strVal val="1+#ppt_h/2"/>
+                                          </p:val>
+                                        </p:tav>
+                                        <p:tav tm="100000">
+                                          <p:val>
+                                            <p:strVal val="#ppt_y"/>
+                                          </p:val>
+                                        </p:tav>
+                                      </p:tavLst>
+                                    </p:anim>
+                                  </p:childTnLst>
+                                </p:cTn>
+                              </p:par>
+                            </p:childTnLst>
+                          </p:cTn>
+                        </p:par>
+                      </p:childTnLst>
+                    </p:cTn>
+                  </p:par>
+                </p:childTnLst>
+              </p:cTn>
+              <p:prevCondLst>
+                <p:cond evt="onPrev" delay="0">
+                  <p:tgtEl>
+                    <p:sldTgt/>
+                  </p:tgtEl>
+                </p:cond>
+              </p:prevCondLst>
+              <p:nextCondLst>
+                <p:cond evt="onNext" delay="0">
+                  <p:tgtEl>
+                    <p:sldTgt/>
+                  </p:tgtEl>
+                </p:cond>
+              </p:nextCondLst>
+            </p:seq>
+          </p:childTnLst>
+        </p:cTn>
+      </p:par>
+    </p:tnLst>
+  </p:timing>
+</p:sld>
+</file>
+
+<file path=ppt/slides/slide19.xml><?xml version="1.0" encoding="utf-8"?>
+<p:sld xmlns:a="http://schemas.openxmlformats.org/drawingml/2006/main" xmlns:r="http://schemas.openxmlformats.org/officeDocument/2006/relationships" xmlns:p="http://schemas.openxmlformats.org/presentationml/2006/main">
+  <p:cSld>
+    <p:spTree>
+      <p:nvGrpSpPr>
+        <p:cNvPr id="1" name=""/>
+        <p:cNvGrpSpPr/>
+        <p:nvPr/>
+      </p:nvGrpSpPr>
+      <p:grpSpPr>
+        <a:xfrm>
+          <a:off x="0" y="0"/>
+          <a:ext cx="0" cy="0"/>
+          <a:chOff x="0" y="0"/>
+          <a:chExt cx="0" cy="0"/>
+        </a:xfrm>
+      </p:grpSpPr>
+      <p:sp>
+        <p:nvSpPr>
+          <p:cNvPr id="2" name="Cím 1">
+            <a:extLst>
+              <a:ext uri="{FF2B5EF4-FFF2-40B4-BE49-F238E27FC236}">
+                <a16:creationId xmlns:a16="http://schemas.microsoft.com/office/drawing/2014/main" id="{9A9225C2-821D-4257-8F4B-9294A2A475C4}"/>
+              </a:ext>
+            </a:extLst>
+          </p:cNvPr>
+          <p:cNvSpPr>
+            <a:spLocks noGrp="1"/>
+          </p:cNvSpPr>
+          <p:nvPr>
+            <p:ph type="title"/>
+          </p:nvPr>
+        </p:nvSpPr>
+        <p:spPr/>
+        <p:txBody>
+          <a:bodyPr/>
+          <a:lstStyle/>
+          <a:p>
+            <a:r>
+              <a:rPr lang="hu-HU" b="1" dirty="0"/>
+              <a:t>Köszönjük a figyelmüket !</a:t>
+            </a:r>
+          </a:p>
+        </p:txBody>
+      </p:sp>
+    </p:spTree>
+    <p:extLst>
+      <p:ext uri="{BB962C8B-B14F-4D97-AF65-F5344CB8AC3E}">
+        <p14:creationId xmlns:p14="http://schemas.microsoft.com/office/powerpoint/2010/main" val="4163104875"/>
+      </p:ext>
+    </p:extLst>
+  </p:cSld>
+  <p:clrMapOvr>
+    <a:masterClrMapping/>
+  </p:clrMapOvr>
+</p:sld>
+</file>
+
 <file path=ppt/slides/slide2.xml><?xml version="1.0" encoding="utf-8"?>
 <p:sld xmlns:a="http://schemas.openxmlformats.org/drawingml/2006/main" xmlns:r="http://schemas.openxmlformats.org/officeDocument/2006/relationships" xmlns:p="http://schemas.openxmlformats.org/presentationml/2006/main">
   <p:cSld>
@@ -5600,8 +8520,8 @@
         </p:blipFill>
         <p:spPr>
           <a:xfrm>
-            <a:off x="4951412" y="2201767"/>
-            <a:ext cx="5522912" cy="2793566"/>
+            <a:off x="5702968" y="2102394"/>
+            <a:ext cx="4961727" cy="2509711"/>
           </a:xfrm>
           <a:prstGeom prst="rect">
             <a:avLst/>
@@ -5630,7 +8550,7 @@
           <a:lstStyle/>
           <a:p>
             <a:r>
-              <a:rPr lang="hu-HU" dirty="0"/>
+              <a:rPr lang="hu-HU" sz="4000" b="1" dirty="0"/>
               <a:t>Problémafelvetés</a:t>
             </a:r>
           </a:p>
@@ -5658,43 +8578,304 @@
           <a:lstStyle/>
           <a:p>
             <a:r>
-              <a:rPr lang="hu-HU" b="1" dirty="0"/>
-              <a:t>Miben illetve hogyan is segítünk pontosan az emberek, családok számára.</a:t>
-            </a:r>
-            <a:endParaRPr lang="hu-HU" dirty="0"/>
+              <a:rPr sz="2000" dirty="0"/>
+              <a:t>• </a:t>
+            </a:r>
+            <a:r>
+              <a:rPr sz="2000" b="1" dirty="0" err="1">
+                <a:solidFill>
+                  <a:schemeClr val="bg1">
+                    <a:lumMod val="50000"/>
+                  </a:schemeClr>
+                </a:solidFill>
+              </a:rPr>
+              <a:t>Miben</a:t>
+            </a:r>
+            <a:r>
+              <a:rPr sz="2000" b="1" dirty="0">
+                <a:solidFill>
+                  <a:schemeClr val="bg1">
+                    <a:lumMod val="50000"/>
+                  </a:schemeClr>
+                </a:solidFill>
+              </a:rPr>
+              <a:t> </a:t>
+            </a:r>
+            <a:r>
+              <a:rPr sz="2000" b="1" dirty="0" err="1">
+                <a:solidFill>
+                  <a:schemeClr val="bg1">
+                    <a:lumMod val="50000"/>
+                  </a:schemeClr>
+                </a:solidFill>
+              </a:rPr>
+              <a:t>illetve</a:t>
+            </a:r>
+            <a:r>
+              <a:rPr sz="2000" b="1" dirty="0">
+                <a:solidFill>
+                  <a:schemeClr val="bg1">
+                    <a:lumMod val="50000"/>
+                  </a:schemeClr>
+                </a:solidFill>
+              </a:rPr>
+              <a:t> </a:t>
+            </a:r>
+            <a:r>
+              <a:rPr sz="2000" b="1" dirty="0" err="1">
+                <a:solidFill>
+                  <a:schemeClr val="bg1">
+                    <a:lumMod val="50000"/>
+                  </a:schemeClr>
+                </a:solidFill>
+              </a:rPr>
+              <a:t>hogyan</a:t>
+            </a:r>
+            <a:r>
+              <a:rPr sz="2000" b="1" dirty="0">
+                <a:solidFill>
+                  <a:schemeClr val="bg1">
+                    <a:lumMod val="50000"/>
+                  </a:schemeClr>
+                </a:solidFill>
+              </a:rPr>
+              <a:t> is </a:t>
+            </a:r>
+            <a:r>
+              <a:rPr sz="2000" b="1" dirty="0" err="1">
+                <a:solidFill>
+                  <a:schemeClr val="bg1">
+                    <a:lumMod val="50000"/>
+                  </a:schemeClr>
+                </a:solidFill>
+              </a:rPr>
+              <a:t>segítünk</a:t>
+            </a:r>
+            <a:r>
+              <a:rPr sz="2000" b="1" dirty="0">
+                <a:solidFill>
+                  <a:schemeClr val="bg1">
+                    <a:lumMod val="50000"/>
+                  </a:schemeClr>
+                </a:solidFill>
+              </a:rPr>
+              <a:t> </a:t>
+            </a:r>
+            <a:r>
+              <a:rPr sz="2000" b="1" dirty="0" err="1">
+                <a:solidFill>
+                  <a:schemeClr val="bg1">
+                    <a:lumMod val="50000"/>
+                  </a:schemeClr>
+                </a:solidFill>
+              </a:rPr>
+              <a:t>pontosan</a:t>
+            </a:r>
+            <a:r>
+              <a:rPr sz="2000" b="1" dirty="0">
+                <a:solidFill>
+                  <a:schemeClr val="bg1">
+                    <a:lumMod val="50000"/>
+                  </a:schemeClr>
+                </a:solidFill>
+              </a:rPr>
+              <a:t> </a:t>
+            </a:r>
+            <a:r>
+              <a:rPr sz="2000" b="1" dirty="0" err="1">
+                <a:solidFill>
+                  <a:schemeClr val="bg1">
+                    <a:lumMod val="50000"/>
+                  </a:schemeClr>
+                </a:solidFill>
+              </a:rPr>
+              <a:t>az</a:t>
+            </a:r>
+            <a:r>
+              <a:rPr sz="2000" b="1" dirty="0">
+                <a:solidFill>
+                  <a:schemeClr val="bg1">
+                    <a:lumMod val="50000"/>
+                  </a:schemeClr>
+                </a:solidFill>
+              </a:rPr>
+              <a:t> </a:t>
+            </a:r>
+            <a:r>
+              <a:rPr sz="2000" b="1" dirty="0" err="1">
+                <a:solidFill>
+                  <a:schemeClr val="bg1">
+                    <a:lumMod val="50000"/>
+                  </a:schemeClr>
+                </a:solidFill>
+              </a:rPr>
+              <a:t>emberek</a:t>
+            </a:r>
+            <a:r>
+              <a:rPr sz="2000" b="1" dirty="0">
+                <a:solidFill>
+                  <a:schemeClr val="bg1">
+                    <a:lumMod val="50000"/>
+                  </a:schemeClr>
+                </a:solidFill>
+              </a:rPr>
+              <a:t>, </a:t>
+            </a:r>
+            <a:r>
+              <a:rPr sz="2000" b="1" dirty="0" err="1">
+                <a:solidFill>
+                  <a:schemeClr val="bg1">
+                    <a:lumMod val="50000"/>
+                  </a:schemeClr>
+                </a:solidFill>
+              </a:rPr>
+              <a:t>családok</a:t>
+            </a:r>
+            <a:r>
+              <a:rPr sz="2000" b="1" dirty="0">
+                <a:solidFill>
+                  <a:schemeClr val="bg1">
+                    <a:lumMod val="50000"/>
+                  </a:schemeClr>
+                </a:solidFill>
+              </a:rPr>
+              <a:t> </a:t>
+            </a:r>
+            <a:r>
+              <a:rPr sz="2000" b="1" dirty="0" err="1">
+                <a:solidFill>
+                  <a:schemeClr val="bg1">
+                    <a:lumMod val="50000"/>
+                  </a:schemeClr>
+                </a:solidFill>
+              </a:rPr>
+              <a:t>számára</a:t>
+            </a:r>
+            <a:r>
+              <a:rPr sz="2000" b="1" dirty="0">
+                <a:solidFill>
+                  <a:schemeClr val="bg1">
+                    <a:lumMod val="50000"/>
+                  </a:schemeClr>
+                </a:solidFill>
+              </a:rPr>
+              <a:t>.</a:t>
+            </a:r>
+            <a:endParaRPr lang="hu-HU" b="1" dirty="0">
+              <a:solidFill>
+                <a:schemeClr val="bg1">
+                  <a:lumMod val="50000"/>
+                </a:schemeClr>
+              </a:solidFill>
+            </a:endParaRPr>
           </a:p>
           <a:p>
             <a:pPr lvl="1"/>
             <a:r>
-              <a:rPr lang="hu-HU" dirty="0">
-                <a:solidFill>
-                  <a:srgbClr val="000000"/>
-                </a:solidFill>
-              </a:rPr>
-              <a:t>Élelmiszer-pazarlás csökkentése -&gt; Hamarosan lejáró termékekre való figyelemfelhívás</a:t>
-            </a:r>
+              <a:rPr sz="2000" dirty="0"/>
+              <a:t>• </a:t>
+            </a:r>
+            <a:r>
+              <a:rPr sz="2000" dirty="0" err="1"/>
+              <a:t>Élelmiszer-pazarlás</a:t>
+            </a:r>
+            <a:r>
+              <a:rPr sz="2000" dirty="0"/>
+              <a:t> </a:t>
+            </a:r>
+            <a:r>
+              <a:rPr sz="2000" dirty="0" err="1"/>
+              <a:t>csökkentése</a:t>
+            </a:r>
+            <a:r>
+              <a:rPr sz="2000" dirty="0"/>
+              <a:t> -&gt; </a:t>
+            </a:r>
+            <a:r>
+              <a:rPr sz="2000" dirty="0" err="1"/>
+              <a:t>Hamarosan</a:t>
+            </a:r>
+            <a:r>
+              <a:rPr sz="2000" dirty="0"/>
+              <a:t> </a:t>
+            </a:r>
+            <a:r>
+              <a:rPr sz="2000" dirty="0" err="1"/>
+              <a:t>lejáró</a:t>
+            </a:r>
+            <a:r>
+              <a:rPr sz="2000" dirty="0"/>
+              <a:t> </a:t>
+            </a:r>
+            <a:r>
+              <a:rPr sz="2000" dirty="0" err="1"/>
+              <a:t>termékekre</a:t>
+            </a:r>
+            <a:r>
+              <a:rPr sz="2000" dirty="0"/>
+              <a:t> </a:t>
+            </a:r>
+            <a:r>
+              <a:rPr sz="2000" dirty="0" err="1"/>
+              <a:t>való</a:t>
+            </a:r>
+            <a:r>
+              <a:rPr sz="2000" dirty="0"/>
+              <a:t> </a:t>
+            </a:r>
+            <a:r>
+              <a:rPr sz="2000" dirty="0" err="1"/>
+              <a:t>figyelemfelhívás</a:t>
+            </a:r>
+            <a:endParaRPr sz="2000" dirty="0"/>
           </a:p>
           <a:p>
             <a:pPr lvl="1"/>
             <a:r>
-              <a:rPr lang="hu-HU" dirty="0">
-                <a:solidFill>
-                  <a:srgbClr val="000000"/>
-                </a:solidFill>
-              </a:rPr>
-              <a:t>Automatikus bevásárlólista</a:t>
-            </a:r>
+              <a:rPr sz="2000" dirty="0"/>
+              <a:t>• </a:t>
+            </a:r>
+            <a:r>
+              <a:rPr sz="2000" dirty="0" err="1"/>
+              <a:t>Automatikus</a:t>
+            </a:r>
+            <a:r>
+              <a:rPr sz="2000" dirty="0"/>
+              <a:t> </a:t>
+            </a:r>
+            <a:r>
+              <a:rPr sz="2000" dirty="0" err="1"/>
+              <a:t>bevásárlólista</a:t>
+            </a:r>
+            <a:endParaRPr sz="2000" dirty="0"/>
           </a:p>
           <a:p>
             <a:pPr lvl="1"/>
             <a:r>
-              <a:rPr lang="hu-HU" dirty="0">
-                <a:solidFill>
-                  <a:srgbClr val="000000"/>
-                </a:solidFill>
-              </a:rPr>
-              <a:t>Recept -&gt; raktár összevetés</a:t>
-            </a:r>
+              <a:rPr sz="2000" dirty="0"/>
+              <a:t>• </a:t>
+            </a:r>
+            <a:r>
+              <a:rPr sz="2000" dirty="0" err="1"/>
+              <a:t>Recept</a:t>
+            </a:r>
+            <a:r>
+              <a:rPr sz="2000" dirty="0"/>
+              <a:t> -&gt; </a:t>
+            </a:r>
+            <a:r>
+              <a:rPr sz="2000" dirty="0" err="1"/>
+              <a:t>raktár</a:t>
+            </a:r>
+            <a:r>
+              <a:rPr sz="2000" dirty="0"/>
+              <a:t> </a:t>
+            </a:r>
+            <a:r>
+              <a:rPr sz="2000" dirty="0" err="1"/>
+              <a:t>összevetés</a:t>
+            </a:r>
+            <a:endParaRPr sz="2000" dirty="0"/>
           </a:p>
           <a:p>
             <a:pPr lvl="1"/>
@@ -5921,7 +9102,7 @@
           <a:lstStyle/>
           <a:p>
             <a:r>
-              <a:rPr lang="hu-HU" dirty="0"/>
+              <a:rPr lang="hu-HU" sz="4000" b="1" dirty="0"/>
               <a:t>Megoldás</a:t>
             </a:r>
           </a:p>
@@ -5949,22 +9130,46 @@
           <a:lstStyle/>
           <a:p>
             <a:r>
-              <a:rPr lang="hu-HU" b="1" dirty="0" err="1"/>
-              <a:t>Magic</a:t>
-            </a:r>
-            <a:r>
-              <a:rPr lang="hu-HU" b="1" dirty="0"/>
-              <a:t> </a:t>
-            </a:r>
-            <a:r>
-              <a:rPr lang="hu-HU" b="1" dirty="0" err="1"/>
-              <a:t>Fridge</a:t>
-            </a:r>
-            <a:r>
-              <a:rPr lang="hu-HU" b="1" dirty="0"/>
-              <a:t> – a „megoldás”</a:t>
-            </a:r>
-            <a:endParaRPr lang="hu-HU" dirty="0"/>
+              <a:rPr sz="2000" dirty="0"/>
+              <a:t>• </a:t>
+            </a:r>
+            <a:r>
+              <a:rPr sz="2000" b="1" dirty="0">
+                <a:solidFill>
+                  <a:schemeClr val="bg1">
+                    <a:lumMod val="50000"/>
+                  </a:schemeClr>
+                </a:solidFill>
+              </a:rPr>
+              <a:t>Magic Fridge – a „</a:t>
+            </a:r>
+            <a:r>
+              <a:rPr sz="2000" b="1" dirty="0" err="1">
+                <a:solidFill>
+                  <a:schemeClr val="bg1">
+                    <a:lumMod val="50000"/>
+                  </a:schemeClr>
+                </a:solidFill>
+              </a:rPr>
+              <a:t>megoldás</a:t>
+            </a:r>
+            <a:r>
+              <a:rPr sz="2000" b="1" dirty="0">
+                <a:solidFill>
+                  <a:schemeClr val="bg1">
+                    <a:lumMod val="50000"/>
+                  </a:schemeClr>
+                </a:solidFill>
+              </a:rPr>
+              <a:t>”</a:t>
+            </a:r>
+            <a:endParaRPr lang="hu-HU" b="1" dirty="0">
+              <a:solidFill>
+                <a:schemeClr val="bg1">
+                  <a:lumMod val="50000"/>
+                </a:schemeClr>
+              </a:solidFill>
+            </a:endParaRPr>
           </a:p>
           <a:p>
             <a:pPr lvl="1">
@@ -5972,13 +9177,30 @@
               <a:buChar char="•"/>
             </a:pPr>
             <a:r>
-              <a:rPr lang="hu-HU" dirty="0">
-                <a:solidFill>
-                  <a:srgbClr val="000000"/>
-                </a:solidFill>
-              </a:rPr>
-              <a:t>Háztartás + Raktár + Bevásárlólista</a:t>
-            </a:r>
+              <a:rPr sz="2000" dirty="0"/>
+              <a:t> </a:t>
+            </a:r>
+            <a:r>
+              <a:rPr sz="2000" dirty="0" err="1"/>
+              <a:t>Háztartás</a:t>
+            </a:r>
+            <a:r>
+              <a:rPr sz="2000" dirty="0"/>
+              <a:t> + </a:t>
+            </a:r>
+            <a:r>
+              <a:rPr sz="2000" dirty="0" err="1"/>
+              <a:t>Raktár</a:t>
+            </a:r>
+            <a:r>
+              <a:rPr sz="2000" dirty="0"/>
+              <a:t> + </a:t>
+            </a:r>
+            <a:r>
+              <a:rPr sz="2000" dirty="0" err="1"/>
+              <a:t>Bevásárlólista</a:t>
+            </a:r>
+            <a:endParaRPr sz="2000" dirty="0"/>
           </a:p>
           <a:p>
             <a:pPr lvl="1">
@@ -5986,13 +9208,22 @@
               <a:buChar char="•"/>
             </a:pPr>
             <a:r>
-              <a:rPr lang="hu-HU" dirty="0">
-                <a:solidFill>
-                  <a:srgbClr val="000000"/>
-                </a:solidFill>
-              </a:rPr>
-              <a:t>Automatikus logika</a:t>
-            </a:r>
+              <a:rPr sz="2000" dirty="0"/>
+              <a:t> </a:t>
+            </a:r>
+            <a:r>
+              <a:rPr sz="2000" dirty="0" err="1"/>
+              <a:t>Automatikus</a:t>
+            </a:r>
+            <a:r>
+              <a:rPr sz="2000" dirty="0"/>
+              <a:t> </a:t>
+            </a:r>
+            <a:r>
+              <a:rPr sz="2000" dirty="0" err="1"/>
+              <a:t>logika</a:t>
+            </a:r>
+            <a:endParaRPr sz="2000" dirty="0"/>
           </a:p>
           <a:p>
             <a:pPr lvl="1">
@@ -6000,13 +9231,30 @@
               <a:buChar char="•"/>
             </a:pPr>
             <a:r>
-              <a:rPr lang="hu-HU" dirty="0">
-                <a:solidFill>
-                  <a:srgbClr val="000000"/>
-                </a:solidFill>
-              </a:rPr>
-              <a:t>Több felhasználós működés</a:t>
-            </a:r>
+              <a:rPr sz="2000" dirty="0"/>
+              <a:t> </a:t>
+            </a:r>
+            <a:r>
+              <a:rPr sz="2000" dirty="0" err="1"/>
+              <a:t>Több</a:t>
+            </a:r>
+            <a:r>
+              <a:rPr sz="2000" dirty="0"/>
+              <a:t> </a:t>
+            </a:r>
+            <a:r>
+              <a:rPr sz="2000" dirty="0" err="1"/>
+              <a:t>felhasználós</a:t>
+            </a:r>
+            <a:r>
+              <a:rPr sz="2000" dirty="0"/>
+              <a:t> </a:t>
+            </a:r>
+            <a:r>
+              <a:rPr sz="2000" dirty="0" err="1"/>
+              <a:t>működés</a:t>
+            </a:r>
+            <a:endParaRPr sz="2000" dirty="0"/>
           </a:p>
           <a:p>
             <a:endParaRPr lang="hu-HU" dirty="0"/>
@@ -6071,8 +9319,8 @@
         </p:blipFill>
         <p:spPr>
           <a:xfrm>
-            <a:off x="5445200" y="275884"/>
-            <a:ext cx="3717924" cy="2745544"/>
+            <a:off x="6130717" y="82159"/>
+            <a:ext cx="3099022" cy="2288509"/>
           </a:xfrm>
           <a:prstGeom prst="rect">
             <a:avLst/>
@@ -6101,8 +9349,8 @@
         </p:blipFill>
         <p:spPr>
           <a:xfrm>
-            <a:off x="8597901" y="1805153"/>
-            <a:ext cx="3594099" cy="2805080"/>
+            <a:off x="8624371" y="1701201"/>
+            <a:ext cx="2559639" cy="1997717"/>
           </a:xfrm>
           <a:prstGeom prst="rect">
             <a:avLst/>
@@ -6131,8 +9379,8 @@
         </p:blipFill>
         <p:spPr>
           <a:xfrm>
-            <a:off x="4695691" y="3021428"/>
-            <a:ext cx="3904629" cy="2828718"/>
+            <a:off x="5462888" y="2370668"/>
+            <a:ext cx="3158949" cy="2288509"/>
           </a:xfrm>
           <a:prstGeom prst="rect">
             <a:avLst/>
@@ -6497,7 +9745,7 @@
           <a:lstStyle/>
           <a:p>
             <a:r>
-              <a:rPr lang="hu-HU" dirty="0"/>
+              <a:rPr lang="hu-HU" sz="4000" b="1" dirty="0"/>
               <a:t>Architektúra áttekintés</a:t>
             </a:r>
           </a:p>
@@ -6525,10 +9773,76 @@
           <a:lstStyle/>
           <a:p>
             <a:r>
-              <a:rPr lang="hu-HU" b="1" dirty="0"/>
-              <a:t>Architektúra összeállítása a programunkban:</a:t>
-            </a:r>
-            <a:endParaRPr lang="hu-HU" dirty="0"/>
+              <a:rPr sz="2000" dirty="0"/>
+              <a:t>• </a:t>
+            </a:r>
+            <a:r>
+              <a:rPr sz="2000" b="1" dirty="0" err="1">
+                <a:solidFill>
+                  <a:schemeClr val="bg1">
+                    <a:lumMod val="50000"/>
+                  </a:schemeClr>
+                </a:solidFill>
+              </a:rPr>
+              <a:t>Architektúra</a:t>
+            </a:r>
+            <a:r>
+              <a:rPr sz="2000" b="1" dirty="0">
+                <a:solidFill>
+                  <a:schemeClr val="bg1">
+                    <a:lumMod val="50000"/>
+                  </a:schemeClr>
+                </a:solidFill>
+              </a:rPr>
+              <a:t> </a:t>
+            </a:r>
+            <a:r>
+              <a:rPr sz="2000" b="1" dirty="0" err="1">
+                <a:solidFill>
+                  <a:schemeClr val="bg1">
+                    <a:lumMod val="50000"/>
+                  </a:schemeClr>
+                </a:solidFill>
+              </a:rPr>
+              <a:t>összeállítása</a:t>
+            </a:r>
+            <a:r>
+              <a:rPr sz="2000" b="1" dirty="0">
+                <a:solidFill>
+                  <a:schemeClr val="bg1">
+                    <a:lumMod val="50000"/>
+                  </a:schemeClr>
+                </a:solidFill>
+              </a:rPr>
+              <a:t> a </a:t>
+            </a:r>
+            <a:r>
+              <a:rPr sz="2000" b="1" dirty="0" err="1">
+                <a:solidFill>
+                  <a:schemeClr val="bg1">
+                    <a:lumMod val="50000"/>
+                  </a:schemeClr>
+                </a:solidFill>
+              </a:rPr>
+              <a:t>programunkban</a:t>
+            </a:r>
+            <a:r>
+              <a:rPr sz="2000" b="1" dirty="0">
+                <a:solidFill>
+                  <a:schemeClr val="bg1">
+                    <a:lumMod val="50000"/>
+                  </a:schemeClr>
+                </a:solidFill>
+              </a:rPr>
+              <a:t>:</a:t>
+            </a:r>
+            <a:endParaRPr lang="hu-HU" b="1" dirty="0">
+              <a:solidFill>
+                <a:schemeClr val="bg1">
+                  <a:lumMod val="50000"/>
+                </a:schemeClr>
+              </a:solidFill>
+            </a:endParaRPr>
           </a:p>
           <a:p>
             <a:pPr lvl="1">
@@ -6536,12 +9850,8 @@
               <a:buChar char="•"/>
             </a:pPr>
             <a:r>
-              <a:rPr lang="hu-HU" dirty="0">
-                <a:solidFill>
-                  <a:srgbClr val="000000"/>
-                </a:solidFill>
-              </a:rPr>
-              <a:t>Frontend</a:t>
+              <a:rPr sz="2000" dirty="0"/>
+              <a:t> Frontend</a:t>
             </a:r>
           </a:p>
           <a:p>
@@ -6550,12 +9860,8 @@
               <a:buChar char="•"/>
             </a:pPr>
             <a:r>
-              <a:rPr lang="hu-HU" dirty="0">
-                <a:solidFill>
-                  <a:srgbClr val="000000"/>
-                </a:solidFill>
-              </a:rPr>
-              <a:t>Backend</a:t>
+              <a:rPr sz="2000" dirty="0"/>
+              <a:t> Backend</a:t>
             </a:r>
           </a:p>
           <a:p>
@@ -6564,13 +9870,14 @@
               <a:buChar char="•"/>
             </a:pPr>
             <a:r>
-              <a:rPr lang="hu-HU" dirty="0">
-                <a:solidFill>
-                  <a:srgbClr val="000000"/>
-                </a:solidFill>
-              </a:rPr>
+              <a:rPr sz="2000" dirty="0"/>
+              <a:t> </a:t>
+            </a:r>
+            <a:r>
+              <a:rPr sz="2000" dirty="0" err="1"/>
               <a:t>Adatbázis</a:t>
             </a:r>
+            <a:endParaRPr sz="2000" dirty="0"/>
           </a:p>
           <a:p>
             <a:pPr lvl="1">
@@ -6578,21 +9885,14 @@
               <a:buChar char="•"/>
             </a:pPr>
             <a:r>
-              <a:rPr lang="hu-HU" dirty="0" err="1">
-                <a:solidFill>
-                  <a:srgbClr val="000000"/>
-                </a:solidFill>
-              </a:rPr>
-              <a:t>Middleware</a:t>
-            </a:r>
-            <a:r>
-              <a:rPr lang="hu-HU" dirty="0">
-                <a:solidFill>
-                  <a:srgbClr val="000000"/>
-                </a:solidFill>
-              </a:rPr>
-              <a:t> védelem</a:t>
-            </a:r>
+              <a:rPr sz="2000" dirty="0"/>
+              <a:t> Middleware </a:t>
+            </a:r>
+            <a:r>
+              <a:rPr sz="2000" dirty="0" err="1"/>
+              <a:t>védelem</a:t>
+            </a:r>
+            <a:endParaRPr sz="2000" dirty="0"/>
           </a:p>
           <a:p>
             <a:pPr lvl="1">
@@ -6600,12 +9900,48 @@
               <a:buChar char="•"/>
             </a:pPr>
             <a:r>
-              <a:rPr lang="hu-HU" dirty="0">
-                <a:solidFill>
-                  <a:srgbClr val="000000"/>
-                </a:solidFill>
-              </a:rPr>
-              <a:t>Külső API integráció(receptekhez való hozzáférés)</a:t>
+              <a:rPr sz="2000" dirty="0"/>
+              <a:t> </a:t>
+            </a:r>
+            <a:r>
+              <a:rPr sz="2000" dirty="0" err="1"/>
+              <a:t>Külső</a:t>
+            </a:r>
+            <a:r>
+              <a:rPr sz="2000" dirty="0"/>
+              <a:t> API </a:t>
+            </a:r>
+            <a:r>
+              <a:rPr sz="2000" dirty="0" err="1"/>
+              <a:t>integráció</a:t>
+            </a:r>
+            <a:r>
+              <a:rPr sz="2000" dirty="0"/>
+              <a:t>(</a:t>
+            </a:r>
+            <a:r>
+              <a:rPr sz="2000" dirty="0" err="1"/>
+              <a:t>receptekhez</a:t>
+            </a:r>
+            <a:r>
+              <a:rPr sz="2000" dirty="0"/>
+              <a:t> </a:t>
+            </a:r>
+            <a:r>
+              <a:rPr sz="2000" dirty="0" err="1"/>
+              <a:t>való</a:t>
+            </a:r>
+            <a:r>
+              <a:rPr sz="2000" dirty="0"/>
+              <a:t> </a:t>
+            </a:r>
+            <a:r>
+              <a:rPr sz="2000" dirty="0" err="1"/>
+              <a:t>hozzáférés</a:t>
+            </a:r>
+            <a:r>
+              <a:rPr sz="2000" dirty="0"/>
+              <a:t>)</a:t>
             </a:r>
           </a:p>
           <a:p>
@@ -6614,13 +9950,14 @@
               <a:buChar char="•"/>
             </a:pPr>
             <a:r>
-              <a:rPr lang="hu-HU" dirty="0">
-                <a:solidFill>
-                  <a:srgbClr val="000000"/>
-                </a:solidFill>
-              </a:rPr>
+              <a:rPr sz="2000" dirty="0"/>
+              <a:t> </a:t>
+            </a:r>
+            <a:r>
+              <a:rPr sz="2000" dirty="0" err="1"/>
               <a:t>Adatszerkezet</a:t>
             </a:r>
+            <a:endParaRPr sz="2000" dirty="0"/>
           </a:p>
           <a:p>
             <a:endParaRPr lang="hu-HU" dirty="0"/>
@@ -6990,7 +10327,7 @@
           <a:lstStyle/>
           <a:p>
             <a:r>
-              <a:rPr lang="hu-HU" dirty="0"/>
+              <a:rPr lang="hu-HU" sz="4000" b="1" dirty="0"/>
               <a:t>Főbb modulok</a:t>
             </a:r>
           </a:p>
@@ -7018,8 +10355,54 @@
           <a:lstStyle/>
           <a:p>
             <a:r>
-              <a:rPr lang="hu-HU" dirty="0"/>
-              <a:t>Rendszer funkciók:</a:t>
+              <a:rPr sz="2000" b="1" dirty="0">
+                <a:solidFill>
+                  <a:schemeClr val="bg1">
+                    <a:lumMod val="50000"/>
+                  </a:schemeClr>
+                </a:solidFill>
+              </a:rPr>
+              <a:t>• </a:t>
+            </a:r>
+            <a:r>
+              <a:rPr sz="2000" b="1" dirty="0" err="1">
+                <a:solidFill>
+                  <a:schemeClr val="bg1">
+                    <a:lumMod val="50000"/>
+                  </a:schemeClr>
+                </a:solidFill>
+              </a:rPr>
+              <a:t>Rendszer</a:t>
+            </a:r>
+            <a:r>
+              <a:rPr sz="2000" b="1" dirty="0">
+                <a:solidFill>
+                  <a:schemeClr val="bg1">
+                    <a:lumMod val="50000"/>
+                  </a:schemeClr>
+                </a:solidFill>
+              </a:rPr>
+              <a:t> </a:t>
+            </a:r>
+            <a:r>
+              <a:rPr sz="2000" b="1" dirty="0" err="1">
+                <a:solidFill>
+                  <a:schemeClr val="bg1">
+                    <a:lumMod val="50000"/>
+                  </a:schemeClr>
+                </a:solidFill>
+              </a:rPr>
+              <a:t>funkciók</a:t>
+            </a:r>
+            <a:r>
+              <a:rPr sz="2000" b="1" dirty="0">
+                <a:solidFill>
+                  <a:schemeClr val="bg1">
+                    <a:lumMod val="50000"/>
+                  </a:schemeClr>
+                </a:solidFill>
+              </a:rPr>
+              <a:t>:</a:t>
             </a:r>
           </a:p>
           <a:p>
@@ -7028,12 +10411,16 @@
               <a:buChar char="•"/>
             </a:pPr>
             <a:r>
-              <a:rPr lang="hu-HU" dirty="0">
-                <a:solidFill>
-                  <a:srgbClr val="000000"/>
-                </a:solidFill>
-              </a:rPr>
-              <a:t>Auth (regisztráció / login / logout)</a:t>
+              <a:rPr sz="2000" dirty="0"/>
+              <a:t> Auth (</a:t>
+            </a:r>
+            <a:r>
+              <a:rPr sz="2000" dirty="0" err="1"/>
+              <a:t>regisztráció</a:t>
+            </a:r>
+            <a:r>
+              <a:rPr sz="2000" dirty="0"/>
+              <a:t> / login / logout)</a:t>
             </a:r>
           </a:p>
           <a:p>
@@ -7042,13 +10429,22 @@
               <a:buChar char="•"/>
             </a:pPr>
             <a:r>
-              <a:rPr lang="hu-HU" dirty="0">
-                <a:solidFill>
-                  <a:srgbClr val="000000"/>
-                </a:solidFill>
-              </a:rPr>
-              <a:t>Raktár kezelése</a:t>
-            </a:r>
+              <a:rPr sz="2000" dirty="0"/>
+              <a:t> </a:t>
+            </a:r>
+            <a:r>
+              <a:rPr sz="2000" dirty="0" err="1"/>
+              <a:t>Raktár</a:t>
+            </a:r>
+            <a:r>
+              <a:rPr sz="2000" dirty="0"/>
+              <a:t> </a:t>
+            </a:r>
+            <a:r>
+              <a:rPr sz="2000" dirty="0" err="1"/>
+              <a:t>kezelése</a:t>
+            </a:r>
+            <a:endParaRPr sz="2000" dirty="0"/>
           </a:p>
           <a:p>
             <a:pPr lvl="1">
@@ -7056,13 +10452,14 @@
               <a:buChar char="•"/>
             </a:pPr>
             <a:r>
-              <a:rPr lang="hu-HU" dirty="0">
-                <a:solidFill>
-                  <a:srgbClr val="000000"/>
-                </a:solidFill>
-              </a:rPr>
+              <a:rPr sz="2000" dirty="0"/>
+              <a:t> </a:t>
+            </a:r>
+            <a:r>
+              <a:rPr sz="2000" dirty="0" err="1"/>
               <a:t>Bevásárlólista</a:t>
             </a:r>
+            <a:endParaRPr sz="2000" dirty="0"/>
           </a:p>
           <a:p>
             <a:pPr lvl="1">
@@ -7070,13 +10467,22 @@
               <a:buChar char="•"/>
             </a:pPr>
             <a:r>
-              <a:rPr lang="hu-HU" dirty="0">
-                <a:solidFill>
-                  <a:srgbClr val="000000"/>
-                </a:solidFill>
-              </a:rPr>
-              <a:t>Recept ellenőrzés</a:t>
-            </a:r>
+              <a:rPr sz="2000" dirty="0"/>
+              <a:t> </a:t>
+            </a:r>
+            <a:r>
+              <a:rPr sz="2000" dirty="0" err="1"/>
+              <a:t>Recept</a:t>
+            </a:r>
+            <a:r>
+              <a:rPr sz="2000" dirty="0"/>
+              <a:t> </a:t>
+            </a:r>
+            <a:r>
+              <a:rPr sz="2000" dirty="0" err="1"/>
+              <a:t>ellenőrzés</a:t>
+            </a:r>
+            <a:endParaRPr sz="2000" dirty="0"/>
           </a:p>
           <a:p>
             <a:pPr lvl="1">
@@ -7084,13 +10490,22 @@
               <a:buChar char="•"/>
             </a:pPr>
             <a:r>
-              <a:rPr lang="hu-HU" dirty="0">
-                <a:solidFill>
-                  <a:srgbClr val="000000"/>
-                </a:solidFill>
-              </a:rPr>
-              <a:t>Háztartás kezelés</a:t>
-            </a:r>
+              <a:rPr sz="2000" dirty="0"/>
+              <a:t> </a:t>
+            </a:r>
+            <a:r>
+              <a:rPr sz="2000" dirty="0" err="1"/>
+              <a:t>Háztartás</a:t>
+            </a:r>
+            <a:r>
+              <a:rPr sz="2000" dirty="0"/>
+              <a:t> </a:t>
+            </a:r>
+            <a:r>
+              <a:rPr sz="2000" dirty="0" err="1"/>
+              <a:t>kezelés</a:t>
+            </a:r>
+            <a:endParaRPr sz="2000" dirty="0"/>
           </a:p>
           <a:p>
             <a:pPr lvl="1"/>
@@ -7582,7 +10997,7 @@
           <a:lstStyle/>
           <a:p>
             <a:r>
-              <a:rPr lang="hu-HU" dirty="0"/>
+              <a:rPr lang="hu-HU" sz="4000" b="1" dirty="0"/>
               <a:t>Bevásárlólista logika</a:t>
             </a:r>
           </a:p>
@@ -7610,8 +11025,48 @@
           <a:lstStyle/>
           <a:p>
             <a:r>
-              <a:rPr lang="hu-HU" dirty="0"/>
-              <a:t>Fő lépések:</a:t>
+              <a:rPr sz="2000" dirty="0"/>
+              <a:t>• </a:t>
+            </a:r>
+            <a:r>
+              <a:rPr sz="2000" b="1" dirty="0" err="1">
+                <a:solidFill>
+                  <a:schemeClr val="bg1">
+                    <a:lumMod val="50000"/>
+                  </a:schemeClr>
+                </a:solidFill>
+              </a:rPr>
+              <a:t>Fő</a:t>
+            </a:r>
+            <a:r>
+              <a:rPr sz="2000" b="1" dirty="0">
+                <a:solidFill>
+                  <a:schemeClr val="bg1">
+                    <a:lumMod val="50000"/>
+                  </a:schemeClr>
+                </a:solidFill>
+              </a:rPr>
+              <a:t> </a:t>
+            </a:r>
+            <a:r>
+              <a:rPr sz="2000" b="1" dirty="0" err="1">
+                <a:solidFill>
+                  <a:schemeClr val="bg1">
+                    <a:lumMod val="50000"/>
+                  </a:schemeClr>
+                </a:solidFill>
+              </a:rPr>
+              <a:t>lépések</a:t>
+            </a:r>
+            <a:r>
+              <a:rPr sz="2000" b="1" dirty="0">
+                <a:solidFill>
+                  <a:schemeClr val="bg1">
+                    <a:lumMod val="50000"/>
+                  </a:schemeClr>
+                </a:solidFill>
+              </a:rPr>
+              <a:t>:</a:t>
             </a:r>
           </a:p>
           <a:p>
@@ -7620,13 +11075,14 @@
               <a:buChar char="•"/>
             </a:pPr>
             <a:r>
-              <a:rPr lang="hu-HU" dirty="0">
-                <a:solidFill>
-                  <a:srgbClr val="000000"/>
-                </a:solidFill>
-              </a:rPr>
-              <a:t>Elem listázása</a:t>
-            </a:r>
+              <a:rPr sz="2000" dirty="0"/>
+              <a:t> Elem </a:t>
+            </a:r>
+            <a:r>
+              <a:rPr sz="2000" dirty="0" err="1"/>
+              <a:t>listázása</a:t>
+            </a:r>
+            <a:endParaRPr sz="2000" dirty="0"/>
           </a:p>
           <a:p>
             <a:pPr lvl="1">
@@ -7634,13 +11090,22 @@
               <a:buChar char="•"/>
             </a:pPr>
             <a:r>
-              <a:rPr lang="hu-HU" dirty="0">
-                <a:solidFill>
-                  <a:srgbClr val="000000"/>
-                </a:solidFill>
-              </a:rPr>
-              <a:t>Elemszám ellenőrzés</a:t>
-            </a:r>
+              <a:rPr sz="2000" dirty="0"/>
+              <a:t> </a:t>
+            </a:r>
+            <a:r>
+              <a:rPr sz="2000" dirty="0" err="1"/>
+              <a:t>Elemszám</a:t>
+            </a:r>
+            <a:r>
+              <a:rPr sz="2000" dirty="0"/>
+              <a:t> </a:t>
+            </a:r>
+            <a:r>
+              <a:rPr sz="2000" dirty="0" err="1"/>
+              <a:t>ellenőrzés</a:t>
+            </a:r>
+            <a:endParaRPr sz="2000" dirty="0"/>
           </a:p>
           <a:p>
             <a:pPr lvl="1">
@@ -7648,13 +11113,22 @@
               <a:buChar char="•"/>
             </a:pPr>
             <a:r>
-              <a:rPr lang="hu-HU" dirty="0">
-                <a:solidFill>
-                  <a:srgbClr val="000000"/>
-                </a:solidFill>
-              </a:rPr>
-              <a:t>Hiány listázás</a:t>
-            </a:r>
+              <a:rPr sz="2000" dirty="0"/>
+              <a:t> </a:t>
+            </a:r>
+            <a:r>
+              <a:rPr sz="2000" dirty="0" err="1"/>
+              <a:t>Hiány</a:t>
+            </a:r>
+            <a:r>
+              <a:rPr sz="2000" dirty="0"/>
+              <a:t> </a:t>
+            </a:r>
+            <a:r>
+              <a:rPr sz="2000" dirty="0" err="1"/>
+              <a:t>listázás</a:t>
+            </a:r>
+            <a:endParaRPr sz="2000" dirty="0"/>
           </a:p>
           <a:p>
             <a:endParaRPr lang="hu-HU" dirty="0"/>
@@ -7719,7 +11193,7 @@
         </p:blipFill>
         <p:spPr>
           <a:xfrm>
-            <a:off x="4264898" y="1020808"/>
+            <a:off x="4537614" y="1020808"/>
             <a:ext cx="6847602" cy="1038288"/>
           </a:xfrm>
           <a:prstGeom prst="rect">
@@ -7749,7 +11223,7 @@
         </p:blipFill>
         <p:spPr>
           <a:xfrm>
-            <a:off x="4264898" y="2059096"/>
+            <a:off x="4537614" y="2059096"/>
             <a:ext cx="6847602" cy="583014"/>
           </a:xfrm>
           <a:prstGeom prst="rect">
@@ -8002,62 +11476,12 @@
           <a:chExt cx="0" cy="0"/>
         </a:xfrm>
       </p:grpSpPr>
-      <p:sp>
-        <p:nvSpPr>
-          <p:cNvPr id="2" name="Cím 1">
+      <p:pic>
+        <p:nvPicPr>
+          <p:cNvPr id="7" name="Kép 6">
             <a:extLst>
               <a:ext uri="{FF2B5EF4-FFF2-40B4-BE49-F238E27FC236}">
-                <a16:creationId xmlns:a16="http://schemas.microsoft.com/office/drawing/2014/main" id="{491BD9F3-6937-47BC-8429-B98D246CD409}"/>
-              </a:ext>
-            </a:extLst>
-          </p:cNvPr>
-          <p:cNvSpPr>
-            <a:spLocks noGrp="1"/>
-          </p:cNvSpPr>
-          <p:nvPr>
-            <p:ph type="title"/>
-          </p:nvPr>
-        </p:nvSpPr>
-        <p:spPr/>
-        <p:txBody>
-          <a:bodyPr/>
-          <a:lstStyle/>
-          <a:p>
-            <a:endParaRPr lang="hu-HU" dirty="0"/>
-          </a:p>
-        </p:txBody>
-      </p:sp>
-      <p:sp>
-        <p:nvSpPr>
-          <p:cNvPr id="3" name="Tartalom helye 2">
-            <a:extLst>
-              <a:ext uri="{FF2B5EF4-FFF2-40B4-BE49-F238E27FC236}">
-                <a16:creationId xmlns:a16="http://schemas.microsoft.com/office/drawing/2014/main" id="{C6162B03-F2C5-4E22-A064-F67F3C4301BF}"/>
-              </a:ext>
-            </a:extLst>
-          </p:cNvPr>
-          <p:cNvSpPr>
-            <a:spLocks noGrp="1"/>
-          </p:cNvSpPr>
-          <p:nvPr>
-            <p:ph idx="1"/>
-          </p:nvPr>
-        </p:nvSpPr>
-        <p:spPr/>
-        <p:txBody>
-          <a:bodyPr/>
-          <a:lstStyle/>
-          <a:p>
-            <a:endParaRPr lang="hu-HU" dirty="0"/>
-          </a:p>
-        </p:txBody>
-      </p:sp>
-      <p:pic>
-        <p:nvPicPr>
-          <p:cNvPr id="5" name="Kép 4">
-            <a:extLst>
-              <a:ext uri="{FF2B5EF4-FFF2-40B4-BE49-F238E27FC236}">
-                <a16:creationId xmlns:a16="http://schemas.microsoft.com/office/drawing/2014/main" id="{1082D8D0-0171-42A2-8393-3126257C7B64}"/>
+                <a16:creationId xmlns:a16="http://schemas.microsoft.com/office/drawing/2014/main" id="{747DB0FE-6E96-4C4D-AC6D-21137E7F3953}"/>
               </a:ext>
             </a:extLst>
           </p:cNvPr>
@@ -8080,20 +11504,210 @@
         </p:blipFill>
         <p:spPr>
           <a:xfrm>
-            <a:off x="-1367" y="-8466"/>
-            <a:ext cx="903213" cy="872068"/>
+            <a:off x="7333247" y="499535"/>
+            <a:ext cx="2901615" cy="1934410"/>
           </a:xfrm>
           <a:prstGeom prst="rect">
             <a:avLst/>
           </a:prstGeom>
         </p:spPr>
       </p:pic>
+      <p:sp>
+        <p:nvSpPr>
+          <p:cNvPr id="2" name="Title 1"/>
+          <p:cNvSpPr>
+            <a:spLocks noGrp="1"/>
+          </p:cNvSpPr>
+          <p:nvPr>
+            <p:ph type="title"/>
+          </p:nvPr>
+        </p:nvSpPr>
+        <p:spPr/>
+        <p:txBody>
+          <a:bodyPr/>
+          <a:lstStyle/>
+          <a:p>
+            <a:r>
+              <a:rPr sz="4000" b="1" dirty="0" err="1"/>
+              <a:t>Célközönség</a:t>
+            </a:r>
+            <a:endParaRPr sz="4000" b="1" dirty="0"/>
+          </a:p>
+        </p:txBody>
+      </p:sp>
+      <p:sp>
+        <p:nvSpPr>
+          <p:cNvPr id="3" name="Content Placeholder 2"/>
+          <p:cNvSpPr>
+            <a:spLocks noGrp="1"/>
+          </p:cNvSpPr>
+          <p:nvPr>
+            <p:ph idx="1"/>
+          </p:nvPr>
+        </p:nvSpPr>
+        <p:spPr/>
+        <p:txBody>
+          <a:bodyPr/>
+          <a:lstStyle/>
+          <a:p>
+            <a:r>
+              <a:rPr sz="2000" dirty="0"/>
+              <a:t> </a:t>
+            </a:r>
+            <a:r>
+              <a:rPr sz="2000" dirty="0" err="1"/>
+              <a:t>Családok</a:t>
+            </a:r>
+            <a:r>
+              <a:rPr sz="2000" dirty="0"/>
+              <a:t> </a:t>
+            </a:r>
+            <a:r>
+              <a:rPr sz="2000" dirty="0" err="1"/>
+              <a:t>és</a:t>
+            </a:r>
+            <a:r>
+              <a:rPr sz="2000" dirty="0"/>
+              <a:t> </a:t>
+            </a:r>
+            <a:r>
+              <a:rPr sz="2000" dirty="0" err="1"/>
+              <a:t>többfős</a:t>
+            </a:r>
+            <a:r>
+              <a:rPr sz="2000" dirty="0"/>
+              <a:t> </a:t>
+            </a:r>
+            <a:r>
+              <a:rPr sz="2000" dirty="0" err="1"/>
+              <a:t>háztartások</a:t>
+            </a:r>
+            <a:endParaRPr sz="2000" dirty="0"/>
+          </a:p>
+          <a:p>
+            <a:r>
+              <a:rPr sz="2000" dirty="0"/>
+              <a:t> </a:t>
+            </a:r>
+            <a:r>
+              <a:rPr sz="2000" dirty="0" err="1"/>
+              <a:t>Diákok</a:t>
+            </a:r>
+            <a:r>
+              <a:rPr sz="2000" dirty="0"/>
+              <a:t> / </a:t>
+            </a:r>
+            <a:r>
+              <a:rPr sz="2000" dirty="0" err="1"/>
+              <a:t>közös</a:t>
+            </a:r>
+            <a:r>
+              <a:rPr sz="2000" dirty="0"/>
+              <a:t> </a:t>
+            </a:r>
+            <a:r>
+              <a:rPr sz="2000" dirty="0" err="1"/>
+              <a:t>albérletek</a:t>
+            </a:r>
+            <a:endParaRPr sz="2000" dirty="0"/>
+          </a:p>
+          <a:p>
+            <a:r>
+              <a:rPr lang="hu-HU" dirty="0"/>
+              <a:t> </a:t>
+            </a:r>
+            <a:r>
+              <a:rPr sz="2000" dirty="0" err="1"/>
+              <a:t>Elfoglalt</a:t>
+            </a:r>
+            <a:r>
+              <a:rPr sz="2000" dirty="0"/>
+              <a:t> </a:t>
+            </a:r>
+            <a:r>
+              <a:rPr sz="2000" dirty="0" err="1"/>
+              <a:t>emberek</a:t>
+            </a:r>
+            <a:r>
+              <a:rPr sz="2000" dirty="0"/>
+              <a:t> </a:t>
+            </a:r>
+            <a:r>
+              <a:rPr sz="2000" dirty="0" err="1"/>
+              <a:t>akik</a:t>
+            </a:r>
+            <a:r>
+              <a:rPr sz="2000" dirty="0"/>
+              <a:t> </a:t>
+            </a:r>
+            <a:r>
+              <a:rPr sz="2000" dirty="0" err="1"/>
+              <a:t>rendszerezni</a:t>
+            </a:r>
+            <a:r>
+              <a:rPr sz="2000" dirty="0"/>
+              <a:t> </a:t>
+            </a:r>
+            <a:r>
+              <a:rPr sz="2000" dirty="0" err="1"/>
+              <a:t>szeretnék</a:t>
+            </a:r>
+            <a:r>
+              <a:rPr sz="2000" dirty="0"/>
+              <a:t> </a:t>
+            </a:r>
+            <a:r>
+              <a:rPr sz="2000" dirty="0" err="1"/>
+              <a:t>az</a:t>
+            </a:r>
+            <a:r>
+              <a:rPr sz="2000" dirty="0"/>
+              <a:t> </a:t>
+            </a:r>
+            <a:r>
+              <a:rPr sz="2000" dirty="0" err="1"/>
+              <a:t>élelmiszereket</a:t>
+            </a:r>
+            <a:endParaRPr sz="2000" dirty="0"/>
+          </a:p>
+          <a:p>
+            <a:r>
+              <a:rPr sz="2000" dirty="0"/>
+              <a:t> </a:t>
+            </a:r>
+            <a:r>
+              <a:rPr sz="2000" dirty="0" err="1"/>
+              <a:t>Fenntarthatóság</a:t>
+            </a:r>
+            <a:r>
+              <a:rPr sz="2000" dirty="0"/>
+              <a:t> </a:t>
+            </a:r>
+            <a:r>
+              <a:rPr sz="2000" dirty="0" err="1"/>
+              <a:t>iránt</a:t>
+            </a:r>
+            <a:r>
+              <a:rPr sz="2000" dirty="0"/>
+              <a:t> </a:t>
+            </a:r>
+            <a:r>
+              <a:rPr sz="2000" dirty="0" err="1"/>
+              <a:t>érdeklődő</a:t>
+            </a:r>
+            <a:r>
+              <a:rPr sz="2000" dirty="0"/>
+              <a:t> </a:t>
+            </a:r>
+            <a:r>
+              <a:rPr sz="2000" dirty="0" err="1"/>
+              <a:t>felhasználók</a:t>
+            </a:r>
+            <a:endParaRPr sz="2000" dirty="0"/>
+          </a:p>
+        </p:txBody>
+      </p:sp>
     </p:spTree>
-    <p:extLst>
-      <p:ext uri="{BB962C8B-B14F-4D97-AF65-F5344CB8AC3E}">
-        <p14:creationId xmlns:p14="http://schemas.microsoft.com/office/powerpoint/2010/main" val="2539761256"/>
-      </p:ext>
-    </p:extLst>
   </p:cSld>
   <p:clrMapOvr>
     <a:masterClrMapping/>
@@ -8123,13 +11737,7 @@
       </p:grpSpPr>
       <p:sp>
         <p:nvSpPr>
-          <p:cNvPr id="2" name="Cím 1">
-            <a:extLst>
-              <a:ext uri="{FF2B5EF4-FFF2-40B4-BE49-F238E27FC236}">
-                <a16:creationId xmlns:a16="http://schemas.microsoft.com/office/drawing/2014/main" id="{EED8A353-8955-4523-9045-1B8E71C219D5}"/>
-              </a:ext>
-            </a:extLst>
-          </p:cNvPr>
+          <p:cNvPr id="2" name="Title 1"/>
           <p:cNvSpPr>
             <a:spLocks noGrp="1"/>
           </p:cNvSpPr>
@@ -8143,21 +11751,24 @@
           <a:lstStyle/>
           <a:p>
             <a:r>
-              <a:rPr lang="hu-HU" b="1" dirty="0"/>
-              <a:t>Köszönjük a figyelmüket !</a:t>
-            </a:r>
-          </a:p>
-        </p:txBody>
-      </p:sp>
-      <p:sp>
-        <p:nvSpPr>
-          <p:cNvPr id="3" name="Tartalom helye 2">
-            <a:extLst>
-              <a:ext uri="{FF2B5EF4-FFF2-40B4-BE49-F238E27FC236}">
-                <a16:creationId xmlns:a16="http://schemas.microsoft.com/office/drawing/2014/main" id="{6087952A-AB13-47A2-9D29-B134F37974AD}"/>
-              </a:ext>
-            </a:extLst>
-          </p:cNvPr>
+              <a:rPr sz="4000" b="1" dirty="0" err="1"/>
+              <a:t>Felhasználói</a:t>
+            </a:r>
+            <a:r>
+              <a:rPr sz="4000" b="1" dirty="0"/>
+              <a:t> </a:t>
+            </a:r>
+            <a:r>
+              <a:rPr sz="4000" b="1" dirty="0" err="1"/>
+              <a:t>folyamat</a:t>
+            </a:r>
+            <a:endParaRPr sz="4000" b="1" dirty="0"/>
+          </a:p>
+        </p:txBody>
+      </p:sp>
+      <p:sp>
+        <p:nvSpPr>
+          <p:cNvPr id="3" name="Content Placeholder 2"/>
           <p:cNvSpPr>
             <a:spLocks noGrp="1"/>
           </p:cNvSpPr>
@@ -8170,16 +11781,403 @@
           <a:bodyPr/>
           <a:lstStyle/>
           <a:p>
-            <a:endParaRPr lang="hu-HU" dirty="0"/>
+            <a:r>
+              <a:rPr sz="2000" dirty="0"/>
+              <a:t> </a:t>
+            </a:r>
+            <a:r>
+              <a:rPr sz="2000" dirty="0" err="1"/>
+              <a:t>Felhasználó</a:t>
+            </a:r>
+            <a:r>
+              <a:rPr sz="2000" dirty="0"/>
+              <a:t> </a:t>
+            </a:r>
+            <a:r>
+              <a:rPr sz="2000" dirty="0" err="1"/>
+              <a:t>regisztrál</a:t>
+            </a:r>
+            <a:r>
+              <a:rPr sz="2000" dirty="0"/>
+              <a:t> </a:t>
+            </a:r>
+            <a:r>
+              <a:rPr sz="2000" dirty="0" err="1"/>
+              <a:t>vagy</a:t>
+            </a:r>
+            <a:r>
+              <a:rPr sz="2000" dirty="0"/>
+              <a:t> </a:t>
+            </a:r>
+            <a:r>
+              <a:rPr sz="2000" dirty="0" err="1"/>
+              <a:t>belép</a:t>
+            </a:r>
+            <a:endParaRPr sz="2000" dirty="0"/>
+          </a:p>
+          <a:p>
+            <a:r>
+              <a:rPr sz="2000" dirty="0"/>
+              <a:t> </a:t>
+            </a:r>
+            <a:r>
+              <a:rPr sz="2000" dirty="0" err="1"/>
+              <a:t>Termékek</a:t>
+            </a:r>
+            <a:r>
+              <a:rPr sz="2000" dirty="0"/>
+              <a:t> </a:t>
+            </a:r>
+            <a:r>
+              <a:rPr sz="2000" dirty="0" err="1"/>
+              <a:t>hozzáadása</a:t>
+            </a:r>
+            <a:r>
+              <a:rPr sz="2000" dirty="0"/>
+              <a:t> a </a:t>
+            </a:r>
+            <a:r>
+              <a:rPr sz="2000" dirty="0" err="1"/>
+              <a:t>hűtőhöz</a:t>
+            </a:r>
+            <a:r>
+              <a:rPr sz="2000" dirty="0"/>
+              <a:t> </a:t>
+            </a:r>
+            <a:r>
+              <a:rPr sz="2000" dirty="0" err="1"/>
+              <a:t>vagy</a:t>
+            </a:r>
+            <a:r>
+              <a:rPr sz="2000" dirty="0"/>
+              <a:t> </a:t>
+            </a:r>
+            <a:r>
+              <a:rPr sz="2000" dirty="0" err="1"/>
+              <a:t>kamrához</a:t>
+            </a:r>
+            <a:endParaRPr sz="2000" dirty="0"/>
+          </a:p>
+          <a:p>
+            <a:r>
+              <a:rPr sz="2000" dirty="0"/>
+              <a:t> </a:t>
+            </a:r>
+            <a:r>
+              <a:rPr sz="2000" dirty="0" err="1"/>
+              <a:t>Rendszer</a:t>
+            </a:r>
+            <a:r>
+              <a:rPr sz="2000" dirty="0"/>
+              <a:t> </a:t>
+            </a:r>
+            <a:r>
+              <a:rPr sz="2000" dirty="0" err="1"/>
+              <a:t>figyeli</a:t>
+            </a:r>
+            <a:r>
+              <a:rPr sz="2000" dirty="0"/>
+              <a:t> a </a:t>
+            </a:r>
+            <a:r>
+              <a:rPr sz="2000" dirty="0" err="1"/>
+              <a:t>mennyiséget</a:t>
+            </a:r>
+            <a:r>
+              <a:rPr sz="2000" dirty="0"/>
+              <a:t> </a:t>
+            </a:r>
+            <a:r>
+              <a:rPr sz="2000" dirty="0" err="1"/>
+              <a:t>és</a:t>
+            </a:r>
+            <a:r>
+              <a:rPr sz="2000" dirty="0"/>
+              <a:t> </a:t>
+            </a:r>
+            <a:r>
+              <a:rPr sz="2000" dirty="0" err="1"/>
+              <a:t>lejárati</a:t>
+            </a:r>
+            <a:r>
+              <a:rPr sz="2000" dirty="0"/>
+              <a:t> </a:t>
+            </a:r>
+            <a:r>
+              <a:rPr sz="2000" dirty="0" err="1"/>
+              <a:t>időt</a:t>
+            </a:r>
+            <a:endParaRPr sz="2000" dirty="0"/>
+          </a:p>
+          <a:p>
+            <a:r>
+              <a:rPr sz="2000" dirty="0"/>
+              <a:t> </a:t>
+            </a:r>
+            <a:r>
+              <a:rPr sz="2000" dirty="0" err="1"/>
+              <a:t>Hiányzó</a:t>
+            </a:r>
+            <a:r>
+              <a:rPr sz="2000" dirty="0"/>
+              <a:t> </a:t>
+            </a:r>
+            <a:r>
+              <a:rPr sz="2000" dirty="0" err="1"/>
+              <a:t>termékek</a:t>
+            </a:r>
+            <a:r>
+              <a:rPr sz="2000" dirty="0"/>
+              <a:t> </a:t>
+            </a:r>
+            <a:r>
+              <a:rPr sz="2000" dirty="0" err="1"/>
+              <a:t>automatikusan</a:t>
+            </a:r>
+            <a:r>
+              <a:rPr sz="2000" dirty="0"/>
+              <a:t> </a:t>
+            </a:r>
+            <a:r>
+              <a:rPr sz="2000" dirty="0" err="1"/>
+              <a:t>bevásárlólistára</a:t>
+            </a:r>
+            <a:r>
+              <a:rPr sz="2000" dirty="0"/>
+              <a:t> </a:t>
+            </a:r>
+            <a:r>
+              <a:rPr sz="2000" dirty="0" err="1"/>
+              <a:t>kerülnek</a:t>
+            </a:r>
+            <a:endParaRPr sz="2000" dirty="0"/>
           </a:p>
         </p:txBody>
       </p:sp>
     </p:spTree>
-    <p:extLst>
-      <p:ext uri="{BB962C8B-B14F-4D97-AF65-F5344CB8AC3E}">
-        <p14:creationId xmlns:p14="http://schemas.microsoft.com/office/powerpoint/2010/main" val="1127408281"/>
-      </p:ext>
-    </p:extLst>
+  </p:cSld>
+  <p:clrMapOvr>
+    <a:masterClrMapping/>
+  </p:clrMapOvr>
+  <p:transition spd="slow">
+    <p:push dir="u"/>
+  </p:transition>
+</p:sld>
+</file>
+
+<file path=ppt/slides/slide9.xml><?xml version="1.0" encoding="utf-8"?>
+<p:sld xmlns:a="http://schemas.openxmlformats.org/drawingml/2006/main" xmlns:r="http://schemas.openxmlformats.org/officeDocument/2006/relationships" xmlns:p="http://schemas.openxmlformats.org/presentationml/2006/main">
+  <p:cSld>
+    <p:spTree>
+      <p:nvGrpSpPr>
+        <p:cNvPr id="1" name=""/>
+        <p:cNvGrpSpPr/>
+        <p:nvPr/>
+      </p:nvGrpSpPr>
+      <p:grpSpPr>
+        <a:xfrm>
+          <a:off x="0" y="0"/>
+          <a:ext cx="0" cy="0"/>
+          <a:chOff x="0" y="0"/>
+          <a:chExt cx="0" cy="0"/>
+        </a:xfrm>
+      </p:grpSpPr>
+      <p:sp>
+        <p:nvSpPr>
+          <p:cNvPr id="2" name="Title 1"/>
+          <p:cNvSpPr>
+            <a:spLocks noGrp="1"/>
+          </p:cNvSpPr>
+          <p:nvPr>
+            <p:ph type="title"/>
+          </p:nvPr>
+        </p:nvSpPr>
+        <p:spPr/>
+        <p:txBody>
+          <a:bodyPr/>
+          <a:lstStyle/>
+          <a:p>
+            <a:r>
+              <a:rPr sz="4000" b="1" dirty="0" err="1"/>
+              <a:t>Raktár</a:t>
+            </a:r>
+            <a:r>
+              <a:rPr sz="4000" b="1" dirty="0"/>
+              <a:t> </a:t>
+            </a:r>
+            <a:r>
+              <a:rPr sz="4000" b="1" dirty="0" err="1"/>
+              <a:t>kezelés</a:t>
+            </a:r>
+            <a:r>
+              <a:rPr sz="4000" b="1" dirty="0"/>
+              <a:t> </a:t>
+            </a:r>
+            <a:r>
+              <a:rPr sz="4000" b="1" dirty="0" err="1"/>
+              <a:t>működése</a:t>
+            </a:r>
+            <a:endParaRPr sz="4000" b="1" dirty="0"/>
+          </a:p>
+        </p:txBody>
+      </p:sp>
+      <p:sp>
+        <p:nvSpPr>
+          <p:cNvPr id="3" name="Content Placeholder 2"/>
+          <p:cNvSpPr>
+            <a:spLocks noGrp="1"/>
+          </p:cNvSpPr>
+          <p:nvPr>
+            <p:ph idx="1"/>
+          </p:nvPr>
+        </p:nvSpPr>
+        <p:spPr/>
+        <p:txBody>
+          <a:bodyPr/>
+          <a:lstStyle/>
+          <a:p>
+            <a:r>
+              <a:rPr sz="2000" dirty="0"/>
+              <a:t> </a:t>
+            </a:r>
+            <a:r>
+              <a:rPr sz="2000" dirty="0" err="1"/>
+              <a:t>Termék</a:t>
+            </a:r>
+            <a:r>
+              <a:rPr sz="2000" dirty="0"/>
+              <a:t> </a:t>
+            </a:r>
+            <a:r>
+              <a:rPr sz="2000" dirty="0" err="1"/>
+              <a:t>hozzáadása</a:t>
+            </a:r>
+            <a:r>
+              <a:rPr sz="2000" dirty="0"/>
+              <a:t> </a:t>
+            </a:r>
+            <a:r>
+              <a:rPr sz="2000" dirty="0" err="1"/>
+              <a:t>névvel</a:t>
+            </a:r>
+            <a:r>
+              <a:rPr sz="2000" dirty="0"/>
+              <a:t> </a:t>
+            </a:r>
+            <a:r>
+              <a:rPr sz="2000" dirty="0" err="1"/>
+              <a:t>és</a:t>
+            </a:r>
+            <a:r>
+              <a:rPr sz="2000" dirty="0"/>
+              <a:t> </a:t>
+            </a:r>
+            <a:r>
+              <a:rPr sz="2000" dirty="0" err="1"/>
+              <a:t>mennyiséggel</a:t>
+            </a:r>
+            <a:endParaRPr sz="2000" dirty="0"/>
+          </a:p>
+          <a:p>
+            <a:r>
+              <a:rPr sz="2000" dirty="0"/>
+              <a:t> </a:t>
+            </a:r>
+            <a:r>
+              <a:rPr sz="2000" dirty="0" err="1"/>
+              <a:t>Lejárati</a:t>
+            </a:r>
+            <a:r>
+              <a:rPr sz="2000" dirty="0"/>
+              <a:t> </a:t>
+            </a:r>
+            <a:r>
+              <a:rPr sz="2000" dirty="0" err="1"/>
+              <a:t>idő</a:t>
+            </a:r>
+            <a:r>
+              <a:rPr sz="2000" dirty="0"/>
+              <a:t> </a:t>
+            </a:r>
+            <a:r>
+              <a:rPr sz="2000" dirty="0" err="1"/>
+              <a:t>rögzítése</a:t>
+            </a:r>
+            <a:endParaRPr sz="2000" dirty="0"/>
+          </a:p>
+          <a:p>
+            <a:r>
+              <a:rPr sz="2000" dirty="0"/>
+              <a:t> </a:t>
+            </a:r>
+            <a:r>
+              <a:rPr sz="2000" dirty="0" err="1"/>
+              <a:t>Termék</a:t>
+            </a:r>
+            <a:r>
+              <a:rPr sz="2000" dirty="0"/>
+              <a:t> </a:t>
+            </a:r>
+            <a:r>
+              <a:rPr sz="2000" dirty="0" err="1"/>
+              <a:t>frissítése</a:t>
+            </a:r>
+            <a:r>
+              <a:rPr sz="2000" dirty="0"/>
+              <a:t> </a:t>
+            </a:r>
+            <a:r>
+              <a:rPr sz="2000" dirty="0" err="1"/>
+              <a:t>vagy</a:t>
+            </a:r>
+            <a:r>
+              <a:rPr sz="2000" dirty="0"/>
+              <a:t> </a:t>
+            </a:r>
+            <a:r>
+              <a:rPr sz="2000" dirty="0" err="1"/>
+              <a:t>törlése</a:t>
+            </a:r>
+            <a:endParaRPr sz="2000" dirty="0"/>
+          </a:p>
+          <a:p>
+            <a:r>
+              <a:rPr sz="2000" dirty="0"/>
+              <a:t> </a:t>
+            </a:r>
+            <a:r>
+              <a:rPr sz="2000" dirty="0" err="1"/>
+              <a:t>Automatikus</a:t>
+            </a:r>
+            <a:r>
+              <a:rPr sz="2000" dirty="0"/>
+              <a:t> </a:t>
+            </a:r>
+            <a:r>
+              <a:rPr sz="2000" dirty="0" err="1"/>
+              <a:t>figyelmeztetés</a:t>
+            </a:r>
+            <a:r>
+              <a:rPr sz="2000" dirty="0"/>
+              <a:t> </a:t>
+            </a:r>
+            <a:r>
+              <a:rPr sz="2000" dirty="0" err="1"/>
+              <a:t>lejárat</a:t>
+            </a:r>
+            <a:r>
+              <a:rPr sz="2000" dirty="0"/>
+              <a:t> </a:t>
+            </a:r>
+            <a:r>
+              <a:rPr sz="2000" dirty="0" err="1"/>
+              <a:t>előtt</a:t>
+            </a:r>
+            <a:endParaRPr sz="2000" dirty="0"/>
+          </a:p>
+        </p:txBody>
+      </p:sp>
+    </p:spTree>
   </p:cSld>
   <p:clrMapOvr>
     <a:masterClrMapping/>

--- a/PPT/Magic Fridge.pptx
+++ b/PPT/Magic Fridge.pptx
@@ -5412,7 +5412,7 @@
             <a:r>
               <a:rPr lang="hu-HU" sz="4000" b="1" dirty="0" err="1">
                 <a:solidFill>
-                  <a:srgbClr val="006699"/>
+                  <a:schemeClr val="tx2"/>
                 </a:solidFill>
               </a:rPr>
               <a:t>Magic</a:t>
@@ -5420,7 +5420,7 @@
             <a:r>
               <a:rPr lang="hu-HU" sz="4000" b="1" dirty="0">
                 <a:solidFill>
-                  <a:srgbClr val="006699"/>
+                  <a:schemeClr val="tx2"/>
                 </a:solidFill>
               </a:rPr>
               <a:t> </a:t>
@@ -5428,7 +5428,7 @@
             <a:r>
               <a:rPr lang="hu-HU" sz="4000" b="1" dirty="0" err="1">
                 <a:solidFill>
-                  <a:srgbClr val="006699"/>
+                  <a:schemeClr val="tx2"/>
                 </a:solidFill>
               </a:rPr>
               <a:t>Fridge</a:t>
@@ -5437,11 +5437,7 @@
               <a:rPr lang="hu-HU" dirty="0"/>
             </a:br>
             <a:r>
-              <a:rPr lang="hu-HU" sz="4000" b="1" dirty="0">
-                <a:solidFill>
-                  <a:srgbClr val="006699"/>
-                </a:solidFill>
-              </a:rPr>
+              <a:rPr lang="hu-HU" sz="4000" b="1" dirty="0"/>
               <a:t>Intelligens hűtő- és kamrakezelő rendszer</a:t>
             </a:r>
           </a:p>
@@ -5469,17 +5465,89 @@
           <a:lstStyle/>
           <a:p>
             <a:r>
-              <a:rPr sz="2000"/>
-              <a:t>• Készítette:</a:t>
-            </a:r>
-            <a:br/>
-            <a:r>
-              <a:rPr sz="2000"/>
-              <a:t>Sutús Róbert</a:t>
-            </a:r>
-            <a:br/>
-            <a:r>
-              <a:rPr sz="2000"/>
+              <a:rPr sz="2000" b="1" dirty="0" err="1">
+                <a:solidFill>
+                  <a:schemeClr val="bg1">
+                    <a:lumMod val="50000"/>
+                  </a:schemeClr>
+                </a:solidFill>
+              </a:rPr>
+              <a:t>Készítette</a:t>
+            </a:r>
+            <a:r>
+              <a:rPr sz="2000" b="1" dirty="0">
+                <a:solidFill>
+                  <a:schemeClr val="bg1">
+                    <a:lumMod val="50000"/>
+                  </a:schemeClr>
+                </a:solidFill>
+              </a:rPr>
+              <a:t>:</a:t>
+            </a:r>
+            <a:br>
+              <a:rPr dirty="0"/>
+            </a:br>
+            <a:r>
+              <a:rPr lang="hu-HU" dirty="0"/>
+              <a:t>	</a:t>
+            </a:r>
+            <a:r>
+              <a:rPr sz="2000" i="1" dirty="0" err="1">
+                <a:solidFill>
+                  <a:schemeClr val="bg1">
+                    <a:lumMod val="50000"/>
+                  </a:schemeClr>
+                </a:solidFill>
+              </a:rPr>
+              <a:t>Sutús</a:t>
+            </a:r>
+            <a:r>
+              <a:rPr sz="2000" i="1" dirty="0">
+                <a:solidFill>
+                  <a:schemeClr val="bg1">
+                    <a:lumMod val="50000"/>
+                  </a:schemeClr>
+                </a:solidFill>
+              </a:rPr>
+              <a:t> </a:t>
+            </a:r>
+            <a:r>
+              <a:rPr sz="2000" i="1" dirty="0" err="1">
+                <a:solidFill>
+                  <a:schemeClr val="bg1">
+                    <a:lumMod val="50000"/>
+                  </a:schemeClr>
+                </a:solidFill>
+              </a:rPr>
+              <a:t>Róbert</a:t>
+            </a:r>
+            <a:br>
+              <a:rPr i="1" dirty="0">
+                <a:solidFill>
+                  <a:schemeClr val="bg1">
+                    <a:lumMod val="50000"/>
+                  </a:schemeClr>
+                </a:solidFill>
+              </a:rPr>
+            </a:br>
+            <a:r>
+              <a:rPr lang="hu-HU" i="1" dirty="0">
+                <a:solidFill>
+                  <a:schemeClr val="bg1">
+                    <a:lumMod val="50000"/>
+                  </a:schemeClr>
+                </a:solidFill>
+              </a:rPr>
+              <a:t>	</a:t>
+            </a:r>
+            <a:r>
+              <a:rPr sz="2000" i="1" dirty="0">
+                <a:solidFill>
+                  <a:schemeClr val="bg1">
+                    <a:lumMod val="50000"/>
+                  </a:schemeClr>
+                </a:solidFill>
+              </a:rPr>
               <a:t>Udvari Dominik</a:t>
             </a:r>
           </a:p>
@@ -5567,7 +5635,12 @@
             <p:ph type="title"/>
           </p:nvPr>
         </p:nvSpPr>
-        <p:spPr/>
+        <p:spPr>
+          <a:xfrm>
+            <a:off x="0" y="5350933"/>
+            <a:ext cx="8534400" cy="1507067"/>
+          </a:xfrm>
+        </p:spPr>
         <p:txBody>
           <a:bodyPr/>
           <a:lstStyle/>
@@ -5765,9 +5838,6 @@
   <p:clrMapOvr>
     <a:masterClrMapping/>
   </p:clrMapOvr>
-  <p:transition spd="slow">
-    <p:push dir="u"/>
-  </p:transition>
 </p:sld>
 </file>
 
@@ -5798,7 +5868,12 @@
             <p:ph type="title"/>
           </p:nvPr>
         </p:nvSpPr>
-        <p:spPr/>
+        <p:spPr>
+          <a:xfrm>
+            <a:off x="0" y="5350933"/>
+            <a:ext cx="8534400" cy="1507067"/>
+          </a:xfrm>
+        </p:spPr>
         <p:txBody>
           <a:bodyPr/>
           <a:lstStyle/>
@@ -5972,9 +6047,6 @@
   <p:clrMapOvr>
     <a:masterClrMapping/>
   </p:clrMapOvr>
-  <p:transition spd="slow">
-    <p:push dir="u"/>
-  </p:transition>
 </p:sld>
 </file>
 
@@ -6005,7 +6077,12 @@
             <p:ph type="title"/>
           </p:nvPr>
         </p:nvSpPr>
-        <p:spPr/>
+        <p:spPr>
+          <a:xfrm>
+            <a:off x="0" y="5350933"/>
+            <a:ext cx="8534400" cy="1507067"/>
+          </a:xfrm>
+        </p:spPr>
         <p:txBody>
           <a:bodyPr/>
           <a:lstStyle/>
@@ -6088,9 +6165,6 @@
   <p:clrMapOvr>
     <a:masterClrMapping/>
   </p:clrMapOvr>
-  <p:transition spd="slow">
-    <p:push dir="u"/>
-  </p:transition>
 </p:sld>
 </file>
 
@@ -6121,7 +6195,12 @@
             <p:ph type="title"/>
           </p:nvPr>
         </p:nvSpPr>
-        <p:spPr/>
+        <p:spPr>
+          <a:xfrm>
+            <a:off x="0" y="5350933"/>
+            <a:ext cx="8534400" cy="1507067"/>
+          </a:xfrm>
+        </p:spPr>
         <p:txBody>
           <a:bodyPr/>
           <a:lstStyle/>
@@ -6283,7 +6362,12 @@
             <p:ph type="title"/>
           </p:nvPr>
         </p:nvSpPr>
-        <p:spPr/>
+        <p:spPr>
+          <a:xfrm>
+            <a:off x="0" y="5350933"/>
+            <a:ext cx="8534400" cy="1507067"/>
+          </a:xfrm>
+        </p:spPr>
         <p:txBody>
           <a:bodyPr/>
           <a:lstStyle/>
@@ -6466,7 +6550,12 @@
             <p:ph type="title"/>
           </p:nvPr>
         </p:nvSpPr>
-        <p:spPr/>
+        <p:spPr>
+          <a:xfrm>
+            <a:off x="0" y="5350933"/>
+            <a:ext cx="8534400" cy="1507067"/>
+          </a:xfrm>
+        </p:spPr>
         <p:txBody>
           <a:bodyPr/>
           <a:lstStyle/>
@@ -6649,7 +6738,12 @@
             <p:ph type="title"/>
           </p:nvPr>
         </p:nvSpPr>
-        <p:spPr/>
+        <p:spPr>
+          <a:xfrm>
+            <a:off x="0" y="5350933"/>
+            <a:ext cx="8534400" cy="1507067"/>
+          </a:xfrm>
+        </p:spPr>
         <p:txBody>
           <a:bodyPr/>
           <a:lstStyle/>
@@ -7400,7 +7494,12 @@
             <p:ph type="title"/>
           </p:nvPr>
         </p:nvSpPr>
-        <p:spPr/>
+        <p:spPr>
+          <a:xfrm>
+            <a:off x="0" y="5350933"/>
+            <a:ext cx="8534400" cy="1507067"/>
+          </a:xfrm>
+        </p:spPr>
         <p:txBody>
           <a:bodyPr/>
           <a:lstStyle/>
@@ -8249,7 +8348,12 @@
             <p:ph type="title"/>
           </p:nvPr>
         </p:nvSpPr>
-        <p:spPr/>
+        <p:spPr>
+          <a:xfrm>
+            <a:off x="0" y="5350933"/>
+            <a:ext cx="8534400" cy="1507067"/>
+          </a:xfrm>
+        </p:spPr>
         <p:txBody>
           <a:bodyPr/>
           <a:lstStyle/>
@@ -8456,7 +8560,12 @@
             <p:ph type="title"/>
           </p:nvPr>
         </p:nvSpPr>
-        <p:spPr/>
+        <p:spPr>
+          <a:xfrm>
+            <a:off x="0" y="5350933"/>
+            <a:ext cx="8534400" cy="1507067"/>
+          </a:xfrm>
+        </p:spPr>
         <p:txBody>
           <a:bodyPr/>
           <a:lstStyle/>
@@ -8544,7 +8653,12 @@
             <p:ph type="title"/>
           </p:nvPr>
         </p:nvSpPr>
-        <p:spPr/>
+        <p:spPr>
+          <a:xfrm>
+            <a:off x="-1367" y="5350933"/>
+            <a:ext cx="8534400" cy="1507067"/>
+          </a:xfrm>
+        </p:spPr>
         <p:txBody>
           <a:bodyPr/>
           <a:lstStyle/>
@@ -8578,188 +8692,18 @@
           <a:lstStyle/>
           <a:p>
             <a:r>
-              <a:rPr sz="2000" dirty="0"/>
-              <a:t>• </a:t>
-            </a:r>
-            <a:r>
-              <a:rPr sz="2000" b="1" dirty="0" err="1">
+              <a:rPr lang="hu-HU" sz="2000" dirty="0"/>
+              <a:t> </a:t>
+            </a:r>
+            <a:r>
+              <a:rPr lang="hu-HU" sz="2000" b="1" dirty="0">
                 <a:solidFill>
                   <a:schemeClr val="bg1">
                     <a:lumMod val="50000"/>
                   </a:schemeClr>
                 </a:solidFill>
               </a:rPr>
-              <a:t>Miben</a:t>
-            </a:r>
-            <a:r>
-              <a:rPr sz="2000" b="1" dirty="0">
-                <a:solidFill>
-                  <a:schemeClr val="bg1">
-                    <a:lumMod val="50000"/>
-                  </a:schemeClr>
-                </a:solidFill>
-              </a:rPr>
-              <a:t> </a:t>
-            </a:r>
-            <a:r>
-              <a:rPr sz="2000" b="1" dirty="0" err="1">
-                <a:solidFill>
-                  <a:schemeClr val="bg1">
-                    <a:lumMod val="50000"/>
-                  </a:schemeClr>
-                </a:solidFill>
-              </a:rPr>
-              <a:t>illetve</a:t>
-            </a:r>
-            <a:r>
-              <a:rPr sz="2000" b="1" dirty="0">
-                <a:solidFill>
-                  <a:schemeClr val="bg1">
-                    <a:lumMod val="50000"/>
-                  </a:schemeClr>
-                </a:solidFill>
-              </a:rPr>
-              <a:t> </a:t>
-            </a:r>
-            <a:r>
-              <a:rPr sz="2000" b="1" dirty="0" err="1">
-                <a:solidFill>
-                  <a:schemeClr val="bg1">
-                    <a:lumMod val="50000"/>
-                  </a:schemeClr>
-                </a:solidFill>
-              </a:rPr>
-              <a:t>hogyan</a:t>
-            </a:r>
-            <a:r>
-              <a:rPr sz="2000" b="1" dirty="0">
-                <a:solidFill>
-                  <a:schemeClr val="bg1">
-                    <a:lumMod val="50000"/>
-                  </a:schemeClr>
-                </a:solidFill>
-              </a:rPr>
-              <a:t> is </a:t>
-            </a:r>
-            <a:r>
-              <a:rPr sz="2000" b="1" dirty="0" err="1">
-                <a:solidFill>
-                  <a:schemeClr val="bg1">
-                    <a:lumMod val="50000"/>
-                  </a:schemeClr>
-                </a:solidFill>
-              </a:rPr>
-              <a:t>segítünk</a:t>
-            </a:r>
-            <a:r>
-              <a:rPr sz="2000" b="1" dirty="0">
-                <a:solidFill>
-                  <a:schemeClr val="bg1">
-                    <a:lumMod val="50000"/>
-                  </a:schemeClr>
-                </a:solidFill>
-              </a:rPr>
-              <a:t> </a:t>
-            </a:r>
-            <a:r>
-              <a:rPr sz="2000" b="1" dirty="0" err="1">
-                <a:solidFill>
-                  <a:schemeClr val="bg1">
-                    <a:lumMod val="50000"/>
-                  </a:schemeClr>
-                </a:solidFill>
-              </a:rPr>
-              <a:t>pontosan</a:t>
-            </a:r>
-            <a:r>
-              <a:rPr sz="2000" b="1" dirty="0">
-                <a:solidFill>
-                  <a:schemeClr val="bg1">
-                    <a:lumMod val="50000"/>
-                  </a:schemeClr>
-                </a:solidFill>
-              </a:rPr>
-              <a:t> </a:t>
-            </a:r>
-            <a:r>
-              <a:rPr sz="2000" b="1" dirty="0" err="1">
-                <a:solidFill>
-                  <a:schemeClr val="bg1">
-                    <a:lumMod val="50000"/>
-                  </a:schemeClr>
-                </a:solidFill>
-              </a:rPr>
-              <a:t>az</a:t>
-            </a:r>
-            <a:r>
-              <a:rPr sz="2000" b="1" dirty="0">
-                <a:solidFill>
-                  <a:schemeClr val="bg1">
-                    <a:lumMod val="50000"/>
-                  </a:schemeClr>
-                </a:solidFill>
-              </a:rPr>
-              <a:t> </a:t>
-            </a:r>
-            <a:r>
-              <a:rPr sz="2000" b="1" dirty="0" err="1">
-                <a:solidFill>
-                  <a:schemeClr val="bg1">
-                    <a:lumMod val="50000"/>
-                  </a:schemeClr>
-                </a:solidFill>
-              </a:rPr>
-              <a:t>emberek</a:t>
-            </a:r>
-            <a:r>
-              <a:rPr sz="2000" b="1" dirty="0">
-                <a:solidFill>
-                  <a:schemeClr val="bg1">
-                    <a:lumMod val="50000"/>
-                  </a:schemeClr>
-                </a:solidFill>
-              </a:rPr>
-              <a:t>, </a:t>
-            </a:r>
-            <a:r>
-              <a:rPr sz="2000" b="1" dirty="0" err="1">
-                <a:solidFill>
-                  <a:schemeClr val="bg1">
-                    <a:lumMod val="50000"/>
-                  </a:schemeClr>
-                </a:solidFill>
-              </a:rPr>
-              <a:t>családok</a:t>
-            </a:r>
-            <a:r>
-              <a:rPr sz="2000" b="1" dirty="0">
-                <a:solidFill>
-                  <a:schemeClr val="bg1">
-                    <a:lumMod val="50000"/>
-                  </a:schemeClr>
-                </a:solidFill>
-              </a:rPr>
-              <a:t> </a:t>
-            </a:r>
-            <a:r>
-              <a:rPr sz="2000" b="1" dirty="0" err="1">
-                <a:solidFill>
-                  <a:schemeClr val="bg1">
-                    <a:lumMod val="50000"/>
-                  </a:schemeClr>
-                </a:solidFill>
-              </a:rPr>
-              <a:t>számára</a:t>
-            </a:r>
-            <a:r>
-              <a:rPr sz="2000" b="1" dirty="0">
-                <a:solidFill>
-                  <a:schemeClr val="bg1">
-                    <a:lumMod val="50000"/>
-                  </a:schemeClr>
-                </a:solidFill>
-              </a:rPr>
-              <a:t>.</a:t>
+              <a:t>Segítségünk az emberek illetve családok számára.</a:t>
             </a:r>
             <a:endParaRPr lang="hu-HU" b="1" dirty="0">
               <a:solidFill>
@@ -8773,7 +8717,7 @@
             <a:pPr lvl="1"/>
             <a:r>
               <a:rPr sz="2000" dirty="0"/>
-              <a:t>• </a:t>
+              <a:t> </a:t>
             </a:r>
             <a:r>
               <a:rPr sz="2000" dirty="0" err="1"/>
@@ -8833,7 +8777,7 @@
             <a:pPr lvl="1"/>
             <a:r>
               <a:rPr sz="2000" dirty="0"/>
-              <a:t>• </a:t>
+              <a:t> </a:t>
             </a:r>
             <a:r>
               <a:rPr sz="2000" dirty="0" err="1"/>
@@ -8853,7 +8797,7 @@
             <a:pPr lvl="1"/>
             <a:r>
               <a:rPr sz="2000" dirty="0"/>
-              <a:t>• </a:t>
+              <a:t> </a:t>
             </a:r>
             <a:r>
               <a:rPr sz="2000" dirty="0" err="1"/>
@@ -9096,7 +9040,12 @@
             <p:ph type="title"/>
           </p:nvPr>
         </p:nvSpPr>
-        <p:spPr/>
+        <p:spPr>
+          <a:xfrm>
+            <a:off x="-1367" y="5350933"/>
+            <a:ext cx="8534400" cy="1507067"/>
+          </a:xfrm>
+        </p:spPr>
         <p:txBody>
           <a:bodyPr/>
           <a:lstStyle/>
@@ -9131,7 +9080,7 @@
           <a:p>
             <a:r>
               <a:rPr sz="2000" dirty="0"/>
-              <a:t>• </a:t>
+              <a:t> </a:t>
             </a:r>
             <a:r>
               <a:rPr sz="2000" b="1" dirty="0">
@@ -9141,7 +9090,7 @@
                   </a:schemeClr>
                 </a:solidFill>
               </a:rPr>
-              <a:t>Magic Fridge – a „</a:t>
+              <a:t>Magic Fridge – a </a:t>
             </a:r>
             <a:r>
               <a:rPr sz="2000" b="1" dirty="0" err="1">
@@ -9152,16 +9101,6 @@
                 </a:solidFill>
               </a:rPr>
               <a:t>megoldás</a:t>
-            </a:r>
-            <a:r>
-              <a:rPr sz="2000" b="1" dirty="0">
-                <a:solidFill>
-                  <a:schemeClr val="bg1">
-                    <a:lumMod val="50000"/>
-                  </a:schemeClr>
-                </a:solidFill>
-              </a:rPr>
-              <a:t>”</a:t>
             </a:r>
             <a:endParaRPr lang="hu-HU" b="1" dirty="0">
               <a:solidFill>
@@ -9739,7 +9678,12 @@
             <p:ph type="title"/>
           </p:nvPr>
         </p:nvSpPr>
-        <p:spPr/>
+        <p:spPr>
+          <a:xfrm>
+            <a:off x="-1367" y="5350933"/>
+            <a:ext cx="8534400" cy="1507067"/>
+          </a:xfrm>
+        </p:spPr>
         <p:txBody>
           <a:bodyPr/>
           <a:lstStyle/>
@@ -9774,7 +9718,7 @@
           <a:p>
             <a:r>
               <a:rPr sz="2000" dirty="0"/>
-              <a:t>• </a:t>
+              <a:t> </a:t>
             </a:r>
             <a:r>
               <a:rPr sz="2000" b="1" dirty="0" err="1">
@@ -10321,7 +10265,12 @@
             <p:ph type="title"/>
           </p:nvPr>
         </p:nvSpPr>
-        <p:spPr/>
+        <p:spPr>
+          <a:xfrm>
+            <a:off x="0" y="5350933"/>
+            <a:ext cx="8534400" cy="1507067"/>
+          </a:xfrm>
+        </p:spPr>
         <p:txBody>
           <a:bodyPr/>
           <a:lstStyle/>
@@ -10362,7 +10311,7 @@
                   </a:schemeClr>
                 </a:solidFill>
               </a:rPr>
-              <a:t>• </a:t>
+              <a:t> </a:t>
             </a:r>
             <a:r>
               <a:rPr sz="2000" b="1" dirty="0" err="1">
@@ -10991,7 +10940,12 @@
             <p:ph type="title"/>
           </p:nvPr>
         </p:nvSpPr>
-        <p:spPr/>
+        <p:spPr>
+          <a:xfrm>
+            <a:off x="0" y="5339355"/>
+            <a:ext cx="8534400" cy="1507067"/>
+          </a:xfrm>
+        </p:spPr>
         <p:txBody>
           <a:bodyPr/>
           <a:lstStyle/>
@@ -11026,7 +10980,7 @@
           <a:p>
             <a:r>
               <a:rPr sz="2000" dirty="0"/>
-              <a:t>• </a:t>
+              <a:t> </a:t>
             </a:r>
             <a:r>
               <a:rPr sz="2000" b="1" dirty="0" err="1">
@@ -11522,7 +11476,12 @@
             <p:ph type="title"/>
           </p:nvPr>
         </p:nvSpPr>
-        <p:spPr/>
+        <p:spPr>
+          <a:xfrm>
+            <a:off x="0" y="5350933"/>
+            <a:ext cx="8534400" cy="1507067"/>
+          </a:xfrm>
+        </p:spPr>
         <p:txBody>
           <a:bodyPr/>
           <a:lstStyle/>
@@ -11745,7 +11704,12 @@
             <p:ph type="title"/>
           </p:nvPr>
         </p:nvSpPr>
-        <p:spPr/>
+        <p:spPr>
+          <a:xfrm>
+            <a:off x="0" y="5350933"/>
+            <a:ext cx="8534400" cy="1507067"/>
+          </a:xfrm>
+        </p:spPr>
         <p:txBody>
           <a:bodyPr/>
           <a:lstStyle/>
@@ -11992,7 +11956,12 @@
             <p:ph type="title"/>
           </p:nvPr>
         </p:nvSpPr>
-        <p:spPr/>
+        <p:spPr>
+          <a:xfrm>
+            <a:off x="0" y="5350933"/>
+            <a:ext cx="8534400" cy="1507067"/>
+          </a:xfrm>
+        </p:spPr>
         <p:txBody>
           <a:bodyPr/>
           <a:lstStyle/>
@@ -12182,9 +12151,6 @@
   <p:clrMapOvr>
     <a:masterClrMapping/>
   </p:clrMapOvr>
-  <p:transition spd="slow">
-    <p:push dir="u"/>
-  </p:transition>
 </p:sld>
 </file>
 

--- a/PPT/Magic Fridge.pptx
+++ b/PPT/Magic Fridge.pptx
@@ -321,7 +321,7 @@
           <a:p>
             <a:fld id="{14FEEE99-8E01-453E-BB84-C9CA0F55D998}" type="datetimeFigureOut">
               <a:rPr lang="hu-HU" smtClean="0"/>
-              <a:t>2026. 03. 04.</a:t>
+              <a:t>2026.03.05.</a:t>
             </a:fld>
             <a:endParaRPr lang="hu-HU"/>
           </a:p>
@@ -757,7 +757,7 @@
           <a:p>
             <a:fld id="{14FEEE99-8E01-453E-BB84-C9CA0F55D998}" type="datetimeFigureOut">
               <a:rPr lang="hu-HU" smtClean="0"/>
-              <a:t>2026. 03. 04.</a:t>
+              <a:t>2026.03.05.</a:t>
             </a:fld>
             <a:endParaRPr lang="hu-HU"/>
           </a:p>
@@ -1007,7 +1007,7 @@
           <a:p>
             <a:fld id="{14FEEE99-8E01-453E-BB84-C9CA0F55D998}" type="datetimeFigureOut">
               <a:rPr lang="hu-HU" smtClean="0"/>
-              <a:t>2026. 03. 04.</a:t>
+              <a:t>2026.03.05.</a:t>
             </a:fld>
             <a:endParaRPr lang="hu-HU"/>
           </a:p>
@@ -1315,7 +1315,7 @@
           <a:p>
             <a:fld id="{14FEEE99-8E01-453E-BB84-C9CA0F55D998}" type="datetimeFigureOut">
               <a:rPr lang="hu-HU" smtClean="0"/>
-              <a:t>2026. 03. 04.</a:t>
+              <a:t>2026.03.05.</a:t>
             </a:fld>
             <a:endParaRPr lang="hu-HU"/>
           </a:p>
@@ -1633,7 +1633,7 @@
           <a:p>
             <a:fld id="{14FEEE99-8E01-453E-BB84-C9CA0F55D998}" type="datetimeFigureOut">
               <a:rPr lang="hu-HU" smtClean="0"/>
-              <a:t>2026. 03. 04.</a:t>
+              <a:t>2026.03.05.</a:t>
             </a:fld>
             <a:endParaRPr lang="hu-HU"/>
           </a:p>
@@ -1935,7 +1935,7 @@
           <a:p>
             <a:fld id="{14FEEE99-8E01-453E-BB84-C9CA0F55D998}" type="datetimeFigureOut">
               <a:rPr lang="hu-HU" smtClean="0"/>
-              <a:t>2026. 03. 04.</a:t>
+              <a:t>2026.03.05.</a:t>
             </a:fld>
             <a:endParaRPr lang="hu-HU"/>
           </a:p>
@@ -2302,7 +2302,7 @@
           <a:p>
             <a:fld id="{14FEEE99-8E01-453E-BB84-C9CA0F55D998}" type="datetimeFigureOut">
               <a:rPr lang="hu-HU" smtClean="0"/>
-              <a:t>2026. 03. 04.</a:t>
+              <a:t>2026.03.05.</a:t>
             </a:fld>
             <a:endParaRPr lang="hu-HU"/>
           </a:p>
@@ -2476,7 +2476,7 @@
           <a:p>
             <a:fld id="{14FEEE99-8E01-453E-BB84-C9CA0F55D998}" type="datetimeFigureOut">
               <a:rPr lang="hu-HU" smtClean="0"/>
-              <a:t>2026. 03. 04.</a:t>
+              <a:t>2026.03.05.</a:t>
             </a:fld>
             <a:endParaRPr lang="hu-HU"/>
           </a:p>
@@ -2656,7 +2656,7 @@
           <a:p>
             <a:fld id="{14FEEE99-8E01-453E-BB84-C9CA0F55D998}" type="datetimeFigureOut">
               <a:rPr lang="hu-HU" smtClean="0"/>
-              <a:t>2026. 03. 04.</a:t>
+              <a:t>2026.03.05.</a:t>
             </a:fld>
             <a:endParaRPr lang="hu-HU"/>
           </a:p>
@@ -2826,7 +2826,7 @@
           <a:p>
             <a:fld id="{14FEEE99-8E01-453E-BB84-C9CA0F55D998}" type="datetimeFigureOut">
               <a:rPr lang="hu-HU" smtClean="0"/>
-              <a:t>2026. 03. 04.</a:t>
+              <a:t>2026.03.05.</a:t>
             </a:fld>
             <a:endParaRPr lang="hu-HU"/>
           </a:p>
@@ -3076,7 +3076,7 @@
           <a:p>
             <a:fld id="{14FEEE99-8E01-453E-BB84-C9CA0F55D998}" type="datetimeFigureOut">
               <a:rPr lang="hu-HU" smtClean="0"/>
-              <a:t>2026. 03. 04.</a:t>
+              <a:t>2026.03.05.</a:t>
             </a:fld>
             <a:endParaRPr lang="hu-HU"/>
           </a:p>
@@ -3312,7 +3312,7 @@
           <a:p>
             <a:fld id="{14FEEE99-8E01-453E-BB84-C9CA0F55D998}" type="datetimeFigureOut">
               <a:rPr lang="hu-HU" smtClean="0"/>
-              <a:t>2026. 03. 04.</a:t>
+              <a:t>2026.03.05.</a:t>
             </a:fld>
             <a:endParaRPr lang="hu-HU"/>
           </a:p>
@@ -3694,7 +3694,7 @@
           <a:p>
             <a:fld id="{14FEEE99-8E01-453E-BB84-C9CA0F55D998}" type="datetimeFigureOut">
               <a:rPr lang="hu-HU" smtClean="0"/>
-              <a:t>2026. 03. 04.</a:t>
+              <a:t>2026.03.05.</a:t>
             </a:fld>
             <a:endParaRPr lang="hu-HU"/>
           </a:p>
@@ -3812,7 +3812,7 @@
           <a:p>
             <a:fld id="{14FEEE99-8E01-453E-BB84-C9CA0F55D998}" type="datetimeFigureOut">
               <a:rPr lang="hu-HU" smtClean="0"/>
-              <a:t>2026. 03. 04.</a:t>
+              <a:t>2026.03.05.</a:t>
             </a:fld>
             <a:endParaRPr lang="hu-HU"/>
           </a:p>
@@ -3907,7 +3907,7 @@
           <a:p>
             <a:fld id="{14FEEE99-8E01-453E-BB84-C9CA0F55D998}" type="datetimeFigureOut">
               <a:rPr lang="hu-HU" smtClean="0"/>
-              <a:t>2026. 03. 04.</a:t>
+              <a:t>2026.03.05.</a:t>
             </a:fld>
             <a:endParaRPr lang="hu-HU"/>
           </a:p>
@@ -4162,7 +4162,7 @@
           <a:p>
             <a:fld id="{14FEEE99-8E01-453E-BB84-C9CA0F55D998}" type="datetimeFigureOut">
               <a:rPr lang="hu-HU" smtClean="0"/>
-              <a:t>2026. 03. 04.</a:t>
+              <a:t>2026.03.05.</a:t>
             </a:fld>
             <a:endParaRPr lang="hu-HU"/>
           </a:p>
@@ -4445,7 +4445,7 @@
           <a:p>
             <a:fld id="{14FEEE99-8E01-453E-BB84-C9CA0F55D998}" type="datetimeFigureOut">
               <a:rPr lang="hu-HU" smtClean="0"/>
-              <a:t>2026. 03. 04.</a:t>
+              <a:t>2026.03.05.</a:t>
             </a:fld>
             <a:endParaRPr lang="hu-HU"/>
           </a:p>
@@ -4851,7 +4851,7 @@
           <a:p>
             <a:fld id="{14FEEE99-8E01-453E-BB84-C9CA0F55D998}" type="datetimeFigureOut">
               <a:rPr lang="hu-HU" smtClean="0"/>
-              <a:t>2026. 03. 04.</a:t>
+              <a:t>2026.03.05.</a:t>
             </a:fld>
             <a:endParaRPr lang="hu-HU"/>
           </a:p>
@@ -5391,7 +5391,7 @@
           <p:cNvPr id="2" name="Cím 1">
             <a:extLst>
               <a:ext uri="{FF2B5EF4-FFF2-40B4-BE49-F238E27FC236}">
-                <a16:creationId xmlns:a16="http://schemas.microsoft.com/office/drawing/2014/main" id="{F37DB2E2-A9EF-46D6-87EE-4320B0440C55}"/>
+                <a16:creationId xmlns:a16="http://schemas.microsoft.com/office/drawing/2014/main" xmlns="" id="{F37DB2E2-A9EF-46D6-87EE-4320B0440C55}"/>
               </a:ext>
             </a:extLst>
           </p:cNvPr>
@@ -5433,6 +5433,10 @@
               </a:rPr>
               <a:t>Fridge</a:t>
             </a:r>
+            <a:r>
+              <a:rPr lang="hu-HU" dirty="0"/>
+              <a:t/>
+            </a:r>
             <a:br>
               <a:rPr lang="hu-HU" dirty="0"/>
             </a:br>
@@ -5448,7 +5452,7 @@
           <p:cNvPr id="3" name="Alcím 2">
             <a:extLst>
               <a:ext uri="{FF2B5EF4-FFF2-40B4-BE49-F238E27FC236}">
-                <a16:creationId xmlns:a16="http://schemas.microsoft.com/office/drawing/2014/main" id="{28B5F30B-1C06-4AFF-BE8B-C33F9B5FDA0C}"/>
+                <a16:creationId xmlns:a16="http://schemas.microsoft.com/office/drawing/2014/main" xmlns="" id="{28B5F30B-1C06-4AFF-BE8B-C33F9B5FDA0C}"/>
               </a:ext>
             </a:extLst>
           </p:cNvPr>
@@ -5484,6 +5488,10 @@
               </a:rPr>
               <a:t>:</a:t>
             </a:r>
+            <a:r>
+              <a:rPr dirty="0"/>
+              <a:t/>
+            </a:r>
             <a:br>
               <a:rPr dirty="0"/>
             </a:br>
@@ -5520,6 +5528,16 @@
                 </a:solidFill>
               </a:rPr>
               <a:t>Róbert</a:t>
+            </a:r>
+            <a:r>
+              <a:rPr i="1" dirty="0">
+                <a:solidFill>
+                  <a:schemeClr val="bg1">
+                    <a:lumMod val="50000"/>
+                  </a:schemeClr>
+                </a:solidFill>
+              </a:rPr>
+              <a:t/>
             </a:r>
             <a:br>
               <a:rPr i="1" dirty="0">
@@ -5561,7 +5579,7 @@
           <p:cNvPr id="6" name="Kép 5">
             <a:extLst>
               <a:ext uri="{FF2B5EF4-FFF2-40B4-BE49-F238E27FC236}">
-                <a16:creationId xmlns:a16="http://schemas.microsoft.com/office/drawing/2014/main" id="{AAA27651-720A-4BA7-80AF-9C64E40261A5}"/>
+                <a16:creationId xmlns:a16="http://schemas.microsoft.com/office/drawing/2014/main" xmlns="" id="{AAA27651-720A-4BA7-80AF-9C64E40261A5}"/>
               </a:ext>
             </a:extLst>
           </p:cNvPr>
@@ -5571,7 +5589,7 @@
           <p:nvPr/>
         </p:nvPicPr>
         <p:blipFill>
-          <a:blip r:embed="rId2">
+          <a:blip r:embed="rId2" cstate="print">
             <a:extLst>
               <a:ext uri="{28A0092B-C50C-407E-A947-70E740481C1C}">
                 <a14:useLocalDpi xmlns:a14="http://schemas.microsoft.com/office/drawing/2010/main" val="0"/>
@@ -5605,6 +5623,13 @@
   <p:transition spd="slow">
     <p:push dir="u"/>
   </p:transition>
+  <p:timing>
+    <p:tnLst>
+      <p:par>
+        <p:cTn id="1" dur="indefinite" restart="never" nodeType="tmRoot"/>
+      </p:par>
+    </p:tnLst>
+  </p:timing>
 </p:sld>
 </file>
 
@@ -5838,6 +5863,13 @@
   <p:clrMapOvr>
     <a:masterClrMapping/>
   </p:clrMapOvr>
+  <p:timing>
+    <p:tnLst>
+      <p:par>
+        <p:cTn id="1" dur="indefinite" restart="never" nodeType="tmRoot"/>
+      </p:par>
+    </p:tnLst>
+  </p:timing>
 </p:sld>
 </file>
 
@@ -6047,6 +6079,13 @@
   <p:clrMapOvr>
     <a:masterClrMapping/>
   </p:clrMapOvr>
+  <p:timing>
+    <p:tnLst>
+      <p:par>
+        <p:cTn id="1" dur="indefinite" restart="never" nodeType="tmRoot"/>
+      </p:par>
+    </p:tnLst>
+  </p:timing>
 </p:sld>
 </file>
 
@@ -6165,6 +6204,13 @@
   <p:clrMapOvr>
     <a:masterClrMapping/>
   </p:clrMapOvr>
+  <p:timing>
+    <p:tnLst>
+      <p:par>
+        <p:cTn id="1" dur="indefinite" restart="never" nodeType="tmRoot"/>
+      </p:par>
+    </p:tnLst>
+  </p:timing>
 </p:sld>
 </file>
 
@@ -6332,6 +6378,13 @@
   <p:transition spd="slow">
     <p:push dir="u"/>
   </p:transition>
+  <p:timing>
+    <p:tnLst>
+      <p:par>
+        <p:cTn id="1" dur="indefinite" restart="never" nodeType="tmRoot"/>
+      </p:par>
+    </p:tnLst>
+  </p:timing>
 </p:sld>
 </file>
 
@@ -6520,6 +6573,13 @@
   <p:transition spd="slow">
     <p:push dir="u"/>
   </p:transition>
+  <p:timing>
+    <p:tnLst>
+      <p:par>
+        <p:cTn id="1" dur="indefinite" restart="never" nodeType="tmRoot"/>
+      </p:par>
+    </p:tnLst>
+  </p:timing>
 </p:sld>
 </file>
 
@@ -6708,6 +6768,13 @@
   <p:transition spd="slow">
     <p:push dir="u"/>
   </p:transition>
+  <p:timing>
+    <p:tnLst>
+      <p:par>
+        <p:cTn id="1" dur="indefinite" restart="never" nodeType="tmRoot"/>
+      </p:par>
+    </p:tnLst>
+  </p:timing>
 </p:sld>
 </file>
 
@@ -8390,8 +8457,8 @@
         </p:blipFill>
         <p:spPr>
           <a:xfrm>
-            <a:off x="3416967" y="100674"/>
-            <a:ext cx="4467727" cy="4752062"/>
+            <a:off x="5736021" y="0"/>
+            <a:ext cx="6455979" cy="6866850"/>
           </a:xfrm>
           <a:prstGeom prst="rect">
             <a:avLst/>
@@ -8549,7 +8616,7 @@
           <p:cNvPr id="2" name="Cím 1">
             <a:extLst>
               <a:ext uri="{FF2B5EF4-FFF2-40B4-BE49-F238E27FC236}">
-                <a16:creationId xmlns:a16="http://schemas.microsoft.com/office/drawing/2014/main" id="{9A9225C2-821D-4257-8F4B-9294A2A475C4}"/>
+                <a16:creationId xmlns:a16="http://schemas.microsoft.com/office/drawing/2014/main" xmlns="" id="{9A9225C2-821D-4257-8F4B-9294A2A475C4}"/>
               </a:ext>
             </a:extLst>
           </p:cNvPr>
@@ -8612,7 +8679,7 @@
           <p:cNvPr id="5" name="Kép 4">
             <a:extLst>
               <a:ext uri="{FF2B5EF4-FFF2-40B4-BE49-F238E27FC236}">
-                <a16:creationId xmlns:a16="http://schemas.microsoft.com/office/drawing/2014/main" id="{D84BE393-950C-4DFB-8153-B5F0BBEF4982}"/>
+                <a16:creationId xmlns:a16="http://schemas.microsoft.com/office/drawing/2014/main" xmlns="" id="{D84BE393-950C-4DFB-8153-B5F0BBEF4982}"/>
               </a:ext>
             </a:extLst>
           </p:cNvPr>
@@ -8629,7 +8696,7 @@
         </p:blipFill>
         <p:spPr>
           <a:xfrm>
-            <a:off x="5702968" y="2102394"/>
+            <a:off x="5884272" y="2102394"/>
             <a:ext cx="4961727" cy="2509711"/>
           </a:xfrm>
           <a:prstGeom prst="rect">
@@ -8642,7 +8709,7 @@
           <p:cNvPr id="2" name="Cím 1">
             <a:extLst>
               <a:ext uri="{FF2B5EF4-FFF2-40B4-BE49-F238E27FC236}">
-                <a16:creationId xmlns:a16="http://schemas.microsoft.com/office/drawing/2014/main" id="{AF4D97FC-C81F-4ADB-A60E-335A38317293}"/>
+                <a16:creationId xmlns:a16="http://schemas.microsoft.com/office/drawing/2014/main" xmlns="" id="{AF4D97FC-C81F-4ADB-A60E-335A38317293}"/>
               </a:ext>
             </a:extLst>
           </p:cNvPr>
@@ -8675,7 +8742,7 @@
           <p:cNvPr id="3" name="Tartalom helye 2">
             <a:extLst>
               <a:ext uri="{FF2B5EF4-FFF2-40B4-BE49-F238E27FC236}">
-                <a16:creationId xmlns:a16="http://schemas.microsoft.com/office/drawing/2014/main" id="{D87A28B3-A76D-4329-BC9E-A53E15965AE1}"/>
+                <a16:creationId xmlns:a16="http://schemas.microsoft.com/office/drawing/2014/main" xmlns="" id="{D87A28B3-A76D-4329-BC9E-A53E15965AE1}"/>
               </a:ext>
             </a:extLst>
           </p:cNvPr>
@@ -8839,7 +8906,7 @@
           <p:cNvPr id="6" name="Kép 5">
             <a:extLst>
               <a:ext uri="{FF2B5EF4-FFF2-40B4-BE49-F238E27FC236}">
-                <a16:creationId xmlns:a16="http://schemas.microsoft.com/office/drawing/2014/main" id="{ABF9A374-A833-427F-8C5F-25EEBC9D506E}"/>
+                <a16:creationId xmlns:a16="http://schemas.microsoft.com/office/drawing/2014/main" xmlns="" id="{ABF9A374-A833-427F-8C5F-25EEBC9D506E}"/>
               </a:ext>
             </a:extLst>
           </p:cNvPr>
@@ -8849,7 +8916,7 @@
           <p:nvPr/>
         </p:nvPicPr>
         <p:blipFill>
-          <a:blip r:embed="rId3">
+          <a:blip r:embed="rId3" cstate="print">
             <a:extLst>
               <a:ext uri="{28A0092B-C50C-407E-A947-70E740481C1C}">
                 <a14:useLocalDpi xmlns:a14="http://schemas.microsoft.com/office/drawing/2010/main" val="0"/>
@@ -9029,7 +9096,7 @@
           <p:cNvPr id="2" name="Cím 1">
             <a:extLst>
               <a:ext uri="{FF2B5EF4-FFF2-40B4-BE49-F238E27FC236}">
-                <a16:creationId xmlns:a16="http://schemas.microsoft.com/office/drawing/2014/main" id="{243268F3-665C-4D52-AC4D-5798A3CC2A40}"/>
+                <a16:creationId xmlns:a16="http://schemas.microsoft.com/office/drawing/2014/main" xmlns="" id="{243268F3-665C-4D52-AC4D-5798A3CC2A40}"/>
               </a:ext>
             </a:extLst>
           </p:cNvPr>
@@ -9062,7 +9129,7 @@
           <p:cNvPr id="3" name="Tartalom helye 2">
             <a:extLst>
               <a:ext uri="{FF2B5EF4-FFF2-40B4-BE49-F238E27FC236}">
-                <a16:creationId xmlns:a16="http://schemas.microsoft.com/office/drawing/2014/main" id="{CB1B53DB-E20D-48F2-90AC-7278A5946755}"/>
+                <a16:creationId xmlns:a16="http://schemas.microsoft.com/office/drawing/2014/main" xmlns="" id="{CB1B53DB-E20D-48F2-90AC-7278A5946755}"/>
               </a:ext>
             </a:extLst>
           </p:cNvPr>
@@ -9116,30 +9183,14 @@
               <a:buChar char="•"/>
             </a:pPr>
             <a:r>
-              <a:rPr sz="2000" dirty="0"/>
-              <a:t> </a:t>
-            </a:r>
-            <a:r>
-              <a:rPr sz="2000" dirty="0" err="1"/>
+              <a:rPr sz="2000" dirty="0" err="1" smtClean="0"/>
               <a:t>Háztartás</a:t>
             </a:r>
             <a:r>
-              <a:rPr sz="2000" dirty="0"/>
-              <a:t> + </a:t>
-            </a:r>
-            <a:r>
-              <a:rPr sz="2000" dirty="0" err="1"/>
-              <a:t>Raktár</a:t>
-            </a:r>
-            <a:r>
-              <a:rPr sz="2000" dirty="0"/>
-              <a:t> + </a:t>
-            </a:r>
-            <a:r>
-              <a:rPr sz="2000" dirty="0" err="1"/>
-              <a:t>Bevásárlólista</a:t>
-            </a:r>
-            <a:endParaRPr sz="2000" dirty="0"/>
+              <a:rPr sz="2000" dirty="0" smtClean="0"/>
+              <a:t> </a:t>
+            </a:r>
+            <a:endParaRPr lang="hu-HU" sz="2000" dirty="0" smtClean="0"/>
           </a:p>
           <a:p>
             <a:pPr lvl="1">
@@ -9147,22 +9198,10 @@
               <a:buChar char="•"/>
             </a:pPr>
             <a:r>
-              <a:rPr sz="2000" dirty="0"/>
-              <a:t> </a:t>
-            </a:r>
-            <a:r>
-              <a:rPr sz="2000" dirty="0" err="1"/>
-              <a:t>Automatikus</a:t>
-            </a:r>
-            <a:r>
-              <a:rPr sz="2000" dirty="0"/>
-              <a:t> </a:t>
-            </a:r>
-            <a:r>
-              <a:rPr sz="2000" dirty="0" err="1"/>
-              <a:t>logika</a:t>
-            </a:r>
-            <a:endParaRPr sz="2000" dirty="0"/>
+              <a:rPr sz="2000" dirty="0" err="1" smtClean="0"/>
+              <a:t>Raktár</a:t>
+            </a:r>
+            <a:endParaRPr lang="hu-HU" sz="2000" dirty="0"/>
           </a:p>
           <a:p>
             <a:pPr lvl="1">
@@ -9170,15 +9209,41 @@
               <a:buChar char="•"/>
             </a:pPr>
             <a:r>
-              <a:rPr sz="2000" dirty="0"/>
-              <a:t> </a:t>
-            </a:r>
-            <a:r>
-              <a:rPr sz="2000" dirty="0" err="1"/>
+              <a:rPr sz="2000" dirty="0" err="1" smtClean="0"/>
+              <a:t>Bevásárlólista</a:t>
+            </a:r>
+            <a:endParaRPr sz="2000" dirty="0"/>
+          </a:p>
+          <a:p>
+            <a:pPr lvl="1">
+              <a:buFont typeface="Arial" panose="020B0604020202020204" pitchFamily="34" charset="0"/>
+              <a:buChar char="•"/>
+            </a:pPr>
+            <a:r>
+              <a:rPr sz="2000" dirty="0" err="1" smtClean="0"/>
+              <a:t>Automatikus</a:t>
+            </a:r>
+            <a:r>
+              <a:rPr sz="2000" dirty="0" smtClean="0"/>
+              <a:t> </a:t>
+            </a:r>
+            <a:r>
+              <a:rPr sz="2000" dirty="0" err="1"/>
+              <a:t>logika</a:t>
+            </a:r>
+            <a:endParaRPr sz="2000" dirty="0"/>
+          </a:p>
+          <a:p>
+            <a:pPr lvl="1">
+              <a:buFont typeface="Arial" panose="020B0604020202020204" pitchFamily="34" charset="0"/>
+              <a:buChar char="•"/>
+            </a:pPr>
+            <a:r>
+              <a:rPr sz="2000" dirty="0" err="1" smtClean="0"/>
               <a:t>Több</a:t>
             </a:r>
             <a:r>
-              <a:rPr sz="2000" dirty="0"/>
+              <a:rPr sz="2000" dirty="0" smtClean="0"/>
               <a:t> </a:t>
             </a:r>
             <a:r>
@@ -9205,7 +9270,7 @@
           <p:cNvPr id="5" name="Kép 4">
             <a:extLst>
               <a:ext uri="{FF2B5EF4-FFF2-40B4-BE49-F238E27FC236}">
-                <a16:creationId xmlns:a16="http://schemas.microsoft.com/office/drawing/2014/main" id="{CCDE3D8B-872D-4D6D-939F-B2396429F18F}"/>
+                <a16:creationId xmlns:a16="http://schemas.microsoft.com/office/drawing/2014/main" xmlns="" id="{CCDE3D8B-872D-4D6D-939F-B2396429F18F}"/>
               </a:ext>
             </a:extLst>
           </p:cNvPr>
@@ -9215,7 +9280,7 @@
           <p:nvPr/>
         </p:nvPicPr>
         <p:blipFill>
-          <a:blip r:embed="rId2">
+          <a:blip r:embed="rId2" cstate="print">
             <a:extLst>
               <a:ext uri="{28A0092B-C50C-407E-A947-70E740481C1C}">
                 <a14:useLocalDpi xmlns:a14="http://schemas.microsoft.com/office/drawing/2010/main" val="0"/>
@@ -9241,7 +9306,7 @@
           <p:cNvPr id="6" name="Kép 5">
             <a:extLst>
               <a:ext uri="{FF2B5EF4-FFF2-40B4-BE49-F238E27FC236}">
-                <a16:creationId xmlns:a16="http://schemas.microsoft.com/office/drawing/2014/main" id="{DBE09674-D80B-4C28-8C28-D999A6BA63D8}"/>
+                <a16:creationId xmlns:a16="http://schemas.microsoft.com/office/drawing/2014/main" xmlns="" id="{DBE09674-D80B-4C28-8C28-D999A6BA63D8}"/>
               </a:ext>
             </a:extLst>
           </p:cNvPr>
@@ -9258,7 +9323,7 @@
         </p:blipFill>
         <p:spPr>
           <a:xfrm>
-            <a:off x="6130717" y="82159"/>
+            <a:off x="4866113" y="327690"/>
             <a:ext cx="3099022" cy="2288509"/>
           </a:xfrm>
           <a:prstGeom prst="rect">
@@ -9271,7 +9336,7 @@
           <p:cNvPr id="8" name="Kép 7">
             <a:extLst>
               <a:ext uri="{FF2B5EF4-FFF2-40B4-BE49-F238E27FC236}">
-                <a16:creationId xmlns:a16="http://schemas.microsoft.com/office/drawing/2014/main" id="{36BD642E-2512-44DA-ACDB-DE70918F4719}"/>
+                <a16:creationId xmlns:a16="http://schemas.microsoft.com/office/drawing/2014/main" xmlns="" id="{36BD642E-2512-44DA-ACDB-DE70918F4719}"/>
               </a:ext>
             </a:extLst>
           </p:cNvPr>
@@ -9288,7 +9353,7 @@
         </p:blipFill>
         <p:spPr>
           <a:xfrm>
-            <a:off x="8624371" y="1701201"/>
+            <a:off x="7965135" y="618482"/>
             <a:ext cx="2559639" cy="1997717"/>
           </a:xfrm>
           <a:prstGeom prst="rect">
@@ -9301,7 +9366,7 @@
           <p:cNvPr id="10" name="Kép 9">
             <a:extLst>
               <a:ext uri="{FF2B5EF4-FFF2-40B4-BE49-F238E27FC236}">
-                <a16:creationId xmlns:a16="http://schemas.microsoft.com/office/drawing/2014/main" id="{3F043C30-21D5-47E4-B1FA-E30EEF83A68A}"/>
+                <a16:creationId xmlns:a16="http://schemas.microsoft.com/office/drawing/2014/main" xmlns="" id="{3F043C30-21D5-47E4-B1FA-E30EEF83A68A}"/>
               </a:ext>
             </a:extLst>
           </p:cNvPr>
@@ -9318,7 +9383,7 @@
         </p:blipFill>
         <p:spPr>
           <a:xfrm>
-            <a:off x="5462888" y="2370668"/>
+            <a:off x="5205291" y="2616199"/>
             <a:ext cx="3158949" cy="2288509"/>
           </a:xfrm>
           <a:prstGeom prst="rect">
@@ -9373,7 +9438,11 @@
                                           </p:stCondLst>
                                         </p:cTn>
                                         <p:tgtEl>
-                                          <p:spTgt spid="6"/>
+                                          <p:spTgt spid="3">
+                                            <p:txEl>
+                                              <p:pRg st="1" end="1"/>
+                                            </p:txEl>
+                                          </p:spTgt>
                                         </p:tgtEl>
                                         <p:attrNameLst>
                                           <p:attrName>style.visibility</p:attrName>
@@ -9387,7 +9456,11 @@
                                       <p:cBhvr additive="base">
                                         <p:cTn id="7" dur="500" fill="hold"/>
                                         <p:tgtEl>
-                                          <p:spTgt spid="6"/>
+                                          <p:spTgt spid="3">
+                                            <p:txEl>
+                                              <p:pRg st="1" end="1"/>
+                                            </p:txEl>
+                                          </p:spTgt>
                                         </p:tgtEl>
                                         <p:attrNameLst>
                                           <p:attrName>ppt_x</p:attrName>
@@ -9410,7 +9483,11 @@
                                       <p:cBhvr additive="base">
                                         <p:cTn id="8" dur="500" fill="hold"/>
                                         <p:tgtEl>
-                                          <p:spTgt spid="6"/>
+                                          <p:spTgt spid="3">
+                                            <p:txEl>
+                                              <p:pRg st="1" end="1"/>
+                                            </p:txEl>
+                                          </p:spTgt>
                                         </p:tgtEl>
                                         <p:attrNameLst>
                                           <p:attrName>ppt_y</p:attrName>
@@ -9464,7 +9541,7 @@
                                           </p:stCondLst>
                                         </p:cTn>
                                         <p:tgtEl>
-                                          <p:spTgt spid="8"/>
+                                          <p:spTgt spid="6"/>
                                         </p:tgtEl>
                                         <p:attrNameLst>
                                           <p:attrName>style.visibility</p:attrName>
@@ -9478,7 +9555,7 @@
                                       <p:cBhvr additive="base">
                                         <p:cTn id="13" dur="500" fill="hold"/>
                                         <p:tgtEl>
-                                          <p:spTgt spid="8"/>
+                                          <p:spTgt spid="6"/>
                                         </p:tgtEl>
                                         <p:attrNameLst>
                                           <p:attrName>ppt_x</p:attrName>
@@ -9501,7 +9578,7 @@
                                       <p:cBhvr additive="base">
                                         <p:cTn id="14" dur="500" fill="hold"/>
                                         <p:tgtEl>
-                                          <p:spTgt spid="8"/>
+                                          <p:spTgt spid="6"/>
                                         </p:tgtEl>
                                         <p:attrNameLst>
                                           <p:attrName>ppt_y</p:attrName>
@@ -9555,7 +9632,11 @@
                                           </p:stCondLst>
                                         </p:cTn>
                                         <p:tgtEl>
-                                          <p:spTgt spid="10"/>
+                                          <p:spTgt spid="3">
+                                            <p:txEl>
+                                              <p:pRg st="2" end="2"/>
+                                            </p:txEl>
+                                          </p:spTgt>
                                         </p:tgtEl>
                                         <p:attrNameLst>
                                           <p:attrName>style.visibility</p:attrName>
@@ -9569,6 +9650,299 @@
                                       <p:cBhvr additive="base">
                                         <p:cTn id="19" dur="500" fill="hold"/>
                                         <p:tgtEl>
+                                          <p:spTgt spid="3">
+                                            <p:txEl>
+                                              <p:pRg st="2" end="2"/>
+                                            </p:txEl>
+                                          </p:spTgt>
+                                        </p:tgtEl>
+                                        <p:attrNameLst>
+                                          <p:attrName>ppt_x</p:attrName>
+                                        </p:attrNameLst>
+                                      </p:cBhvr>
+                                      <p:tavLst>
+                                        <p:tav tm="0">
+                                          <p:val>
+                                            <p:strVal val="#ppt_x"/>
+                                          </p:val>
+                                        </p:tav>
+                                        <p:tav tm="100000">
+                                          <p:val>
+                                            <p:strVal val="#ppt_x"/>
+                                          </p:val>
+                                        </p:tav>
+                                      </p:tavLst>
+                                    </p:anim>
+                                    <p:anim calcmode="lin" valueType="num">
+                                      <p:cBhvr additive="base">
+                                        <p:cTn id="20" dur="500" fill="hold"/>
+                                        <p:tgtEl>
+                                          <p:spTgt spid="3">
+                                            <p:txEl>
+                                              <p:pRg st="2" end="2"/>
+                                            </p:txEl>
+                                          </p:spTgt>
+                                        </p:tgtEl>
+                                        <p:attrNameLst>
+                                          <p:attrName>ppt_y</p:attrName>
+                                        </p:attrNameLst>
+                                      </p:cBhvr>
+                                      <p:tavLst>
+                                        <p:tav tm="0">
+                                          <p:val>
+                                            <p:strVal val="1+#ppt_h/2"/>
+                                          </p:val>
+                                        </p:tav>
+                                        <p:tav tm="100000">
+                                          <p:val>
+                                            <p:strVal val="#ppt_y"/>
+                                          </p:val>
+                                        </p:tav>
+                                      </p:tavLst>
+                                    </p:anim>
+                                  </p:childTnLst>
+                                </p:cTn>
+                              </p:par>
+                            </p:childTnLst>
+                          </p:cTn>
+                        </p:par>
+                      </p:childTnLst>
+                    </p:cTn>
+                  </p:par>
+                  <p:par>
+                    <p:cTn id="21" fill="hold">
+                      <p:stCondLst>
+                        <p:cond delay="indefinite"/>
+                      </p:stCondLst>
+                      <p:childTnLst>
+                        <p:par>
+                          <p:cTn id="22" fill="hold">
+                            <p:stCondLst>
+                              <p:cond delay="0"/>
+                            </p:stCondLst>
+                            <p:childTnLst>
+                              <p:par>
+                                <p:cTn id="23" presetID="2" presetClass="entr" presetSubtype="4" fill="hold" nodeType="clickEffect">
+                                  <p:stCondLst>
+                                    <p:cond delay="0"/>
+                                  </p:stCondLst>
+                                  <p:childTnLst>
+                                    <p:set>
+                                      <p:cBhvr>
+                                        <p:cTn id="24" dur="1" fill="hold">
+                                          <p:stCondLst>
+                                            <p:cond delay="0"/>
+                                          </p:stCondLst>
+                                        </p:cTn>
+                                        <p:tgtEl>
+                                          <p:spTgt spid="8"/>
+                                        </p:tgtEl>
+                                        <p:attrNameLst>
+                                          <p:attrName>style.visibility</p:attrName>
+                                        </p:attrNameLst>
+                                      </p:cBhvr>
+                                      <p:to>
+                                        <p:strVal val="visible"/>
+                                      </p:to>
+                                    </p:set>
+                                    <p:anim calcmode="lin" valueType="num">
+                                      <p:cBhvr additive="base">
+                                        <p:cTn id="25" dur="500" fill="hold"/>
+                                        <p:tgtEl>
+                                          <p:spTgt spid="8"/>
+                                        </p:tgtEl>
+                                        <p:attrNameLst>
+                                          <p:attrName>ppt_x</p:attrName>
+                                        </p:attrNameLst>
+                                      </p:cBhvr>
+                                      <p:tavLst>
+                                        <p:tav tm="0">
+                                          <p:val>
+                                            <p:strVal val="#ppt_x"/>
+                                          </p:val>
+                                        </p:tav>
+                                        <p:tav tm="100000">
+                                          <p:val>
+                                            <p:strVal val="#ppt_x"/>
+                                          </p:val>
+                                        </p:tav>
+                                      </p:tavLst>
+                                    </p:anim>
+                                    <p:anim calcmode="lin" valueType="num">
+                                      <p:cBhvr additive="base">
+                                        <p:cTn id="26" dur="500" fill="hold"/>
+                                        <p:tgtEl>
+                                          <p:spTgt spid="8"/>
+                                        </p:tgtEl>
+                                        <p:attrNameLst>
+                                          <p:attrName>ppt_y</p:attrName>
+                                        </p:attrNameLst>
+                                      </p:cBhvr>
+                                      <p:tavLst>
+                                        <p:tav tm="0">
+                                          <p:val>
+                                            <p:strVal val="1+#ppt_h/2"/>
+                                          </p:val>
+                                        </p:tav>
+                                        <p:tav tm="100000">
+                                          <p:val>
+                                            <p:strVal val="#ppt_y"/>
+                                          </p:val>
+                                        </p:tav>
+                                      </p:tavLst>
+                                    </p:anim>
+                                  </p:childTnLst>
+                                </p:cTn>
+                              </p:par>
+                            </p:childTnLst>
+                          </p:cTn>
+                        </p:par>
+                      </p:childTnLst>
+                    </p:cTn>
+                  </p:par>
+                  <p:par>
+                    <p:cTn id="27" fill="hold">
+                      <p:stCondLst>
+                        <p:cond delay="indefinite"/>
+                      </p:stCondLst>
+                      <p:childTnLst>
+                        <p:par>
+                          <p:cTn id="28" fill="hold">
+                            <p:stCondLst>
+                              <p:cond delay="0"/>
+                            </p:stCondLst>
+                            <p:childTnLst>
+                              <p:par>
+                                <p:cTn id="29" presetID="2" presetClass="entr" presetSubtype="4" fill="hold" nodeType="clickEffect">
+                                  <p:stCondLst>
+                                    <p:cond delay="0"/>
+                                  </p:stCondLst>
+                                  <p:childTnLst>
+                                    <p:set>
+                                      <p:cBhvr>
+                                        <p:cTn id="30" dur="1" fill="hold">
+                                          <p:stCondLst>
+                                            <p:cond delay="0"/>
+                                          </p:stCondLst>
+                                        </p:cTn>
+                                        <p:tgtEl>
+                                          <p:spTgt spid="3">
+                                            <p:txEl>
+                                              <p:pRg st="3" end="3"/>
+                                            </p:txEl>
+                                          </p:spTgt>
+                                        </p:tgtEl>
+                                        <p:attrNameLst>
+                                          <p:attrName>style.visibility</p:attrName>
+                                        </p:attrNameLst>
+                                      </p:cBhvr>
+                                      <p:to>
+                                        <p:strVal val="visible"/>
+                                      </p:to>
+                                    </p:set>
+                                    <p:anim calcmode="lin" valueType="num">
+                                      <p:cBhvr additive="base">
+                                        <p:cTn id="31" dur="500" fill="hold"/>
+                                        <p:tgtEl>
+                                          <p:spTgt spid="3">
+                                            <p:txEl>
+                                              <p:pRg st="3" end="3"/>
+                                            </p:txEl>
+                                          </p:spTgt>
+                                        </p:tgtEl>
+                                        <p:attrNameLst>
+                                          <p:attrName>ppt_x</p:attrName>
+                                        </p:attrNameLst>
+                                      </p:cBhvr>
+                                      <p:tavLst>
+                                        <p:tav tm="0">
+                                          <p:val>
+                                            <p:strVal val="#ppt_x"/>
+                                          </p:val>
+                                        </p:tav>
+                                        <p:tav tm="100000">
+                                          <p:val>
+                                            <p:strVal val="#ppt_x"/>
+                                          </p:val>
+                                        </p:tav>
+                                      </p:tavLst>
+                                    </p:anim>
+                                    <p:anim calcmode="lin" valueType="num">
+                                      <p:cBhvr additive="base">
+                                        <p:cTn id="32" dur="500" fill="hold"/>
+                                        <p:tgtEl>
+                                          <p:spTgt spid="3">
+                                            <p:txEl>
+                                              <p:pRg st="3" end="3"/>
+                                            </p:txEl>
+                                          </p:spTgt>
+                                        </p:tgtEl>
+                                        <p:attrNameLst>
+                                          <p:attrName>ppt_y</p:attrName>
+                                        </p:attrNameLst>
+                                      </p:cBhvr>
+                                      <p:tavLst>
+                                        <p:tav tm="0">
+                                          <p:val>
+                                            <p:strVal val="1+#ppt_h/2"/>
+                                          </p:val>
+                                        </p:tav>
+                                        <p:tav tm="100000">
+                                          <p:val>
+                                            <p:strVal val="#ppt_y"/>
+                                          </p:val>
+                                        </p:tav>
+                                      </p:tavLst>
+                                    </p:anim>
+                                  </p:childTnLst>
+                                </p:cTn>
+                              </p:par>
+                            </p:childTnLst>
+                          </p:cTn>
+                        </p:par>
+                      </p:childTnLst>
+                    </p:cTn>
+                  </p:par>
+                  <p:par>
+                    <p:cTn id="33" fill="hold">
+                      <p:stCondLst>
+                        <p:cond delay="indefinite"/>
+                      </p:stCondLst>
+                      <p:childTnLst>
+                        <p:par>
+                          <p:cTn id="34" fill="hold">
+                            <p:stCondLst>
+                              <p:cond delay="0"/>
+                            </p:stCondLst>
+                            <p:childTnLst>
+                              <p:par>
+                                <p:cTn id="35" presetID="2" presetClass="entr" presetSubtype="4" fill="hold" nodeType="clickEffect">
+                                  <p:stCondLst>
+                                    <p:cond delay="0"/>
+                                  </p:stCondLst>
+                                  <p:childTnLst>
+                                    <p:set>
+                                      <p:cBhvr>
+                                        <p:cTn id="36" dur="1" fill="hold">
+                                          <p:stCondLst>
+                                            <p:cond delay="0"/>
+                                          </p:stCondLst>
+                                        </p:cTn>
+                                        <p:tgtEl>
+                                          <p:spTgt spid="10"/>
+                                        </p:tgtEl>
+                                        <p:attrNameLst>
+                                          <p:attrName>style.visibility</p:attrName>
+                                        </p:attrNameLst>
+                                      </p:cBhvr>
+                                      <p:to>
+                                        <p:strVal val="visible"/>
+                                      </p:to>
+                                    </p:set>
+                                    <p:anim calcmode="lin" valueType="num">
+                                      <p:cBhvr additive="base">
+                                        <p:cTn id="37" dur="500" fill="hold"/>
+                                        <p:tgtEl>
                                           <p:spTgt spid="10"/>
                                         </p:tgtEl>
                                         <p:attrNameLst>
@@ -9590,9 +9964,215 @@
                                     </p:anim>
                                     <p:anim calcmode="lin" valueType="num">
                                       <p:cBhvr additive="base">
-                                        <p:cTn id="20" dur="500" fill="hold"/>
+                                        <p:cTn id="38" dur="500" fill="hold"/>
                                         <p:tgtEl>
                                           <p:spTgt spid="10"/>
+                                        </p:tgtEl>
+                                        <p:attrNameLst>
+                                          <p:attrName>ppt_y</p:attrName>
+                                        </p:attrNameLst>
+                                      </p:cBhvr>
+                                      <p:tavLst>
+                                        <p:tav tm="0">
+                                          <p:val>
+                                            <p:strVal val="1+#ppt_h/2"/>
+                                          </p:val>
+                                        </p:tav>
+                                        <p:tav tm="100000">
+                                          <p:val>
+                                            <p:strVal val="#ppt_y"/>
+                                          </p:val>
+                                        </p:tav>
+                                      </p:tavLst>
+                                    </p:anim>
+                                  </p:childTnLst>
+                                </p:cTn>
+                              </p:par>
+                            </p:childTnLst>
+                          </p:cTn>
+                        </p:par>
+                      </p:childTnLst>
+                    </p:cTn>
+                  </p:par>
+                  <p:par>
+                    <p:cTn id="39" fill="hold">
+                      <p:stCondLst>
+                        <p:cond delay="indefinite"/>
+                      </p:stCondLst>
+                      <p:childTnLst>
+                        <p:par>
+                          <p:cTn id="40" fill="hold">
+                            <p:stCondLst>
+                              <p:cond delay="0"/>
+                            </p:stCondLst>
+                            <p:childTnLst>
+                              <p:par>
+                                <p:cTn id="41" presetID="2" presetClass="entr" presetSubtype="4" fill="hold" nodeType="clickEffect">
+                                  <p:stCondLst>
+                                    <p:cond delay="0"/>
+                                  </p:stCondLst>
+                                  <p:childTnLst>
+                                    <p:set>
+                                      <p:cBhvr>
+                                        <p:cTn id="42" dur="1" fill="hold">
+                                          <p:stCondLst>
+                                            <p:cond delay="0"/>
+                                          </p:stCondLst>
+                                        </p:cTn>
+                                        <p:tgtEl>
+                                          <p:spTgt spid="3">
+                                            <p:txEl>
+                                              <p:pRg st="4" end="4"/>
+                                            </p:txEl>
+                                          </p:spTgt>
+                                        </p:tgtEl>
+                                        <p:attrNameLst>
+                                          <p:attrName>style.visibility</p:attrName>
+                                        </p:attrNameLst>
+                                      </p:cBhvr>
+                                      <p:to>
+                                        <p:strVal val="visible"/>
+                                      </p:to>
+                                    </p:set>
+                                    <p:anim calcmode="lin" valueType="num">
+                                      <p:cBhvr additive="base">
+                                        <p:cTn id="43" dur="500" fill="hold"/>
+                                        <p:tgtEl>
+                                          <p:spTgt spid="3">
+                                            <p:txEl>
+                                              <p:pRg st="4" end="4"/>
+                                            </p:txEl>
+                                          </p:spTgt>
+                                        </p:tgtEl>
+                                        <p:attrNameLst>
+                                          <p:attrName>ppt_x</p:attrName>
+                                        </p:attrNameLst>
+                                      </p:cBhvr>
+                                      <p:tavLst>
+                                        <p:tav tm="0">
+                                          <p:val>
+                                            <p:strVal val="#ppt_x"/>
+                                          </p:val>
+                                        </p:tav>
+                                        <p:tav tm="100000">
+                                          <p:val>
+                                            <p:strVal val="#ppt_x"/>
+                                          </p:val>
+                                        </p:tav>
+                                      </p:tavLst>
+                                    </p:anim>
+                                    <p:anim calcmode="lin" valueType="num">
+                                      <p:cBhvr additive="base">
+                                        <p:cTn id="44" dur="500" fill="hold"/>
+                                        <p:tgtEl>
+                                          <p:spTgt spid="3">
+                                            <p:txEl>
+                                              <p:pRg st="4" end="4"/>
+                                            </p:txEl>
+                                          </p:spTgt>
+                                        </p:tgtEl>
+                                        <p:attrNameLst>
+                                          <p:attrName>ppt_y</p:attrName>
+                                        </p:attrNameLst>
+                                      </p:cBhvr>
+                                      <p:tavLst>
+                                        <p:tav tm="0">
+                                          <p:val>
+                                            <p:strVal val="1+#ppt_h/2"/>
+                                          </p:val>
+                                        </p:tav>
+                                        <p:tav tm="100000">
+                                          <p:val>
+                                            <p:strVal val="#ppt_y"/>
+                                          </p:val>
+                                        </p:tav>
+                                      </p:tavLst>
+                                    </p:anim>
+                                  </p:childTnLst>
+                                </p:cTn>
+                              </p:par>
+                            </p:childTnLst>
+                          </p:cTn>
+                        </p:par>
+                      </p:childTnLst>
+                    </p:cTn>
+                  </p:par>
+                  <p:par>
+                    <p:cTn id="45" fill="hold">
+                      <p:stCondLst>
+                        <p:cond delay="indefinite"/>
+                      </p:stCondLst>
+                      <p:childTnLst>
+                        <p:par>
+                          <p:cTn id="46" fill="hold">
+                            <p:stCondLst>
+                              <p:cond delay="0"/>
+                            </p:stCondLst>
+                            <p:childTnLst>
+                              <p:par>
+                                <p:cTn id="47" presetID="2" presetClass="entr" presetSubtype="4" fill="hold" nodeType="clickEffect">
+                                  <p:stCondLst>
+                                    <p:cond delay="0"/>
+                                  </p:stCondLst>
+                                  <p:childTnLst>
+                                    <p:set>
+                                      <p:cBhvr>
+                                        <p:cTn id="48" dur="1" fill="hold">
+                                          <p:stCondLst>
+                                            <p:cond delay="0"/>
+                                          </p:stCondLst>
+                                        </p:cTn>
+                                        <p:tgtEl>
+                                          <p:spTgt spid="3">
+                                            <p:txEl>
+                                              <p:pRg st="5" end="5"/>
+                                            </p:txEl>
+                                          </p:spTgt>
+                                        </p:tgtEl>
+                                        <p:attrNameLst>
+                                          <p:attrName>style.visibility</p:attrName>
+                                        </p:attrNameLst>
+                                      </p:cBhvr>
+                                      <p:to>
+                                        <p:strVal val="visible"/>
+                                      </p:to>
+                                    </p:set>
+                                    <p:anim calcmode="lin" valueType="num">
+                                      <p:cBhvr additive="base">
+                                        <p:cTn id="49" dur="500" fill="hold"/>
+                                        <p:tgtEl>
+                                          <p:spTgt spid="3">
+                                            <p:txEl>
+                                              <p:pRg st="5" end="5"/>
+                                            </p:txEl>
+                                          </p:spTgt>
+                                        </p:tgtEl>
+                                        <p:attrNameLst>
+                                          <p:attrName>ppt_x</p:attrName>
+                                        </p:attrNameLst>
+                                      </p:cBhvr>
+                                      <p:tavLst>
+                                        <p:tav tm="0">
+                                          <p:val>
+                                            <p:strVal val="#ppt_x"/>
+                                          </p:val>
+                                        </p:tav>
+                                        <p:tav tm="100000">
+                                          <p:val>
+                                            <p:strVal val="#ppt_x"/>
+                                          </p:val>
+                                        </p:tav>
+                                      </p:tavLst>
+                                    </p:anim>
+                                    <p:anim calcmode="lin" valueType="num">
+                                      <p:cBhvr additive="base">
+                                        <p:cTn id="50" dur="500" fill="hold"/>
+                                        <p:tgtEl>
+                                          <p:spTgt spid="3">
+                                            <p:txEl>
+                                              <p:pRg st="5" end="5"/>
+                                            </p:txEl>
+                                          </p:spTgt>
                                         </p:tgtEl>
                                         <p:attrNameLst>
                                           <p:attrName>ppt_y</p:attrName>
@@ -9667,7 +10247,7 @@
           <p:cNvPr id="2" name="Cím 1">
             <a:extLst>
               <a:ext uri="{FF2B5EF4-FFF2-40B4-BE49-F238E27FC236}">
-                <a16:creationId xmlns:a16="http://schemas.microsoft.com/office/drawing/2014/main" id="{0AC98F82-9057-4B7D-85E4-971D48F3A09F}"/>
+                <a16:creationId xmlns:a16="http://schemas.microsoft.com/office/drawing/2014/main" xmlns="" id="{0AC98F82-9057-4B7D-85E4-971D48F3A09F}"/>
               </a:ext>
             </a:extLst>
           </p:cNvPr>
@@ -9700,7 +10280,7 @@
           <p:cNvPr id="3" name="Tartalom helye 2">
             <a:extLst>
               <a:ext uri="{FF2B5EF4-FFF2-40B4-BE49-F238E27FC236}">
-                <a16:creationId xmlns:a16="http://schemas.microsoft.com/office/drawing/2014/main" id="{E9B8CCEE-BBE1-4FB8-9D14-F1FB329BDF81}"/>
+                <a16:creationId xmlns:a16="http://schemas.microsoft.com/office/drawing/2014/main" xmlns="" id="{E9B8CCEE-BBE1-4FB8-9D14-F1FB329BDF81}"/>
               </a:ext>
             </a:extLst>
           </p:cNvPr>
@@ -9836,7 +10416,7 @@
               <a:rPr sz="2000" dirty="0" err="1"/>
               <a:t>védelem</a:t>
             </a:r>
-            <a:endParaRPr sz="2000" dirty="0"/>
+            <a:endParaRPr sz="2000" b="1" dirty="0"/>
           </a:p>
           <a:p>
             <a:pPr lvl="1">
@@ -9913,7 +10493,7 @@
           <p:cNvPr id="7" name="Kép 6">
             <a:extLst>
               <a:ext uri="{FF2B5EF4-FFF2-40B4-BE49-F238E27FC236}">
-                <a16:creationId xmlns:a16="http://schemas.microsoft.com/office/drawing/2014/main" id="{8C018E19-8D24-45E2-9106-A1B38623CAE8}"/>
+                <a16:creationId xmlns:a16="http://schemas.microsoft.com/office/drawing/2014/main" xmlns="" id="{8C018E19-8D24-45E2-9106-A1B38623CAE8}"/>
               </a:ext>
             </a:extLst>
           </p:cNvPr>
@@ -9923,7 +10503,7 @@
           <p:nvPr/>
         </p:nvPicPr>
         <p:blipFill>
-          <a:blip r:embed="rId2">
+          <a:blip r:embed="rId2" cstate="print">
             <a:extLst>
               <a:ext uri="{28A0092B-C50C-407E-A947-70E740481C1C}">
                 <a14:useLocalDpi xmlns:a14="http://schemas.microsoft.com/office/drawing/2010/main" val="0"/>
@@ -9949,7 +10529,7 @@
           <p:cNvPr id="5" name="Kép 4">
             <a:extLst>
               <a:ext uri="{FF2B5EF4-FFF2-40B4-BE49-F238E27FC236}">
-                <a16:creationId xmlns:a16="http://schemas.microsoft.com/office/drawing/2014/main" id="{83983435-DA29-4720-812D-4906ACE39108}"/>
+                <a16:creationId xmlns:a16="http://schemas.microsoft.com/office/drawing/2014/main" xmlns="" id="{83983435-DA29-4720-812D-4906ACE39108}"/>
               </a:ext>
             </a:extLst>
           </p:cNvPr>
@@ -9966,7 +10546,7 @@
         </p:blipFill>
         <p:spPr>
           <a:xfrm>
-            <a:off x="9542974" y="335745"/>
+            <a:off x="6287540" y="1113641"/>
             <a:ext cx="1171914" cy="1820150"/>
           </a:xfrm>
           <a:prstGeom prst="rect">
@@ -9979,7 +10559,7 @@
           <p:cNvPr id="8" name="Kép 7">
             <a:extLst>
               <a:ext uri="{FF2B5EF4-FFF2-40B4-BE49-F238E27FC236}">
-                <a16:creationId xmlns:a16="http://schemas.microsoft.com/office/drawing/2014/main" id="{E945A3CB-8276-4B91-B4D9-22D7D5E1CC38}"/>
+                <a16:creationId xmlns:a16="http://schemas.microsoft.com/office/drawing/2014/main" xmlns="" id="{E945A3CB-8276-4B91-B4D9-22D7D5E1CC38}"/>
               </a:ext>
             </a:extLst>
           </p:cNvPr>
@@ -9996,8 +10576,62 @@
         </p:blipFill>
         <p:spPr>
           <a:xfrm>
-            <a:off x="7008481" y="335745"/>
+            <a:off x="7813669" y="488039"/>
             <a:ext cx="2284522" cy="1820150"/>
+          </a:xfrm>
+          <a:prstGeom prst="rect">
+            <a:avLst/>
+          </a:prstGeom>
+        </p:spPr>
+      </p:pic>
+      <p:pic>
+        <p:nvPicPr>
+          <p:cNvPr id="4" name="Kép 3"/>
+          <p:cNvPicPr>
+            <a:picLocks noChangeAspect="1"/>
+          </p:cNvPicPr>
+          <p:nvPr/>
+        </p:nvPicPr>
+        <p:blipFill>
+          <a:blip r:embed="rId5"/>
+          <a:stretch>
+            <a:fillRect/>
+          </a:stretch>
+        </p:blipFill>
+        <p:spPr>
+          <a:xfrm>
+            <a:off x="7766908" y="2569418"/>
+            <a:ext cx="2903407" cy="3920497"/>
+          </a:xfrm>
+          <a:prstGeom prst="rect">
+            <a:avLst/>
+          </a:prstGeom>
+        </p:spPr>
+      </p:pic>
+      <p:pic>
+        <p:nvPicPr>
+          <p:cNvPr id="9" name="Kép 8">
+            <a:extLst>
+              <a:ext uri="{FF2B5EF4-FFF2-40B4-BE49-F238E27FC236}">
+                <a16:creationId xmlns:a16="http://schemas.microsoft.com/office/drawing/2014/main" xmlns="" id="{D84BE393-950C-4DFB-8153-B5F0BBEF4982}"/>
+              </a:ext>
+            </a:extLst>
+          </p:cNvPr>
+          <p:cNvPicPr>
+            <a:picLocks noChangeAspect="1"/>
+          </p:cNvPicPr>
+          <p:nvPr/>
+        </p:nvPicPr>
+        <p:blipFill>
+          <a:blip r:embed="rId6"/>
+          <a:stretch>
+            <a:fillRect/>
+          </a:stretch>
+        </p:blipFill>
+        <p:spPr>
+          <a:xfrm>
+            <a:off x="3383260" y="1102384"/>
+            <a:ext cx="2781057" cy="1406697"/>
           </a:xfrm>
           <a:prstGeom prst="rect">
             <a:avLst/>
@@ -10051,7 +10685,11 @@
                                           </p:stCondLst>
                                         </p:cTn>
                                         <p:tgtEl>
-                                          <p:spTgt spid="5"/>
+                                          <p:spTgt spid="3">
+                                            <p:txEl>
+                                              <p:pRg st="1" end="1"/>
+                                            </p:txEl>
+                                          </p:spTgt>
                                         </p:tgtEl>
                                         <p:attrNameLst>
                                           <p:attrName>style.visibility</p:attrName>
@@ -10065,7 +10703,11 @@
                                       <p:cBhvr additive="base">
                                         <p:cTn id="7" dur="500" fill="hold"/>
                                         <p:tgtEl>
-                                          <p:spTgt spid="5"/>
+                                          <p:spTgt spid="3">
+                                            <p:txEl>
+                                              <p:pRg st="1" end="1"/>
+                                            </p:txEl>
+                                          </p:spTgt>
                                         </p:tgtEl>
                                         <p:attrNameLst>
                                           <p:attrName>ppt_x</p:attrName>
@@ -10088,7 +10730,11 @@
                                       <p:cBhvr additive="base">
                                         <p:cTn id="8" dur="500" fill="hold"/>
                                         <p:tgtEl>
-                                          <p:spTgt spid="5"/>
+                                          <p:spTgt spid="3">
+                                            <p:txEl>
+                                              <p:pRg st="1" end="1"/>
+                                            </p:txEl>
+                                          </p:spTgt>
                                         </p:tgtEl>
                                         <p:attrNameLst>
                                           <p:attrName>ppt_y</p:attrName>
@@ -10142,7 +10788,7 @@
                                           </p:stCondLst>
                                         </p:cTn>
                                         <p:tgtEl>
-                                          <p:spTgt spid="8"/>
+                                          <p:spTgt spid="9"/>
                                         </p:tgtEl>
                                         <p:attrNameLst>
                                           <p:attrName>style.visibility</p:attrName>
@@ -10156,6 +10802,691 @@
                                       <p:cBhvr additive="base">
                                         <p:cTn id="13" dur="500" fill="hold"/>
                                         <p:tgtEl>
+                                          <p:spTgt spid="9"/>
+                                        </p:tgtEl>
+                                        <p:attrNameLst>
+                                          <p:attrName>ppt_x</p:attrName>
+                                        </p:attrNameLst>
+                                      </p:cBhvr>
+                                      <p:tavLst>
+                                        <p:tav tm="0">
+                                          <p:val>
+                                            <p:strVal val="#ppt_x"/>
+                                          </p:val>
+                                        </p:tav>
+                                        <p:tav tm="100000">
+                                          <p:val>
+                                            <p:strVal val="#ppt_x"/>
+                                          </p:val>
+                                        </p:tav>
+                                      </p:tavLst>
+                                    </p:anim>
+                                    <p:anim calcmode="lin" valueType="num">
+                                      <p:cBhvr additive="base">
+                                        <p:cTn id="14" dur="500" fill="hold"/>
+                                        <p:tgtEl>
+                                          <p:spTgt spid="9"/>
+                                        </p:tgtEl>
+                                        <p:attrNameLst>
+                                          <p:attrName>ppt_y</p:attrName>
+                                        </p:attrNameLst>
+                                      </p:cBhvr>
+                                      <p:tavLst>
+                                        <p:tav tm="0">
+                                          <p:val>
+                                            <p:strVal val="1+#ppt_h/2"/>
+                                          </p:val>
+                                        </p:tav>
+                                        <p:tav tm="100000">
+                                          <p:val>
+                                            <p:strVal val="#ppt_y"/>
+                                          </p:val>
+                                        </p:tav>
+                                      </p:tavLst>
+                                    </p:anim>
+                                  </p:childTnLst>
+                                </p:cTn>
+                              </p:par>
+                            </p:childTnLst>
+                          </p:cTn>
+                        </p:par>
+                      </p:childTnLst>
+                    </p:cTn>
+                  </p:par>
+                  <p:par>
+                    <p:cTn id="15" fill="hold">
+                      <p:stCondLst>
+                        <p:cond delay="indefinite"/>
+                      </p:stCondLst>
+                      <p:childTnLst>
+                        <p:par>
+                          <p:cTn id="16" fill="hold">
+                            <p:stCondLst>
+                              <p:cond delay="0"/>
+                            </p:stCondLst>
+                            <p:childTnLst>
+                              <p:par>
+                                <p:cTn id="17" presetID="2" presetClass="entr" presetSubtype="4" fill="hold" nodeType="clickEffect">
+                                  <p:stCondLst>
+                                    <p:cond delay="0"/>
+                                  </p:stCondLst>
+                                  <p:childTnLst>
+                                    <p:set>
+                                      <p:cBhvr>
+                                        <p:cTn id="18" dur="1" fill="hold">
+                                          <p:stCondLst>
+                                            <p:cond delay="0"/>
+                                          </p:stCondLst>
+                                        </p:cTn>
+                                        <p:tgtEl>
+                                          <p:spTgt spid="3">
+                                            <p:txEl>
+                                              <p:pRg st="2" end="2"/>
+                                            </p:txEl>
+                                          </p:spTgt>
+                                        </p:tgtEl>
+                                        <p:attrNameLst>
+                                          <p:attrName>style.visibility</p:attrName>
+                                        </p:attrNameLst>
+                                      </p:cBhvr>
+                                      <p:to>
+                                        <p:strVal val="visible"/>
+                                      </p:to>
+                                    </p:set>
+                                    <p:anim calcmode="lin" valueType="num">
+                                      <p:cBhvr additive="base">
+                                        <p:cTn id="19" dur="500" fill="hold"/>
+                                        <p:tgtEl>
+                                          <p:spTgt spid="3">
+                                            <p:txEl>
+                                              <p:pRg st="2" end="2"/>
+                                            </p:txEl>
+                                          </p:spTgt>
+                                        </p:tgtEl>
+                                        <p:attrNameLst>
+                                          <p:attrName>ppt_x</p:attrName>
+                                        </p:attrNameLst>
+                                      </p:cBhvr>
+                                      <p:tavLst>
+                                        <p:tav tm="0">
+                                          <p:val>
+                                            <p:strVal val="#ppt_x"/>
+                                          </p:val>
+                                        </p:tav>
+                                        <p:tav tm="100000">
+                                          <p:val>
+                                            <p:strVal val="#ppt_x"/>
+                                          </p:val>
+                                        </p:tav>
+                                      </p:tavLst>
+                                    </p:anim>
+                                    <p:anim calcmode="lin" valueType="num">
+                                      <p:cBhvr additive="base">
+                                        <p:cTn id="20" dur="500" fill="hold"/>
+                                        <p:tgtEl>
+                                          <p:spTgt spid="3">
+                                            <p:txEl>
+                                              <p:pRg st="2" end="2"/>
+                                            </p:txEl>
+                                          </p:spTgt>
+                                        </p:tgtEl>
+                                        <p:attrNameLst>
+                                          <p:attrName>ppt_y</p:attrName>
+                                        </p:attrNameLst>
+                                      </p:cBhvr>
+                                      <p:tavLst>
+                                        <p:tav tm="0">
+                                          <p:val>
+                                            <p:strVal val="1+#ppt_h/2"/>
+                                          </p:val>
+                                        </p:tav>
+                                        <p:tav tm="100000">
+                                          <p:val>
+                                            <p:strVal val="#ppt_y"/>
+                                          </p:val>
+                                        </p:tav>
+                                      </p:tavLst>
+                                    </p:anim>
+                                  </p:childTnLst>
+                                </p:cTn>
+                              </p:par>
+                            </p:childTnLst>
+                          </p:cTn>
+                        </p:par>
+                      </p:childTnLst>
+                    </p:cTn>
+                  </p:par>
+                  <p:par>
+                    <p:cTn id="21" fill="hold">
+                      <p:stCondLst>
+                        <p:cond delay="indefinite"/>
+                      </p:stCondLst>
+                      <p:childTnLst>
+                        <p:par>
+                          <p:cTn id="22" fill="hold">
+                            <p:stCondLst>
+                              <p:cond delay="0"/>
+                            </p:stCondLst>
+                            <p:childTnLst>
+                              <p:par>
+                                <p:cTn id="23" presetID="2" presetClass="entr" presetSubtype="4" fill="hold" nodeType="clickEffect">
+                                  <p:stCondLst>
+                                    <p:cond delay="0"/>
+                                  </p:stCondLst>
+                                  <p:childTnLst>
+                                    <p:set>
+                                      <p:cBhvr>
+                                        <p:cTn id="24" dur="1" fill="hold">
+                                          <p:stCondLst>
+                                            <p:cond delay="0"/>
+                                          </p:stCondLst>
+                                        </p:cTn>
+                                        <p:tgtEl>
+                                          <p:spTgt spid="3">
+                                            <p:txEl>
+                                              <p:pRg st="3" end="3"/>
+                                            </p:txEl>
+                                          </p:spTgt>
+                                        </p:tgtEl>
+                                        <p:attrNameLst>
+                                          <p:attrName>style.visibility</p:attrName>
+                                        </p:attrNameLst>
+                                      </p:cBhvr>
+                                      <p:to>
+                                        <p:strVal val="visible"/>
+                                      </p:to>
+                                    </p:set>
+                                    <p:anim calcmode="lin" valueType="num">
+                                      <p:cBhvr additive="base">
+                                        <p:cTn id="25" dur="500" fill="hold"/>
+                                        <p:tgtEl>
+                                          <p:spTgt spid="3">
+                                            <p:txEl>
+                                              <p:pRg st="3" end="3"/>
+                                            </p:txEl>
+                                          </p:spTgt>
+                                        </p:tgtEl>
+                                        <p:attrNameLst>
+                                          <p:attrName>ppt_x</p:attrName>
+                                        </p:attrNameLst>
+                                      </p:cBhvr>
+                                      <p:tavLst>
+                                        <p:tav tm="0">
+                                          <p:val>
+                                            <p:strVal val="#ppt_x"/>
+                                          </p:val>
+                                        </p:tav>
+                                        <p:tav tm="100000">
+                                          <p:val>
+                                            <p:strVal val="#ppt_x"/>
+                                          </p:val>
+                                        </p:tav>
+                                      </p:tavLst>
+                                    </p:anim>
+                                    <p:anim calcmode="lin" valueType="num">
+                                      <p:cBhvr additive="base">
+                                        <p:cTn id="26" dur="500" fill="hold"/>
+                                        <p:tgtEl>
+                                          <p:spTgt spid="3">
+                                            <p:txEl>
+                                              <p:pRg st="3" end="3"/>
+                                            </p:txEl>
+                                          </p:spTgt>
+                                        </p:tgtEl>
+                                        <p:attrNameLst>
+                                          <p:attrName>ppt_y</p:attrName>
+                                        </p:attrNameLst>
+                                      </p:cBhvr>
+                                      <p:tavLst>
+                                        <p:tav tm="0">
+                                          <p:val>
+                                            <p:strVal val="1+#ppt_h/2"/>
+                                          </p:val>
+                                        </p:tav>
+                                        <p:tav tm="100000">
+                                          <p:val>
+                                            <p:strVal val="#ppt_y"/>
+                                          </p:val>
+                                        </p:tav>
+                                      </p:tavLst>
+                                    </p:anim>
+                                  </p:childTnLst>
+                                </p:cTn>
+                              </p:par>
+                            </p:childTnLst>
+                          </p:cTn>
+                        </p:par>
+                      </p:childTnLst>
+                    </p:cTn>
+                  </p:par>
+                  <p:par>
+                    <p:cTn id="27" fill="hold">
+                      <p:stCondLst>
+                        <p:cond delay="indefinite"/>
+                      </p:stCondLst>
+                      <p:childTnLst>
+                        <p:par>
+                          <p:cTn id="28" fill="hold">
+                            <p:stCondLst>
+                              <p:cond delay="0"/>
+                            </p:stCondLst>
+                            <p:childTnLst>
+                              <p:par>
+                                <p:cTn id="29" presetID="2" presetClass="entr" presetSubtype="4" fill="hold" nodeType="clickEffect">
+                                  <p:stCondLst>
+                                    <p:cond delay="0"/>
+                                  </p:stCondLst>
+                                  <p:childTnLst>
+                                    <p:set>
+                                      <p:cBhvr>
+                                        <p:cTn id="30" dur="1" fill="hold">
+                                          <p:stCondLst>
+                                            <p:cond delay="0"/>
+                                          </p:stCondLst>
+                                        </p:cTn>
+                                        <p:tgtEl>
+                                          <p:spTgt spid="5"/>
+                                        </p:tgtEl>
+                                        <p:attrNameLst>
+                                          <p:attrName>style.visibility</p:attrName>
+                                        </p:attrNameLst>
+                                      </p:cBhvr>
+                                      <p:to>
+                                        <p:strVal val="visible"/>
+                                      </p:to>
+                                    </p:set>
+                                    <p:anim calcmode="lin" valueType="num">
+                                      <p:cBhvr additive="base">
+                                        <p:cTn id="31" dur="500" fill="hold"/>
+                                        <p:tgtEl>
+                                          <p:spTgt spid="5"/>
+                                        </p:tgtEl>
+                                        <p:attrNameLst>
+                                          <p:attrName>ppt_x</p:attrName>
+                                        </p:attrNameLst>
+                                      </p:cBhvr>
+                                      <p:tavLst>
+                                        <p:tav tm="0">
+                                          <p:val>
+                                            <p:strVal val="#ppt_x"/>
+                                          </p:val>
+                                        </p:tav>
+                                        <p:tav tm="100000">
+                                          <p:val>
+                                            <p:strVal val="#ppt_x"/>
+                                          </p:val>
+                                        </p:tav>
+                                      </p:tavLst>
+                                    </p:anim>
+                                    <p:anim calcmode="lin" valueType="num">
+                                      <p:cBhvr additive="base">
+                                        <p:cTn id="32" dur="500" fill="hold"/>
+                                        <p:tgtEl>
+                                          <p:spTgt spid="5"/>
+                                        </p:tgtEl>
+                                        <p:attrNameLst>
+                                          <p:attrName>ppt_y</p:attrName>
+                                        </p:attrNameLst>
+                                      </p:cBhvr>
+                                      <p:tavLst>
+                                        <p:tav tm="0">
+                                          <p:val>
+                                            <p:strVal val="1+#ppt_h/2"/>
+                                          </p:val>
+                                        </p:tav>
+                                        <p:tav tm="100000">
+                                          <p:val>
+                                            <p:strVal val="#ppt_y"/>
+                                          </p:val>
+                                        </p:tav>
+                                      </p:tavLst>
+                                    </p:anim>
+                                  </p:childTnLst>
+                                </p:cTn>
+                              </p:par>
+                            </p:childTnLst>
+                          </p:cTn>
+                        </p:par>
+                      </p:childTnLst>
+                    </p:cTn>
+                  </p:par>
+                  <p:par>
+                    <p:cTn id="33" fill="hold">
+                      <p:stCondLst>
+                        <p:cond delay="indefinite"/>
+                      </p:stCondLst>
+                      <p:childTnLst>
+                        <p:par>
+                          <p:cTn id="34" fill="hold">
+                            <p:stCondLst>
+                              <p:cond delay="0"/>
+                            </p:stCondLst>
+                            <p:childTnLst>
+                              <p:par>
+                                <p:cTn id="35" presetID="2" presetClass="entr" presetSubtype="4" fill="hold" nodeType="clickEffect">
+                                  <p:stCondLst>
+                                    <p:cond delay="0"/>
+                                  </p:stCondLst>
+                                  <p:childTnLst>
+                                    <p:set>
+                                      <p:cBhvr>
+                                        <p:cTn id="36" dur="1" fill="hold">
+                                          <p:stCondLst>
+                                            <p:cond delay="0"/>
+                                          </p:stCondLst>
+                                        </p:cTn>
+                                        <p:tgtEl>
+                                          <p:spTgt spid="3">
+                                            <p:txEl>
+                                              <p:pRg st="4" end="4"/>
+                                            </p:txEl>
+                                          </p:spTgt>
+                                        </p:tgtEl>
+                                        <p:attrNameLst>
+                                          <p:attrName>style.visibility</p:attrName>
+                                        </p:attrNameLst>
+                                      </p:cBhvr>
+                                      <p:to>
+                                        <p:strVal val="visible"/>
+                                      </p:to>
+                                    </p:set>
+                                    <p:anim calcmode="lin" valueType="num">
+                                      <p:cBhvr additive="base">
+                                        <p:cTn id="37" dur="500" fill="hold"/>
+                                        <p:tgtEl>
+                                          <p:spTgt spid="3">
+                                            <p:txEl>
+                                              <p:pRg st="4" end="4"/>
+                                            </p:txEl>
+                                          </p:spTgt>
+                                        </p:tgtEl>
+                                        <p:attrNameLst>
+                                          <p:attrName>ppt_x</p:attrName>
+                                        </p:attrNameLst>
+                                      </p:cBhvr>
+                                      <p:tavLst>
+                                        <p:tav tm="0">
+                                          <p:val>
+                                            <p:strVal val="#ppt_x"/>
+                                          </p:val>
+                                        </p:tav>
+                                        <p:tav tm="100000">
+                                          <p:val>
+                                            <p:strVal val="#ppt_x"/>
+                                          </p:val>
+                                        </p:tav>
+                                      </p:tavLst>
+                                    </p:anim>
+                                    <p:anim calcmode="lin" valueType="num">
+                                      <p:cBhvr additive="base">
+                                        <p:cTn id="38" dur="500" fill="hold"/>
+                                        <p:tgtEl>
+                                          <p:spTgt spid="3">
+                                            <p:txEl>
+                                              <p:pRg st="4" end="4"/>
+                                            </p:txEl>
+                                          </p:spTgt>
+                                        </p:tgtEl>
+                                        <p:attrNameLst>
+                                          <p:attrName>ppt_y</p:attrName>
+                                        </p:attrNameLst>
+                                      </p:cBhvr>
+                                      <p:tavLst>
+                                        <p:tav tm="0">
+                                          <p:val>
+                                            <p:strVal val="1+#ppt_h/2"/>
+                                          </p:val>
+                                        </p:tav>
+                                        <p:tav tm="100000">
+                                          <p:val>
+                                            <p:strVal val="#ppt_y"/>
+                                          </p:val>
+                                        </p:tav>
+                                      </p:tavLst>
+                                    </p:anim>
+                                  </p:childTnLst>
+                                </p:cTn>
+                              </p:par>
+                            </p:childTnLst>
+                          </p:cTn>
+                        </p:par>
+                      </p:childTnLst>
+                    </p:cTn>
+                  </p:par>
+                  <p:par>
+                    <p:cTn id="39" fill="hold">
+                      <p:stCondLst>
+                        <p:cond delay="indefinite"/>
+                      </p:stCondLst>
+                      <p:childTnLst>
+                        <p:par>
+                          <p:cTn id="40" fill="hold">
+                            <p:stCondLst>
+                              <p:cond delay="0"/>
+                            </p:stCondLst>
+                            <p:childTnLst>
+                              <p:par>
+                                <p:cTn id="41" presetID="2" presetClass="entr" presetSubtype="4" fill="hold" nodeType="clickEffect">
+                                  <p:stCondLst>
+                                    <p:cond delay="0"/>
+                                  </p:stCondLst>
+                                  <p:childTnLst>
+                                    <p:set>
+                                      <p:cBhvr>
+                                        <p:cTn id="42" dur="1" fill="hold">
+                                          <p:stCondLst>
+                                            <p:cond delay="0"/>
+                                          </p:stCondLst>
+                                        </p:cTn>
+                                        <p:tgtEl>
+                                          <p:spTgt spid="4"/>
+                                        </p:tgtEl>
+                                        <p:attrNameLst>
+                                          <p:attrName>style.visibility</p:attrName>
+                                        </p:attrNameLst>
+                                      </p:cBhvr>
+                                      <p:to>
+                                        <p:strVal val="visible"/>
+                                      </p:to>
+                                    </p:set>
+                                    <p:anim calcmode="lin" valueType="num">
+                                      <p:cBhvr additive="base">
+                                        <p:cTn id="43" dur="500" fill="hold"/>
+                                        <p:tgtEl>
+                                          <p:spTgt spid="4"/>
+                                        </p:tgtEl>
+                                        <p:attrNameLst>
+                                          <p:attrName>ppt_x</p:attrName>
+                                        </p:attrNameLst>
+                                      </p:cBhvr>
+                                      <p:tavLst>
+                                        <p:tav tm="0">
+                                          <p:val>
+                                            <p:strVal val="#ppt_x"/>
+                                          </p:val>
+                                        </p:tav>
+                                        <p:tav tm="100000">
+                                          <p:val>
+                                            <p:strVal val="#ppt_x"/>
+                                          </p:val>
+                                        </p:tav>
+                                      </p:tavLst>
+                                    </p:anim>
+                                    <p:anim calcmode="lin" valueType="num">
+                                      <p:cBhvr additive="base">
+                                        <p:cTn id="44" dur="500" fill="hold"/>
+                                        <p:tgtEl>
+                                          <p:spTgt spid="4"/>
+                                        </p:tgtEl>
+                                        <p:attrNameLst>
+                                          <p:attrName>ppt_y</p:attrName>
+                                        </p:attrNameLst>
+                                      </p:cBhvr>
+                                      <p:tavLst>
+                                        <p:tav tm="0">
+                                          <p:val>
+                                            <p:strVal val="1+#ppt_h/2"/>
+                                          </p:val>
+                                        </p:tav>
+                                        <p:tav tm="100000">
+                                          <p:val>
+                                            <p:strVal val="#ppt_y"/>
+                                          </p:val>
+                                        </p:tav>
+                                      </p:tavLst>
+                                    </p:anim>
+                                  </p:childTnLst>
+                                </p:cTn>
+                              </p:par>
+                            </p:childTnLst>
+                          </p:cTn>
+                        </p:par>
+                      </p:childTnLst>
+                    </p:cTn>
+                  </p:par>
+                  <p:par>
+                    <p:cTn id="45" fill="hold">
+                      <p:stCondLst>
+                        <p:cond delay="indefinite"/>
+                      </p:stCondLst>
+                      <p:childTnLst>
+                        <p:par>
+                          <p:cTn id="46" fill="hold">
+                            <p:stCondLst>
+                              <p:cond delay="0"/>
+                            </p:stCondLst>
+                            <p:childTnLst>
+                              <p:par>
+                                <p:cTn id="47" presetID="2" presetClass="entr" presetSubtype="4" fill="hold" nodeType="clickEffect">
+                                  <p:stCondLst>
+                                    <p:cond delay="0"/>
+                                  </p:stCondLst>
+                                  <p:childTnLst>
+                                    <p:set>
+                                      <p:cBhvr>
+                                        <p:cTn id="48" dur="1" fill="hold">
+                                          <p:stCondLst>
+                                            <p:cond delay="0"/>
+                                          </p:stCondLst>
+                                        </p:cTn>
+                                        <p:tgtEl>
+                                          <p:spTgt spid="3">
+                                            <p:txEl>
+                                              <p:pRg st="5" end="5"/>
+                                            </p:txEl>
+                                          </p:spTgt>
+                                        </p:tgtEl>
+                                        <p:attrNameLst>
+                                          <p:attrName>style.visibility</p:attrName>
+                                        </p:attrNameLst>
+                                      </p:cBhvr>
+                                      <p:to>
+                                        <p:strVal val="visible"/>
+                                      </p:to>
+                                    </p:set>
+                                    <p:anim calcmode="lin" valueType="num">
+                                      <p:cBhvr additive="base">
+                                        <p:cTn id="49" dur="500" fill="hold"/>
+                                        <p:tgtEl>
+                                          <p:spTgt spid="3">
+                                            <p:txEl>
+                                              <p:pRg st="5" end="5"/>
+                                            </p:txEl>
+                                          </p:spTgt>
+                                        </p:tgtEl>
+                                        <p:attrNameLst>
+                                          <p:attrName>ppt_x</p:attrName>
+                                        </p:attrNameLst>
+                                      </p:cBhvr>
+                                      <p:tavLst>
+                                        <p:tav tm="0">
+                                          <p:val>
+                                            <p:strVal val="#ppt_x"/>
+                                          </p:val>
+                                        </p:tav>
+                                        <p:tav tm="100000">
+                                          <p:val>
+                                            <p:strVal val="#ppt_x"/>
+                                          </p:val>
+                                        </p:tav>
+                                      </p:tavLst>
+                                    </p:anim>
+                                    <p:anim calcmode="lin" valueType="num">
+                                      <p:cBhvr additive="base">
+                                        <p:cTn id="50" dur="500" fill="hold"/>
+                                        <p:tgtEl>
+                                          <p:spTgt spid="3">
+                                            <p:txEl>
+                                              <p:pRg st="5" end="5"/>
+                                            </p:txEl>
+                                          </p:spTgt>
+                                        </p:tgtEl>
+                                        <p:attrNameLst>
+                                          <p:attrName>ppt_y</p:attrName>
+                                        </p:attrNameLst>
+                                      </p:cBhvr>
+                                      <p:tavLst>
+                                        <p:tav tm="0">
+                                          <p:val>
+                                            <p:strVal val="1+#ppt_h/2"/>
+                                          </p:val>
+                                        </p:tav>
+                                        <p:tav tm="100000">
+                                          <p:val>
+                                            <p:strVal val="#ppt_y"/>
+                                          </p:val>
+                                        </p:tav>
+                                      </p:tavLst>
+                                    </p:anim>
+                                  </p:childTnLst>
+                                </p:cTn>
+                              </p:par>
+                            </p:childTnLst>
+                          </p:cTn>
+                        </p:par>
+                      </p:childTnLst>
+                    </p:cTn>
+                  </p:par>
+                  <p:par>
+                    <p:cTn id="51" fill="hold">
+                      <p:stCondLst>
+                        <p:cond delay="indefinite"/>
+                      </p:stCondLst>
+                      <p:childTnLst>
+                        <p:par>
+                          <p:cTn id="52" fill="hold">
+                            <p:stCondLst>
+                              <p:cond delay="0"/>
+                            </p:stCondLst>
+                            <p:childTnLst>
+                              <p:par>
+                                <p:cTn id="53" presetID="2" presetClass="entr" presetSubtype="4" fill="hold" nodeType="clickEffect">
+                                  <p:stCondLst>
+                                    <p:cond delay="0"/>
+                                  </p:stCondLst>
+                                  <p:childTnLst>
+                                    <p:set>
+                                      <p:cBhvr>
+                                        <p:cTn id="54" dur="1" fill="hold">
+                                          <p:stCondLst>
+                                            <p:cond delay="0"/>
+                                          </p:stCondLst>
+                                        </p:cTn>
+                                        <p:tgtEl>
+                                          <p:spTgt spid="8"/>
+                                        </p:tgtEl>
+                                        <p:attrNameLst>
+                                          <p:attrName>style.visibility</p:attrName>
+                                        </p:attrNameLst>
+                                      </p:cBhvr>
+                                      <p:to>
+                                        <p:strVal val="visible"/>
+                                      </p:to>
+                                    </p:set>
+                                    <p:anim calcmode="lin" valueType="num">
+                                      <p:cBhvr additive="base">
+                                        <p:cTn id="55" dur="500" fill="hold"/>
+                                        <p:tgtEl>
                                           <p:spTgt spid="8"/>
                                         </p:tgtEl>
                                         <p:attrNameLst>
@@ -10177,9 +11508,112 @@
                                     </p:anim>
                                     <p:anim calcmode="lin" valueType="num">
                                       <p:cBhvr additive="base">
-                                        <p:cTn id="14" dur="500" fill="hold"/>
+                                        <p:cTn id="56" dur="500" fill="hold"/>
                                         <p:tgtEl>
                                           <p:spTgt spid="8"/>
+                                        </p:tgtEl>
+                                        <p:attrNameLst>
+                                          <p:attrName>ppt_y</p:attrName>
+                                        </p:attrNameLst>
+                                      </p:cBhvr>
+                                      <p:tavLst>
+                                        <p:tav tm="0">
+                                          <p:val>
+                                            <p:strVal val="1+#ppt_h/2"/>
+                                          </p:val>
+                                        </p:tav>
+                                        <p:tav tm="100000">
+                                          <p:val>
+                                            <p:strVal val="#ppt_y"/>
+                                          </p:val>
+                                        </p:tav>
+                                      </p:tavLst>
+                                    </p:anim>
+                                  </p:childTnLst>
+                                </p:cTn>
+                              </p:par>
+                            </p:childTnLst>
+                          </p:cTn>
+                        </p:par>
+                      </p:childTnLst>
+                    </p:cTn>
+                  </p:par>
+                  <p:par>
+                    <p:cTn id="57" fill="hold">
+                      <p:stCondLst>
+                        <p:cond delay="indefinite"/>
+                      </p:stCondLst>
+                      <p:childTnLst>
+                        <p:par>
+                          <p:cTn id="58" fill="hold">
+                            <p:stCondLst>
+                              <p:cond delay="0"/>
+                            </p:stCondLst>
+                            <p:childTnLst>
+                              <p:par>
+                                <p:cTn id="59" presetID="2" presetClass="entr" presetSubtype="4" fill="hold" nodeType="clickEffect">
+                                  <p:stCondLst>
+                                    <p:cond delay="0"/>
+                                  </p:stCondLst>
+                                  <p:childTnLst>
+                                    <p:set>
+                                      <p:cBhvr>
+                                        <p:cTn id="60" dur="1" fill="hold">
+                                          <p:stCondLst>
+                                            <p:cond delay="0"/>
+                                          </p:stCondLst>
+                                        </p:cTn>
+                                        <p:tgtEl>
+                                          <p:spTgt spid="3">
+                                            <p:txEl>
+                                              <p:pRg st="6" end="6"/>
+                                            </p:txEl>
+                                          </p:spTgt>
+                                        </p:tgtEl>
+                                        <p:attrNameLst>
+                                          <p:attrName>style.visibility</p:attrName>
+                                        </p:attrNameLst>
+                                      </p:cBhvr>
+                                      <p:to>
+                                        <p:strVal val="visible"/>
+                                      </p:to>
+                                    </p:set>
+                                    <p:anim calcmode="lin" valueType="num">
+                                      <p:cBhvr additive="base">
+                                        <p:cTn id="61" dur="500" fill="hold"/>
+                                        <p:tgtEl>
+                                          <p:spTgt spid="3">
+                                            <p:txEl>
+                                              <p:pRg st="6" end="6"/>
+                                            </p:txEl>
+                                          </p:spTgt>
+                                        </p:tgtEl>
+                                        <p:attrNameLst>
+                                          <p:attrName>ppt_x</p:attrName>
+                                        </p:attrNameLst>
+                                      </p:cBhvr>
+                                      <p:tavLst>
+                                        <p:tav tm="0">
+                                          <p:val>
+                                            <p:strVal val="#ppt_x"/>
+                                          </p:val>
+                                        </p:tav>
+                                        <p:tav tm="100000">
+                                          <p:val>
+                                            <p:strVal val="#ppt_x"/>
+                                          </p:val>
+                                        </p:tav>
+                                      </p:tavLst>
+                                    </p:anim>
+                                    <p:anim calcmode="lin" valueType="num">
+                                      <p:cBhvr additive="base">
+                                        <p:cTn id="62" dur="500" fill="hold"/>
+                                        <p:tgtEl>
+                                          <p:spTgt spid="3">
+                                            <p:txEl>
+                                              <p:pRg st="6" end="6"/>
+                                            </p:txEl>
+                                          </p:spTgt>
                                         </p:tgtEl>
                                         <p:attrNameLst>
                                           <p:attrName>ppt_y</p:attrName>
@@ -10254,7 +11688,7 @@
           <p:cNvPr id="2" name="Cím 1">
             <a:extLst>
               <a:ext uri="{FF2B5EF4-FFF2-40B4-BE49-F238E27FC236}">
-                <a16:creationId xmlns:a16="http://schemas.microsoft.com/office/drawing/2014/main" id="{2BEBE6DC-DF52-43FD-8ADC-AE4170A654EA}"/>
+                <a16:creationId xmlns:a16="http://schemas.microsoft.com/office/drawing/2014/main" xmlns="" id="{2BEBE6DC-DF52-43FD-8ADC-AE4170A654EA}"/>
               </a:ext>
             </a:extLst>
           </p:cNvPr>
@@ -10287,7 +11721,7 @@
           <p:cNvPr id="3" name="Tartalom helye 2">
             <a:extLst>
               <a:ext uri="{FF2B5EF4-FFF2-40B4-BE49-F238E27FC236}">
-                <a16:creationId xmlns:a16="http://schemas.microsoft.com/office/drawing/2014/main" id="{A628FCB4-1578-4901-8A3D-8A7CB040917A}"/>
+                <a16:creationId xmlns:a16="http://schemas.microsoft.com/office/drawing/2014/main" xmlns="" id="{A628FCB4-1578-4901-8A3D-8A7CB040917A}"/>
               </a:ext>
             </a:extLst>
           </p:cNvPr>
@@ -10467,7 +11901,7 @@
           <p:cNvPr id="5" name="Kép 4">
             <a:extLst>
               <a:ext uri="{FF2B5EF4-FFF2-40B4-BE49-F238E27FC236}">
-                <a16:creationId xmlns:a16="http://schemas.microsoft.com/office/drawing/2014/main" id="{7D86D52B-A7AA-4976-BE82-FE6AA0353660}"/>
+                <a16:creationId xmlns:a16="http://schemas.microsoft.com/office/drawing/2014/main" xmlns="" id="{7D86D52B-A7AA-4976-BE82-FE6AA0353660}"/>
               </a:ext>
             </a:extLst>
           </p:cNvPr>
@@ -10477,7 +11911,7 @@
           <p:nvPr/>
         </p:nvPicPr>
         <p:blipFill>
-          <a:blip r:embed="rId2">
+          <a:blip r:embed="rId2" cstate="print">
             <a:extLst>
               <a:ext uri="{28A0092B-C50C-407E-A947-70E740481C1C}">
                 <a14:useLocalDpi xmlns:a14="http://schemas.microsoft.com/office/drawing/2010/main" val="0"/>
@@ -10503,7 +11937,7 @@
           <p:cNvPr id="6" name="Kép 5">
             <a:extLst>
               <a:ext uri="{FF2B5EF4-FFF2-40B4-BE49-F238E27FC236}">
-                <a16:creationId xmlns:a16="http://schemas.microsoft.com/office/drawing/2014/main" id="{22E1B217-BBD8-4CC1-BF8B-CA58FFB05755}"/>
+                <a16:creationId xmlns:a16="http://schemas.microsoft.com/office/drawing/2014/main" xmlns="" id="{22E1B217-BBD8-4CC1-BF8B-CA58FFB05755}"/>
               </a:ext>
             </a:extLst>
           </p:cNvPr>
@@ -10533,7 +11967,7 @@
           <p:cNvPr id="8" name="Kép 7">
             <a:extLst>
               <a:ext uri="{FF2B5EF4-FFF2-40B4-BE49-F238E27FC236}">
-                <a16:creationId xmlns:a16="http://schemas.microsoft.com/office/drawing/2014/main" id="{A06BBBEF-98E1-4BF6-8762-8941F378C730}"/>
+                <a16:creationId xmlns:a16="http://schemas.microsoft.com/office/drawing/2014/main" xmlns="" id="{A06BBBEF-98E1-4BF6-8762-8941F378C730}"/>
               </a:ext>
             </a:extLst>
           </p:cNvPr>
@@ -10563,7 +11997,7 @@
           <p:cNvPr id="10" name="Kép 9">
             <a:extLst>
               <a:ext uri="{FF2B5EF4-FFF2-40B4-BE49-F238E27FC236}">
-                <a16:creationId xmlns:a16="http://schemas.microsoft.com/office/drawing/2014/main" id="{95F5C76B-D9C5-4760-8415-D5585D01D54F}"/>
+                <a16:creationId xmlns:a16="http://schemas.microsoft.com/office/drawing/2014/main" xmlns="" id="{95F5C76B-D9C5-4760-8415-D5585D01D54F}"/>
               </a:ext>
             </a:extLst>
           </p:cNvPr>
@@ -10635,7 +12069,11 @@
                                           </p:stCondLst>
                                         </p:cTn>
                                         <p:tgtEl>
-                                          <p:spTgt spid="6"/>
+                                          <p:spTgt spid="3">
+                                            <p:txEl>
+                                              <p:pRg st="1" end="1"/>
+                                            </p:txEl>
+                                          </p:spTgt>
                                         </p:tgtEl>
                                         <p:attrNameLst>
                                           <p:attrName>style.visibility</p:attrName>
@@ -10649,7 +12087,11 @@
                                       <p:cBhvr additive="base">
                                         <p:cTn id="7" dur="500" fill="hold"/>
                                         <p:tgtEl>
-                                          <p:spTgt spid="6"/>
+                                          <p:spTgt spid="3">
+                                            <p:txEl>
+                                              <p:pRg st="1" end="1"/>
+                                            </p:txEl>
+                                          </p:spTgt>
                                         </p:tgtEl>
                                         <p:attrNameLst>
                                           <p:attrName>ppt_x</p:attrName>
@@ -10672,7 +12114,11 @@
                                       <p:cBhvr additive="base">
                                         <p:cTn id="8" dur="500" fill="hold"/>
                                         <p:tgtEl>
-                                          <p:spTgt spid="6"/>
+                                          <p:spTgt spid="3">
+                                            <p:txEl>
+                                              <p:pRg st="1" end="1"/>
+                                            </p:txEl>
+                                          </p:spTgt>
                                         </p:tgtEl>
                                         <p:attrNameLst>
                                           <p:attrName>ppt_y</p:attrName>
@@ -10726,7 +12172,7 @@
                                           </p:stCondLst>
                                         </p:cTn>
                                         <p:tgtEl>
-                                          <p:spTgt spid="8"/>
+                                          <p:spTgt spid="6"/>
                                         </p:tgtEl>
                                         <p:attrNameLst>
                                           <p:attrName>style.visibility</p:attrName>
@@ -10740,7 +12186,7 @@
                                       <p:cBhvr additive="base">
                                         <p:cTn id="13" dur="500" fill="hold"/>
                                         <p:tgtEl>
-                                          <p:spTgt spid="8"/>
+                                          <p:spTgt spid="6"/>
                                         </p:tgtEl>
                                         <p:attrNameLst>
                                           <p:attrName>ppt_x</p:attrName>
@@ -10763,7 +12209,7 @@
                                       <p:cBhvr additive="base">
                                         <p:cTn id="14" dur="500" fill="hold"/>
                                         <p:tgtEl>
-                                          <p:spTgt spid="8"/>
+                                          <p:spTgt spid="6"/>
                                         </p:tgtEl>
                                         <p:attrNameLst>
                                           <p:attrName>ppt_y</p:attrName>
@@ -10817,7 +12263,11 @@
                                           </p:stCondLst>
                                         </p:cTn>
                                         <p:tgtEl>
-                                          <p:spTgt spid="10"/>
+                                          <p:spTgt spid="3">
+                                            <p:txEl>
+                                              <p:pRg st="2" end="2"/>
+                                            </p:txEl>
+                                          </p:spTgt>
                                         </p:tgtEl>
                                         <p:attrNameLst>
                                           <p:attrName>style.visibility</p:attrName>
@@ -10831,6 +12281,299 @@
                                       <p:cBhvr additive="base">
                                         <p:cTn id="19" dur="500" fill="hold"/>
                                         <p:tgtEl>
+                                          <p:spTgt spid="3">
+                                            <p:txEl>
+                                              <p:pRg st="2" end="2"/>
+                                            </p:txEl>
+                                          </p:spTgt>
+                                        </p:tgtEl>
+                                        <p:attrNameLst>
+                                          <p:attrName>ppt_x</p:attrName>
+                                        </p:attrNameLst>
+                                      </p:cBhvr>
+                                      <p:tavLst>
+                                        <p:tav tm="0">
+                                          <p:val>
+                                            <p:strVal val="#ppt_x"/>
+                                          </p:val>
+                                        </p:tav>
+                                        <p:tav tm="100000">
+                                          <p:val>
+                                            <p:strVal val="#ppt_x"/>
+                                          </p:val>
+                                        </p:tav>
+                                      </p:tavLst>
+                                    </p:anim>
+                                    <p:anim calcmode="lin" valueType="num">
+                                      <p:cBhvr additive="base">
+                                        <p:cTn id="20" dur="500" fill="hold"/>
+                                        <p:tgtEl>
+                                          <p:spTgt spid="3">
+                                            <p:txEl>
+                                              <p:pRg st="2" end="2"/>
+                                            </p:txEl>
+                                          </p:spTgt>
+                                        </p:tgtEl>
+                                        <p:attrNameLst>
+                                          <p:attrName>ppt_y</p:attrName>
+                                        </p:attrNameLst>
+                                      </p:cBhvr>
+                                      <p:tavLst>
+                                        <p:tav tm="0">
+                                          <p:val>
+                                            <p:strVal val="1+#ppt_h/2"/>
+                                          </p:val>
+                                        </p:tav>
+                                        <p:tav tm="100000">
+                                          <p:val>
+                                            <p:strVal val="#ppt_y"/>
+                                          </p:val>
+                                        </p:tav>
+                                      </p:tavLst>
+                                    </p:anim>
+                                  </p:childTnLst>
+                                </p:cTn>
+                              </p:par>
+                            </p:childTnLst>
+                          </p:cTn>
+                        </p:par>
+                      </p:childTnLst>
+                    </p:cTn>
+                  </p:par>
+                  <p:par>
+                    <p:cTn id="21" fill="hold">
+                      <p:stCondLst>
+                        <p:cond delay="indefinite"/>
+                      </p:stCondLst>
+                      <p:childTnLst>
+                        <p:par>
+                          <p:cTn id="22" fill="hold">
+                            <p:stCondLst>
+                              <p:cond delay="0"/>
+                            </p:stCondLst>
+                            <p:childTnLst>
+                              <p:par>
+                                <p:cTn id="23" presetID="2" presetClass="entr" presetSubtype="4" fill="hold" nodeType="clickEffect">
+                                  <p:stCondLst>
+                                    <p:cond delay="0"/>
+                                  </p:stCondLst>
+                                  <p:childTnLst>
+                                    <p:set>
+                                      <p:cBhvr>
+                                        <p:cTn id="24" dur="1" fill="hold">
+                                          <p:stCondLst>
+                                            <p:cond delay="0"/>
+                                          </p:stCondLst>
+                                        </p:cTn>
+                                        <p:tgtEl>
+                                          <p:spTgt spid="8"/>
+                                        </p:tgtEl>
+                                        <p:attrNameLst>
+                                          <p:attrName>style.visibility</p:attrName>
+                                        </p:attrNameLst>
+                                      </p:cBhvr>
+                                      <p:to>
+                                        <p:strVal val="visible"/>
+                                      </p:to>
+                                    </p:set>
+                                    <p:anim calcmode="lin" valueType="num">
+                                      <p:cBhvr additive="base">
+                                        <p:cTn id="25" dur="500" fill="hold"/>
+                                        <p:tgtEl>
+                                          <p:spTgt spid="8"/>
+                                        </p:tgtEl>
+                                        <p:attrNameLst>
+                                          <p:attrName>ppt_x</p:attrName>
+                                        </p:attrNameLst>
+                                      </p:cBhvr>
+                                      <p:tavLst>
+                                        <p:tav tm="0">
+                                          <p:val>
+                                            <p:strVal val="#ppt_x"/>
+                                          </p:val>
+                                        </p:tav>
+                                        <p:tav tm="100000">
+                                          <p:val>
+                                            <p:strVal val="#ppt_x"/>
+                                          </p:val>
+                                        </p:tav>
+                                      </p:tavLst>
+                                    </p:anim>
+                                    <p:anim calcmode="lin" valueType="num">
+                                      <p:cBhvr additive="base">
+                                        <p:cTn id="26" dur="500" fill="hold"/>
+                                        <p:tgtEl>
+                                          <p:spTgt spid="8"/>
+                                        </p:tgtEl>
+                                        <p:attrNameLst>
+                                          <p:attrName>ppt_y</p:attrName>
+                                        </p:attrNameLst>
+                                      </p:cBhvr>
+                                      <p:tavLst>
+                                        <p:tav tm="0">
+                                          <p:val>
+                                            <p:strVal val="1+#ppt_h/2"/>
+                                          </p:val>
+                                        </p:tav>
+                                        <p:tav tm="100000">
+                                          <p:val>
+                                            <p:strVal val="#ppt_y"/>
+                                          </p:val>
+                                        </p:tav>
+                                      </p:tavLst>
+                                    </p:anim>
+                                  </p:childTnLst>
+                                </p:cTn>
+                              </p:par>
+                            </p:childTnLst>
+                          </p:cTn>
+                        </p:par>
+                      </p:childTnLst>
+                    </p:cTn>
+                  </p:par>
+                  <p:par>
+                    <p:cTn id="27" fill="hold">
+                      <p:stCondLst>
+                        <p:cond delay="indefinite"/>
+                      </p:stCondLst>
+                      <p:childTnLst>
+                        <p:par>
+                          <p:cTn id="28" fill="hold">
+                            <p:stCondLst>
+                              <p:cond delay="0"/>
+                            </p:stCondLst>
+                            <p:childTnLst>
+                              <p:par>
+                                <p:cTn id="29" presetID="2" presetClass="entr" presetSubtype="4" fill="hold" nodeType="clickEffect">
+                                  <p:stCondLst>
+                                    <p:cond delay="0"/>
+                                  </p:stCondLst>
+                                  <p:childTnLst>
+                                    <p:set>
+                                      <p:cBhvr>
+                                        <p:cTn id="30" dur="1" fill="hold">
+                                          <p:stCondLst>
+                                            <p:cond delay="0"/>
+                                          </p:stCondLst>
+                                        </p:cTn>
+                                        <p:tgtEl>
+                                          <p:spTgt spid="3">
+                                            <p:txEl>
+                                              <p:pRg st="3" end="3"/>
+                                            </p:txEl>
+                                          </p:spTgt>
+                                        </p:tgtEl>
+                                        <p:attrNameLst>
+                                          <p:attrName>style.visibility</p:attrName>
+                                        </p:attrNameLst>
+                                      </p:cBhvr>
+                                      <p:to>
+                                        <p:strVal val="visible"/>
+                                      </p:to>
+                                    </p:set>
+                                    <p:anim calcmode="lin" valueType="num">
+                                      <p:cBhvr additive="base">
+                                        <p:cTn id="31" dur="500" fill="hold"/>
+                                        <p:tgtEl>
+                                          <p:spTgt spid="3">
+                                            <p:txEl>
+                                              <p:pRg st="3" end="3"/>
+                                            </p:txEl>
+                                          </p:spTgt>
+                                        </p:tgtEl>
+                                        <p:attrNameLst>
+                                          <p:attrName>ppt_x</p:attrName>
+                                        </p:attrNameLst>
+                                      </p:cBhvr>
+                                      <p:tavLst>
+                                        <p:tav tm="0">
+                                          <p:val>
+                                            <p:strVal val="#ppt_x"/>
+                                          </p:val>
+                                        </p:tav>
+                                        <p:tav tm="100000">
+                                          <p:val>
+                                            <p:strVal val="#ppt_x"/>
+                                          </p:val>
+                                        </p:tav>
+                                      </p:tavLst>
+                                    </p:anim>
+                                    <p:anim calcmode="lin" valueType="num">
+                                      <p:cBhvr additive="base">
+                                        <p:cTn id="32" dur="500" fill="hold"/>
+                                        <p:tgtEl>
+                                          <p:spTgt spid="3">
+                                            <p:txEl>
+                                              <p:pRg st="3" end="3"/>
+                                            </p:txEl>
+                                          </p:spTgt>
+                                        </p:tgtEl>
+                                        <p:attrNameLst>
+                                          <p:attrName>ppt_y</p:attrName>
+                                        </p:attrNameLst>
+                                      </p:cBhvr>
+                                      <p:tavLst>
+                                        <p:tav tm="0">
+                                          <p:val>
+                                            <p:strVal val="1+#ppt_h/2"/>
+                                          </p:val>
+                                        </p:tav>
+                                        <p:tav tm="100000">
+                                          <p:val>
+                                            <p:strVal val="#ppt_y"/>
+                                          </p:val>
+                                        </p:tav>
+                                      </p:tavLst>
+                                    </p:anim>
+                                  </p:childTnLst>
+                                </p:cTn>
+                              </p:par>
+                            </p:childTnLst>
+                          </p:cTn>
+                        </p:par>
+                      </p:childTnLst>
+                    </p:cTn>
+                  </p:par>
+                  <p:par>
+                    <p:cTn id="33" fill="hold">
+                      <p:stCondLst>
+                        <p:cond delay="indefinite"/>
+                      </p:stCondLst>
+                      <p:childTnLst>
+                        <p:par>
+                          <p:cTn id="34" fill="hold">
+                            <p:stCondLst>
+                              <p:cond delay="0"/>
+                            </p:stCondLst>
+                            <p:childTnLst>
+                              <p:par>
+                                <p:cTn id="35" presetID="2" presetClass="entr" presetSubtype="4" fill="hold" nodeType="clickEffect">
+                                  <p:stCondLst>
+                                    <p:cond delay="0"/>
+                                  </p:stCondLst>
+                                  <p:childTnLst>
+                                    <p:set>
+                                      <p:cBhvr>
+                                        <p:cTn id="36" dur="1" fill="hold">
+                                          <p:stCondLst>
+                                            <p:cond delay="0"/>
+                                          </p:stCondLst>
+                                        </p:cTn>
+                                        <p:tgtEl>
+                                          <p:spTgt spid="10"/>
+                                        </p:tgtEl>
+                                        <p:attrNameLst>
+                                          <p:attrName>style.visibility</p:attrName>
+                                        </p:attrNameLst>
+                                      </p:cBhvr>
+                                      <p:to>
+                                        <p:strVal val="visible"/>
+                                      </p:to>
+                                    </p:set>
+                                    <p:anim calcmode="lin" valueType="num">
+                                      <p:cBhvr additive="base">
+                                        <p:cTn id="37" dur="500" fill="hold"/>
+                                        <p:tgtEl>
                                           <p:spTgt spid="10"/>
                                         </p:tgtEl>
                                         <p:attrNameLst>
@@ -10852,9 +12595,215 @@
                                     </p:anim>
                                     <p:anim calcmode="lin" valueType="num">
                                       <p:cBhvr additive="base">
-                                        <p:cTn id="20" dur="500" fill="hold"/>
+                                        <p:cTn id="38" dur="500" fill="hold"/>
                                         <p:tgtEl>
                                           <p:spTgt spid="10"/>
+                                        </p:tgtEl>
+                                        <p:attrNameLst>
+                                          <p:attrName>ppt_y</p:attrName>
+                                        </p:attrNameLst>
+                                      </p:cBhvr>
+                                      <p:tavLst>
+                                        <p:tav tm="0">
+                                          <p:val>
+                                            <p:strVal val="1+#ppt_h/2"/>
+                                          </p:val>
+                                        </p:tav>
+                                        <p:tav tm="100000">
+                                          <p:val>
+                                            <p:strVal val="#ppt_y"/>
+                                          </p:val>
+                                        </p:tav>
+                                      </p:tavLst>
+                                    </p:anim>
+                                  </p:childTnLst>
+                                </p:cTn>
+                              </p:par>
+                            </p:childTnLst>
+                          </p:cTn>
+                        </p:par>
+                      </p:childTnLst>
+                    </p:cTn>
+                  </p:par>
+                  <p:par>
+                    <p:cTn id="39" fill="hold">
+                      <p:stCondLst>
+                        <p:cond delay="indefinite"/>
+                      </p:stCondLst>
+                      <p:childTnLst>
+                        <p:par>
+                          <p:cTn id="40" fill="hold">
+                            <p:stCondLst>
+                              <p:cond delay="0"/>
+                            </p:stCondLst>
+                            <p:childTnLst>
+                              <p:par>
+                                <p:cTn id="41" presetID="2" presetClass="entr" presetSubtype="4" fill="hold" nodeType="clickEffect">
+                                  <p:stCondLst>
+                                    <p:cond delay="0"/>
+                                  </p:stCondLst>
+                                  <p:childTnLst>
+                                    <p:set>
+                                      <p:cBhvr>
+                                        <p:cTn id="42" dur="1" fill="hold">
+                                          <p:stCondLst>
+                                            <p:cond delay="0"/>
+                                          </p:stCondLst>
+                                        </p:cTn>
+                                        <p:tgtEl>
+                                          <p:spTgt spid="3">
+                                            <p:txEl>
+                                              <p:pRg st="4" end="4"/>
+                                            </p:txEl>
+                                          </p:spTgt>
+                                        </p:tgtEl>
+                                        <p:attrNameLst>
+                                          <p:attrName>style.visibility</p:attrName>
+                                        </p:attrNameLst>
+                                      </p:cBhvr>
+                                      <p:to>
+                                        <p:strVal val="visible"/>
+                                      </p:to>
+                                    </p:set>
+                                    <p:anim calcmode="lin" valueType="num">
+                                      <p:cBhvr additive="base">
+                                        <p:cTn id="43" dur="500" fill="hold"/>
+                                        <p:tgtEl>
+                                          <p:spTgt spid="3">
+                                            <p:txEl>
+                                              <p:pRg st="4" end="4"/>
+                                            </p:txEl>
+                                          </p:spTgt>
+                                        </p:tgtEl>
+                                        <p:attrNameLst>
+                                          <p:attrName>ppt_x</p:attrName>
+                                        </p:attrNameLst>
+                                      </p:cBhvr>
+                                      <p:tavLst>
+                                        <p:tav tm="0">
+                                          <p:val>
+                                            <p:strVal val="#ppt_x"/>
+                                          </p:val>
+                                        </p:tav>
+                                        <p:tav tm="100000">
+                                          <p:val>
+                                            <p:strVal val="#ppt_x"/>
+                                          </p:val>
+                                        </p:tav>
+                                      </p:tavLst>
+                                    </p:anim>
+                                    <p:anim calcmode="lin" valueType="num">
+                                      <p:cBhvr additive="base">
+                                        <p:cTn id="44" dur="500" fill="hold"/>
+                                        <p:tgtEl>
+                                          <p:spTgt spid="3">
+                                            <p:txEl>
+                                              <p:pRg st="4" end="4"/>
+                                            </p:txEl>
+                                          </p:spTgt>
+                                        </p:tgtEl>
+                                        <p:attrNameLst>
+                                          <p:attrName>ppt_y</p:attrName>
+                                        </p:attrNameLst>
+                                      </p:cBhvr>
+                                      <p:tavLst>
+                                        <p:tav tm="0">
+                                          <p:val>
+                                            <p:strVal val="1+#ppt_h/2"/>
+                                          </p:val>
+                                        </p:tav>
+                                        <p:tav tm="100000">
+                                          <p:val>
+                                            <p:strVal val="#ppt_y"/>
+                                          </p:val>
+                                        </p:tav>
+                                      </p:tavLst>
+                                    </p:anim>
+                                  </p:childTnLst>
+                                </p:cTn>
+                              </p:par>
+                            </p:childTnLst>
+                          </p:cTn>
+                        </p:par>
+                      </p:childTnLst>
+                    </p:cTn>
+                  </p:par>
+                  <p:par>
+                    <p:cTn id="45" fill="hold">
+                      <p:stCondLst>
+                        <p:cond delay="indefinite"/>
+                      </p:stCondLst>
+                      <p:childTnLst>
+                        <p:par>
+                          <p:cTn id="46" fill="hold">
+                            <p:stCondLst>
+                              <p:cond delay="0"/>
+                            </p:stCondLst>
+                            <p:childTnLst>
+                              <p:par>
+                                <p:cTn id="47" presetID="2" presetClass="entr" presetSubtype="4" fill="hold" nodeType="clickEffect">
+                                  <p:stCondLst>
+                                    <p:cond delay="0"/>
+                                  </p:stCondLst>
+                                  <p:childTnLst>
+                                    <p:set>
+                                      <p:cBhvr>
+                                        <p:cTn id="48" dur="1" fill="hold">
+                                          <p:stCondLst>
+                                            <p:cond delay="0"/>
+                                          </p:stCondLst>
+                                        </p:cTn>
+                                        <p:tgtEl>
+                                          <p:spTgt spid="3">
+                                            <p:txEl>
+                                              <p:pRg st="5" end="5"/>
+                                            </p:txEl>
+                                          </p:spTgt>
+                                        </p:tgtEl>
+                                        <p:attrNameLst>
+                                          <p:attrName>style.visibility</p:attrName>
+                                        </p:attrNameLst>
+                                      </p:cBhvr>
+                                      <p:to>
+                                        <p:strVal val="visible"/>
+                                      </p:to>
+                                    </p:set>
+                                    <p:anim calcmode="lin" valueType="num">
+                                      <p:cBhvr additive="base">
+                                        <p:cTn id="49" dur="500" fill="hold"/>
+                                        <p:tgtEl>
+                                          <p:spTgt spid="3">
+                                            <p:txEl>
+                                              <p:pRg st="5" end="5"/>
+                                            </p:txEl>
+                                          </p:spTgt>
+                                        </p:tgtEl>
+                                        <p:attrNameLst>
+                                          <p:attrName>ppt_x</p:attrName>
+                                        </p:attrNameLst>
+                                      </p:cBhvr>
+                                      <p:tavLst>
+                                        <p:tav tm="0">
+                                          <p:val>
+                                            <p:strVal val="#ppt_x"/>
+                                          </p:val>
+                                        </p:tav>
+                                        <p:tav tm="100000">
+                                          <p:val>
+                                            <p:strVal val="#ppt_x"/>
+                                          </p:val>
+                                        </p:tav>
+                                      </p:tavLst>
+                                    </p:anim>
+                                    <p:anim calcmode="lin" valueType="num">
+                                      <p:cBhvr additive="base">
+                                        <p:cTn id="50" dur="500" fill="hold"/>
+                                        <p:tgtEl>
+                                          <p:spTgt spid="3">
+                                            <p:txEl>
+                                              <p:pRg st="5" end="5"/>
+                                            </p:txEl>
+                                          </p:spTgt>
                                         </p:tgtEl>
                                         <p:attrNameLst>
                                           <p:attrName>ppt_y</p:attrName>
@@ -10929,7 +12878,7 @@
           <p:cNvPr id="2" name="Cím 1">
             <a:extLst>
               <a:ext uri="{FF2B5EF4-FFF2-40B4-BE49-F238E27FC236}">
-                <a16:creationId xmlns:a16="http://schemas.microsoft.com/office/drawing/2014/main" id="{12893BF7-BD23-41AF-8D7B-2AF76957CA40}"/>
+                <a16:creationId xmlns:a16="http://schemas.microsoft.com/office/drawing/2014/main" xmlns="" id="{12893BF7-BD23-41AF-8D7B-2AF76957CA40}"/>
               </a:ext>
             </a:extLst>
           </p:cNvPr>
@@ -10962,7 +12911,7 @@
           <p:cNvPr id="3" name="Tartalom helye 2">
             <a:extLst>
               <a:ext uri="{FF2B5EF4-FFF2-40B4-BE49-F238E27FC236}">
-                <a16:creationId xmlns:a16="http://schemas.microsoft.com/office/drawing/2014/main" id="{9765E1B2-375A-4284-8AE3-A7AEDB8D3115}"/>
+                <a16:creationId xmlns:a16="http://schemas.microsoft.com/office/drawing/2014/main" xmlns="" id="{9765E1B2-375A-4284-8AE3-A7AEDB8D3115}"/>
               </a:ext>
             </a:extLst>
           </p:cNvPr>
@@ -11094,7 +13043,7 @@
           <p:cNvPr id="5" name="Kép 4">
             <a:extLst>
               <a:ext uri="{FF2B5EF4-FFF2-40B4-BE49-F238E27FC236}">
-                <a16:creationId xmlns:a16="http://schemas.microsoft.com/office/drawing/2014/main" id="{DFD8F10B-87AC-4134-A140-06053C8C7E7A}"/>
+                <a16:creationId xmlns:a16="http://schemas.microsoft.com/office/drawing/2014/main" xmlns="" id="{DFD8F10B-87AC-4134-A140-06053C8C7E7A}"/>
               </a:ext>
             </a:extLst>
           </p:cNvPr>
@@ -11104,7 +13053,7 @@
           <p:nvPr/>
         </p:nvPicPr>
         <p:blipFill>
-          <a:blip r:embed="rId2">
+          <a:blip r:embed="rId2" cstate="print">
             <a:extLst>
               <a:ext uri="{28A0092B-C50C-407E-A947-70E740481C1C}">
                 <a14:useLocalDpi xmlns:a14="http://schemas.microsoft.com/office/drawing/2010/main" val="0"/>
@@ -11130,7 +13079,7 @@
           <p:cNvPr id="6" name="Kép 5">
             <a:extLst>
               <a:ext uri="{FF2B5EF4-FFF2-40B4-BE49-F238E27FC236}">
-                <a16:creationId xmlns:a16="http://schemas.microsoft.com/office/drawing/2014/main" id="{76F26A6F-168D-42B5-B76A-A5C1EFC67834}"/>
+                <a16:creationId xmlns:a16="http://schemas.microsoft.com/office/drawing/2014/main" xmlns="" id="{76F26A6F-168D-42B5-B76A-A5C1EFC67834}"/>
               </a:ext>
             </a:extLst>
           </p:cNvPr>
@@ -11160,7 +13109,7 @@
           <p:cNvPr id="8" name="Kép 7">
             <a:extLst>
               <a:ext uri="{FF2B5EF4-FFF2-40B4-BE49-F238E27FC236}">
-                <a16:creationId xmlns:a16="http://schemas.microsoft.com/office/drawing/2014/main" id="{99DFC7C0-1914-4953-8F92-B8B45D8BA715}"/>
+                <a16:creationId xmlns:a16="http://schemas.microsoft.com/office/drawing/2014/main" xmlns="" id="{99DFC7C0-1914-4953-8F92-B8B45D8BA715}"/>
               </a:ext>
             </a:extLst>
           </p:cNvPr>
@@ -11435,7 +13384,7 @@
           <p:cNvPr id="7" name="Kép 6">
             <a:extLst>
               <a:ext uri="{FF2B5EF4-FFF2-40B4-BE49-F238E27FC236}">
-                <a16:creationId xmlns:a16="http://schemas.microsoft.com/office/drawing/2014/main" id="{747DB0FE-6E96-4C4D-AC6D-21137E7F3953}"/>
+                <a16:creationId xmlns:a16="http://schemas.microsoft.com/office/drawing/2014/main" xmlns="" id="{747DB0FE-6E96-4C4D-AC6D-21137E7F3953}"/>
               </a:ext>
             </a:extLst>
           </p:cNvPr>
@@ -11445,7 +13394,7 @@
           <p:nvPr/>
         </p:nvPicPr>
         <p:blipFill>
-          <a:blip r:embed="rId2">
+          <a:blip r:embed="rId2" cstate="print">
             <a:extLst>
               <a:ext uri="{28A0092B-C50C-407E-A947-70E740481C1C}">
                 <a14:useLocalDpi xmlns:a14="http://schemas.microsoft.com/office/drawing/2010/main" val="0"/>
@@ -11674,6 +13623,127 @@
   <p:transition spd="slow">
     <p:push dir="u"/>
   </p:transition>
+  <p:timing>
+    <p:tnLst>
+      <p:par>
+        <p:cTn id="1" dur="indefinite" restart="never" nodeType="tmRoot">
+          <p:childTnLst>
+            <p:seq concurrent="1" nextAc="seek">
+              <p:cTn id="2" dur="indefinite" nodeType="mainSeq">
+                <p:childTnLst>
+                  <p:par>
+                    <p:cTn id="3" fill="hold">
+                      <p:stCondLst>
+                        <p:cond delay="indefinite"/>
+                      </p:stCondLst>
+                      <p:childTnLst>
+                        <p:par>
+                          <p:cTn id="4" fill="hold">
+                            <p:stCondLst>
+                              <p:cond delay="0"/>
+                            </p:stCondLst>
+                            <p:childTnLst>
+                              <p:par>
+                                <p:cTn id="5" presetID="2" presetClass="entr" presetSubtype="4" fill="hold" nodeType="clickEffect">
+                                  <p:stCondLst>
+                                    <p:cond delay="0"/>
+                                  </p:stCondLst>
+                                  <p:childTnLst>
+                                    <p:set>
+                                      <p:cBhvr>
+                                        <p:cTn id="6" dur="1" fill="hold">
+                                          <p:stCondLst>
+                                            <p:cond delay="0"/>
+                                          </p:stCondLst>
+                                        </p:cTn>
+                                        <p:tgtEl>
+                                          <p:spTgt spid="7"/>
+                                        </p:tgtEl>
+                                        <p:attrNameLst>
+                                          <p:attrName>style.visibility</p:attrName>
+                                        </p:attrNameLst>
+                                      </p:cBhvr>
+                                      <p:to>
+                                        <p:strVal val="visible"/>
+                                      </p:to>
+                                    </p:set>
+                                    <p:anim calcmode="lin" valueType="num">
+                                      <p:cBhvr additive="base">
+                                        <p:cTn id="7" dur="500" fill="hold"/>
+                                        <p:tgtEl>
+                                          <p:spTgt spid="7"/>
+                                        </p:tgtEl>
+                                        <p:attrNameLst>
+                                          <p:attrName>ppt_x</p:attrName>
+                                        </p:attrNameLst>
+                                      </p:cBhvr>
+                                      <p:tavLst>
+                                        <p:tav tm="0">
+                                          <p:val>
+                                            <p:strVal val="#ppt_x"/>
+                                          </p:val>
+                                        </p:tav>
+                                        <p:tav tm="100000">
+                                          <p:val>
+                                            <p:strVal val="#ppt_x"/>
+                                          </p:val>
+                                        </p:tav>
+                                      </p:tavLst>
+                                    </p:anim>
+                                    <p:anim calcmode="lin" valueType="num">
+                                      <p:cBhvr additive="base">
+                                        <p:cTn id="8" dur="500" fill="hold"/>
+                                        <p:tgtEl>
+                                          <p:spTgt spid="7"/>
+                                        </p:tgtEl>
+                                        <p:attrNameLst>
+                                          <p:attrName>ppt_y</p:attrName>
+                                        </p:attrNameLst>
+                                      </p:cBhvr>
+                                      <p:tavLst>
+                                        <p:tav tm="0">
+                                          <p:val>
+                                            <p:strVal val="1+#ppt_h/2"/>
+                                          </p:val>
+                                        </p:tav>
+                                        <p:tav tm="100000">
+                                          <p:val>
+                                            <p:strVal val="#ppt_y"/>
+                                          </p:val>
+                                        </p:tav>
+                                      </p:tavLst>
+                                    </p:anim>
+                                  </p:childTnLst>
+                                </p:cTn>
+                              </p:par>
+                            </p:childTnLst>
+                          </p:cTn>
+                        </p:par>
+                      </p:childTnLst>
+                    </p:cTn>
+                  </p:par>
+                </p:childTnLst>
+              </p:cTn>
+              <p:prevCondLst>
+                <p:cond evt="onPrev" delay="0">
+                  <p:tgtEl>
+                    <p:sldTgt/>
+                  </p:tgtEl>
+                </p:cond>
+              </p:prevCondLst>
+              <p:nextCondLst>
+                <p:cond evt="onNext" delay="0">
+                  <p:tgtEl>
+                    <p:sldTgt/>
+                  </p:tgtEl>
+                </p:cond>
+              </p:nextCondLst>
+            </p:seq>
+          </p:childTnLst>
+        </p:cTn>
+      </p:par>
+    </p:tnLst>
+  </p:timing>
 </p:sld>
 </file>
 
@@ -11926,6 +13996,13 @@
   <p:transition spd="slow">
     <p:push dir="u"/>
   </p:transition>
+  <p:timing>
+    <p:tnLst>
+      <p:par>
+        <p:cTn id="1" dur="indefinite" restart="never" nodeType="tmRoot"/>
+      </p:par>
+    </p:tnLst>
+  </p:timing>
 </p:sld>
 </file>
 
@@ -12151,6 +14228,13 @@
   <p:clrMapOvr>
     <a:masterClrMapping/>
   </p:clrMapOvr>
+  <p:timing>
+    <p:tnLst>
+      <p:par>
+        <p:cTn id="1" dur="indefinite" restart="never" nodeType="tmRoot"/>
+      </p:par>
+    </p:tnLst>
+  </p:timing>
 </p:sld>
 </file>
 

--- a/PPT/Magic Fridge.pptx
+++ b/PPT/Magic Fridge.pptx
@@ -7224,33 +7224,15 @@
                                   </p:childTnLst>
                                 </p:cTn>
                               </p:par>
-                            </p:childTnLst>
-                          </p:cTn>
-                        </p:par>
-                      </p:childTnLst>
-                    </p:cTn>
-                  </p:par>
-                  <p:par>
-                    <p:cTn id="9" fill="hold">
-                      <p:stCondLst>
-                        <p:cond delay="indefinite"/>
-                      </p:stCondLst>
-                      <p:childTnLst>
-                        <p:par>
-                          <p:cTn id="10" fill="hold">
-                            <p:stCondLst>
-                              <p:cond delay="0"/>
-                            </p:stCondLst>
-                            <p:childTnLst>
                               <p:par>
-                                <p:cTn id="11" presetID="2" presetClass="entr" presetSubtype="4" fill="hold" grpId="0" nodeType="clickEffect">
+                                <p:cTn id="9" presetID="2" presetClass="entr" presetSubtype="4" fill="hold" grpId="0" nodeType="withEffect">
                                   <p:stCondLst>
                                     <p:cond delay="0"/>
                                   </p:stCondLst>
                                   <p:childTnLst>
                                     <p:set>
                                       <p:cBhvr>
-                                        <p:cTn id="12" dur="1" fill="hold">
+                                        <p:cTn id="10" dur="1" fill="hold">
                                           <p:stCondLst>
                                             <p:cond delay="0"/>
                                           </p:stCondLst>
@@ -7268,7 +7250,7 @@
                                     </p:set>
                                     <p:anim calcmode="lin" valueType="num">
                                       <p:cBhvr additive="base">
-                                        <p:cTn id="13" dur="500" fill="hold"/>
+                                        <p:cTn id="11" dur="500" fill="hold"/>
                                         <p:tgtEl>
                                           <p:spTgt spid="4"/>
                                         </p:tgtEl>
@@ -7291,7 +7273,7 @@
                                     </p:anim>
                                     <p:anim calcmode="lin" valueType="num">
                                       <p:cBhvr additive="base">
-                                        <p:cTn id="14" dur="500" fill="hold"/>
+                                        <p:cTn id="12" dur="500" fill="hold"/>
                                         <p:tgtEl>
                                           <p:spTgt spid="4"/>
                                         </p:tgtEl>
@@ -7315,33 +7297,15 @@
                                   </p:childTnLst>
                                 </p:cTn>
                               </p:par>
-                            </p:childTnLst>
-                          </p:cTn>
-                        </p:par>
-                      </p:childTnLst>
-                    </p:cTn>
-                  </p:par>
-                  <p:par>
-                    <p:cTn id="15" fill="hold">
-                      <p:stCondLst>
-                        <p:cond delay="indefinite"/>
-                      </p:stCondLst>
-                      <p:childTnLst>
-                        <p:par>
-                          <p:cTn id="16" fill="hold">
-                            <p:stCondLst>
-                              <p:cond delay="0"/>
-                            </p:stCondLst>
-                            <p:childTnLst>
                               <p:par>
-                                <p:cTn id="17" presetID="2" presetClass="entr" presetSubtype="4" fill="hold" grpId="0" nodeType="clickEffect">
+                                <p:cTn id="13" presetID="2" presetClass="entr" presetSubtype="4" fill="hold" grpId="0" nodeType="withEffect">
                                   <p:stCondLst>
                                     <p:cond delay="0"/>
                                   </p:stCondLst>
                                   <p:childTnLst>
                                     <p:set>
                                       <p:cBhvr>
-                                        <p:cTn id="18" dur="1" fill="hold">
+                                        <p:cTn id="14" dur="1" fill="hold">
                                           <p:stCondLst>
                                             <p:cond delay="0"/>
                                           </p:stCondLst>
@@ -7359,7 +7323,7 @@
                                     </p:set>
                                     <p:anim calcmode="lin" valueType="num">
                                       <p:cBhvr additive="base">
-                                        <p:cTn id="19" dur="500" fill="hold"/>
+                                        <p:cTn id="15" dur="500" fill="hold"/>
                                         <p:tgtEl>
                                           <p:spTgt spid="5"/>
                                         </p:tgtEl>
@@ -7382,7 +7346,7 @@
                                     </p:anim>
                                     <p:anim calcmode="lin" valueType="num">
                                       <p:cBhvr additive="base">
-                                        <p:cTn id="20" dur="500" fill="hold"/>
+                                        <p:cTn id="16" dur="500" fill="hold"/>
                                         <p:tgtEl>
                                           <p:spTgt spid="5"/>
                                         </p:tgtEl>
@@ -7406,33 +7370,15 @@
                                   </p:childTnLst>
                                 </p:cTn>
                               </p:par>
-                            </p:childTnLst>
-                          </p:cTn>
-                        </p:par>
-                      </p:childTnLst>
-                    </p:cTn>
-                  </p:par>
-                  <p:par>
-                    <p:cTn id="21" fill="hold">
-                      <p:stCondLst>
-                        <p:cond delay="indefinite"/>
-                      </p:stCondLst>
-                      <p:childTnLst>
-                        <p:par>
-                          <p:cTn id="22" fill="hold">
-                            <p:stCondLst>
-                              <p:cond delay="0"/>
-                            </p:stCondLst>
-                            <p:childTnLst>
                               <p:par>
-                                <p:cTn id="23" presetID="2" presetClass="entr" presetSubtype="4" fill="hold" grpId="0" nodeType="clickEffect">
+                                <p:cTn id="17" presetID="2" presetClass="entr" presetSubtype="4" fill="hold" grpId="0" nodeType="withEffect">
                                   <p:stCondLst>
                                     <p:cond delay="0"/>
                                   </p:stCondLst>
                                   <p:childTnLst>
                                     <p:set>
                                       <p:cBhvr>
-                                        <p:cTn id="24" dur="1" fill="hold">
+                                        <p:cTn id="18" dur="1" fill="hold">
                                           <p:stCondLst>
                                             <p:cond delay="0"/>
                                           </p:stCondLst>
@@ -7450,7 +7396,7 @@
                                     </p:set>
                                     <p:anim calcmode="lin" valueType="num">
                                       <p:cBhvr additive="base">
-                                        <p:cTn id="25" dur="500" fill="hold"/>
+                                        <p:cTn id="19" dur="500" fill="hold"/>
                                         <p:tgtEl>
                                           <p:spTgt spid="6"/>
                                         </p:tgtEl>
@@ -7473,9 +7419,228 @@
                                     </p:anim>
                                     <p:anim calcmode="lin" valueType="num">
                                       <p:cBhvr additive="base">
-                                        <p:cTn id="26" dur="500" fill="hold"/>
+                                        <p:cTn id="20" dur="500" fill="hold"/>
                                         <p:tgtEl>
                                           <p:spTgt spid="6"/>
+                                        </p:tgtEl>
+                                        <p:attrNameLst>
+                                          <p:attrName>ppt_y</p:attrName>
+                                        </p:attrNameLst>
+                                      </p:cBhvr>
+                                      <p:tavLst>
+                                        <p:tav tm="0">
+                                          <p:val>
+                                            <p:strVal val="1+#ppt_h/2"/>
+                                          </p:val>
+                                        </p:tav>
+                                        <p:tav tm="100000">
+                                          <p:val>
+                                            <p:strVal val="#ppt_y"/>
+                                          </p:val>
+                                        </p:tav>
+                                      </p:tavLst>
+                                    </p:anim>
+                                  </p:childTnLst>
+                                </p:cTn>
+                              </p:par>
+                              <p:par>
+                                <p:cTn id="21" presetID="2" presetClass="entr" presetSubtype="4" fill="hold" nodeType="withEffect">
+                                  <p:stCondLst>
+                                    <p:cond delay="0"/>
+                                  </p:stCondLst>
+                                  <p:childTnLst>
+                                    <p:set>
+                                      <p:cBhvr>
+                                        <p:cTn id="22" dur="1" fill="hold">
+                                          <p:stCondLst>
+                                            <p:cond delay="0"/>
+                                          </p:stCondLst>
+                                        </p:cTn>
+                                        <p:tgtEl>
+                                          <p:spTgt spid="7"/>
+                                        </p:tgtEl>
+                                        <p:attrNameLst>
+                                          <p:attrName>style.visibility</p:attrName>
+                                        </p:attrNameLst>
+                                      </p:cBhvr>
+                                      <p:to>
+                                        <p:strVal val="visible"/>
+                                      </p:to>
+                                    </p:set>
+                                    <p:anim calcmode="lin" valueType="num">
+                                      <p:cBhvr additive="base">
+                                        <p:cTn id="23" dur="500" fill="hold"/>
+                                        <p:tgtEl>
+                                          <p:spTgt spid="7"/>
+                                        </p:tgtEl>
+                                        <p:attrNameLst>
+                                          <p:attrName>ppt_x</p:attrName>
+                                        </p:attrNameLst>
+                                      </p:cBhvr>
+                                      <p:tavLst>
+                                        <p:tav tm="0">
+                                          <p:val>
+                                            <p:strVal val="#ppt_x"/>
+                                          </p:val>
+                                        </p:tav>
+                                        <p:tav tm="100000">
+                                          <p:val>
+                                            <p:strVal val="#ppt_x"/>
+                                          </p:val>
+                                        </p:tav>
+                                      </p:tavLst>
+                                    </p:anim>
+                                    <p:anim calcmode="lin" valueType="num">
+                                      <p:cBhvr additive="base">
+                                        <p:cTn id="24" dur="500" fill="hold"/>
+                                        <p:tgtEl>
+                                          <p:spTgt spid="7"/>
+                                        </p:tgtEl>
+                                        <p:attrNameLst>
+                                          <p:attrName>ppt_y</p:attrName>
+                                        </p:attrNameLst>
+                                      </p:cBhvr>
+                                      <p:tavLst>
+                                        <p:tav tm="0">
+                                          <p:val>
+                                            <p:strVal val="1+#ppt_h/2"/>
+                                          </p:val>
+                                        </p:tav>
+                                        <p:tav tm="100000">
+                                          <p:val>
+                                            <p:strVal val="#ppt_y"/>
+                                          </p:val>
+                                        </p:tav>
+                                      </p:tavLst>
+                                    </p:anim>
+                                  </p:childTnLst>
+                                </p:cTn>
+                              </p:par>
+                              <p:par>
+                                <p:cTn id="25" presetID="2" presetClass="entr" presetSubtype="4" fill="hold" nodeType="withEffect">
+                                  <p:stCondLst>
+                                    <p:cond delay="0"/>
+                                  </p:stCondLst>
+                                  <p:childTnLst>
+                                    <p:set>
+                                      <p:cBhvr>
+                                        <p:cTn id="26" dur="1" fill="hold">
+                                          <p:stCondLst>
+                                            <p:cond delay="0"/>
+                                          </p:stCondLst>
+                                        </p:cTn>
+                                        <p:tgtEl>
+                                          <p:spTgt spid="8"/>
+                                        </p:tgtEl>
+                                        <p:attrNameLst>
+                                          <p:attrName>style.visibility</p:attrName>
+                                        </p:attrNameLst>
+                                      </p:cBhvr>
+                                      <p:to>
+                                        <p:strVal val="visible"/>
+                                      </p:to>
+                                    </p:set>
+                                    <p:anim calcmode="lin" valueType="num">
+                                      <p:cBhvr additive="base">
+                                        <p:cTn id="27" dur="500" fill="hold"/>
+                                        <p:tgtEl>
+                                          <p:spTgt spid="8"/>
+                                        </p:tgtEl>
+                                        <p:attrNameLst>
+                                          <p:attrName>ppt_x</p:attrName>
+                                        </p:attrNameLst>
+                                      </p:cBhvr>
+                                      <p:tavLst>
+                                        <p:tav tm="0">
+                                          <p:val>
+                                            <p:strVal val="#ppt_x"/>
+                                          </p:val>
+                                        </p:tav>
+                                        <p:tav tm="100000">
+                                          <p:val>
+                                            <p:strVal val="#ppt_x"/>
+                                          </p:val>
+                                        </p:tav>
+                                      </p:tavLst>
+                                    </p:anim>
+                                    <p:anim calcmode="lin" valueType="num">
+                                      <p:cBhvr additive="base">
+                                        <p:cTn id="28" dur="500" fill="hold"/>
+                                        <p:tgtEl>
+                                          <p:spTgt spid="8"/>
+                                        </p:tgtEl>
+                                        <p:attrNameLst>
+                                          <p:attrName>ppt_y</p:attrName>
+                                        </p:attrNameLst>
+                                      </p:cBhvr>
+                                      <p:tavLst>
+                                        <p:tav tm="0">
+                                          <p:val>
+                                            <p:strVal val="1+#ppt_h/2"/>
+                                          </p:val>
+                                        </p:tav>
+                                        <p:tav tm="100000">
+                                          <p:val>
+                                            <p:strVal val="#ppt_y"/>
+                                          </p:val>
+                                        </p:tav>
+                                      </p:tavLst>
+                                    </p:anim>
+                                  </p:childTnLst>
+                                </p:cTn>
+                              </p:par>
+                              <p:par>
+                                <p:cTn id="29" presetID="2" presetClass="entr" presetSubtype="4" fill="hold" nodeType="withEffect">
+                                  <p:stCondLst>
+                                    <p:cond delay="0"/>
+                                  </p:stCondLst>
+                                  <p:childTnLst>
+                                    <p:set>
+                                      <p:cBhvr>
+                                        <p:cTn id="30" dur="1" fill="hold">
+                                          <p:stCondLst>
+                                            <p:cond delay="0"/>
+                                          </p:stCondLst>
+                                        </p:cTn>
+                                        <p:tgtEl>
+                                          <p:spTgt spid="9"/>
+                                        </p:tgtEl>
+                                        <p:attrNameLst>
+                                          <p:attrName>style.visibility</p:attrName>
+                                        </p:attrNameLst>
+                                      </p:cBhvr>
+                                      <p:to>
+                                        <p:strVal val="visible"/>
+                                      </p:to>
+                                    </p:set>
+                                    <p:anim calcmode="lin" valueType="num">
+                                      <p:cBhvr additive="base">
+                                        <p:cTn id="31" dur="500" fill="hold"/>
+                                        <p:tgtEl>
+                                          <p:spTgt spid="9"/>
+                                        </p:tgtEl>
+                                        <p:attrNameLst>
+                                          <p:attrName>ppt_x</p:attrName>
+                                        </p:attrNameLst>
+                                      </p:cBhvr>
+                                      <p:tavLst>
+                                        <p:tav tm="0">
+                                          <p:val>
+                                            <p:strVal val="#ppt_x"/>
+                                          </p:val>
+                                        </p:tav>
+                                        <p:tav tm="100000">
+                                          <p:val>
+                                            <p:strVal val="#ppt_x"/>
+                                          </p:val>
+                                        </p:tav>
+                                      </p:tavLst>
+                                    </p:anim>
+                                    <p:anim calcmode="lin" valueType="num">
+                                      <p:cBhvr additive="base">
+                                        <p:cTn id="32" dur="500" fill="hold"/>
+                                        <p:tgtEl>
+                                          <p:spTgt spid="9"/>
                                         </p:tgtEl>
                                         <p:attrNameLst>
                                           <p:attrName>ppt_y</p:attrName>
@@ -8078,33 +8243,15 @@
                                   </p:childTnLst>
                                 </p:cTn>
                               </p:par>
-                            </p:childTnLst>
-                          </p:cTn>
-                        </p:par>
-                      </p:childTnLst>
-                    </p:cTn>
-                  </p:par>
-                  <p:par>
-                    <p:cTn id="9" fill="hold">
-                      <p:stCondLst>
-                        <p:cond delay="indefinite"/>
-                      </p:stCondLst>
-                      <p:childTnLst>
-                        <p:par>
-                          <p:cTn id="10" fill="hold">
-                            <p:stCondLst>
-                              <p:cond delay="0"/>
-                            </p:stCondLst>
-                            <p:childTnLst>
                               <p:par>
-                                <p:cTn id="11" presetID="2" presetClass="entr" presetSubtype="4" fill="hold" grpId="0" nodeType="clickEffect">
+                                <p:cTn id="9" presetID="2" presetClass="entr" presetSubtype="4" fill="hold" grpId="0" nodeType="withEffect">
                                   <p:stCondLst>
                                     <p:cond delay="0"/>
                                   </p:stCondLst>
                                   <p:childTnLst>
                                     <p:set>
                                       <p:cBhvr>
-                                        <p:cTn id="12" dur="1" fill="hold">
+                                        <p:cTn id="10" dur="1" fill="hold">
                                           <p:stCondLst>
                                             <p:cond delay="0"/>
                                           </p:stCondLst>
@@ -8122,7 +8269,7 @@
                                     </p:set>
                                     <p:anim calcmode="lin" valueType="num">
                                       <p:cBhvr additive="base">
-                                        <p:cTn id="13" dur="500" fill="hold"/>
+                                        <p:cTn id="11" dur="500" fill="hold"/>
                                         <p:tgtEl>
                                           <p:spTgt spid="4"/>
                                         </p:tgtEl>
@@ -8145,7 +8292,7 @@
                                     </p:anim>
                                     <p:anim calcmode="lin" valueType="num">
                                       <p:cBhvr additive="base">
-                                        <p:cTn id="14" dur="500" fill="hold"/>
+                                        <p:cTn id="12" dur="500" fill="hold"/>
                                         <p:tgtEl>
                                           <p:spTgt spid="4"/>
                                         </p:tgtEl>
@@ -8169,33 +8316,15 @@
                                   </p:childTnLst>
                                 </p:cTn>
                               </p:par>
-                            </p:childTnLst>
-                          </p:cTn>
-                        </p:par>
-                      </p:childTnLst>
-                    </p:cTn>
-                  </p:par>
-                  <p:par>
-                    <p:cTn id="15" fill="hold">
-                      <p:stCondLst>
-                        <p:cond delay="indefinite"/>
-                      </p:stCondLst>
-                      <p:childTnLst>
-                        <p:par>
-                          <p:cTn id="16" fill="hold">
-                            <p:stCondLst>
-                              <p:cond delay="0"/>
-                            </p:stCondLst>
-                            <p:childTnLst>
                               <p:par>
-                                <p:cTn id="17" presetID="2" presetClass="entr" presetSubtype="4" fill="hold" grpId="0" nodeType="clickEffect">
+                                <p:cTn id="13" presetID="2" presetClass="entr" presetSubtype="4" fill="hold" grpId="0" nodeType="withEffect">
                                   <p:stCondLst>
                                     <p:cond delay="0"/>
                                   </p:stCondLst>
                                   <p:childTnLst>
                                     <p:set>
                                       <p:cBhvr>
-                                        <p:cTn id="18" dur="1" fill="hold">
+                                        <p:cTn id="14" dur="1" fill="hold">
                                           <p:stCondLst>
                                             <p:cond delay="0"/>
                                           </p:stCondLst>
@@ -8213,7 +8342,7 @@
                                     </p:set>
                                     <p:anim calcmode="lin" valueType="num">
                                       <p:cBhvr additive="base">
-                                        <p:cTn id="19" dur="500" fill="hold"/>
+                                        <p:cTn id="15" dur="500" fill="hold"/>
                                         <p:tgtEl>
                                           <p:spTgt spid="6"/>
                                         </p:tgtEl>
@@ -8236,7 +8365,7 @@
                                     </p:anim>
                                     <p:anim calcmode="lin" valueType="num">
                                       <p:cBhvr additive="base">
-                                        <p:cTn id="20" dur="500" fill="hold"/>
+                                        <p:cTn id="16" dur="500" fill="hold"/>
                                         <p:tgtEl>
                                           <p:spTgt spid="6"/>
                                         </p:tgtEl>
@@ -8260,33 +8389,15 @@
                                   </p:childTnLst>
                                 </p:cTn>
                               </p:par>
-                            </p:childTnLst>
-                          </p:cTn>
-                        </p:par>
-                      </p:childTnLst>
-                    </p:cTn>
-                  </p:par>
-                  <p:par>
-                    <p:cTn id="21" fill="hold">
-                      <p:stCondLst>
-                        <p:cond delay="indefinite"/>
-                      </p:stCondLst>
-                      <p:childTnLst>
-                        <p:par>
-                          <p:cTn id="22" fill="hold">
-                            <p:stCondLst>
-                              <p:cond delay="0"/>
-                            </p:stCondLst>
-                            <p:childTnLst>
                               <p:par>
-                                <p:cTn id="23" presetID="2" presetClass="entr" presetSubtype="4" fill="hold" grpId="0" nodeType="clickEffect">
+                                <p:cTn id="17" presetID="2" presetClass="entr" presetSubtype="4" fill="hold" grpId="0" nodeType="withEffect">
                                   <p:stCondLst>
                                     <p:cond delay="0"/>
                                   </p:stCondLst>
                                   <p:childTnLst>
                                     <p:set>
                                       <p:cBhvr>
-                                        <p:cTn id="24" dur="1" fill="hold">
+                                        <p:cTn id="18" dur="1" fill="hold">
                                           <p:stCondLst>
                                             <p:cond delay="0"/>
                                           </p:stCondLst>
@@ -8304,7 +8415,7 @@
                                     </p:set>
                                     <p:anim calcmode="lin" valueType="num">
                                       <p:cBhvr additive="base">
-                                        <p:cTn id="25" dur="500" fill="hold"/>
+                                        <p:cTn id="19" dur="500" fill="hold"/>
                                         <p:tgtEl>
                                           <p:spTgt spid="8"/>
                                         </p:tgtEl>
@@ -8327,9 +8438,228 @@
                                     </p:anim>
                                     <p:anim calcmode="lin" valueType="num">
                                       <p:cBhvr additive="base">
-                                        <p:cTn id="26" dur="500" fill="hold"/>
+                                        <p:cTn id="20" dur="500" fill="hold"/>
                                         <p:tgtEl>
                                           <p:spTgt spid="8"/>
+                                        </p:tgtEl>
+                                        <p:attrNameLst>
+                                          <p:attrName>ppt_y</p:attrName>
+                                        </p:attrNameLst>
+                                      </p:cBhvr>
+                                      <p:tavLst>
+                                        <p:tav tm="0">
+                                          <p:val>
+                                            <p:strVal val="1+#ppt_h/2"/>
+                                          </p:val>
+                                        </p:tav>
+                                        <p:tav tm="100000">
+                                          <p:val>
+                                            <p:strVal val="#ppt_y"/>
+                                          </p:val>
+                                        </p:tav>
+                                      </p:tavLst>
+                                    </p:anim>
+                                  </p:childTnLst>
+                                </p:cTn>
+                              </p:par>
+                              <p:par>
+                                <p:cTn id="21" presetID="2" presetClass="entr" presetSubtype="4" fill="hold" nodeType="withEffect">
+                                  <p:stCondLst>
+                                    <p:cond delay="0"/>
+                                  </p:stCondLst>
+                                  <p:childTnLst>
+                                    <p:set>
+                                      <p:cBhvr>
+                                        <p:cTn id="22" dur="1" fill="hold">
+                                          <p:stCondLst>
+                                            <p:cond delay="0"/>
+                                          </p:stCondLst>
+                                        </p:cTn>
+                                        <p:tgtEl>
+                                          <p:spTgt spid="5"/>
+                                        </p:tgtEl>
+                                        <p:attrNameLst>
+                                          <p:attrName>style.visibility</p:attrName>
+                                        </p:attrNameLst>
+                                      </p:cBhvr>
+                                      <p:to>
+                                        <p:strVal val="visible"/>
+                                      </p:to>
+                                    </p:set>
+                                    <p:anim calcmode="lin" valueType="num">
+                                      <p:cBhvr additive="base">
+                                        <p:cTn id="23" dur="500" fill="hold"/>
+                                        <p:tgtEl>
+                                          <p:spTgt spid="5"/>
+                                        </p:tgtEl>
+                                        <p:attrNameLst>
+                                          <p:attrName>ppt_x</p:attrName>
+                                        </p:attrNameLst>
+                                      </p:cBhvr>
+                                      <p:tavLst>
+                                        <p:tav tm="0">
+                                          <p:val>
+                                            <p:strVal val="#ppt_x"/>
+                                          </p:val>
+                                        </p:tav>
+                                        <p:tav tm="100000">
+                                          <p:val>
+                                            <p:strVal val="#ppt_x"/>
+                                          </p:val>
+                                        </p:tav>
+                                      </p:tavLst>
+                                    </p:anim>
+                                    <p:anim calcmode="lin" valueType="num">
+                                      <p:cBhvr additive="base">
+                                        <p:cTn id="24" dur="500" fill="hold"/>
+                                        <p:tgtEl>
+                                          <p:spTgt spid="5"/>
+                                        </p:tgtEl>
+                                        <p:attrNameLst>
+                                          <p:attrName>ppt_y</p:attrName>
+                                        </p:attrNameLst>
+                                      </p:cBhvr>
+                                      <p:tavLst>
+                                        <p:tav tm="0">
+                                          <p:val>
+                                            <p:strVal val="1+#ppt_h/2"/>
+                                          </p:val>
+                                        </p:tav>
+                                        <p:tav tm="100000">
+                                          <p:val>
+                                            <p:strVal val="#ppt_y"/>
+                                          </p:val>
+                                        </p:tav>
+                                      </p:tavLst>
+                                    </p:anim>
+                                  </p:childTnLst>
+                                </p:cTn>
+                              </p:par>
+                              <p:par>
+                                <p:cTn id="25" presetID="2" presetClass="entr" presetSubtype="4" fill="hold" nodeType="withEffect">
+                                  <p:stCondLst>
+                                    <p:cond delay="0"/>
+                                  </p:stCondLst>
+                                  <p:childTnLst>
+                                    <p:set>
+                                      <p:cBhvr>
+                                        <p:cTn id="26" dur="1" fill="hold">
+                                          <p:stCondLst>
+                                            <p:cond delay="0"/>
+                                          </p:stCondLst>
+                                        </p:cTn>
+                                        <p:tgtEl>
+                                          <p:spTgt spid="7"/>
+                                        </p:tgtEl>
+                                        <p:attrNameLst>
+                                          <p:attrName>style.visibility</p:attrName>
+                                        </p:attrNameLst>
+                                      </p:cBhvr>
+                                      <p:to>
+                                        <p:strVal val="visible"/>
+                                      </p:to>
+                                    </p:set>
+                                    <p:anim calcmode="lin" valueType="num">
+                                      <p:cBhvr additive="base">
+                                        <p:cTn id="27" dur="500" fill="hold"/>
+                                        <p:tgtEl>
+                                          <p:spTgt spid="7"/>
+                                        </p:tgtEl>
+                                        <p:attrNameLst>
+                                          <p:attrName>ppt_x</p:attrName>
+                                        </p:attrNameLst>
+                                      </p:cBhvr>
+                                      <p:tavLst>
+                                        <p:tav tm="0">
+                                          <p:val>
+                                            <p:strVal val="#ppt_x"/>
+                                          </p:val>
+                                        </p:tav>
+                                        <p:tav tm="100000">
+                                          <p:val>
+                                            <p:strVal val="#ppt_x"/>
+                                          </p:val>
+                                        </p:tav>
+                                      </p:tavLst>
+                                    </p:anim>
+                                    <p:anim calcmode="lin" valueType="num">
+                                      <p:cBhvr additive="base">
+                                        <p:cTn id="28" dur="500" fill="hold"/>
+                                        <p:tgtEl>
+                                          <p:spTgt spid="7"/>
+                                        </p:tgtEl>
+                                        <p:attrNameLst>
+                                          <p:attrName>ppt_y</p:attrName>
+                                        </p:attrNameLst>
+                                      </p:cBhvr>
+                                      <p:tavLst>
+                                        <p:tav tm="0">
+                                          <p:val>
+                                            <p:strVal val="1+#ppt_h/2"/>
+                                          </p:val>
+                                        </p:tav>
+                                        <p:tav tm="100000">
+                                          <p:val>
+                                            <p:strVal val="#ppt_y"/>
+                                          </p:val>
+                                        </p:tav>
+                                      </p:tavLst>
+                                    </p:anim>
+                                  </p:childTnLst>
+                                </p:cTn>
+                              </p:par>
+                              <p:par>
+                                <p:cTn id="29" presetID="2" presetClass="entr" presetSubtype="4" fill="hold" nodeType="withEffect">
+                                  <p:stCondLst>
+                                    <p:cond delay="0"/>
+                                  </p:stCondLst>
+                                  <p:childTnLst>
+                                    <p:set>
+                                      <p:cBhvr>
+                                        <p:cTn id="30" dur="1" fill="hold">
+                                          <p:stCondLst>
+                                            <p:cond delay="0"/>
+                                          </p:stCondLst>
+                                        </p:cTn>
+                                        <p:tgtEl>
+                                          <p:spTgt spid="9"/>
+                                        </p:tgtEl>
+                                        <p:attrNameLst>
+                                          <p:attrName>style.visibility</p:attrName>
+                                        </p:attrNameLst>
+                                      </p:cBhvr>
+                                      <p:to>
+                                        <p:strVal val="visible"/>
+                                      </p:to>
+                                    </p:set>
+                                    <p:anim calcmode="lin" valueType="num">
+                                      <p:cBhvr additive="base">
+                                        <p:cTn id="31" dur="500" fill="hold"/>
+                                        <p:tgtEl>
+                                          <p:spTgt spid="9"/>
+                                        </p:tgtEl>
+                                        <p:attrNameLst>
+                                          <p:attrName>ppt_x</p:attrName>
+                                        </p:attrNameLst>
+                                      </p:cBhvr>
+                                      <p:tavLst>
+                                        <p:tav tm="0">
+                                          <p:val>
+                                            <p:strVal val="#ppt_x"/>
+                                          </p:val>
+                                        </p:tav>
+                                        <p:tav tm="100000">
+                                          <p:val>
+                                            <p:strVal val="#ppt_x"/>
+                                          </p:val>
+                                        </p:tav>
+                                      </p:tavLst>
+                                    </p:anim>
+                                    <p:anim calcmode="lin" valueType="num">
+                                      <p:cBhvr additive="base">
+                                        <p:cTn id="32" dur="500" fill="hold"/>
+                                        <p:tgtEl>
+                                          <p:spTgt spid="9"/>
                                         </p:tgtEl>
                                         <p:attrNameLst>
                                           <p:attrName>ppt_y</p:attrName>
@@ -8654,6 +8984,13 @@
   <p:clrMapOvr>
     <a:masterClrMapping/>
   </p:clrMapOvr>
+  <p:timing>
+    <p:tnLst>
+      <p:par>
+        <p:cTn id="1" dur="indefinite" restart="never" nodeType="tmRoot"/>
+      </p:par>
+    </p:tnLst>
+  </p:timing>
 </p:sld>
 </file>
 
